--- a/presentation/presentation.pptx
+++ b/presentation/presentation.pptx
@@ -4,9 +4,6 @@
   <p:sldMasterIdLst>
     <p:sldMasterId id="2147483648" r:id="rId1"/>
   </p:sldMasterIdLst>
-  <p:notesMasterIdLst>
-    <p:notesMasterId r:id="rId11"/>
-  </p:notesMasterIdLst>
   <p:sldIdLst>
     <p:sldId id="256" r:id="rId2"/>
     <p:sldId id="257" r:id="rId3"/>
@@ -17,7 +14,13 @@
     <p:sldId id="262" r:id="rId8"/>
     <p:sldId id="263" r:id="rId9"/>
     <p:sldId id="264" r:id="rId10"/>
+    <p:sldId id="265" r:id="rId11"/>
+    <p:sldId id="266" r:id="rId12"/>
+    <p:sldId id="267" r:id="rId13"/>
   </p:sldIdLst>
+  <p:notesMasterIdLst>
+    <p:notesMasterId r:id="rId14"/>
+  </p:notesMasterIdLst>
   <p:sldSz cx="12192000" cy="6858000"/>
   <p:notesSz cx="6858000" cy="12192000"/>
   <p:defaultTextStyle>
@@ -112,11 +115,6 @@
       </a:defRPr>
     </a:lvl9pPr>
   </p:defaultTextStyle>
-  <p:extLst>
-    <p:ext uri="{EFAFB233-063F-42B5-8137-9DF3F51BA10A}">
-      <p15:sldGuideLst xmlns:p15="http://schemas.microsoft.com/office/powerpoint/2012/main"/>
-    </p:ext>
-  </p:extLst>
 </p:presentation>
 </file>
 
@@ -142,10 +140,234 @@
           <a:chExt cx="0" cy="0"/>
         </a:xfrm>
       </p:grpSpPr>
+      <p:sp>
+        <p:nvSpPr>
+          <p:cNvPr id="2" name="Header Placeholder 1"/>
+          <p:cNvSpPr>
+            <a:spLocks noGrp="1"/>
+          </p:cNvSpPr>
+          <p:nvPr>
+            <p:ph type="hdr" sz="quarter"/>
+          </p:nvPr>
+        </p:nvSpPr>
+        <p:spPr>
+          <a:xfrm>
+            <a:off x="0" y="0"/>
+            <a:ext cx="2971800" cy="458788"/>
+          </a:xfrm>
+          <a:prstGeom prst="rect">
+            <a:avLst/>
+          </a:prstGeom>
+        </p:spPr>
+        <p:txBody>
+          <a:bodyPr vert="horz" lIns="91440" tIns="45720" rIns="91440" bIns="45720" rtlCol="0"/>
+          <a:lstStyle>
+            <a:lvl1pPr algn="l">
+              <a:defRPr sz="1200"/>
+            </a:lvl1pPr>
+          </a:lstStyle>
+          <a:p>
+            <a:endParaRPr lang="en-US"/>
+          </a:p>
+        </p:txBody>
+      </p:sp>
+      <p:sp>
+        <p:nvSpPr>
+          <p:cNvPr id="3" name="Date Placeholder 2"/>
+          <p:cNvSpPr>
+            <a:spLocks noGrp="1"/>
+          </p:cNvSpPr>
+          <p:nvPr>
+            <p:ph type="dt" idx="1"/>
+          </p:nvPr>
+        </p:nvSpPr>
+        <p:spPr>
+          <a:xfrm>
+            <a:off x="3884613" y="0"/>
+            <a:ext cx="2971800" cy="458788"/>
+          </a:xfrm>
+          <a:prstGeom prst="rect">
+            <a:avLst/>
+          </a:prstGeom>
+        </p:spPr>
+        <p:txBody>
+          <a:bodyPr vert="horz" lIns="91440" tIns="45720" rIns="91440" bIns="45720" rtlCol="0"/>
+          <a:lstStyle>
+            <a:lvl1pPr algn="r">
+              <a:defRPr sz="1200"/>
+            </a:lvl1pPr>
+          </a:lstStyle>
+          <a:p>
+            <a:fld id="{5282F153-3F37-0F45-9E97-73ACFA13230C}" type="datetimeFigureOut">
+              <a:rPr lang="en-US"/>
+              <a:t>7/23/19</a:t>
+            </a:fld>
+            <a:endParaRPr lang="en-US"/>
+          </a:p>
+        </p:txBody>
+      </p:sp>
+      <p:sp>
+        <p:nvSpPr>
+          <p:cNvPr id="4" name="Slide Image Placeholder 3"/>
+          <p:cNvSpPr>
+            <a:spLocks noGrp="1" noRot="1" noChangeAspect="1"/>
+          </p:cNvSpPr>
+          <p:nvPr>
+            <p:ph type="sldImg" idx="2"/>
+          </p:nvPr>
+        </p:nvSpPr>
+        <p:spPr>
+          <a:xfrm>
+            <a:off x="685800" y="1143000"/>
+            <a:ext cx="5486400" cy="3086100"/>
+          </a:xfrm>
+          <a:prstGeom prst="rect">
+            <a:avLst/>
+          </a:prstGeom>
+          <a:noFill/>
+          <a:ln w="12700">
+            <a:solidFill>
+              <a:prstClr val="black"/>
+            </a:solidFill>
+          </a:ln>
+        </p:spPr>
+        <p:txBody>
+          <a:bodyPr vert="horz" lIns="91440" tIns="45720" rIns="91440" bIns="45720" rtlCol="0" anchor="ctr"/>
+          <a:lstStyle/>
+          <a:p>
+            <a:endParaRPr lang="en-US"/>
+          </a:p>
+        </p:txBody>
+      </p:sp>
+      <p:sp>
+        <p:nvSpPr>
+          <p:cNvPr id="5" name="Notes Placeholder 4"/>
+          <p:cNvSpPr>
+            <a:spLocks noGrp="1"/>
+          </p:cNvSpPr>
+          <p:nvPr>
+            <p:ph type="body" sz="quarter" idx="3"/>
+          </p:nvPr>
+        </p:nvSpPr>
+        <p:spPr>
+          <a:xfrm>
+            <a:off x="685800" y="4400550"/>
+            <a:ext cx="5486400" cy="3600450"/>
+          </a:xfrm>
+          <a:prstGeom prst="rect">
+            <a:avLst/>
+          </a:prstGeom>
+        </p:spPr>
+        <p:txBody>
+          <a:bodyPr vert="horz" lIns="91440" tIns="45720" rIns="91440" bIns="45720" rtlCol="0"/>
+          <a:lstStyle/>
+          <a:p>
+            <a:pPr lvl="0"/>
+            <a:r>
+              <a:rPr lang="en-US"/>
+              <a:t>Click to edit Master text styles</a:t>
+            </a:r>
+          </a:p>
+          <a:p>
+            <a:pPr lvl="1"/>
+            <a:r>
+              <a:rPr lang="en-US"/>
+              <a:t>Second level</a:t>
+            </a:r>
+          </a:p>
+          <a:p>
+            <a:pPr lvl="2"/>
+            <a:r>
+              <a:rPr lang="en-US"/>
+              <a:t>Third level</a:t>
+            </a:r>
+          </a:p>
+          <a:p>
+            <a:pPr lvl="3"/>
+            <a:r>
+              <a:rPr lang="en-US"/>
+              <a:t>Fourth level</a:t>
+            </a:r>
+          </a:p>
+          <a:p>
+            <a:pPr lvl="4"/>
+            <a:r>
+              <a:rPr lang="en-US"/>
+              <a:t>Fifth level</a:t>
+            </a:r>
+          </a:p>
+        </p:txBody>
+      </p:sp>
+      <p:sp>
+        <p:nvSpPr>
+          <p:cNvPr id="6" name="Footer Placeholder 5"/>
+          <p:cNvSpPr>
+            <a:spLocks noGrp="1"/>
+          </p:cNvSpPr>
+          <p:nvPr>
+            <p:ph type="ftr" sz="quarter" idx="4"/>
+          </p:nvPr>
+        </p:nvSpPr>
+        <p:spPr>
+          <a:xfrm>
+            <a:off x="0" y="8685213"/>
+            <a:ext cx="2971800" cy="458787"/>
+          </a:xfrm>
+          <a:prstGeom prst="rect">
+            <a:avLst/>
+          </a:prstGeom>
+        </p:spPr>
+        <p:txBody>
+          <a:bodyPr vert="horz" lIns="91440" tIns="45720" rIns="91440" bIns="45720" rtlCol="0" anchor="b"/>
+          <a:lstStyle>
+            <a:lvl1pPr algn="l">
+              <a:defRPr sz="1200"/>
+            </a:lvl1pPr>
+          </a:lstStyle>
+          <a:p>
+            <a:endParaRPr lang="en-US"/>
+          </a:p>
+        </p:txBody>
+      </p:sp>
+      <p:sp>
+        <p:nvSpPr>
+          <p:cNvPr id="7" name="Slide Number Placeholder 6"/>
+          <p:cNvSpPr>
+            <a:spLocks noGrp="1"/>
+          </p:cNvSpPr>
+          <p:nvPr>
+            <p:ph type="sldNum" sz="quarter" idx="5"/>
+          </p:nvPr>
+        </p:nvSpPr>
+        <p:spPr>
+          <a:xfrm>
+            <a:off x="3884613" y="8685213"/>
+            <a:ext cx="2971800" cy="458787"/>
+          </a:xfrm>
+          <a:prstGeom prst="rect">
+            <a:avLst/>
+          </a:prstGeom>
+        </p:spPr>
+        <p:txBody>
+          <a:bodyPr vert="horz" lIns="91440" tIns="45720" rIns="91440" bIns="45720" rtlCol="0" anchor="b"/>
+          <a:lstStyle>
+            <a:lvl1pPr algn="r">
+              <a:defRPr sz="1200"/>
+            </a:lvl1pPr>
+          </a:lstStyle>
+          <a:p>
+            <a:fld id="{CE5E9CC1-C706-0F49-92D6-E571CC5EEA8F}" type="slidenum">
+              <a:rPr lang="en-US"/>
+              <a:t>‹#›</a:t>
+            </a:fld>
+            <a:endParaRPr lang="en-US"/>
+          </a:p>
+        </p:txBody>
+      </p:sp>
     </p:spTree>
     <p:extLst>
       <p:ext uri="{BB962C8B-B14F-4D97-AF65-F5344CB8AC3E}">
-        <p14:creationId xmlns:p14="http://schemas.microsoft.com/office/powerpoint/2010/main" val="634980221"/>
+        <p14:creationId xmlns:p14="http://schemas.microsoft.com/office/powerpoint/2010/main" val="1024086991"/>
       </p:ext>
     </p:extLst>
   </p:cSld>
@@ -290,7 +512,7 @@
           <a:lstStyle/>
           <a:p>
             <a:r>
-              <a:t>Добрый день! Меня зовут Настасия Ерёмина, курс «Аналитик данных». Тема моего проекта — прогнозирование спроса на новогодний ассортимент розничной сети, в разрезе «магазин на товарную подгруппу», для оптимизации первичного распределения товара.</a:t>
+              <a:t>Добрый день! Меня зовут Настасия Ерёмина. Тема проекта — прогнозирование спроса на новогодний ассортимент розничной сети в разрезе «магазин и товарная подгруппа» для первичного распределения товара.</a:t>
             </a:r>
           </a:p>
         </p:txBody>
@@ -313,6 +535,264 @@
             <a:fld id="{F7021451-1387-4CA6-816F-3879F97B5CBC}" type="slidenum">
               <a:rPr lang="en-US"/>
               <a:t>1</a:t>
+            </a:fld>
+            <a:endParaRPr lang="en-US"/>
+          </a:p>
+        </p:txBody>
+      </p:sp>
+    </p:spTree>
+    <p:extLst>
+      <p:ext uri="{BB962C8B-B14F-4D97-AF65-F5344CB8AC3E}">
+        <p14:creationId xmlns:p14="http://schemas.microsoft.com/office/powerpoint/2010/main" val="1024086991"/>
+      </p:ext>
+    </p:extLst>
+  </p:cSld>
+  <p:clrMapOvr>
+    <a:masterClrMapping/>
+  </p:clrMapOvr>
+</p:notes>
+</file>
+
+<file path=ppt/notesSlides/notesSlide10.xml><?xml version="1.0" encoding="utf-8"?>
+<p:notes xmlns:a="http://schemas.openxmlformats.org/drawingml/2006/main" xmlns:r="http://schemas.openxmlformats.org/officeDocument/2006/relationships" xmlns:p="http://schemas.openxmlformats.org/presentationml/2006/main">
+  <p:cSld>
+    <p:spTree>
+      <p:nvGrpSpPr>
+        <p:cNvPr id="1" name=""/>
+        <p:cNvGrpSpPr/>
+        <p:nvPr/>
+      </p:nvGrpSpPr>
+      <p:grpSpPr>
+        <a:xfrm>
+          <a:off x="0" y="0"/>
+          <a:ext cx="0" cy="0"/>
+          <a:chOff x="0" y="0"/>
+          <a:chExt cx="0" cy="0"/>
+        </a:xfrm>
+      </p:grpSpPr>
+      <p:sp>
+        <p:nvSpPr>
+          <p:cNvPr id="2" name="Slide Image Placeholder 1"/>
+          <p:cNvSpPr>
+            <a:spLocks noGrp="1" noRot="1" noChangeAspect="1"/>
+          </p:cNvSpPr>
+          <p:nvPr>
+            <p:ph type="sldImg"/>
+          </p:nvPr>
+        </p:nvSpPr>
+        <p:spPr/>
+      </p:sp>
+      <p:sp>
+        <p:nvSpPr>
+          <p:cNvPr id="3" name="Notes Placeholder 2"/>
+          <p:cNvSpPr>
+            <a:spLocks noGrp="1"/>
+          </p:cNvSpPr>
+          <p:nvPr>
+            <p:ph type="body" idx="1"/>
+          </p:nvPr>
+        </p:nvSpPr>
+        <p:spPr/>
+        <p:txBody>
+          <a:bodyPr/>
+          <a:lstStyle/>
+          <a:p>
+            <a:r>
+              <a:t>Ни один артикул не менял подгруппу, но в 2025 году печенье продавалось новыми артикулами под группой «сладости», а не «хлебобулочные изделия». Общий спрос стабилен, но для прогноза по подгруппам это два разных товара: две подгруппы дают больше четверти ошибки бейзлайна. До сезона этот сдвиг не виден — около 10 пунктов ошибки любого метода, а модели внутри сезона его «выучили», отсюда примерно 40 процентов их выигрыша.</a:t>
+            </a:r>
+          </a:p>
+        </p:txBody>
+      </p:sp>
+      <p:sp>
+        <p:nvSpPr>
+          <p:cNvPr id="4" name="Slide Number Placeholder 3"/>
+          <p:cNvSpPr>
+            <a:spLocks noGrp="1"/>
+          </p:cNvSpPr>
+          <p:nvPr>
+            <p:ph type="sldNum" sz="quarter" idx="10"/>
+          </p:nvPr>
+        </p:nvSpPr>
+        <p:spPr/>
+        <p:txBody>
+          <a:bodyPr/>
+          <a:lstStyle/>
+          <a:p>
+            <a:fld id="{F7021451-1387-4CA6-816F-3879F97B5CBC}" type="slidenum">
+              <a:rPr lang="en-US"/>
+              <a:t>10</a:t>
+            </a:fld>
+            <a:endParaRPr lang="en-US"/>
+          </a:p>
+        </p:txBody>
+      </p:sp>
+    </p:spTree>
+    <p:extLst>
+      <p:ext uri="{BB962C8B-B14F-4D97-AF65-F5344CB8AC3E}">
+        <p14:creationId xmlns:p14="http://schemas.microsoft.com/office/powerpoint/2010/main" val="1024086991"/>
+      </p:ext>
+    </p:extLst>
+  </p:cSld>
+  <p:clrMapOvr>
+    <a:masterClrMapping/>
+  </p:clrMapOvr>
+</p:notes>
+</file>
+
+<file path=ppt/notesSlides/notesSlide11.xml><?xml version="1.0" encoding="utf-8"?>
+<p:notes xmlns:a="http://schemas.openxmlformats.org/drawingml/2006/main" xmlns:r="http://schemas.openxmlformats.org/officeDocument/2006/relationships" xmlns:p="http://schemas.openxmlformats.org/presentationml/2006/main">
+  <p:cSld>
+    <p:spTree>
+      <p:nvGrpSpPr>
+        <p:cNvPr id="1" name=""/>
+        <p:cNvGrpSpPr/>
+        <p:nvPr/>
+      </p:nvGrpSpPr>
+      <p:grpSpPr>
+        <a:xfrm>
+          <a:off x="0" y="0"/>
+          <a:ext cx="0" cy="0"/>
+          <a:chOff x="0" y="0"/>
+          <a:chExt cx="0" cy="0"/>
+        </a:xfrm>
+      </p:grpSpPr>
+      <p:sp>
+        <p:nvSpPr>
+          <p:cNvPr id="2" name="Slide Image Placeholder 1"/>
+          <p:cNvSpPr>
+            <a:spLocks noGrp="1" noRot="1" noChangeAspect="1"/>
+          </p:cNvSpPr>
+          <p:nvPr>
+            <p:ph type="sldImg"/>
+          </p:nvPr>
+        </p:nvSpPr>
+        <p:spPr/>
+      </p:sp>
+      <p:sp>
+        <p:nvSpPr>
+          <p:cNvPr id="3" name="Notes Placeholder 2"/>
+          <p:cNvSpPr>
+            <a:spLocks noGrp="1"/>
+          </p:cNvSpPr>
+          <p:nvPr>
+            <p:ph type="body" idx="1"/>
+          </p:nvPr>
+        </p:nvSpPr>
+        <p:spPr/>
+        <p:txBody>
+          <a:bodyPr/>
+          <a:lstStyle/>
+          <a:p>
+            <a:r>
+              <a:t>Рекомендации. Для первичного распределения — LFL с единым коэффициентом роста по началу октября. Для Дальнего Востока — пересмотреть логистику: упущенная выручка около 307 тысяч рублей за сезон в масштабированных цифрах. При смене ассортимента — переносить историю продаж вручную. Модели — для перераспределения в сезоне; следующий шаг — проверить их на первых неделях ноября. Ограничения: дефицит определён косвенно, один сезон обучения, гиперпараметры не подбирались.</a:t>
+            </a:r>
+          </a:p>
+        </p:txBody>
+      </p:sp>
+      <p:sp>
+        <p:nvSpPr>
+          <p:cNvPr id="4" name="Slide Number Placeholder 3"/>
+          <p:cNvSpPr>
+            <a:spLocks noGrp="1"/>
+          </p:cNvSpPr>
+          <p:nvPr>
+            <p:ph type="sldNum" sz="quarter" idx="10"/>
+          </p:nvPr>
+        </p:nvSpPr>
+        <p:spPr/>
+        <p:txBody>
+          <a:bodyPr/>
+          <a:lstStyle/>
+          <a:p>
+            <a:fld id="{F7021451-1387-4CA6-816F-3879F97B5CBC}" type="slidenum">
+              <a:rPr lang="en-US"/>
+              <a:t>11</a:t>
+            </a:fld>
+            <a:endParaRPr lang="en-US"/>
+          </a:p>
+        </p:txBody>
+      </p:sp>
+    </p:spTree>
+    <p:extLst>
+      <p:ext uri="{BB962C8B-B14F-4D97-AF65-F5344CB8AC3E}">
+        <p14:creationId xmlns:p14="http://schemas.microsoft.com/office/powerpoint/2010/main" val="1024086991"/>
+      </p:ext>
+    </p:extLst>
+  </p:cSld>
+  <p:clrMapOvr>
+    <a:masterClrMapping/>
+  </p:clrMapOvr>
+</p:notes>
+</file>
+
+<file path=ppt/notesSlides/notesSlide12.xml><?xml version="1.0" encoding="utf-8"?>
+<p:notes xmlns:a="http://schemas.openxmlformats.org/drawingml/2006/main" xmlns:r="http://schemas.openxmlformats.org/officeDocument/2006/relationships" xmlns:p="http://schemas.openxmlformats.org/presentationml/2006/main">
+  <p:cSld>
+    <p:spTree>
+      <p:nvGrpSpPr>
+        <p:cNvPr id="1" name=""/>
+        <p:cNvGrpSpPr/>
+        <p:nvPr/>
+      </p:nvGrpSpPr>
+      <p:grpSpPr>
+        <a:xfrm>
+          <a:off x="0" y="0"/>
+          <a:ext cx="0" cy="0"/>
+          <a:chOff x="0" y="0"/>
+          <a:chExt cx="0" cy="0"/>
+        </a:xfrm>
+      </p:grpSpPr>
+      <p:sp>
+        <p:nvSpPr>
+          <p:cNvPr id="2" name="Slide Image Placeholder 1"/>
+          <p:cNvSpPr>
+            <a:spLocks noGrp="1" noRot="1" noChangeAspect="1"/>
+          </p:cNvSpPr>
+          <p:nvPr>
+            <p:ph type="sldImg"/>
+          </p:nvPr>
+        </p:nvSpPr>
+        <p:spPr/>
+      </p:sp>
+      <p:sp>
+        <p:nvSpPr>
+          <p:cNvPr id="3" name="Notes Placeholder 2"/>
+          <p:cNvSpPr>
+            <a:spLocks noGrp="1"/>
+          </p:cNvSpPr>
+          <p:nvPr>
+            <p:ph type="body" idx="1"/>
+          </p:nvPr>
+        </p:nvSpPr>
+        <p:spPr/>
+        <p:txBody>
+          <a:bodyPr/>
+          <a:lstStyle/>
+          <a:p>
+            <a:r>
+              <a:t>Спасибо за внимание, готова ответить на вопросы.</a:t>
+            </a:r>
+          </a:p>
+        </p:txBody>
+      </p:sp>
+      <p:sp>
+        <p:nvSpPr>
+          <p:cNvPr id="4" name="Slide Number Placeholder 3"/>
+          <p:cNvSpPr>
+            <a:spLocks noGrp="1"/>
+          </p:cNvSpPr>
+          <p:nvPr>
+            <p:ph type="sldNum" sz="quarter" idx="10"/>
+          </p:nvPr>
+        </p:nvSpPr>
+        <p:spPr/>
+        <p:txBody>
+          <a:bodyPr/>
+          <a:lstStyle/>
+          <a:p>
+            <a:fld id="{F7021451-1387-4CA6-816F-3879F97B5CBC}" type="slidenum">
+              <a:rPr lang="en-US"/>
+              <a:t>12</a:t>
             </a:fld>
             <a:endParaRPr lang="en-US"/>
           </a:p>
@@ -376,7 +856,7 @@
           <a:lstStyle/>
           <a:p>
             <a:r>
-              <a:t>Розничная сеть товаров для дома, декора и подарков — это 170 с лишним магазинов по России. Каждый год перед Новым годом сеть распределяет сезонный товар по магазинам, и решение об этом принимается в середине октября — до того, как продажи вообще начались. Недовоз — упущенные продажи. Перевоз — заморозка капитала и уценка после 31 декабря. Работа продолжает более раннюю попытку по первому кварталу, доработанную с учётом обратной связи научного руководителя. Цель — построить обоснованные правила распределения и честно оценить их точность против текущей практики.</a:t>
+              <a:t>В сети товаров для дома, декора и подарков больше 170 магазинов. Проблема, которую решает эта работа: новогодний товар распределяется по магазинам в середине октября, до старта продаж, по экспертной оценке, и точность такого распределения на данных никто не проверял. Из-за этого сеть теряет дважды: там, где товара не хватило, полка пустеет и продажи упущены, а там, где его слишком много, после 31 декабря он замораживает деньги и уходит в уценку. Цель работы — найти обоснованное правило первичного распределения и честно проверить, насколько оно точное.</a:t>
             </a:r>
           </a:p>
         </p:txBody>
@@ -462,7 +942,7 @@
           <a:lstStyle/>
           <a:p>
             <a:r>
-              <a:t>Единица прогноза — пара «магазин и товарная подгруппа» на сезон ноябрь-декабрь. Точка отсечки признаков — 15 октября: модель использует только информацию, доступную до старта продаж. Метрика — WAPE (устойчива к низким/нулевым продажам, в отличие от MAPE) и bias. Сравниваю три метода: наивный LFL, fair share, Ridge-регрессия.</a:t>
+              <a:t>Я прогнозирую продажи пары «магазин и подгруппа» за ноябрь и декабрь. Решение принимается 15 октября, поэтому прогноз может использовать только то, что известно к этой дате. Метрика — WAPE, взвешенная процентная ошибка, устойчивая к нулевым продажам; дополнительно смотрю bias — систематическое завышение или занижение. Сравниваю простое правило LFL — прошлогодние продажи, умноженные на коэффициент роста, — и три модели машинного обучения.</a:t>
             </a:r>
           </a:p>
         </p:txBody>
@@ -548,7 +1028,13 @@
           <a:lstStyle/>
           <a:p>
             <a:r>
-              <a:t>36 недельных выгрузок 1С, 3.44 млн строк, после очистки — 172 магазина, 83 подгруппы. Проблемы 1С: пропуски = нули (проверено на примере), разный регистр названий, неуникальность имени подгруппы (составной ключ). Признаки: ever_active (была ли пара в ассортименте), is_stockout (дефицит на конец недели). Train/test разбиты по магазинам без пересечений.</a:t>
+              <a:t>Данные — 36 недельных выгрузок из 1С, 3,4 миллиона строк; после агрегации — 172 магазина и 83 подгруппы. В остатках, продажах и поставках было много пустых ячеек. Чтобы понять, что они значат, я проверила конкретный пример: в начале недели остаток две штуки, продано две штуки, а в конце недели ячейка пустая. Значит, пустая ячейка — это ноль, и я заменила такие пропуски нулями.</a:t>
+            </a:r>
+          </a:p>
+          <a:p/>
+          <a:p>
+            <a:r>
+              <a:t>Вторая сложность: справочника, какие товары каким магазинам назначены, нет. Если у пары «магазин и товар» весь сезон одни нули, это может быть и дефицит, и товар, который магазину просто не положен. Поэтому я считаю товар ассортиментным, если за сезон у него хотя бы раз был остаток, продажа или поставка; только тогда нулевой остаток засчитывается как дефицит. Январь в прогноз не входит: это распродажи, а не спрос.</a:t>
             </a:r>
           </a:p>
         </p:txBody>
@@ -634,7 +1120,7 @@
           <a:lstStyle/>
           <a:p>
             <a:r>
-              <a:t>Пик спроса определён по данным, не назначен вручную — неделя 52 в обоих сезонах: 860 257 шт. (2024) и 789 716 шт. (2025). ABC-XYZ по подгруппам: золотой фонд (AX) — всего 2 позиции (шапки, перчатки). Большинство топовых по выручке подгрупп нестабильны (Z) — это логично, они и дают резкий скачок перед Новым годом.</a:t>
+              <a:t>Слева — суммарные продажи сети по неделям: по горизонтали недели с начала октября до начала февраля, по вертикали тысячи проданных штук. Пик спроса я не назначала, его показали данные: последняя неделя перед Новым годом в обоих сезонах. Справа — матрица ABC-XYZ, в каждой клетке число подгрупп. Буква A, B или C — вклад в выручку, X, Y или Z — насколько ровно подгруппа продаётся. Доходных и стабильных подгрупп всего две — шапки и перчатки; большинство доходных продаются скачками, это и есть предновогодний пик.</a:t>
             </a:r>
           </a:p>
         </p:txBody>
@@ -720,7 +1206,7 @@
           <a:lstStyle/>
           <a:p>
             <a:r>
-              <a:t>Спирмен ρ=0.906, p&lt;0.0001 — структура спроса устойчива между сезонами, это обосновывает LFL-прогноз. Манна-Уитни: дефицит на Дальнем Востоке в 5.2 раза выше сети (25.7% против 4.9%), p&lt;0.00001 — статистически значимо, системная проблема, вероятно логистика.</a:t>
+              <a:t>Я проверила две гипотезы. Первая: лидеры продаж прошлого сезона остаются лидерами и в этом. Я расставила подгруппы по местам в рейтинге выручки и сравнила места двух сезонов: корреляция Спирмена 0,906, рейтинг почти не меняется. Это обосновывает прогноз от прошлого года. Вторая: на Дальнем Востоке дефицит выше, чем в остальной сети. На диаграмме размаха видно, что доля недель с дефицитом там 25,7 процента против 4,9 по сети, в 5,2 раза выше; тест Манна-Уитни подтверждает различие.</a:t>
             </a:r>
           </a:p>
         </p:txBody>
@@ -806,7 +1292,7 @@
           <a:lstStyle/>
           <a:p>
             <a:r>
-              <a:t>Главный слайд. Оба графика — подлинные, сохранены прямо из ноутбука. Честная проверка на 36 отложенных магазинах. Наивный LFL и fair share дали одинаковый WAPE 51.7% — математически тождественны при едином коэффициенте роста. Ridge (отдельные веса по кластеру/категории/подгруппе) снижает WAPE до 33.5% — почти на треть точнее, bias сократился с 16.4% до 6.2%. Улучшение системное — точнее в 8 из 9 кластеров.</a:t>
+              <a:t>Как проверить прогноз? Я сделала это двумя способами. Основной — честная имитация 15 октября: модель учится на сезоне 2024 и прогнозирует сезон 2025, зная только то, что было известно к 15 октября. Второй — внутри сезона: модель видит реальные продажи ноября и декабря у одних магазинов и прогнозирует остальные. На 15 октября таких данных ещё нет, поэтому второй способ показывает не прогноз для распределения, а насколько модели полезны позже, когда сезон уже идёт.</a:t>
             </a:r>
           </a:p>
         </p:txBody>
@@ -892,7 +1378,7 @@
           <a:lstStyle/>
           <a:p>
             <a:r>
-              <a:t>Три рекомендации: 1) дифференцировать коэффициент роста по кластерам; 2) пересмотреть логистику для Дальнего Востока (упущенная выручка ~306 883 руб. за сезон, масштабировано); 3) доверять модели AX/AY, контролировать вручную CZ. Ограничения: дефицит определён косвенно (нет справочника ассортимента), один сезон обучения. Развитие: учёт стокаута в целевой переменной, второй сезон, точка отсечки «пополнение по ходу сезона».</a:t>
+              <a:t>Это главный результат. Лучший метод — простой LFL с единым коэффициентом роста по первым двум неделям октября: ошибка 45,8 процента. Случайный лес почти сравнялся — 46,8, Ridge сильно хуже. Без истории прошлого сезона моделям не хватает данных: у трёх четвертей пар в начале октября продаж ещё нет. По той же причине отдельные коэффициенты по кластерам и подгруппам ухудшают прогноз — они слишком шумные.</a:t>
             </a:r>
           </a:p>
         </p:txBody>
@@ -978,7 +1464,7 @@
           <a:lstStyle/>
           <a:p>
             <a:r>
-              <a:t>Спасибо за внимание, готова ответить на вопросы.</a:t>
+              <a:t>Если известны продажи текущего сезона в остальной сети, модели раскрываются. На 36 отложенных магазинах случайный лес снижает ошибку до 29,6 процента против 51,7 у бейзлайна, почти без систематического смещения. Это потенциал для перераспределения товара по ходу сезона. Часть этого выигрыша связана с одной находкой — о ней на следующем слайде.</a:t>
             </a:r>
           </a:p>
         </p:txBody>
@@ -1052,11 +1538,6 @@
 <file path=ppt/slideMasters/slideMaster1.xml><?xml version="1.0" encoding="utf-8"?>
 <p:sldMaster xmlns:a="http://schemas.openxmlformats.org/drawingml/2006/main" xmlns:r="http://schemas.openxmlformats.org/officeDocument/2006/relationships" xmlns:p="http://schemas.openxmlformats.org/presentationml/2006/main">
   <p:cSld>
-    <p:bg>
-      <p:bgRef idx="1001">
-        <a:schemeClr val="bg1"/>
-      </p:bgRef>
-    </p:bg>
     <p:spTree>
       <p:nvGrpSpPr>
         <p:cNvPr id="1" name=""/>
@@ -1337,9 +1818,8 @@
     <p:bg>
       <p:bgPr>
         <a:solidFill>
-          <a:srgbClr val="1E2761"/>
+          <a:srgbClr val="323C32"/>
         </a:solidFill>
-        <a:effectLst/>
       </p:bgPr>
     </p:bg>
     <p:spTree>
@@ -1364,28 +1844,6 @@
         </p:nvSpPr>
         <p:spPr>
           <a:xfrm>
-            <a:off x="0" y="0"/>
-            <a:ext cx="12188952" cy="6858000"/>
-          </a:xfrm>
-          <a:prstGeom prst="rect">
-            <a:avLst/>
-          </a:prstGeom>
-          <a:solidFill>
-            <a:srgbClr val="141B47">
-              <a:alpha val="60000"/>
-            </a:srgbClr>
-          </a:solidFill>
-          <a:ln/>
-        </p:spPr>
-      </p:sp>
-      <p:sp>
-        <p:nvSpPr>
-          <p:cNvPr id="3" name="Shape 1"/>
-          <p:cNvSpPr/>
-          <p:nvPr/>
-        </p:nvSpPr>
-        <p:spPr>
-          <a:xfrm>
             <a:off x="914400" y="914400"/>
             <a:ext cx="82296" cy="82296"/>
           </a:xfrm>
@@ -1393,14 +1851,14 @@
             <a:avLst/>
           </a:prstGeom>
           <a:solidFill>
-            <a:srgbClr val="C9A227"/>
+            <a:srgbClr val="B61B3B"/>
           </a:solidFill>
           <a:ln/>
         </p:spPr>
       </p:sp>
       <p:sp>
         <p:nvSpPr>
-          <p:cNvPr id="4" name="Shape 2"/>
+          <p:cNvPr id="3" name="Shape 1"/>
           <p:cNvSpPr/>
           <p:nvPr/>
         </p:nvSpPr>
@@ -1413,14 +1871,14 @@
             <a:avLst/>
           </a:prstGeom>
           <a:solidFill>
-            <a:srgbClr val="C9A227"/>
+            <a:srgbClr val="B61B3B"/>
           </a:solidFill>
           <a:ln/>
         </p:spPr>
       </p:sp>
       <p:sp>
         <p:nvSpPr>
-          <p:cNvPr id="5" name="Shape 3"/>
+          <p:cNvPr id="4" name="Shape 2"/>
           <p:cNvSpPr/>
           <p:nvPr/>
         </p:nvSpPr>
@@ -1433,14 +1891,14 @@
             <a:avLst/>
           </a:prstGeom>
           <a:solidFill>
-            <a:srgbClr val="C9A227"/>
+            <a:srgbClr val="B61B3B"/>
           </a:solidFill>
           <a:ln/>
         </p:spPr>
       </p:sp>
       <p:sp>
         <p:nvSpPr>
-          <p:cNvPr id="6" name="Shape 4"/>
+          <p:cNvPr id="5" name="Shape 3"/>
           <p:cNvSpPr/>
           <p:nvPr/>
         </p:nvSpPr>
@@ -1453,14 +1911,14 @@
             <a:avLst/>
           </a:prstGeom>
           <a:solidFill>
-            <a:srgbClr val="C9A227"/>
+            <a:srgbClr val="B61B3B"/>
           </a:solidFill>
           <a:ln/>
         </p:spPr>
       </p:sp>
       <p:sp>
         <p:nvSpPr>
-          <p:cNvPr id="7" name="Shape 5"/>
+          <p:cNvPr id="6" name="Shape 4"/>
           <p:cNvSpPr/>
           <p:nvPr/>
         </p:nvSpPr>
@@ -1473,14 +1931,14 @@
             <a:avLst/>
           </a:prstGeom>
           <a:solidFill>
-            <a:srgbClr val="C9A227"/>
+            <a:srgbClr val="B61B3B"/>
           </a:solidFill>
           <a:ln/>
         </p:spPr>
       </p:sp>
       <p:sp>
         <p:nvSpPr>
-          <p:cNvPr id="8" name="Shape 6"/>
+          <p:cNvPr id="7" name="Shape 5"/>
           <p:cNvSpPr/>
           <p:nvPr/>
         </p:nvSpPr>
@@ -1493,15 +1951,15 @@
             <a:avLst/>
           </a:prstGeom>
           <a:solidFill>
-            <a:srgbClr val="C9A227"/>
+            <a:srgbClr val="B61B3B"/>
           </a:solidFill>
           <a:ln/>
         </p:spPr>
       </p:sp>
       <p:sp>
         <p:nvSpPr>
-          <p:cNvPr id="9" name="Text 7"/>
-          <p:cNvSpPr txBox="1"/>
+          <p:cNvPr id="8" name="Text 6"/>
+          <p:cNvSpPr/>
           <p:nvPr/>
         </p:nvSpPr>
         <p:spPr>
@@ -1519,13 +1977,13 @@
           <a:bodyPr wrap="square" lIns="0" tIns="0" rIns="0" bIns="0" rtlCol="0" anchor="ctr"/>
           <a:lstStyle/>
           <a:p>
-            <a:pPr marL="0" indent="0">
-              <a:buNone/>
-            </a:pPr>
-            <a:r>
-              <a:rPr lang="en-US" sz="1300" kern="0" spc="200" dirty="0">
-                <a:solidFill>
-                  <a:srgbClr val="C9A227"/>
+            <a:pPr indent="0" marL="0">
+              <a:buNone/>
+            </a:pPr>
+            <a:r>
+              <a:rPr lang="en-US" sz="1300" spc="200" kern="0" dirty="0">
+                <a:solidFill>
+                  <a:srgbClr val="C5C9A6"/>
                 </a:solidFill>
                 <a:latin typeface="Calibri" pitchFamily="34" charset="0"/>
                 <a:ea typeface="Calibri" pitchFamily="34" charset="-122"/>
@@ -1539,8 +1997,8 @@
       </p:sp>
       <p:sp>
         <p:nvSpPr>
-          <p:cNvPr id="10" name="Text 8"/>
-          <p:cNvSpPr txBox="1"/>
+          <p:cNvPr id="9" name="Text 7"/>
+          <p:cNvSpPr/>
           <p:nvPr/>
         </p:nvSpPr>
         <p:spPr>
@@ -1558,7 +2016,7 @@
           <a:bodyPr wrap="square" lIns="0" tIns="0" rIns="0" bIns="0" rtlCol="0" anchor="ctr"/>
           <a:lstStyle/>
           <a:p>
-            <a:pPr marL="0" indent="0">
+            <a:pPr indent="0" marL="0">
               <a:lnSpc>
                 <a:spcPct val="110000"/>
               </a:lnSpc>
@@ -1581,8 +2039,8 @@
       </p:sp>
       <p:sp>
         <p:nvSpPr>
-          <p:cNvPr id="11" name="Text 9"/>
-          <p:cNvSpPr txBox="1"/>
+          <p:cNvPr id="10" name="Text 8"/>
+          <p:cNvSpPr/>
           <p:nvPr/>
         </p:nvSpPr>
         <p:spPr>
@@ -1600,13 +2058,13 @@
           <a:bodyPr wrap="square" lIns="0" tIns="0" rIns="0" bIns="0" rtlCol="0" anchor="ctr"/>
           <a:lstStyle/>
           <a:p>
-            <a:pPr marL="0" indent="0">
+            <a:pPr indent="0" marL="0">
               <a:buNone/>
             </a:pPr>
             <a:r>
               <a:rPr lang="en-US" sz="1700" i="1" dirty="0">
                 <a:solidFill>
-                  <a:srgbClr val="EAF0FB"/>
+                  <a:srgbClr val="E4E2D3"/>
                 </a:solidFill>
                 <a:latin typeface="Calibri" pitchFamily="34" charset="0"/>
                 <a:ea typeface="Calibri" pitchFamily="34" charset="-122"/>
@@ -1620,7 +2078,7 @@
       </p:sp>
       <p:sp>
         <p:nvSpPr>
-          <p:cNvPr id="12" name="Shape 10"/>
+          <p:cNvPr id="11" name="Shape 9"/>
           <p:cNvSpPr/>
           <p:nvPr/>
         </p:nvSpPr>
@@ -1635,11 +2093,3046 @@
           <a:noFill/>
           <a:ln w="25400">
             <a:solidFill>
-              <a:srgbClr val="C9A227"/>
+              <a:srgbClr val="B61B3B"/>
             </a:solidFill>
             <a:prstDash val="solid"/>
           </a:ln>
         </p:spPr>
+      </p:sp>
+    </p:spTree>
+  </p:cSld>
+  <p:clrMapOvr>
+    <a:masterClrMapping/>
+  </p:clrMapOvr>
+</p:sld>
+</file>
+
+<file path=ppt/slides/slide10.xml><?xml version="1.0" encoding="utf-8"?>
+<p:sld xmlns:a="http://schemas.openxmlformats.org/drawingml/2006/main" xmlns:r="http://schemas.openxmlformats.org/officeDocument/2006/relationships" xmlns:p="http://schemas.openxmlformats.org/presentationml/2006/main">
+  <p:cSld name="Slide 10">
+    <p:bg>
+      <p:bgPr>
+        <a:solidFill>
+          <a:srgbClr val="FFFFFF"/>
+        </a:solidFill>
+      </p:bgPr>
+    </p:bg>
+    <p:spTree>
+      <p:nvGrpSpPr>
+        <p:cNvPr id="1" name=""/>
+        <p:cNvGrpSpPr/>
+        <p:nvPr/>
+      </p:nvGrpSpPr>
+      <p:grpSpPr>
+        <a:xfrm>
+          <a:off x="0" y="0"/>
+          <a:ext cx="0" cy="0"/>
+          <a:chOff x="0" y="0"/>
+          <a:chExt cx="0" cy="0"/>
+        </a:xfrm>
+      </p:grpSpPr>
+      <p:sp>
+        <p:nvSpPr>
+          <p:cNvPr id="2" name="Text 0"/>
+          <p:cNvSpPr/>
+          <p:nvPr/>
+        </p:nvSpPr>
+        <p:spPr>
+          <a:xfrm>
+            <a:off x="640080" y="411480"/>
+            <a:ext cx="10881360" cy="640080"/>
+          </a:xfrm>
+          <a:prstGeom prst="rect">
+            <a:avLst/>
+          </a:prstGeom>
+          <a:noFill/>
+          <a:ln/>
+        </p:spPr>
+        <p:txBody>
+          <a:bodyPr wrap="square" lIns="0" tIns="0" rIns="0" bIns="0" rtlCol="0" anchor="ctr"/>
+          <a:lstStyle/>
+          <a:p>
+            <a:pPr indent="0" marL="0">
+              <a:buNone/>
+            </a:pPr>
+            <a:r>
+              <a:rPr lang="en-US" sz="2800" b="1" dirty="0">
+                <a:solidFill>
+                  <a:srgbClr val="323C32"/>
+                </a:solidFill>
+                <a:latin typeface="Cambria" pitchFamily="34" charset="0"/>
+                <a:ea typeface="Cambria" pitchFamily="34" charset="-122"/>
+                <a:cs typeface="Cambria" pitchFamily="34" charset="-120"/>
+              </a:rPr>
+              <a:t>Находка: смена ассортимента печенья</a:t>
+            </a:r>
+            <a:endParaRPr lang="en-US" sz="2800" dirty="0"/>
+          </a:p>
+        </p:txBody>
+      </p:sp>
+      <p:sp>
+        <p:nvSpPr>
+          <p:cNvPr id="3" name="Text 1"/>
+          <p:cNvSpPr/>
+          <p:nvPr/>
+        </p:nvSpPr>
+        <p:spPr>
+          <a:xfrm>
+            <a:off x="640080" y="987552"/>
+            <a:ext cx="10881360" cy="365760"/>
+          </a:xfrm>
+          <a:prstGeom prst="rect">
+            <a:avLst/>
+          </a:prstGeom>
+          <a:noFill/>
+          <a:ln/>
+        </p:spPr>
+        <p:txBody>
+          <a:bodyPr wrap="square" lIns="0" tIns="0" rIns="0" bIns="0" rtlCol="0" anchor="ctr"/>
+          <a:lstStyle/>
+          <a:p>
+            <a:pPr indent="0" marL="0">
+              <a:buNone/>
+            </a:pPr>
+            <a:r>
+              <a:rPr lang="en-US" sz="1300" dirty="0">
+                <a:solidFill>
+                  <a:srgbClr val="6B7280"/>
+                </a:solidFill>
+                <a:latin typeface="Calibri" pitchFamily="34" charset="0"/>
+                <a:ea typeface="Calibri" pitchFamily="34" charset="-122"/>
+                <a:cs typeface="Calibri" pitchFamily="34" charset="-120"/>
+              </a:rPr>
+              <a:t>Ни один артикул не менял подгруппу — сменились сами артикулы</a:t>
+            </a:r>
+            <a:endParaRPr lang="en-US" sz="1300" dirty="0"/>
+          </a:p>
+        </p:txBody>
+      </p:sp>
+      <p:graphicFrame>
+        <p:nvGraphicFramePr>
+          <p:cNvPr id="11" name="Table 0"/>
+          <p:cNvGraphicFramePr>
+            <a:graphicFrameLocks noGrp="1"/>
+          </p:cNvGraphicFramePr>
+          <p:nvPr>
+            <p:extLst>
+              <p:ext uri="{D42A27DB-BD31-4B8C-83A1-F6EECF244321}">
+                <p14:modId xmlns:p14="http://schemas.microsoft.com/office/powerpoint/2010/main" val="1579011935"/>
+              </p:ext>
+            </p:extLst>
+          </p:nvPr>
+        </p:nvGraphicFramePr>
+        <p:xfrm>
+          <a:off x="640080" y="1645920"/>
+          <a:ext cx="6766560" cy="914400"/>
+        </p:xfrm>
+        <a:graphic>
+          <a:graphicData uri="http://schemas.openxmlformats.org/drawingml/2006/table">
+            <a:tbl>
+              <a:tblPr/>
+              <a:tblGrid>
+                <a:gridCol w="2651760"/>
+                <a:gridCol w="914400"/>
+                <a:gridCol w="1051560"/>
+                <a:gridCol w="914400"/>
+                <a:gridCol w="1234440"/>
+              </a:tblGrid>
+              <a:tr h="566928">
+                <a:tc>
+                  <a:txBody>
+                    <a:bodyPr/>
+                    <a:lstStyle/>
+                    <a:p>
+                      <a:pPr algn="ctr" indent="0" marL="0">
+                        <a:buNone/>
+                      </a:pPr>
+                      <a:r>
+                        <a:rPr lang="en-US" sz="1300" b="1" dirty="0">
+                          <a:solidFill>
+                            <a:srgbClr val="FFFFFF"/>
+                          </a:solidFill>
+                          <a:latin typeface="Calibri" pitchFamily="34" charset="0"/>
+                          <a:ea typeface="Calibri" pitchFamily="34" charset="-122"/>
+                          <a:cs typeface="Calibri" pitchFamily="34" charset="-120"/>
+                        </a:rPr>
+                        <a:t>Подгруппа</a:t>
+                      </a:r>
+                      <a:endParaRPr lang="en-US" sz="1300" dirty="0">
+                        <a:latin typeface="Calibri" charset="0"/>
+                        <a:ea typeface="Calibri" charset="0"/>
+                        <a:cs typeface="Calibri" charset="0"/>
+                      </a:endParaRPr>
+                    </a:p>
+                  </a:txBody>
+                  <a:tcPr marL="91440" marR="91440" marT="45720" marB="45720" anchor="ctr">
+                    <a:lnL w="9525" cap="flat" cmpd="sng" algn="ctr">
+                      <a:solidFill>
+                        <a:srgbClr val="D9D6CC"/>
+                      </a:solidFill>
+                      <a:prstDash val="solid"/>
+                      <a:round/>
+                      <a:headEnd type="none" w="med" len="med"/>
+                      <a:tailEnd type="none" w="med" len="med"/>
+                    </a:lnL>
+                    <a:lnR w="9525" cap="flat" cmpd="sng" algn="ctr">
+                      <a:solidFill>
+                        <a:srgbClr val="D9D6CC"/>
+                      </a:solidFill>
+                      <a:prstDash val="solid"/>
+                      <a:round/>
+                      <a:headEnd type="none" w="med" len="med"/>
+                      <a:tailEnd type="none" w="med" len="med"/>
+                    </a:lnR>
+                    <a:lnT w="9525" cap="flat" cmpd="sng" algn="ctr">
+                      <a:solidFill>
+                        <a:srgbClr val="D9D6CC"/>
+                      </a:solidFill>
+                      <a:prstDash val="solid"/>
+                      <a:round/>
+                      <a:headEnd type="none" w="med" len="med"/>
+                      <a:tailEnd type="none" w="med" len="med"/>
+                    </a:lnT>
+                    <a:lnB w="9525" cap="flat" cmpd="sng" algn="ctr">
+                      <a:solidFill>
+                        <a:srgbClr val="D9D6CC"/>
+                      </a:solidFill>
+                      <a:prstDash val="solid"/>
+                      <a:round/>
+                      <a:headEnd type="none" w="med" len="med"/>
+                      <a:tailEnd type="none" w="med" len="med"/>
+                    </a:lnB>
+                    <a:solidFill>
+                      <a:srgbClr val="323C32"/>
+                    </a:solidFill>
+                  </a:tcPr>
+                </a:tc>
+                <a:tc>
+                  <a:txBody>
+                    <a:bodyPr/>
+                    <a:lstStyle/>
+                    <a:p>
+                      <a:pPr algn="ctr" indent="0" marL="0">
+                        <a:buNone/>
+                      </a:pPr>
+                      <a:r>
+                        <a:rPr lang="en-US" sz="1300" b="1" dirty="0">
+                          <a:solidFill>
+                            <a:srgbClr val="FFFFFF"/>
+                          </a:solidFill>
+                          <a:latin typeface="Calibri" pitchFamily="34" charset="0"/>
+                          <a:ea typeface="Calibri" pitchFamily="34" charset="-122"/>
+                          <a:cs typeface="Calibri" pitchFamily="34" charset="-120"/>
+                        </a:rPr>
+                        <a:t>2024: SKU</a:t>
+                      </a:r>
+                      <a:endParaRPr lang="en-US" sz="1300" dirty="0">
+                        <a:latin typeface="Calibri" charset="0"/>
+                        <a:ea typeface="Calibri" charset="0"/>
+                        <a:cs typeface="Calibri" charset="0"/>
+                      </a:endParaRPr>
+                    </a:p>
+                  </a:txBody>
+                  <a:tcPr marL="91440" marR="91440" marT="45720" marB="45720" anchor="ctr">
+                    <a:lnL w="9525" cap="flat" cmpd="sng" algn="ctr">
+                      <a:solidFill>
+                        <a:srgbClr val="D9D6CC"/>
+                      </a:solidFill>
+                      <a:prstDash val="solid"/>
+                      <a:round/>
+                      <a:headEnd type="none" w="med" len="med"/>
+                      <a:tailEnd type="none" w="med" len="med"/>
+                    </a:lnL>
+                    <a:lnR w="9525" cap="flat" cmpd="sng" algn="ctr">
+                      <a:solidFill>
+                        <a:srgbClr val="D9D6CC"/>
+                      </a:solidFill>
+                      <a:prstDash val="solid"/>
+                      <a:round/>
+                      <a:headEnd type="none" w="med" len="med"/>
+                      <a:tailEnd type="none" w="med" len="med"/>
+                    </a:lnR>
+                    <a:lnT w="9525" cap="flat" cmpd="sng" algn="ctr">
+                      <a:solidFill>
+                        <a:srgbClr val="D9D6CC"/>
+                      </a:solidFill>
+                      <a:prstDash val="solid"/>
+                      <a:round/>
+                      <a:headEnd type="none" w="med" len="med"/>
+                      <a:tailEnd type="none" w="med" len="med"/>
+                    </a:lnT>
+                    <a:lnB w="9525" cap="flat" cmpd="sng" algn="ctr">
+                      <a:solidFill>
+                        <a:srgbClr val="D9D6CC"/>
+                      </a:solidFill>
+                      <a:prstDash val="solid"/>
+                      <a:round/>
+                      <a:headEnd type="none" w="med" len="med"/>
+                      <a:tailEnd type="none" w="med" len="med"/>
+                    </a:lnB>
+                    <a:solidFill>
+                      <a:srgbClr val="323C32"/>
+                    </a:solidFill>
+                  </a:tcPr>
+                </a:tc>
+                <a:tc>
+                  <a:txBody>
+                    <a:bodyPr/>
+                    <a:lstStyle/>
+                    <a:p>
+                      <a:pPr algn="ctr" indent="0" marL="0">
+                        <a:buNone/>
+                      </a:pPr>
+                      <a:r>
+                        <a:rPr lang="en-US" sz="1300" b="1" dirty="0">
+                          <a:solidFill>
+                            <a:srgbClr val="FFFFFF"/>
+                          </a:solidFill>
+                          <a:latin typeface="Calibri" pitchFamily="34" charset="0"/>
+                          <a:ea typeface="Calibri" pitchFamily="34" charset="-122"/>
+                          <a:cs typeface="Calibri" pitchFamily="34" charset="-120"/>
+                        </a:rPr>
+                        <a:t>2024: шт.</a:t>
+                      </a:r>
+                      <a:endParaRPr lang="en-US" sz="1300" dirty="0">
+                        <a:latin typeface="Calibri" charset="0"/>
+                        <a:ea typeface="Calibri" charset="0"/>
+                        <a:cs typeface="Calibri" charset="0"/>
+                      </a:endParaRPr>
+                    </a:p>
+                  </a:txBody>
+                  <a:tcPr marL="91440" marR="91440" marT="45720" marB="45720" anchor="ctr">
+                    <a:lnL w="9525" cap="flat" cmpd="sng" algn="ctr">
+                      <a:solidFill>
+                        <a:srgbClr val="D9D6CC"/>
+                      </a:solidFill>
+                      <a:prstDash val="solid"/>
+                      <a:round/>
+                      <a:headEnd type="none" w="med" len="med"/>
+                      <a:tailEnd type="none" w="med" len="med"/>
+                    </a:lnL>
+                    <a:lnR w="9525" cap="flat" cmpd="sng" algn="ctr">
+                      <a:solidFill>
+                        <a:srgbClr val="D9D6CC"/>
+                      </a:solidFill>
+                      <a:prstDash val="solid"/>
+                      <a:round/>
+                      <a:headEnd type="none" w="med" len="med"/>
+                      <a:tailEnd type="none" w="med" len="med"/>
+                    </a:lnR>
+                    <a:lnT w="9525" cap="flat" cmpd="sng" algn="ctr">
+                      <a:solidFill>
+                        <a:srgbClr val="D9D6CC"/>
+                      </a:solidFill>
+                      <a:prstDash val="solid"/>
+                      <a:round/>
+                      <a:headEnd type="none" w="med" len="med"/>
+                      <a:tailEnd type="none" w="med" len="med"/>
+                    </a:lnT>
+                    <a:lnB w="9525" cap="flat" cmpd="sng" algn="ctr">
+                      <a:solidFill>
+                        <a:srgbClr val="D9D6CC"/>
+                      </a:solidFill>
+                      <a:prstDash val="solid"/>
+                      <a:round/>
+                      <a:headEnd type="none" w="med" len="med"/>
+                      <a:tailEnd type="none" w="med" len="med"/>
+                    </a:lnB>
+                    <a:solidFill>
+                      <a:srgbClr val="323C32"/>
+                    </a:solidFill>
+                  </a:tcPr>
+                </a:tc>
+                <a:tc>
+                  <a:txBody>
+                    <a:bodyPr/>
+                    <a:lstStyle/>
+                    <a:p>
+                      <a:pPr algn="ctr" indent="0" marL="0">
+                        <a:buNone/>
+                      </a:pPr>
+                      <a:r>
+                        <a:rPr lang="en-US" sz="1300" b="1" dirty="0">
+                          <a:solidFill>
+                            <a:srgbClr val="FFFFFF"/>
+                          </a:solidFill>
+                          <a:latin typeface="Calibri" pitchFamily="34" charset="0"/>
+                          <a:ea typeface="Calibri" pitchFamily="34" charset="-122"/>
+                          <a:cs typeface="Calibri" pitchFamily="34" charset="-120"/>
+                        </a:rPr>
+                        <a:t>2025: SKU</a:t>
+                      </a:r>
+                      <a:endParaRPr lang="en-US" sz="1300" dirty="0">
+                        <a:latin typeface="Calibri" charset="0"/>
+                        <a:ea typeface="Calibri" charset="0"/>
+                        <a:cs typeface="Calibri" charset="0"/>
+                      </a:endParaRPr>
+                    </a:p>
+                  </a:txBody>
+                  <a:tcPr marL="91440" marR="91440" marT="45720" marB="45720" anchor="ctr">
+                    <a:lnL w="9525" cap="flat" cmpd="sng" algn="ctr">
+                      <a:solidFill>
+                        <a:srgbClr val="D9D6CC"/>
+                      </a:solidFill>
+                      <a:prstDash val="solid"/>
+                      <a:round/>
+                      <a:headEnd type="none" w="med" len="med"/>
+                      <a:tailEnd type="none" w="med" len="med"/>
+                    </a:lnL>
+                    <a:lnR w="9525" cap="flat" cmpd="sng" algn="ctr">
+                      <a:solidFill>
+                        <a:srgbClr val="D9D6CC"/>
+                      </a:solidFill>
+                      <a:prstDash val="solid"/>
+                      <a:round/>
+                      <a:headEnd type="none" w="med" len="med"/>
+                      <a:tailEnd type="none" w="med" len="med"/>
+                    </a:lnR>
+                    <a:lnT w="9525" cap="flat" cmpd="sng" algn="ctr">
+                      <a:solidFill>
+                        <a:srgbClr val="D9D6CC"/>
+                      </a:solidFill>
+                      <a:prstDash val="solid"/>
+                      <a:round/>
+                      <a:headEnd type="none" w="med" len="med"/>
+                      <a:tailEnd type="none" w="med" len="med"/>
+                    </a:lnT>
+                    <a:lnB w="9525" cap="flat" cmpd="sng" algn="ctr">
+                      <a:solidFill>
+                        <a:srgbClr val="D9D6CC"/>
+                      </a:solidFill>
+                      <a:prstDash val="solid"/>
+                      <a:round/>
+                      <a:headEnd type="none" w="med" len="med"/>
+                      <a:tailEnd type="none" w="med" len="med"/>
+                    </a:lnB>
+                    <a:solidFill>
+                      <a:srgbClr val="323C32"/>
+                    </a:solidFill>
+                  </a:tcPr>
+                </a:tc>
+                <a:tc>
+                  <a:txBody>
+                    <a:bodyPr/>
+                    <a:lstStyle/>
+                    <a:p>
+                      <a:pPr algn="ctr" indent="0" marL="0">
+                        <a:buNone/>
+                      </a:pPr>
+                      <a:r>
+                        <a:rPr lang="en-US" sz="1300" b="1" dirty="0">
+                          <a:solidFill>
+                            <a:srgbClr val="FFFFFF"/>
+                          </a:solidFill>
+                          <a:latin typeface="Calibri" pitchFamily="34" charset="0"/>
+                          <a:ea typeface="Calibri" pitchFamily="34" charset="-122"/>
+                          <a:cs typeface="Calibri" pitchFamily="34" charset="-120"/>
+                        </a:rPr>
+                        <a:t>2025: шт.</a:t>
+                      </a:r>
+                      <a:endParaRPr lang="en-US" sz="1300" dirty="0">
+                        <a:latin typeface="Calibri" charset="0"/>
+                        <a:ea typeface="Calibri" charset="0"/>
+                        <a:cs typeface="Calibri" charset="0"/>
+                      </a:endParaRPr>
+                    </a:p>
+                  </a:txBody>
+                  <a:tcPr marL="91440" marR="91440" marT="45720" marB="45720" anchor="ctr">
+                    <a:lnL w="9525" cap="flat" cmpd="sng" algn="ctr">
+                      <a:solidFill>
+                        <a:srgbClr val="D9D6CC"/>
+                      </a:solidFill>
+                      <a:prstDash val="solid"/>
+                      <a:round/>
+                      <a:headEnd type="none" w="med" len="med"/>
+                      <a:tailEnd type="none" w="med" len="med"/>
+                    </a:lnL>
+                    <a:lnR w="9525" cap="flat" cmpd="sng" algn="ctr">
+                      <a:solidFill>
+                        <a:srgbClr val="D9D6CC"/>
+                      </a:solidFill>
+                      <a:prstDash val="solid"/>
+                      <a:round/>
+                      <a:headEnd type="none" w="med" len="med"/>
+                      <a:tailEnd type="none" w="med" len="med"/>
+                    </a:lnR>
+                    <a:lnT w="9525" cap="flat" cmpd="sng" algn="ctr">
+                      <a:solidFill>
+                        <a:srgbClr val="D9D6CC"/>
+                      </a:solidFill>
+                      <a:prstDash val="solid"/>
+                      <a:round/>
+                      <a:headEnd type="none" w="med" len="med"/>
+                      <a:tailEnd type="none" w="med" len="med"/>
+                    </a:lnT>
+                    <a:lnB w="9525" cap="flat" cmpd="sng" algn="ctr">
+                      <a:solidFill>
+                        <a:srgbClr val="D9D6CC"/>
+                      </a:solidFill>
+                      <a:prstDash val="solid"/>
+                      <a:round/>
+                      <a:headEnd type="none" w="med" len="med"/>
+                      <a:tailEnd type="none" w="med" len="med"/>
+                    </a:lnB>
+                    <a:solidFill>
+                      <a:srgbClr val="323C32"/>
+                    </a:solidFill>
+                  </a:tcPr>
+                </a:tc>
+              </a:tr>
+              <a:tr h="566928">
+                <a:tc>
+                  <a:txBody>
+                    <a:bodyPr/>
+                    <a:lstStyle/>
+                    <a:p>
+                      <a:pPr algn="l" indent="0" marL="0">
+                        <a:buNone/>
+                      </a:pPr>
+                      <a:r>
+                        <a:rPr lang="en-US" sz="1300" dirty="0">
+                          <a:solidFill>
+                            <a:srgbClr val="1F2937"/>
+                          </a:solidFill>
+                          <a:latin typeface="Calibri" pitchFamily="34" charset="0"/>
+                          <a:ea typeface="Calibri" pitchFamily="34" charset="-122"/>
+                          <a:cs typeface="Calibri" pitchFamily="34" charset="-120"/>
+                        </a:rPr>
+                        <a:t>хлебобулочные изделия | печенье</a:t>
+                      </a:r>
+                      <a:endParaRPr lang="en-US" sz="1300" dirty="0">
+                        <a:latin typeface="Calibri" charset="0"/>
+                        <a:ea typeface="Calibri" charset="0"/>
+                        <a:cs typeface="Calibri" charset="0"/>
+                      </a:endParaRPr>
+                    </a:p>
+                  </a:txBody>
+                  <a:tcPr marL="91440" marR="91440" marT="45720" marB="45720" anchor="ctr">
+                    <a:lnL w="9525" cap="flat" cmpd="sng" algn="ctr">
+                      <a:solidFill>
+                        <a:srgbClr val="D9D6CC"/>
+                      </a:solidFill>
+                      <a:prstDash val="solid"/>
+                      <a:round/>
+                      <a:headEnd type="none" w="med" len="med"/>
+                      <a:tailEnd type="none" w="med" len="med"/>
+                    </a:lnL>
+                    <a:lnR w="9525" cap="flat" cmpd="sng" algn="ctr">
+                      <a:solidFill>
+                        <a:srgbClr val="D9D6CC"/>
+                      </a:solidFill>
+                      <a:prstDash val="solid"/>
+                      <a:round/>
+                      <a:headEnd type="none" w="med" len="med"/>
+                      <a:tailEnd type="none" w="med" len="med"/>
+                    </a:lnR>
+                    <a:lnT w="9525" cap="flat" cmpd="sng" algn="ctr">
+                      <a:solidFill>
+                        <a:srgbClr val="D9D6CC"/>
+                      </a:solidFill>
+                      <a:prstDash val="solid"/>
+                      <a:round/>
+                      <a:headEnd type="none" w="med" len="med"/>
+                      <a:tailEnd type="none" w="med" len="med"/>
+                    </a:lnT>
+                    <a:lnB w="9525" cap="flat" cmpd="sng" algn="ctr">
+                      <a:solidFill>
+                        <a:srgbClr val="D9D6CC"/>
+                      </a:solidFill>
+                      <a:prstDash val="solid"/>
+                      <a:round/>
+                      <a:headEnd type="none" w="med" len="med"/>
+                      <a:tailEnd type="none" w="med" len="med"/>
+                    </a:lnB>
+                    <a:solidFill>
+                      <a:srgbClr val="FFFFFF"/>
+                    </a:solidFill>
+                  </a:tcPr>
+                </a:tc>
+                <a:tc>
+                  <a:txBody>
+                    <a:bodyPr/>
+                    <a:lstStyle/>
+                    <a:p>
+                      <a:pPr algn="ctr" indent="0" marL="0">
+                        <a:buNone/>
+                      </a:pPr>
+                      <a:r>
+                        <a:rPr lang="en-US" sz="1300" dirty="0">
+                          <a:solidFill>
+                            <a:srgbClr val="1F2937"/>
+                          </a:solidFill>
+                          <a:latin typeface="Calibri" pitchFamily="34" charset="0"/>
+                          <a:ea typeface="Calibri" pitchFamily="34" charset="-122"/>
+                          <a:cs typeface="Calibri" pitchFamily="34" charset="-120"/>
+                        </a:rPr>
+                        <a:t>18</a:t>
+                      </a:r>
+                      <a:endParaRPr lang="en-US" sz="1300" dirty="0">
+                        <a:latin typeface="Calibri" charset="0"/>
+                        <a:ea typeface="Calibri" charset="0"/>
+                        <a:cs typeface="Calibri" charset="0"/>
+                      </a:endParaRPr>
+                    </a:p>
+                  </a:txBody>
+                  <a:tcPr marL="91440" marR="91440" marT="45720" marB="45720" anchor="ctr">
+                    <a:lnL w="9525" cap="flat" cmpd="sng" algn="ctr">
+                      <a:solidFill>
+                        <a:srgbClr val="D9D6CC"/>
+                      </a:solidFill>
+                      <a:prstDash val="solid"/>
+                      <a:round/>
+                      <a:headEnd type="none" w="med" len="med"/>
+                      <a:tailEnd type="none" w="med" len="med"/>
+                    </a:lnL>
+                    <a:lnR w="9525" cap="flat" cmpd="sng" algn="ctr">
+                      <a:solidFill>
+                        <a:srgbClr val="D9D6CC"/>
+                      </a:solidFill>
+                      <a:prstDash val="solid"/>
+                      <a:round/>
+                      <a:headEnd type="none" w="med" len="med"/>
+                      <a:tailEnd type="none" w="med" len="med"/>
+                    </a:lnR>
+                    <a:lnT w="9525" cap="flat" cmpd="sng" algn="ctr">
+                      <a:solidFill>
+                        <a:srgbClr val="D9D6CC"/>
+                      </a:solidFill>
+                      <a:prstDash val="solid"/>
+                      <a:round/>
+                      <a:headEnd type="none" w="med" len="med"/>
+                      <a:tailEnd type="none" w="med" len="med"/>
+                    </a:lnT>
+                    <a:lnB w="9525" cap="flat" cmpd="sng" algn="ctr">
+                      <a:solidFill>
+                        <a:srgbClr val="D9D6CC"/>
+                      </a:solidFill>
+                      <a:prstDash val="solid"/>
+                      <a:round/>
+                      <a:headEnd type="none" w="med" len="med"/>
+                      <a:tailEnd type="none" w="med" len="med"/>
+                    </a:lnB>
+                    <a:solidFill>
+                      <a:srgbClr val="FFFFFF"/>
+                    </a:solidFill>
+                  </a:tcPr>
+                </a:tc>
+                <a:tc>
+                  <a:txBody>
+                    <a:bodyPr/>
+                    <a:lstStyle/>
+                    <a:p>
+                      <a:pPr algn="ctr" indent="0" marL="0">
+                        <a:buNone/>
+                      </a:pPr>
+                      <a:r>
+                        <a:rPr lang="en-US" sz="1300" dirty="0">
+                          <a:solidFill>
+                            <a:srgbClr val="1F2937"/>
+                          </a:solidFill>
+                          <a:latin typeface="Calibri" pitchFamily="34" charset="0"/>
+                          <a:ea typeface="Calibri" pitchFamily="34" charset="-122"/>
+                          <a:cs typeface="Calibri" pitchFamily="34" charset="-120"/>
+                        </a:rPr>
+                        <a:t>135 266</a:t>
+                      </a:r>
+                      <a:endParaRPr lang="en-US" sz="1300" dirty="0">
+                        <a:latin typeface="Calibri" charset="0"/>
+                        <a:ea typeface="Calibri" charset="0"/>
+                        <a:cs typeface="Calibri" charset="0"/>
+                      </a:endParaRPr>
+                    </a:p>
+                  </a:txBody>
+                  <a:tcPr marL="91440" marR="91440" marT="45720" marB="45720" anchor="ctr">
+                    <a:lnL w="9525" cap="flat" cmpd="sng" algn="ctr">
+                      <a:solidFill>
+                        <a:srgbClr val="D9D6CC"/>
+                      </a:solidFill>
+                      <a:prstDash val="solid"/>
+                      <a:round/>
+                      <a:headEnd type="none" w="med" len="med"/>
+                      <a:tailEnd type="none" w="med" len="med"/>
+                    </a:lnL>
+                    <a:lnR w="9525" cap="flat" cmpd="sng" algn="ctr">
+                      <a:solidFill>
+                        <a:srgbClr val="D9D6CC"/>
+                      </a:solidFill>
+                      <a:prstDash val="solid"/>
+                      <a:round/>
+                      <a:headEnd type="none" w="med" len="med"/>
+                      <a:tailEnd type="none" w="med" len="med"/>
+                    </a:lnR>
+                    <a:lnT w="9525" cap="flat" cmpd="sng" algn="ctr">
+                      <a:solidFill>
+                        <a:srgbClr val="D9D6CC"/>
+                      </a:solidFill>
+                      <a:prstDash val="solid"/>
+                      <a:round/>
+                      <a:headEnd type="none" w="med" len="med"/>
+                      <a:tailEnd type="none" w="med" len="med"/>
+                    </a:lnT>
+                    <a:lnB w="9525" cap="flat" cmpd="sng" algn="ctr">
+                      <a:solidFill>
+                        <a:srgbClr val="D9D6CC"/>
+                      </a:solidFill>
+                      <a:prstDash val="solid"/>
+                      <a:round/>
+                      <a:headEnd type="none" w="med" len="med"/>
+                      <a:tailEnd type="none" w="med" len="med"/>
+                    </a:lnB>
+                    <a:solidFill>
+                      <a:srgbClr val="FFFFFF"/>
+                    </a:solidFill>
+                  </a:tcPr>
+                </a:tc>
+                <a:tc>
+                  <a:txBody>
+                    <a:bodyPr/>
+                    <a:lstStyle/>
+                    <a:p>
+                      <a:pPr algn="ctr" indent="0" marL="0">
+                        <a:buNone/>
+                      </a:pPr>
+                      <a:r>
+                        <a:rPr lang="en-US" sz="1300" dirty="0">
+                          <a:solidFill>
+                            <a:srgbClr val="1F2937"/>
+                          </a:solidFill>
+                          <a:latin typeface="Calibri" pitchFamily="34" charset="0"/>
+                          <a:ea typeface="Calibri" pitchFamily="34" charset="-122"/>
+                          <a:cs typeface="Calibri" pitchFamily="34" charset="-120"/>
+                        </a:rPr>
+                        <a:t>6</a:t>
+                      </a:r>
+                      <a:endParaRPr lang="en-US" sz="1300" dirty="0">
+                        <a:latin typeface="Calibri" charset="0"/>
+                        <a:ea typeface="Calibri" charset="0"/>
+                        <a:cs typeface="Calibri" charset="0"/>
+                      </a:endParaRPr>
+                    </a:p>
+                  </a:txBody>
+                  <a:tcPr marL="91440" marR="91440" marT="45720" marB="45720" anchor="ctr">
+                    <a:lnL w="9525" cap="flat" cmpd="sng" algn="ctr">
+                      <a:solidFill>
+                        <a:srgbClr val="D9D6CC"/>
+                      </a:solidFill>
+                      <a:prstDash val="solid"/>
+                      <a:round/>
+                      <a:headEnd type="none" w="med" len="med"/>
+                      <a:tailEnd type="none" w="med" len="med"/>
+                    </a:lnL>
+                    <a:lnR w="9525" cap="flat" cmpd="sng" algn="ctr">
+                      <a:solidFill>
+                        <a:srgbClr val="D9D6CC"/>
+                      </a:solidFill>
+                      <a:prstDash val="solid"/>
+                      <a:round/>
+                      <a:headEnd type="none" w="med" len="med"/>
+                      <a:tailEnd type="none" w="med" len="med"/>
+                    </a:lnR>
+                    <a:lnT w="9525" cap="flat" cmpd="sng" algn="ctr">
+                      <a:solidFill>
+                        <a:srgbClr val="D9D6CC"/>
+                      </a:solidFill>
+                      <a:prstDash val="solid"/>
+                      <a:round/>
+                      <a:headEnd type="none" w="med" len="med"/>
+                      <a:tailEnd type="none" w="med" len="med"/>
+                    </a:lnT>
+                    <a:lnB w="9525" cap="flat" cmpd="sng" algn="ctr">
+                      <a:solidFill>
+                        <a:srgbClr val="D9D6CC"/>
+                      </a:solidFill>
+                      <a:prstDash val="solid"/>
+                      <a:round/>
+                      <a:headEnd type="none" w="med" len="med"/>
+                      <a:tailEnd type="none" w="med" len="med"/>
+                    </a:lnB>
+                    <a:solidFill>
+                      <a:srgbClr val="FFFFFF"/>
+                    </a:solidFill>
+                  </a:tcPr>
+                </a:tc>
+                <a:tc>
+                  <a:txBody>
+                    <a:bodyPr/>
+                    <a:lstStyle/>
+                    <a:p>
+                      <a:pPr algn="ctr" indent="0" marL="0">
+                        <a:buNone/>
+                      </a:pPr>
+                      <a:r>
+                        <a:rPr lang="en-US" sz="1300" b="1" dirty="0">
+                          <a:solidFill>
+                            <a:srgbClr val="B61B3B"/>
+                          </a:solidFill>
+                          <a:latin typeface="Calibri" pitchFamily="34" charset="0"/>
+                          <a:ea typeface="Calibri" pitchFamily="34" charset="-122"/>
+                          <a:cs typeface="Calibri" pitchFamily="34" charset="-120"/>
+                        </a:rPr>
+                        <a:t>16 536</a:t>
+                      </a:r>
+                      <a:endParaRPr lang="en-US" sz="1300" dirty="0">
+                        <a:latin typeface="Calibri" charset="0"/>
+                        <a:ea typeface="Calibri" charset="0"/>
+                        <a:cs typeface="Calibri" charset="0"/>
+                      </a:endParaRPr>
+                    </a:p>
+                  </a:txBody>
+                  <a:tcPr marL="91440" marR="91440" marT="45720" marB="45720" anchor="ctr">
+                    <a:lnL w="9525" cap="flat" cmpd="sng" algn="ctr">
+                      <a:solidFill>
+                        <a:srgbClr val="D9D6CC"/>
+                      </a:solidFill>
+                      <a:prstDash val="solid"/>
+                      <a:round/>
+                      <a:headEnd type="none" w="med" len="med"/>
+                      <a:tailEnd type="none" w="med" len="med"/>
+                    </a:lnL>
+                    <a:lnR w="9525" cap="flat" cmpd="sng" algn="ctr">
+                      <a:solidFill>
+                        <a:srgbClr val="D9D6CC"/>
+                      </a:solidFill>
+                      <a:prstDash val="solid"/>
+                      <a:round/>
+                      <a:headEnd type="none" w="med" len="med"/>
+                      <a:tailEnd type="none" w="med" len="med"/>
+                    </a:lnR>
+                    <a:lnT w="9525" cap="flat" cmpd="sng" algn="ctr">
+                      <a:solidFill>
+                        <a:srgbClr val="D9D6CC"/>
+                      </a:solidFill>
+                      <a:prstDash val="solid"/>
+                      <a:round/>
+                      <a:headEnd type="none" w="med" len="med"/>
+                      <a:tailEnd type="none" w="med" len="med"/>
+                    </a:lnT>
+                    <a:lnB w="9525" cap="flat" cmpd="sng" algn="ctr">
+                      <a:solidFill>
+                        <a:srgbClr val="D9D6CC"/>
+                      </a:solidFill>
+                      <a:prstDash val="solid"/>
+                      <a:round/>
+                      <a:headEnd type="none" w="med" len="med"/>
+                      <a:tailEnd type="none" w="med" len="med"/>
+                    </a:lnB>
+                    <a:solidFill>
+                      <a:srgbClr val="FFFFFF"/>
+                    </a:solidFill>
+                  </a:tcPr>
+                </a:tc>
+              </a:tr>
+              <a:tr h="566928">
+                <a:tc>
+                  <a:txBody>
+                    <a:bodyPr/>
+                    <a:lstStyle/>
+                    <a:p>
+                      <a:pPr algn="l" indent="0" marL="0">
+                        <a:buNone/>
+                      </a:pPr>
+                      <a:r>
+                        <a:rPr lang="en-US" sz="1300" dirty="0">
+                          <a:solidFill>
+                            <a:srgbClr val="1F2937"/>
+                          </a:solidFill>
+                          <a:latin typeface="Calibri" pitchFamily="34" charset="0"/>
+                          <a:ea typeface="Calibri" pitchFamily="34" charset="-122"/>
+                          <a:cs typeface="Calibri" pitchFamily="34" charset="-120"/>
+                        </a:rPr>
+                        <a:t>сладости | печенье</a:t>
+                      </a:r>
+                      <a:endParaRPr lang="en-US" sz="1300" dirty="0">
+                        <a:latin typeface="Calibri" charset="0"/>
+                        <a:ea typeface="Calibri" charset="0"/>
+                        <a:cs typeface="Calibri" charset="0"/>
+                      </a:endParaRPr>
+                    </a:p>
+                  </a:txBody>
+                  <a:tcPr marL="91440" marR="91440" marT="45720" marB="45720" anchor="ctr">
+                    <a:lnL w="9525" cap="flat" cmpd="sng" algn="ctr">
+                      <a:solidFill>
+                        <a:srgbClr val="D9D6CC"/>
+                      </a:solidFill>
+                      <a:prstDash val="solid"/>
+                      <a:round/>
+                      <a:headEnd type="none" w="med" len="med"/>
+                      <a:tailEnd type="none" w="med" len="med"/>
+                    </a:lnL>
+                    <a:lnR w="9525" cap="flat" cmpd="sng" algn="ctr">
+                      <a:solidFill>
+                        <a:srgbClr val="D9D6CC"/>
+                      </a:solidFill>
+                      <a:prstDash val="solid"/>
+                      <a:round/>
+                      <a:headEnd type="none" w="med" len="med"/>
+                      <a:tailEnd type="none" w="med" len="med"/>
+                    </a:lnR>
+                    <a:lnT w="9525" cap="flat" cmpd="sng" algn="ctr">
+                      <a:solidFill>
+                        <a:srgbClr val="D9D6CC"/>
+                      </a:solidFill>
+                      <a:prstDash val="solid"/>
+                      <a:round/>
+                      <a:headEnd type="none" w="med" len="med"/>
+                      <a:tailEnd type="none" w="med" len="med"/>
+                    </a:lnT>
+                    <a:lnB w="9525" cap="flat" cmpd="sng" algn="ctr">
+                      <a:solidFill>
+                        <a:srgbClr val="D9D6CC"/>
+                      </a:solidFill>
+                      <a:prstDash val="solid"/>
+                      <a:round/>
+                      <a:headEnd type="none" w="med" len="med"/>
+                      <a:tailEnd type="none" w="med" len="med"/>
+                    </a:lnB>
+                    <a:solidFill>
+                      <a:srgbClr val="FFFFFF"/>
+                    </a:solidFill>
+                  </a:tcPr>
+                </a:tc>
+                <a:tc>
+                  <a:txBody>
+                    <a:bodyPr/>
+                    <a:lstStyle/>
+                    <a:p>
+                      <a:pPr algn="ctr" indent="0" marL="0">
+                        <a:buNone/>
+                      </a:pPr>
+                      <a:r>
+                        <a:rPr lang="en-US" sz="1300" dirty="0">
+                          <a:solidFill>
+                            <a:srgbClr val="1F2937"/>
+                          </a:solidFill>
+                          <a:latin typeface="Calibri" pitchFamily="34" charset="0"/>
+                          <a:ea typeface="Calibri" pitchFamily="34" charset="-122"/>
+                          <a:cs typeface="Calibri" pitchFamily="34" charset="-120"/>
+                        </a:rPr>
+                        <a:t>5</a:t>
+                      </a:r>
+                      <a:endParaRPr lang="en-US" sz="1300" dirty="0">
+                        <a:latin typeface="Calibri" charset="0"/>
+                        <a:ea typeface="Calibri" charset="0"/>
+                        <a:cs typeface="Calibri" charset="0"/>
+                      </a:endParaRPr>
+                    </a:p>
+                  </a:txBody>
+                  <a:tcPr marL="91440" marR="91440" marT="45720" marB="45720" anchor="ctr">
+                    <a:lnL w="9525" cap="flat" cmpd="sng" algn="ctr">
+                      <a:solidFill>
+                        <a:srgbClr val="D9D6CC"/>
+                      </a:solidFill>
+                      <a:prstDash val="solid"/>
+                      <a:round/>
+                      <a:headEnd type="none" w="med" len="med"/>
+                      <a:tailEnd type="none" w="med" len="med"/>
+                    </a:lnL>
+                    <a:lnR w="9525" cap="flat" cmpd="sng" algn="ctr">
+                      <a:solidFill>
+                        <a:srgbClr val="D9D6CC"/>
+                      </a:solidFill>
+                      <a:prstDash val="solid"/>
+                      <a:round/>
+                      <a:headEnd type="none" w="med" len="med"/>
+                      <a:tailEnd type="none" w="med" len="med"/>
+                    </a:lnR>
+                    <a:lnT w="9525" cap="flat" cmpd="sng" algn="ctr">
+                      <a:solidFill>
+                        <a:srgbClr val="D9D6CC"/>
+                      </a:solidFill>
+                      <a:prstDash val="solid"/>
+                      <a:round/>
+                      <a:headEnd type="none" w="med" len="med"/>
+                      <a:tailEnd type="none" w="med" len="med"/>
+                    </a:lnT>
+                    <a:lnB w="9525" cap="flat" cmpd="sng" algn="ctr">
+                      <a:solidFill>
+                        <a:srgbClr val="D9D6CC"/>
+                      </a:solidFill>
+                      <a:prstDash val="solid"/>
+                      <a:round/>
+                      <a:headEnd type="none" w="med" len="med"/>
+                      <a:tailEnd type="none" w="med" len="med"/>
+                    </a:lnB>
+                    <a:solidFill>
+                      <a:srgbClr val="FFFFFF"/>
+                    </a:solidFill>
+                  </a:tcPr>
+                </a:tc>
+                <a:tc>
+                  <a:txBody>
+                    <a:bodyPr/>
+                    <a:lstStyle/>
+                    <a:p>
+                      <a:pPr algn="ctr" indent="0" marL="0">
+                        <a:buNone/>
+                      </a:pPr>
+                      <a:r>
+                        <a:rPr lang="en-US" sz="1300" dirty="0">
+                          <a:solidFill>
+                            <a:srgbClr val="1F2937"/>
+                          </a:solidFill>
+                          <a:latin typeface="Calibri" pitchFamily="34" charset="0"/>
+                          <a:ea typeface="Calibri" pitchFamily="34" charset="-122"/>
+                          <a:cs typeface="Calibri" pitchFamily="34" charset="-120"/>
+                        </a:rPr>
+                        <a:t>9 899</a:t>
+                      </a:r>
+                      <a:endParaRPr lang="en-US" sz="1300" dirty="0">
+                        <a:latin typeface="Calibri" charset="0"/>
+                        <a:ea typeface="Calibri" charset="0"/>
+                        <a:cs typeface="Calibri" charset="0"/>
+                      </a:endParaRPr>
+                    </a:p>
+                  </a:txBody>
+                  <a:tcPr marL="91440" marR="91440" marT="45720" marB="45720" anchor="ctr">
+                    <a:lnL w="9525" cap="flat" cmpd="sng" algn="ctr">
+                      <a:solidFill>
+                        <a:srgbClr val="D9D6CC"/>
+                      </a:solidFill>
+                      <a:prstDash val="solid"/>
+                      <a:round/>
+                      <a:headEnd type="none" w="med" len="med"/>
+                      <a:tailEnd type="none" w="med" len="med"/>
+                    </a:lnL>
+                    <a:lnR w="9525" cap="flat" cmpd="sng" algn="ctr">
+                      <a:solidFill>
+                        <a:srgbClr val="D9D6CC"/>
+                      </a:solidFill>
+                      <a:prstDash val="solid"/>
+                      <a:round/>
+                      <a:headEnd type="none" w="med" len="med"/>
+                      <a:tailEnd type="none" w="med" len="med"/>
+                    </a:lnR>
+                    <a:lnT w="9525" cap="flat" cmpd="sng" algn="ctr">
+                      <a:solidFill>
+                        <a:srgbClr val="D9D6CC"/>
+                      </a:solidFill>
+                      <a:prstDash val="solid"/>
+                      <a:round/>
+                      <a:headEnd type="none" w="med" len="med"/>
+                      <a:tailEnd type="none" w="med" len="med"/>
+                    </a:lnT>
+                    <a:lnB w="9525" cap="flat" cmpd="sng" algn="ctr">
+                      <a:solidFill>
+                        <a:srgbClr val="D9D6CC"/>
+                      </a:solidFill>
+                      <a:prstDash val="solid"/>
+                      <a:round/>
+                      <a:headEnd type="none" w="med" len="med"/>
+                      <a:tailEnd type="none" w="med" len="med"/>
+                    </a:lnB>
+                    <a:solidFill>
+                      <a:srgbClr val="FFFFFF"/>
+                    </a:solidFill>
+                  </a:tcPr>
+                </a:tc>
+                <a:tc>
+                  <a:txBody>
+                    <a:bodyPr/>
+                    <a:lstStyle/>
+                    <a:p>
+                      <a:pPr algn="ctr" indent="0" marL="0">
+                        <a:buNone/>
+                      </a:pPr>
+                      <a:r>
+                        <a:rPr lang="en-US" sz="1300" dirty="0">
+                          <a:solidFill>
+                            <a:srgbClr val="1F2937"/>
+                          </a:solidFill>
+                          <a:latin typeface="Calibri" pitchFamily="34" charset="0"/>
+                          <a:ea typeface="Calibri" pitchFamily="34" charset="-122"/>
+                          <a:cs typeface="Calibri" pitchFamily="34" charset="-120"/>
+                        </a:rPr>
+                        <a:t>18</a:t>
+                      </a:r>
+                      <a:endParaRPr lang="en-US" sz="1300" dirty="0">
+                        <a:latin typeface="Calibri" charset="0"/>
+                        <a:ea typeface="Calibri" charset="0"/>
+                        <a:cs typeface="Calibri" charset="0"/>
+                      </a:endParaRPr>
+                    </a:p>
+                  </a:txBody>
+                  <a:tcPr marL="91440" marR="91440" marT="45720" marB="45720" anchor="ctr">
+                    <a:lnL w="9525" cap="flat" cmpd="sng" algn="ctr">
+                      <a:solidFill>
+                        <a:srgbClr val="D9D6CC"/>
+                      </a:solidFill>
+                      <a:prstDash val="solid"/>
+                      <a:round/>
+                      <a:headEnd type="none" w="med" len="med"/>
+                      <a:tailEnd type="none" w="med" len="med"/>
+                    </a:lnL>
+                    <a:lnR w="9525" cap="flat" cmpd="sng" algn="ctr">
+                      <a:solidFill>
+                        <a:srgbClr val="D9D6CC"/>
+                      </a:solidFill>
+                      <a:prstDash val="solid"/>
+                      <a:round/>
+                      <a:headEnd type="none" w="med" len="med"/>
+                      <a:tailEnd type="none" w="med" len="med"/>
+                    </a:lnR>
+                    <a:lnT w="9525" cap="flat" cmpd="sng" algn="ctr">
+                      <a:solidFill>
+                        <a:srgbClr val="D9D6CC"/>
+                      </a:solidFill>
+                      <a:prstDash val="solid"/>
+                      <a:round/>
+                      <a:headEnd type="none" w="med" len="med"/>
+                      <a:tailEnd type="none" w="med" len="med"/>
+                    </a:lnT>
+                    <a:lnB w="9525" cap="flat" cmpd="sng" algn="ctr">
+                      <a:solidFill>
+                        <a:srgbClr val="D9D6CC"/>
+                      </a:solidFill>
+                      <a:prstDash val="solid"/>
+                      <a:round/>
+                      <a:headEnd type="none" w="med" len="med"/>
+                      <a:tailEnd type="none" w="med" len="med"/>
+                    </a:lnB>
+                    <a:solidFill>
+                      <a:srgbClr val="FFFFFF"/>
+                    </a:solidFill>
+                  </a:tcPr>
+                </a:tc>
+                <a:tc>
+                  <a:txBody>
+                    <a:bodyPr/>
+                    <a:lstStyle/>
+                    <a:p>
+                      <a:pPr algn="ctr" indent="0" marL="0">
+                        <a:buNone/>
+                      </a:pPr>
+                      <a:r>
+                        <a:rPr lang="en-US" sz="1300" b="1" dirty="0">
+                          <a:solidFill>
+                            <a:srgbClr val="B61B3B"/>
+                          </a:solidFill>
+                          <a:latin typeface="Calibri" pitchFamily="34" charset="0"/>
+                          <a:ea typeface="Calibri" pitchFamily="34" charset="-122"/>
+                          <a:cs typeface="Calibri" pitchFamily="34" charset="-120"/>
+                        </a:rPr>
+                        <a:t>131 587</a:t>
+                      </a:r>
+                      <a:endParaRPr lang="en-US" sz="1300" dirty="0">
+                        <a:latin typeface="Calibri" charset="0"/>
+                        <a:ea typeface="Calibri" charset="0"/>
+                        <a:cs typeface="Calibri" charset="0"/>
+                      </a:endParaRPr>
+                    </a:p>
+                  </a:txBody>
+                  <a:tcPr marL="91440" marR="91440" marT="45720" marB="45720" anchor="ctr">
+                    <a:lnL w="9525" cap="flat" cmpd="sng" algn="ctr">
+                      <a:solidFill>
+                        <a:srgbClr val="D9D6CC"/>
+                      </a:solidFill>
+                      <a:prstDash val="solid"/>
+                      <a:round/>
+                      <a:headEnd type="none" w="med" len="med"/>
+                      <a:tailEnd type="none" w="med" len="med"/>
+                    </a:lnL>
+                    <a:lnR w="9525" cap="flat" cmpd="sng" algn="ctr">
+                      <a:solidFill>
+                        <a:srgbClr val="D9D6CC"/>
+                      </a:solidFill>
+                      <a:prstDash val="solid"/>
+                      <a:round/>
+                      <a:headEnd type="none" w="med" len="med"/>
+                      <a:tailEnd type="none" w="med" len="med"/>
+                    </a:lnR>
+                    <a:lnT w="9525" cap="flat" cmpd="sng" algn="ctr">
+                      <a:solidFill>
+                        <a:srgbClr val="D9D6CC"/>
+                      </a:solidFill>
+                      <a:prstDash val="solid"/>
+                      <a:round/>
+                      <a:headEnd type="none" w="med" len="med"/>
+                      <a:tailEnd type="none" w="med" len="med"/>
+                    </a:lnT>
+                    <a:lnB w="9525" cap="flat" cmpd="sng" algn="ctr">
+                      <a:solidFill>
+                        <a:srgbClr val="D9D6CC"/>
+                      </a:solidFill>
+                      <a:prstDash val="solid"/>
+                      <a:round/>
+                      <a:headEnd type="none" w="med" len="med"/>
+                      <a:tailEnd type="none" w="med" len="med"/>
+                    </a:lnB>
+                    <a:solidFill>
+                      <a:srgbClr val="FFFFFF"/>
+                    </a:solidFill>
+                  </a:tcPr>
+                </a:tc>
+              </a:tr>
+              <a:tr h="566928">
+                <a:tc>
+                  <a:txBody>
+                    <a:bodyPr/>
+                    <a:lstStyle/>
+                    <a:p>
+                      <a:pPr algn="l" indent="0" marL="0">
+                        <a:buNone/>
+                      </a:pPr>
+                      <a:r>
+                        <a:rPr lang="en-US" sz="1300" b="1" dirty="0">
+                          <a:solidFill>
+                            <a:srgbClr val="1F2937"/>
+                          </a:solidFill>
+                          <a:latin typeface="Calibri" pitchFamily="34" charset="0"/>
+                          <a:ea typeface="Calibri" pitchFamily="34" charset="-122"/>
+                          <a:cs typeface="Calibri" pitchFamily="34" charset="-120"/>
+                        </a:rPr>
+                        <a:t>Всего печенья</a:t>
+                      </a:r>
+                      <a:endParaRPr lang="en-US" sz="1300" dirty="0">
+                        <a:latin typeface="Calibri" charset="0"/>
+                        <a:ea typeface="Calibri" charset="0"/>
+                        <a:cs typeface="Calibri" charset="0"/>
+                      </a:endParaRPr>
+                    </a:p>
+                  </a:txBody>
+                  <a:tcPr marL="91440" marR="91440" marT="45720" marB="45720" anchor="ctr">
+                    <a:lnL w="9525" cap="flat" cmpd="sng" algn="ctr">
+                      <a:solidFill>
+                        <a:srgbClr val="D9D6CC"/>
+                      </a:solidFill>
+                      <a:prstDash val="solid"/>
+                      <a:round/>
+                      <a:headEnd type="none" w="med" len="med"/>
+                      <a:tailEnd type="none" w="med" len="med"/>
+                    </a:lnL>
+                    <a:lnR w="9525" cap="flat" cmpd="sng" algn="ctr">
+                      <a:solidFill>
+                        <a:srgbClr val="D9D6CC"/>
+                      </a:solidFill>
+                      <a:prstDash val="solid"/>
+                      <a:round/>
+                      <a:headEnd type="none" w="med" len="med"/>
+                      <a:tailEnd type="none" w="med" len="med"/>
+                    </a:lnR>
+                    <a:lnT w="9525" cap="flat" cmpd="sng" algn="ctr">
+                      <a:solidFill>
+                        <a:srgbClr val="D9D6CC"/>
+                      </a:solidFill>
+                      <a:prstDash val="solid"/>
+                      <a:round/>
+                      <a:headEnd type="none" w="med" len="med"/>
+                      <a:tailEnd type="none" w="med" len="med"/>
+                    </a:lnT>
+                    <a:lnB w="9525" cap="flat" cmpd="sng" algn="ctr">
+                      <a:solidFill>
+                        <a:srgbClr val="D9D6CC"/>
+                      </a:solidFill>
+                      <a:prstDash val="solid"/>
+                      <a:round/>
+                      <a:headEnd type="none" w="med" len="med"/>
+                      <a:tailEnd type="none" w="med" len="med"/>
+                    </a:lnB>
+                    <a:solidFill>
+                      <a:srgbClr val="FFFFFF"/>
+                    </a:solidFill>
+                  </a:tcPr>
+                </a:tc>
+                <a:tc>
+                  <a:txBody>
+                    <a:bodyPr/>
+                    <a:lstStyle/>
+                    <a:p>
+                      <a:pPr algn="ctr" indent="0" marL="0">
+                        <a:buNone/>
+                      </a:pPr>
+                      <a:endParaRPr lang="en-US" sz="1300" dirty="0">
+                        <a:latin typeface="Calibri" charset="0"/>
+                        <a:ea typeface="Calibri" charset="0"/>
+                        <a:cs typeface="Calibri" charset="0"/>
+                      </a:endParaRPr>
+                    </a:p>
+                  </a:txBody>
+                  <a:tcPr marL="91440" marR="91440" marT="45720" marB="45720" anchor="ctr">
+                    <a:lnL w="9525" cap="flat" cmpd="sng" algn="ctr">
+                      <a:solidFill>
+                        <a:srgbClr val="D9D6CC"/>
+                      </a:solidFill>
+                      <a:prstDash val="solid"/>
+                      <a:round/>
+                      <a:headEnd type="none" w="med" len="med"/>
+                      <a:tailEnd type="none" w="med" len="med"/>
+                    </a:lnL>
+                    <a:lnR w="9525" cap="flat" cmpd="sng" algn="ctr">
+                      <a:solidFill>
+                        <a:srgbClr val="D9D6CC"/>
+                      </a:solidFill>
+                      <a:prstDash val="solid"/>
+                      <a:round/>
+                      <a:headEnd type="none" w="med" len="med"/>
+                      <a:tailEnd type="none" w="med" len="med"/>
+                    </a:lnR>
+                    <a:lnT w="9525" cap="flat" cmpd="sng" algn="ctr">
+                      <a:solidFill>
+                        <a:srgbClr val="D9D6CC"/>
+                      </a:solidFill>
+                      <a:prstDash val="solid"/>
+                      <a:round/>
+                      <a:headEnd type="none" w="med" len="med"/>
+                      <a:tailEnd type="none" w="med" len="med"/>
+                    </a:lnT>
+                    <a:lnB w="9525" cap="flat" cmpd="sng" algn="ctr">
+                      <a:solidFill>
+                        <a:srgbClr val="D9D6CC"/>
+                      </a:solidFill>
+                      <a:prstDash val="solid"/>
+                      <a:round/>
+                      <a:headEnd type="none" w="med" len="med"/>
+                      <a:tailEnd type="none" w="med" len="med"/>
+                    </a:lnB>
+                    <a:solidFill>
+                      <a:srgbClr val="FFFFFF"/>
+                    </a:solidFill>
+                  </a:tcPr>
+                </a:tc>
+                <a:tc>
+                  <a:txBody>
+                    <a:bodyPr/>
+                    <a:lstStyle/>
+                    <a:p>
+                      <a:pPr algn="ctr" indent="0" marL="0">
+                        <a:buNone/>
+                      </a:pPr>
+                      <a:r>
+                        <a:rPr lang="en-US" sz="1300" b="1" dirty="0">
+                          <a:solidFill>
+                            <a:srgbClr val="1F2937"/>
+                          </a:solidFill>
+                          <a:latin typeface="Calibri" pitchFamily="34" charset="0"/>
+                          <a:ea typeface="Calibri" pitchFamily="34" charset="-122"/>
+                          <a:cs typeface="Calibri" pitchFamily="34" charset="-120"/>
+                        </a:rPr>
+                        <a:t>145 165</a:t>
+                      </a:r>
+                      <a:endParaRPr lang="en-US" sz="1300" dirty="0">
+                        <a:latin typeface="Calibri" charset="0"/>
+                        <a:ea typeface="Calibri" charset="0"/>
+                        <a:cs typeface="Calibri" charset="0"/>
+                      </a:endParaRPr>
+                    </a:p>
+                  </a:txBody>
+                  <a:tcPr marL="91440" marR="91440" marT="45720" marB="45720" anchor="ctr">
+                    <a:lnL w="9525" cap="flat" cmpd="sng" algn="ctr">
+                      <a:solidFill>
+                        <a:srgbClr val="D9D6CC"/>
+                      </a:solidFill>
+                      <a:prstDash val="solid"/>
+                      <a:round/>
+                      <a:headEnd type="none" w="med" len="med"/>
+                      <a:tailEnd type="none" w="med" len="med"/>
+                    </a:lnL>
+                    <a:lnR w="9525" cap="flat" cmpd="sng" algn="ctr">
+                      <a:solidFill>
+                        <a:srgbClr val="D9D6CC"/>
+                      </a:solidFill>
+                      <a:prstDash val="solid"/>
+                      <a:round/>
+                      <a:headEnd type="none" w="med" len="med"/>
+                      <a:tailEnd type="none" w="med" len="med"/>
+                    </a:lnR>
+                    <a:lnT w="9525" cap="flat" cmpd="sng" algn="ctr">
+                      <a:solidFill>
+                        <a:srgbClr val="D9D6CC"/>
+                      </a:solidFill>
+                      <a:prstDash val="solid"/>
+                      <a:round/>
+                      <a:headEnd type="none" w="med" len="med"/>
+                      <a:tailEnd type="none" w="med" len="med"/>
+                    </a:lnT>
+                    <a:lnB w="9525" cap="flat" cmpd="sng" algn="ctr">
+                      <a:solidFill>
+                        <a:srgbClr val="D9D6CC"/>
+                      </a:solidFill>
+                      <a:prstDash val="solid"/>
+                      <a:round/>
+                      <a:headEnd type="none" w="med" len="med"/>
+                      <a:tailEnd type="none" w="med" len="med"/>
+                    </a:lnB>
+                    <a:solidFill>
+                      <a:srgbClr val="FFFFFF"/>
+                    </a:solidFill>
+                  </a:tcPr>
+                </a:tc>
+                <a:tc>
+                  <a:txBody>
+                    <a:bodyPr/>
+                    <a:lstStyle/>
+                    <a:p>
+                      <a:pPr algn="ctr" indent="0" marL="0">
+                        <a:buNone/>
+                      </a:pPr>
+                      <a:endParaRPr lang="en-US" sz="1300" dirty="0">
+                        <a:latin typeface="Calibri" charset="0"/>
+                        <a:ea typeface="Calibri" charset="0"/>
+                        <a:cs typeface="Calibri" charset="0"/>
+                      </a:endParaRPr>
+                    </a:p>
+                  </a:txBody>
+                  <a:tcPr marL="91440" marR="91440" marT="45720" marB="45720" anchor="ctr">
+                    <a:lnL w="9525" cap="flat" cmpd="sng" algn="ctr">
+                      <a:solidFill>
+                        <a:srgbClr val="D9D6CC"/>
+                      </a:solidFill>
+                      <a:prstDash val="solid"/>
+                      <a:round/>
+                      <a:headEnd type="none" w="med" len="med"/>
+                      <a:tailEnd type="none" w="med" len="med"/>
+                    </a:lnL>
+                    <a:lnR w="9525" cap="flat" cmpd="sng" algn="ctr">
+                      <a:solidFill>
+                        <a:srgbClr val="D9D6CC"/>
+                      </a:solidFill>
+                      <a:prstDash val="solid"/>
+                      <a:round/>
+                      <a:headEnd type="none" w="med" len="med"/>
+                      <a:tailEnd type="none" w="med" len="med"/>
+                    </a:lnR>
+                    <a:lnT w="9525" cap="flat" cmpd="sng" algn="ctr">
+                      <a:solidFill>
+                        <a:srgbClr val="D9D6CC"/>
+                      </a:solidFill>
+                      <a:prstDash val="solid"/>
+                      <a:round/>
+                      <a:headEnd type="none" w="med" len="med"/>
+                      <a:tailEnd type="none" w="med" len="med"/>
+                    </a:lnT>
+                    <a:lnB w="9525" cap="flat" cmpd="sng" algn="ctr">
+                      <a:solidFill>
+                        <a:srgbClr val="D9D6CC"/>
+                      </a:solidFill>
+                      <a:prstDash val="solid"/>
+                      <a:round/>
+                      <a:headEnd type="none" w="med" len="med"/>
+                      <a:tailEnd type="none" w="med" len="med"/>
+                    </a:lnB>
+                    <a:solidFill>
+                      <a:srgbClr val="FFFFFF"/>
+                    </a:solidFill>
+                  </a:tcPr>
+                </a:tc>
+                <a:tc>
+                  <a:txBody>
+                    <a:bodyPr/>
+                    <a:lstStyle/>
+                    <a:p>
+                      <a:pPr algn="ctr" indent="0" marL="0">
+                        <a:buNone/>
+                      </a:pPr>
+                      <a:r>
+                        <a:rPr lang="en-US" sz="1300" b="1" dirty="0">
+                          <a:solidFill>
+                            <a:srgbClr val="1F2937"/>
+                          </a:solidFill>
+                          <a:latin typeface="Calibri" pitchFamily="34" charset="0"/>
+                          <a:ea typeface="Calibri" pitchFamily="34" charset="-122"/>
+                          <a:cs typeface="Calibri" pitchFamily="34" charset="-120"/>
+                        </a:rPr>
+                        <a:t>148 123 (+2%)</a:t>
+                      </a:r>
+                      <a:endParaRPr lang="en-US" sz="1300" dirty="0">
+                        <a:latin typeface="Calibri" charset="0"/>
+                        <a:ea typeface="Calibri" charset="0"/>
+                        <a:cs typeface="Calibri" charset="0"/>
+                      </a:endParaRPr>
+                    </a:p>
+                  </a:txBody>
+                  <a:tcPr marL="91440" marR="91440" marT="45720" marB="45720" anchor="ctr">
+                    <a:lnL w="9525" cap="flat" cmpd="sng" algn="ctr">
+                      <a:solidFill>
+                        <a:srgbClr val="D9D6CC"/>
+                      </a:solidFill>
+                      <a:prstDash val="solid"/>
+                      <a:round/>
+                      <a:headEnd type="none" w="med" len="med"/>
+                      <a:tailEnd type="none" w="med" len="med"/>
+                    </a:lnL>
+                    <a:lnR w="9525" cap="flat" cmpd="sng" algn="ctr">
+                      <a:solidFill>
+                        <a:srgbClr val="D9D6CC"/>
+                      </a:solidFill>
+                      <a:prstDash val="solid"/>
+                      <a:round/>
+                      <a:headEnd type="none" w="med" len="med"/>
+                      <a:tailEnd type="none" w="med" len="med"/>
+                    </a:lnR>
+                    <a:lnT w="9525" cap="flat" cmpd="sng" algn="ctr">
+                      <a:solidFill>
+                        <a:srgbClr val="D9D6CC"/>
+                      </a:solidFill>
+                      <a:prstDash val="solid"/>
+                      <a:round/>
+                      <a:headEnd type="none" w="med" len="med"/>
+                      <a:tailEnd type="none" w="med" len="med"/>
+                    </a:lnT>
+                    <a:lnB w="9525" cap="flat" cmpd="sng" algn="ctr">
+                      <a:solidFill>
+                        <a:srgbClr val="D9D6CC"/>
+                      </a:solidFill>
+                      <a:prstDash val="solid"/>
+                      <a:round/>
+                      <a:headEnd type="none" w="med" len="med"/>
+                      <a:tailEnd type="none" w="med" len="med"/>
+                    </a:lnB>
+                    <a:solidFill>
+                      <a:srgbClr val="FFFFFF"/>
+                    </a:solidFill>
+                  </a:tcPr>
+                </a:tc>
+              </a:tr>
+            </a:tbl>
+          </a:graphicData>
+        </a:graphic>
+      </p:graphicFrame>
+      <p:sp>
+        <p:nvSpPr>
+          <p:cNvPr id="5" name="Text 2"/>
+          <p:cNvSpPr/>
+          <p:nvPr/>
+        </p:nvSpPr>
+        <p:spPr>
+          <a:xfrm>
+            <a:off x="640080" y="4160520"/>
+            <a:ext cx="6766560" cy="822960"/>
+          </a:xfrm>
+          <a:prstGeom prst="rect">
+            <a:avLst/>
+          </a:prstGeom>
+          <a:noFill/>
+          <a:ln/>
+        </p:spPr>
+        <p:txBody>
+          <a:bodyPr wrap="square" lIns="0" tIns="0" rIns="0" bIns="0" rtlCol="0" anchor="ctr"/>
+          <a:lstStyle/>
+          <a:p>
+            <a:pPr indent="0" marL="0">
+              <a:lnSpc>
+                <a:spcPct val="115000"/>
+              </a:lnSpc>
+              <a:buNone/>
+            </a:pPr>
+            <a:r>
+              <a:rPr lang="en-US" sz="1300" i="1" dirty="0">
+                <a:solidFill>
+                  <a:srgbClr val="6B7280"/>
+                </a:solidFill>
+                <a:latin typeface="Calibri" pitchFamily="34" charset="0"/>
+                <a:ea typeface="Calibri" pitchFamily="34" charset="-122"/>
+                <a:cs typeface="Calibri" pitchFamily="34" charset="-120"/>
+              </a:rPr>
+              <a:t>Спрос на печенье стабилен, но для прогноза по подгруппам это два разных товара: одна подгруппа «обвалилась», другая «выросла» в 13 раз.</a:t>
+            </a:r>
+            <a:endParaRPr lang="en-US" sz="1300" dirty="0"/>
+          </a:p>
+        </p:txBody>
+      </p:sp>
+      <p:sp>
+        <p:nvSpPr>
+          <p:cNvPr id="6" name="Shape 3"/>
+          <p:cNvSpPr/>
+          <p:nvPr/>
+        </p:nvSpPr>
+        <p:spPr>
+          <a:xfrm>
+            <a:off x="7726680" y="1645920"/>
+            <a:ext cx="3931920" cy="1508760"/>
+          </a:xfrm>
+          <a:prstGeom prst="roundRect">
+            <a:avLst>
+              <a:gd name="adj" fmla="val 4848"/>
+            </a:avLst>
+          </a:prstGeom>
+          <a:solidFill>
+            <a:srgbClr val="7E1013"/>
+          </a:solidFill>
+          <a:ln/>
+        </p:spPr>
+      </p:sp>
+      <p:sp>
+        <p:nvSpPr>
+          <p:cNvPr id="7" name="Text 4"/>
+          <p:cNvSpPr/>
+          <p:nvPr/>
+        </p:nvSpPr>
+        <p:spPr>
+          <a:xfrm>
+            <a:off x="7955280" y="1737360"/>
+            <a:ext cx="3566160" cy="731520"/>
+          </a:xfrm>
+          <a:prstGeom prst="rect">
+            <a:avLst/>
+          </a:prstGeom>
+          <a:noFill/>
+          <a:ln/>
+        </p:spPr>
+        <p:txBody>
+          <a:bodyPr wrap="square" lIns="0" tIns="0" rIns="0" bIns="0" rtlCol="0" anchor="ctr"/>
+          <a:lstStyle/>
+          <a:p>
+            <a:pPr indent="0" marL="0">
+              <a:buNone/>
+            </a:pPr>
+            <a:r>
+              <a:rPr lang="en-US" sz="3400" b="1" dirty="0">
+                <a:solidFill>
+                  <a:srgbClr val="FFFFFF"/>
+                </a:solidFill>
+                <a:latin typeface="Cambria" pitchFamily="34" charset="0"/>
+                <a:ea typeface="Cambria" pitchFamily="34" charset="-122"/>
+                <a:cs typeface="Cambria" pitchFamily="34" charset="-120"/>
+              </a:rPr>
+              <a:t>26.7%</a:t>
+            </a:r>
+            <a:endParaRPr lang="en-US" sz="3400" dirty="0"/>
+          </a:p>
+        </p:txBody>
+      </p:sp>
+      <p:sp>
+        <p:nvSpPr>
+          <p:cNvPr id="8" name="Text 5"/>
+          <p:cNvSpPr/>
+          <p:nvPr/>
+        </p:nvSpPr>
+        <p:spPr>
+          <a:xfrm>
+            <a:off x="7955280" y="2423160"/>
+            <a:ext cx="3566160" cy="640080"/>
+          </a:xfrm>
+          <a:prstGeom prst="rect">
+            <a:avLst/>
+          </a:prstGeom>
+          <a:noFill/>
+          <a:ln/>
+        </p:spPr>
+        <p:txBody>
+          <a:bodyPr wrap="square" lIns="0" tIns="0" rIns="0" bIns="0" rtlCol="0" anchor="ctr"/>
+          <a:lstStyle/>
+          <a:p>
+            <a:pPr indent="0" marL="0">
+              <a:lnSpc>
+                <a:spcPct val="110000"/>
+              </a:lnSpc>
+              <a:buNone/>
+            </a:pPr>
+            <a:r>
+              <a:rPr lang="en-US" sz="1250" dirty="0">
+                <a:solidFill>
+                  <a:srgbClr val="FFFFFF"/>
+                </a:solidFill>
+                <a:latin typeface="Calibri" pitchFamily="34" charset="0"/>
+                <a:ea typeface="Calibri" pitchFamily="34" charset="-122"/>
+                <a:cs typeface="Calibri" pitchFamily="34" charset="-120"/>
+              </a:rPr>
+              <a:t>ошибки бейзлайна дают всего 2.6% пар — две подгруппы печенья</a:t>
+            </a:r>
+            <a:endParaRPr lang="en-US" sz="1250" dirty="0"/>
+          </a:p>
+        </p:txBody>
+      </p:sp>
+      <p:sp>
+        <p:nvSpPr>
+          <p:cNvPr id="9" name="Shape 6"/>
+          <p:cNvSpPr/>
+          <p:nvPr/>
+        </p:nvSpPr>
+        <p:spPr>
+          <a:xfrm>
+            <a:off x="7726680" y="3726180"/>
+            <a:ext cx="91440" cy="91440"/>
+          </a:xfrm>
+          <a:prstGeom prst="ellipse">
+            <a:avLst/>
+          </a:prstGeom>
+          <a:solidFill>
+            <a:srgbClr val="B61B3B"/>
+          </a:solidFill>
+          <a:ln/>
+        </p:spPr>
+      </p:sp>
+      <p:sp>
+        <p:nvSpPr>
+          <p:cNvPr id="10" name="Text 7"/>
+          <p:cNvSpPr/>
+          <p:nvPr/>
+        </p:nvSpPr>
+        <p:spPr>
+          <a:xfrm>
+            <a:off x="7955280" y="3337560"/>
+            <a:ext cx="3703320" cy="868680"/>
+          </a:xfrm>
+          <a:prstGeom prst="rect">
+            <a:avLst/>
+          </a:prstGeom>
+          <a:noFill/>
+          <a:ln/>
+        </p:spPr>
+        <p:txBody>
+          <a:bodyPr wrap="square" lIns="0" tIns="0" rIns="0" bIns="0" rtlCol="0" anchor="ctr"/>
+          <a:lstStyle/>
+          <a:p>
+            <a:pPr indent="0" marL="0">
+              <a:lnSpc>
+                <a:spcPct val="115000"/>
+              </a:lnSpc>
+              <a:buNone/>
+            </a:pPr>
+            <a:r>
+              <a:rPr lang="en-US" sz="1300" dirty="0">
+                <a:solidFill>
+                  <a:srgbClr val="1F2937"/>
+                </a:solidFill>
+                <a:latin typeface="Calibri" pitchFamily="34" charset="0"/>
+                <a:ea typeface="Calibri" pitchFamily="34" charset="-122"/>
+                <a:cs typeface="Calibri" pitchFamily="34" charset="-120"/>
+              </a:rPr>
+              <a:t>На 15 октября сдвиг не виден: ≈10 п.п. ошибки у любого метода</a:t>
+            </a:r>
+            <a:endParaRPr lang="en-US" sz="1300" dirty="0"/>
+          </a:p>
+        </p:txBody>
+      </p:sp>
+      <p:sp>
+        <p:nvSpPr>
+          <p:cNvPr id="11" name="Shape 8"/>
+          <p:cNvSpPr/>
+          <p:nvPr/>
+        </p:nvSpPr>
+        <p:spPr>
+          <a:xfrm>
+            <a:off x="7726680" y="4594860"/>
+            <a:ext cx="91440" cy="91440"/>
+          </a:xfrm>
+          <a:prstGeom prst="ellipse">
+            <a:avLst/>
+          </a:prstGeom>
+          <a:solidFill>
+            <a:srgbClr val="B61B3B"/>
+          </a:solidFill>
+          <a:ln/>
+        </p:spPr>
+      </p:sp>
+      <p:sp>
+        <p:nvSpPr>
+          <p:cNvPr id="12" name="Text 9"/>
+          <p:cNvSpPr/>
+          <p:nvPr/>
+        </p:nvSpPr>
+        <p:spPr>
+          <a:xfrm>
+            <a:off x="7955280" y="4206240"/>
+            <a:ext cx="3703320" cy="868680"/>
+          </a:xfrm>
+          <a:prstGeom prst="rect">
+            <a:avLst/>
+          </a:prstGeom>
+          <a:noFill/>
+          <a:ln/>
+        </p:spPr>
+        <p:txBody>
+          <a:bodyPr wrap="square" lIns="0" tIns="0" rIns="0" bIns="0" rtlCol="0" anchor="ctr"/>
+          <a:lstStyle/>
+          <a:p>
+            <a:pPr indent="0" marL="0">
+              <a:lnSpc>
+                <a:spcPct val="115000"/>
+              </a:lnSpc>
+              <a:buNone/>
+            </a:pPr>
+            <a:r>
+              <a:rPr lang="en-US" sz="1300" dirty="0">
+                <a:solidFill>
+                  <a:srgbClr val="1F2937"/>
+                </a:solidFill>
+                <a:latin typeface="Calibri" pitchFamily="34" charset="0"/>
+                <a:ea typeface="Calibri" pitchFamily="34" charset="-122"/>
+                <a:cs typeface="Calibri" pitchFamily="34" charset="-120"/>
+              </a:rPr>
+              <a:t>Внутри сезона модели «выучили» сдвиг — отсюда ≈40% их выигрыша</a:t>
+            </a:r>
+            <a:endParaRPr lang="en-US" sz="1300" dirty="0"/>
+          </a:p>
+        </p:txBody>
+      </p:sp>
+      <p:sp>
+        <p:nvSpPr>
+          <p:cNvPr id="13" name="Shape 10"/>
+          <p:cNvSpPr/>
+          <p:nvPr/>
+        </p:nvSpPr>
+        <p:spPr>
+          <a:xfrm>
+            <a:off x="7726680" y="5463540"/>
+            <a:ext cx="91440" cy="91440"/>
+          </a:xfrm>
+          <a:prstGeom prst="ellipse">
+            <a:avLst/>
+          </a:prstGeom>
+          <a:solidFill>
+            <a:srgbClr val="B61B3B"/>
+          </a:solidFill>
+          <a:ln/>
+        </p:spPr>
+      </p:sp>
+      <p:sp>
+        <p:nvSpPr>
+          <p:cNvPr id="14" name="Text 11"/>
+          <p:cNvSpPr/>
+          <p:nvPr/>
+        </p:nvSpPr>
+        <p:spPr>
+          <a:xfrm>
+            <a:off x="7955280" y="5074920"/>
+            <a:ext cx="3703320" cy="868680"/>
+          </a:xfrm>
+          <a:prstGeom prst="rect">
+            <a:avLst/>
+          </a:prstGeom>
+          <a:noFill/>
+          <a:ln/>
+        </p:spPr>
+        <p:txBody>
+          <a:bodyPr wrap="square" lIns="0" tIns="0" rIns="0" bIns="0" rtlCol="0" anchor="ctr"/>
+          <a:lstStyle/>
+          <a:p>
+            <a:pPr indent="0" marL="0">
+              <a:lnSpc>
+                <a:spcPct val="115000"/>
+              </a:lnSpc>
+              <a:buNone/>
+            </a:pPr>
+            <a:r>
+              <a:rPr lang="en-US" sz="1300" dirty="0">
+                <a:solidFill>
+                  <a:srgbClr val="1F2937"/>
+                </a:solidFill>
+                <a:latin typeface="Calibri" pitchFamily="34" charset="0"/>
+                <a:ea typeface="Calibri" pitchFamily="34" charset="-122"/>
+                <a:cs typeface="Calibri" pitchFamily="34" charset="-120"/>
+              </a:rPr>
+              <a:t>Вывод: при смене ассортимента переносить историю продаж вручную</a:t>
+            </a:r>
+            <a:endParaRPr lang="en-US" sz="1300" dirty="0"/>
+          </a:p>
+        </p:txBody>
+      </p:sp>
+      <p:sp>
+        <p:nvSpPr>
+          <p:cNvPr id="15" name="Text 12"/>
+          <p:cNvSpPr/>
+          <p:nvPr/>
+        </p:nvSpPr>
+        <p:spPr>
+          <a:xfrm>
+            <a:off x="11640312" y="6446520"/>
+            <a:ext cx="365760" cy="274320"/>
+          </a:xfrm>
+          <a:prstGeom prst="rect">
+            <a:avLst/>
+          </a:prstGeom>
+          <a:noFill/>
+          <a:ln/>
+        </p:spPr>
+        <p:txBody>
+          <a:bodyPr wrap="square" rtlCol="0" anchor="ctr"/>
+          <a:lstStyle/>
+          <a:p>
+            <a:pPr algn="r" indent="0" marL="0">
+              <a:buNone/>
+            </a:pPr>
+            <a:r>
+              <a:rPr lang="en-US" sz="1000" dirty="0">
+                <a:solidFill>
+                  <a:srgbClr val="6B7280"/>
+                </a:solidFill>
+                <a:latin typeface="Calibri" pitchFamily="34" charset="0"/>
+                <a:ea typeface="Calibri" pitchFamily="34" charset="-122"/>
+                <a:cs typeface="Calibri" pitchFamily="34" charset="-120"/>
+              </a:rPr>
+              <a:t>10</a:t>
+            </a:r>
+            <a:endParaRPr lang="en-US" sz="1000" dirty="0"/>
+          </a:p>
+        </p:txBody>
+      </p:sp>
+    </p:spTree>
+  </p:cSld>
+  <p:clrMapOvr>
+    <a:masterClrMapping/>
+  </p:clrMapOvr>
+</p:sld>
+</file>
+
+<file path=ppt/slides/slide11.xml><?xml version="1.0" encoding="utf-8"?>
+<p:sld xmlns:a="http://schemas.openxmlformats.org/drawingml/2006/main" xmlns:r="http://schemas.openxmlformats.org/officeDocument/2006/relationships" xmlns:p="http://schemas.openxmlformats.org/presentationml/2006/main">
+  <p:cSld name="Slide 11">
+    <p:bg>
+      <p:bgPr>
+        <a:solidFill>
+          <a:srgbClr val="FFFFFF"/>
+        </a:solidFill>
+      </p:bgPr>
+    </p:bg>
+    <p:spTree>
+      <p:nvGrpSpPr>
+        <p:cNvPr id="1" name=""/>
+        <p:cNvGrpSpPr/>
+        <p:nvPr/>
+      </p:nvGrpSpPr>
+      <p:grpSpPr>
+        <a:xfrm>
+          <a:off x="0" y="0"/>
+          <a:ext cx="0" cy="0"/>
+          <a:chOff x="0" y="0"/>
+          <a:chExt cx="0" cy="0"/>
+        </a:xfrm>
+      </p:grpSpPr>
+      <p:sp>
+        <p:nvSpPr>
+          <p:cNvPr id="2" name="Text 0"/>
+          <p:cNvSpPr/>
+          <p:nvPr/>
+        </p:nvSpPr>
+        <p:spPr>
+          <a:xfrm>
+            <a:off x="640080" y="411480"/>
+            <a:ext cx="10881360" cy="640080"/>
+          </a:xfrm>
+          <a:prstGeom prst="rect">
+            <a:avLst/>
+          </a:prstGeom>
+          <a:noFill/>
+          <a:ln/>
+        </p:spPr>
+        <p:txBody>
+          <a:bodyPr wrap="square" lIns="0" tIns="0" rIns="0" bIns="0" rtlCol="0" anchor="ctr"/>
+          <a:lstStyle/>
+          <a:p>
+            <a:pPr indent="0" marL="0">
+              <a:buNone/>
+            </a:pPr>
+            <a:r>
+              <a:rPr lang="en-US" sz="2800" b="1" dirty="0">
+                <a:solidFill>
+                  <a:srgbClr val="323C32"/>
+                </a:solidFill>
+                <a:latin typeface="Cambria" pitchFamily="34" charset="0"/>
+                <a:ea typeface="Cambria" pitchFamily="34" charset="-122"/>
+                <a:cs typeface="Cambria" pitchFamily="34" charset="-120"/>
+              </a:rPr>
+              <a:t>Рекомендации и ограничения</a:t>
+            </a:r>
+            <a:endParaRPr lang="en-US" sz="2800" dirty="0"/>
+          </a:p>
+        </p:txBody>
+      </p:sp>
+      <p:sp>
+        <p:nvSpPr>
+          <p:cNvPr id="3" name="Shape 1"/>
+          <p:cNvSpPr/>
+          <p:nvPr/>
+        </p:nvSpPr>
+        <p:spPr>
+          <a:xfrm>
+            <a:off x="502920" y="1188720"/>
+            <a:ext cx="6035040" cy="4937760"/>
+          </a:xfrm>
+          <a:prstGeom prst="roundRect">
+            <a:avLst>
+              <a:gd name="adj" fmla="val 1481"/>
+            </a:avLst>
+          </a:prstGeom>
+          <a:solidFill>
+            <a:srgbClr val="F1EFE8"/>
+          </a:solidFill>
+          <a:ln/>
+        </p:spPr>
+      </p:sp>
+      <p:sp>
+        <p:nvSpPr>
+          <p:cNvPr id="4" name="Text 2"/>
+          <p:cNvSpPr/>
+          <p:nvPr/>
+        </p:nvSpPr>
+        <p:spPr>
+          <a:xfrm>
+            <a:off x="777240" y="1353312"/>
+            <a:ext cx="5486400" cy="365760"/>
+          </a:xfrm>
+          <a:prstGeom prst="rect">
+            <a:avLst/>
+          </a:prstGeom>
+          <a:noFill/>
+          <a:ln/>
+        </p:spPr>
+        <p:txBody>
+          <a:bodyPr wrap="square" lIns="0" tIns="0" rIns="0" bIns="0" rtlCol="0" anchor="ctr"/>
+          <a:lstStyle/>
+          <a:p>
+            <a:pPr indent="0" marL="0">
+              <a:buNone/>
+            </a:pPr>
+            <a:r>
+              <a:rPr lang="en-US" sz="1300" b="1" spc="150" kern="0" dirty="0">
+                <a:solidFill>
+                  <a:srgbClr val="323C32"/>
+                </a:solidFill>
+                <a:latin typeface="Calibri" pitchFamily="34" charset="0"/>
+                <a:ea typeface="Calibri" pitchFamily="34" charset="-122"/>
+                <a:cs typeface="Calibri" pitchFamily="34" charset="-120"/>
+              </a:rPr>
+              <a:t>РЕКОМЕНДАЦИИ</a:t>
+            </a:r>
+            <a:endParaRPr lang="en-US" sz="1300" dirty="0"/>
+          </a:p>
+        </p:txBody>
+      </p:sp>
+      <p:sp>
+        <p:nvSpPr>
+          <p:cNvPr id="5" name="Shape 3"/>
+          <p:cNvSpPr/>
+          <p:nvPr/>
+        </p:nvSpPr>
+        <p:spPr>
+          <a:xfrm>
+            <a:off x="777240" y="2048256"/>
+            <a:ext cx="411480" cy="411480"/>
+          </a:xfrm>
+          <a:prstGeom prst="ellipse">
+            <a:avLst/>
+          </a:prstGeom>
+          <a:solidFill>
+            <a:srgbClr val="B61B3B"/>
+          </a:solidFill>
+          <a:ln/>
+        </p:spPr>
+      </p:sp>
+      <p:sp>
+        <p:nvSpPr>
+          <p:cNvPr id="6" name="Text 4"/>
+          <p:cNvSpPr/>
+          <p:nvPr/>
+        </p:nvSpPr>
+        <p:spPr>
+          <a:xfrm>
+            <a:off x="777240" y="2048256"/>
+            <a:ext cx="411480" cy="411480"/>
+          </a:xfrm>
+          <a:prstGeom prst="rect">
+            <a:avLst/>
+          </a:prstGeom>
+          <a:noFill/>
+          <a:ln/>
+        </p:spPr>
+        <p:txBody>
+          <a:bodyPr wrap="square" lIns="0" tIns="0" rIns="0" bIns="0" rtlCol="0" anchor="ctr"/>
+          <a:lstStyle/>
+          <a:p>
+            <a:pPr algn="ctr" indent="0" marL="0">
+              <a:buNone/>
+            </a:pPr>
+            <a:r>
+              <a:rPr lang="en-US" sz="1600" b="1" dirty="0">
+                <a:solidFill>
+                  <a:srgbClr val="FFFFFF"/>
+                </a:solidFill>
+                <a:latin typeface="Cambria" pitchFamily="34" charset="0"/>
+                <a:ea typeface="Cambria" pitchFamily="34" charset="-122"/>
+                <a:cs typeface="Cambria" pitchFamily="34" charset="-120"/>
+              </a:rPr>
+              <a:t>1</a:t>
+            </a:r>
+            <a:endParaRPr lang="en-US" sz="1600" dirty="0"/>
+          </a:p>
+        </p:txBody>
+      </p:sp>
+      <p:sp>
+        <p:nvSpPr>
+          <p:cNvPr id="7" name="Text 5"/>
+          <p:cNvSpPr/>
+          <p:nvPr/>
+        </p:nvSpPr>
+        <p:spPr>
+          <a:xfrm>
+            <a:off x="1371600" y="1828800"/>
+            <a:ext cx="4983480" cy="868680"/>
+          </a:xfrm>
+          <a:prstGeom prst="rect">
+            <a:avLst/>
+          </a:prstGeom>
+          <a:noFill/>
+          <a:ln/>
+        </p:spPr>
+        <p:txBody>
+          <a:bodyPr wrap="square" lIns="0" tIns="0" rIns="0" bIns="0" rtlCol="0" anchor="ctr"/>
+          <a:lstStyle/>
+          <a:p>
+            <a:pPr indent="0" marL="0">
+              <a:lnSpc>
+                <a:spcPct val="115000"/>
+              </a:lnSpc>
+              <a:buNone/>
+            </a:pPr>
+            <a:r>
+              <a:rPr lang="en-US" sz="1300" dirty="0">
+                <a:solidFill>
+                  <a:srgbClr val="1F2937"/>
+                </a:solidFill>
+                <a:latin typeface="Calibri" pitchFamily="34" charset="0"/>
+                <a:ea typeface="Calibri" pitchFamily="34" charset="-122"/>
+                <a:cs typeface="Calibri" pitchFamily="34" charset="-120"/>
+              </a:rPr>
+              <a:t>Первичное распределение — LFL с единым коэффициентом роста, рассчитанным по началу октября</a:t>
+            </a:r>
+            <a:endParaRPr lang="en-US" sz="1300" dirty="0"/>
+          </a:p>
+        </p:txBody>
+      </p:sp>
+      <p:sp>
+        <p:nvSpPr>
+          <p:cNvPr id="8" name="Shape 6"/>
+          <p:cNvSpPr/>
+          <p:nvPr/>
+        </p:nvSpPr>
+        <p:spPr>
+          <a:xfrm>
+            <a:off x="777240" y="3099816"/>
+            <a:ext cx="411480" cy="411480"/>
+          </a:xfrm>
+          <a:prstGeom prst="ellipse">
+            <a:avLst/>
+          </a:prstGeom>
+          <a:solidFill>
+            <a:srgbClr val="B61B3B"/>
+          </a:solidFill>
+          <a:ln/>
+        </p:spPr>
+      </p:sp>
+      <p:sp>
+        <p:nvSpPr>
+          <p:cNvPr id="9" name="Text 7"/>
+          <p:cNvSpPr/>
+          <p:nvPr/>
+        </p:nvSpPr>
+        <p:spPr>
+          <a:xfrm>
+            <a:off x="777240" y="3099816"/>
+            <a:ext cx="411480" cy="411480"/>
+          </a:xfrm>
+          <a:prstGeom prst="rect">
+            <a:avLst/>
+          </a:prstGeom>
+          <a:noFill/>
+          <a:ln/>
+        </p:spPr>
+        <p:txBody>
+          <a:bodyPr wrap="square" lIns="0" tIns="0" rIns="0" bIns="0" rtlCol="0" anchor="ctr"/>
+          <a:lstStyle/>
+          <a:p>
+            <a:pPr algn="ctr" indent="0" marL="0">
+              <a:buNone/>
+            </a:pPr>
+            <a:r>
+              <a:rPr lang="en-US" sz="1600" b="1" dirty="0">
+                <a:solidFill>
+                  <a:srgbClr val="FFFFFF"/>
+                </a:solidFill>
+                <a:latin typeface="Cambria" pitchFamily="34" charset="0"/>
+                <a:ea typeface="Cambria" pitchFamily="34" charset="-122"/>
+                <a:cs typeface="Cambria" pitchFamily="34" charset="-120"/>
+              </a:rPr>
+              <a:t>2</a:t>
+            </a:r>
+            <a:endParaRPr lang="en-US" sz="1600" dirty="0"/>
+          </a:p>
+        </p:txBody>
+      </p:sp>
+      <p:sp>
+        <p:nvSpPr>
+          <p:cNvPr id="10" name="Text 8"/>
+          <p:cNvSpPr/>
+          <p:nvPr/>
+        </p:nvSpPr>
+        <p:spPr>
+          <a:xfrm>
+            <a:off x="1371600" y="2880360"/>
+            <a:ext cx="4983480" cy="868680"/>
+          </a:xfrm>
+          <a:prstGeom prst="rect">
+            <a:avLst/>
+          </a:prstGeom>
+          <a:noFill/>
+          <a:ln/>
+        </p:spPr>
+        <p:txBody>
+          <a:bodyPr wrap="square" lIns="0" tIns="0" rIns="0" bIns="0" rtlCol="0" anchor="ctr"/>
+          <a:lstStyle/>
+          <a:p>
+            <a:pPr indent="0" marL="0">
+              <a:lnSpc>
+                <a:spcPct val="115000"/>
+              </a:lnSpc>
+              <a:buNone/>
+            </a:pPr>
+            <a:r>
+              <a:rPr lang="en-US" sz="1300" dirty="0">
+                <a:solidFill>
+                  <a:srgbClr val="1F2937"/>
+                </a:solidFill>
+                <a:latin typeface="Calibri" pitchFamily="34" charset="0"/>
+                <a:ea typeface="Calibri" pitchFamily="34" charset="-122"/>
+                <a:cs typeface="Calibri" pitchFamily="34" charset="-120"/>
+              </a:rPr>
+              <a:t>Пересмотреть логистику Дальнего Востока: упущенная выручка ≈307 тыс. руб. за сезон</a:t>
+            </a:r>
+            <a:endParaRPr lang="en-US" sz="1300" dirty="0"/>
+          </a:p>
+        </p:txBody>
+      </p:sp>
+      <p:sp>
+        <p:nvSpPr>
+          <p:cNvPr id="11" name="Shape 9"/>
+          <p:cNvSpPr/>
+          <p:nvPr/>
+        </p:nvSpPr>
+        <p:spPr>
+          <a:xfrm>
+            <a:off x="777240" y="4151376"/>
+            <a:ext cx="411480" cy="411480"/>
+          </a:xfrm>
+          <a:prstGeom prst="ellipse">
+            <a:avLst/>
+          </a:prstGeom>
+          <a:solidFill>
+            <a:srgbClr val="B61B3B"/>
+          </a:solidFill>
+          <a:ln/>
+        </p:spPr>
+      </p:sp>
+      <p:sp>
+        <p:nvSpPr>
+          <p:cNvPr id="12" name="Text 10"/>
+          <p:cNvSpPr/>
+          <p:nvPr/>
+        </p:nvSpPr>
+        <p:spPr>
+          <a:xfrm>
+            <a:off x="777240" y="4151376"/>
+            <a:ext cx="411480" cy="411480"/>
+          </a:xfrm>
+          <a:prstGeom prst="rect">
+            <a:avLst/>
+          </a:prstGeom>
+          <a:noFill/>
+          <a:ln/>
+        </p:spPr>
+        <p:txBody>
+          <a:bodyPr wrap="square" lIns="0" tIns="0" rIns="0" bIns="0" rtlCol="0" anchor="ctr"/>
+          <a:lstStyle/>
+          <a:p>
+            <a:pPr algn="ctr" indent="0" marL="0">
+              <a:buNone/>
+            </a:pPr>
+            <a:r>
+              <a:rPr lang="en-US" sz="1600" b="1" dirty="0">
+                <a:solidFill>
+                  <a:srgbClr val="FFFFFF"/>
+                </a:solidFill>
+                <a:latin typeface="Cambria" pitchFamily="34" charset="0"/>
+                <a:ea typeface="Cambria" pitchFamily="34" charset="-122"/>
+                <a:cs typeface="Cambria" pitchFamily="34" charset="-120"/>
+              </a:rPr>
+              <a:t>3</a:t>
+            </a:r>
+            <a:endParaRPr lang="en-US" sz="1600" dirty="0"/>
+          </a:p>
+        </p:txBody>
+      </p:sp>
+      <p:sp>
+        <p:nvSpPr>
+          <p:cNvPr id="13" name="Text 11"/>
+          <p:cNvSpPr/>
+          <p:nvPr/>
+        </p:nvSpPr>
+        <p:spPr>
+          <a:xfrm>
+            <a:off x="1371600" y="3931920"/>
+            <a:ext cx="4983480" cy="868680"/>
+          </a:xfrm>
+          <a:prstGeom prst="rect">
+            <a:avLst/>
+          </a:prstGeom>
+          <a:noFill/>
+          <a:ln/>
+        </p:spPr>
+        <p:txBody>
+          <a:bodyPr wrap="square" lIns="0" tIns="0" rIns="0" bIns="0" rtlCol="0" anchor="ctr"/>
+          <a:lstStyle/>
+          <a:p>
+            <a:pPr indent="0" marL="0">
+              <a:lnSpc>
+                <a:spcPct val="115000"/>
+              </a:lnSpc>
+              <a:buNone/>
+            </a:pPr>
+            <a:r>
+              <a:rPr lang="en-US" sz="1300" dirty="0">
+                <a:solidFill>
+                  <a:srgbClr val="1F2937"/>
+                </a:solidFill>
+                <a:latin typeface="Calibri" pitchFamily="34" charset="0"/>
+                <a:ea typeface="Calibri" pitchFamily="34" charset="-122"/>
+                <a:cs typeface="Calibri" pitchFamily="34" charset="-120"/>
+              </a:rPr>
+              <a:t>При смене ассортимента между подгруппами переносить историю продаж вручную</a:t>
+            </a:r>
+            <a:endParaRPr lang="en-US" sz="1300" dirty="0"/>
+          </a:p>
+        </p:txBody>
+      </p:sp>
+      <p:sp>
+        <p:nvSpPr>
+          <p:cNvPr id="14" name="Shape 12"/>
+          <p:cNvSpPr/>
+          <p:nvPr/>
+        </p:nvSpPr>
+        <p:spPr>
+          <a:xfrm>
+            <a:off x="777240" y="5202936"/>
+            <a:ext cx="411480" cy="411480"/>
+          </a:xfrm>
+          <a:prstGeom prst="ellipse">
+            <a:avLst/>
+          </a:prstGeom>
+          <a:solidFill>
+            <a:srgbClr val="B61B3B"/>
+          </a:solidFill>
+          <a:ln/>
+        </p:spPr>
+      </p:sp>
+      <p:sp>
+        <p:nvSpPr>
+          <p:cNvPr id="15" name="Text 13"/>
+          <p:cNvSpPr/>
+          <p:nvPr/>
+        </p:nvSpPr>
+        <p:spPr>
+          <a:xfrm>
+            <a:off x="777240" y="5202936"/>
+            <a:ext cx="411480" cy="411480"/>
+          </a:xfrm>
+          <a:prstGeom prst="rect">
+            <a:avLst/>
+          </a:prstGeom>
+          <a:noFill/>
+          <a:ln/>
+        </p:spPr>
+        <p:txBody>
+          <a:bodyPr wrap="square" lIns="0" tIns="0" rIns="0" bIns="0" rtlCol="0" anchor="ctr"/>
+          <a:lstStyle/>
+          <a:p>
+            <a:pPr algn="ctr" indent="0" marL="0">
+              <a:buNone/>
+            </a:pPr>
+            <a:r>
+              <a:rPr lang="en-US" sz="1600" b="1" dirty="0">
+                <a:solidFill>
+                  <a:srgbClr val="FFFFFF"/>
+                </a:solidFill>
+                <a:latin typeface="Cambria" pitchFamily="34" charset="0"/>
+                <a:ea typeface="Cambria" pitchFamily="34" charset="-122"/>
+                <a:cs typeface="Cambria" pitchFamily="34" charset="-120"/>
+              </a:rPr>
+              <a:t>4</a:t>
+            </a:r>
+            <a:endParaRPr lang="en-US" sz="1600" dirty="0"/>
+          </a:p>
+        </p:txBody>
+      </p:sp>
+      <p:sp>
+        <p:nvSpPr>
+          <p:cNvPr id="16" name="Text 14"/>
+          <p:cNvSpPr/>
+          <p:nvPr/>
+        </p:nvSpPr>
+        <p:spPr>
+          <a:xfrm>
+            <a:off x="1371600" y="4983480"/>
+            <a:ext cx="4983480" cy="868680"/>
+          </a:xfrm>
+          <a:prstGeom prst="rect">
+            <a:avLst/>
+          </a:prstGeom>
+          <a:noFill/>
+          <a:ln/>
+        </p:spPr>
+        <p:txBody>
+          <a:bodyPr wrap="square" lIns="0" tIns="0" rIns="0" bIns="0" rtlCol="0" anchor="ctr"/>
+          <a:lstStyle/>
+          <a:p>
+            <a:pPr indent="0" marL="0">
+              <a:lnSpc>
+                <a:spcPct val="115000"/>
+              </a:lnSpc>
+              <a:buNone/>
+            </a:pPr>
+            <a:r>
+              <a:rPr lang="en-US" sz="1300" dirty="0">
+                <a:solidFill>
+                  <a:srgbClr val="1F2937"/>
+                </a:solidFill>
+                <a:latin typeface="Calibri" pitchFamily="34" charset="0"/>
+                <a:ea typeface="Calibri" pitchFamily="34" charset="-122"/>
+                <a:cs typeface="Calibri" pitchFamily="34" charset="-120"/>
+              </a:rPr>
+              <a:t>Модели — для перераспределения в сезоне; следующий шаг — проверка на первых неделях ноября</a:t>
+            </a:r>
+            <a:endParaRPr lang="en-US" sz="1300" dirty="0"/>
+          </a:p>
+        </p:txBody>
+      </p:sp>
+      <p:sp>
+        <p:nvSpPr>
+          <p:cNvPr id="17" name="Shape 15"/>
+          <p:cNvSpPr/>
+          <p:nvPr/>
+        </p:nvSpPr>
+        <p:spPr>
+          <a:xfrm>
+            <a:off x="6766560" y="1188720"/>
+            <a:ext cx="4892040" cy="4937760"/>
+          </a:xfrm>
+          <a:prstGeom prst="roundRect">
+            <a:avLst>
+              <a:gd name="adj" fmla="val 1495"/>
+            </a:avLst>
+          </a:prstGeom>
+          <a:solidFill>
+            <a:srgbClr val="323C32"/>
+          </a:solidFill>
+          <a:ln/>
+        </p:spPr>
+      </p:sp>
+      <p:sp>
+        <p:nvSpPr>
+          <p:cNvPr id="18" name="Text 16"/>
+          <p:cNvSpPr/>
+          <p:nvPr/>
+        </p:nvSpPr>
+        <p:spPr>
+          <a:xfrm>
+            <a:off x="7040880" y="1353312"/>
+            <a:ext cx="4389120" cy="365760"/>
+          </a:xfrm>
+          <a:prstGeom prst="rect">
+            <a:avLst/>
+          </a:prstGeom>
+          <a:noFill/>
+          <a:ln/>
+        </p:spPr>
+        <p:txBody>
+          <a:bodyPr wrap="square" lIns="0" tIns="0" rIns="0" bIns="0" rtlCol="0" anchor="ctr"/>
+          <a:lstStyle/>
+          <a:p>
+            <a:pPr indent="0" marL="0">
+              <a:buNone/>
+            </a:pPr>
+            <a:r>
+              <a:rPr lang="en-US" sz="1300" b="1" spc="150" kern="0" dirty="0">
+                <a:solidFill>
+                  <a:srgbClr val="C5C9A6"/>
+                </a:solidFill>
+                <a:latin typeface="Calibri" pitchFamily="34" charset="0"/>
+                <a:ea typeface="Calibri" pitchFamily="34" charset="-122"/>
+                <a:cs typeface="Calibri" pitchFamily="34" charset="-120"/>
+              </a:rPr>
+              <a:t>ОГРАНИЧЕНИЯ</a:t>
+            </a:r>
+            <a:endParaRPr lang="en-US" sz="1300" dirty="0"/>
+          </a:p>
+        </p:txBody>
+      </p:sp>
+      <p:sp>
+        <p:nvSpPr>
+          <p:cNvPr id="19" name="Shape 17"/>
+          <p:cNvSpPr/>
+          <p:nvPr/>
+        </p:nvSpPr>
+        <p:spPr>
+          <a:xfrm>
+            <a:off x="7040880" y="2308860"/>
+            <a:ext cx="91440" cy="91440"/>
+          </a:xfrm>
+          <a:prstGeom prst="ellipse">
+            <a:avLst/>
+          </a:prstGeom>
+          <a:solidFill>
+            <a:srgbClr val="C5C9A6"/>
+          </a:solidFill>
+          <a:ln/>
+        </p:spPr>
+      </p:sp>
+      <p:sp>
+        <p:nvSpPr>
+          <p:cNvPr id="20" name="Text 18"/>
+          <p:cNvSpPr/>
+          <p:nvPr/>
+        </p:nvSpPr>
+        <p:spPr>
+          <a:xfrm>
+            <a:off x="7269480" y="1828800"/>
+            <a:ext cx="4160520" cy="1051560"/>
+          </a:xfrm>
+          <a:prstGeom prst="rect">
+            <a:avLst/>
+          </a:prstGeom>
+          <a:noFill/>
+          <a:ln/>
+        </p:spPr>
+        <p:txBody>
+          <a:bodyPr wrap="square" lIns="0" tIns="0" rIns="0" bIns="0" rtlCol="0" anchor="ctr"/>
+          <a:lstStyle/>
+          <a:p>
+            <a:pPr indent="0" marL="0">
+              <a:lnSpc>
+                <a:spcPct val="115000"/>
+              </a:lnSpc>
+              <a:buNone/>
+            </a:pPr>
+            <a:r>
+              <a:rPr lang="en-US" sz="1300" dirty="0">
+                <a:solidFill>
+                  <a:srgbClr val="FFFFFF"/>
+                </a:solidFill>
+                <a:latin typeface="Calibri" pitchFamily="34" charset="0"/>
+                <a:ea typeface="Calibri" pitchFamily="34" charset="-122"/>
+                <a:cs typeface="Calibri" pitchFamily="34" charset="-120"/>
+              </a:rPr>
+              <a:t>Дефицит определён косвенно — справочника ассортимента нет</a:t>
+            </a:r>
+            <a:endParaRPr lang="en-US" sz="1300" dirty="0"/>
+          </a:p>
+        </p:txBody>
+      </p:sp>
+      <p:sp>
+        <p:nvSpPr>
+          <p:cNvPr id="21" name="Shape 19"/>
+          <p:cNvSpPr/>
+          <p:nvPr/>
+        </p:nvSpPr>
+        <p:spPr>
+          <a:xfrm>
+            <a:off x="7040880" y="3360420"/>
+            <a:ext cx="91440" cy="91440"/>
+          </a:xfrm>
+          <a:prstGeom prst="ellipse">
+            <a:avLst/>
+          </a:prstGeom>
+          <a:solidFill>
+            <a:srgbClr val="C5C9A6"/>
+          </a:solidFill>
+          <a:ln/>
+        </p:spPr>
+      </p:sp>
+      <p:sp>
+        <p:nvSpPr>
+          <p:cNvPr id="22" name="Text 20"/>
+          <p:cNvSpPr/>
+          <p:nvPr/>
+        </p:nvSpPr>
+        <p:spPr>
+          <a:xfrm>
+            <a:off x="7269480" y="2880360"/>
+            <a:ext cx="4160520" cy="1051560"/>
+          </a:xfrm>
+          <a:prstGeom prst="rect">
+            <a:avLst/>
+          </a:prstGeom>
+          <a:noFill/>
+          <a:ln/>
+        </p:spPr>
+        <p:txBody>
+          <a:bodyPr wrap="square" lIns="0" tIns="0" rIns="0" bIns="0" rtlCol="0" anchor="ctr"/>
+          <a:lstStyle/>
+          <a:p>
+            <a:pPr indent="0" marL="0">
+              <a:lnSpc>
+                <a:spcPct val="115000"/>
+              </a:lnSpc>
+              <a:buNone/>
+            </a:pPr>
+            <a:r>
+              <a:rPr lang="en-US" sz="1300" dirty="0">
+                <a:solidFill>
+                  <a:srgbClr val="FFFFFF"/>
+                </a:solidFill>
+                <a:latin typeface="Calibri" pitchFamily="34" charset="0"/>
+                <a:ea typeface="Calibri" pitchFamily="34" charset="-122"/>
+                <a:cs typeface="Calibri" pitchFamily="34" charset="-120"/>
+              </a:rPr>
+              <a:t>Один сезон обучения (2024 → 2025)</a:t>
+            </a:r>
+            <a:endParaRPr lang="en-US" sz="1300" dirty="0"/>
+          </a:p>
+        </p:txBody>
+      </p:sp>
+      <p:sp>
+        <p:nvSpPr>
+          <p:cNvPr id="23" name="Shape 21"/>
+          <p:cNvSpPr/>
+          <p:nvPr/>
+        </p:nvSpPr>
+        <p:spPr>
+          <a:xfrm>
+            <a:off x="7040880" y="4411980"/>
+            <a:ext cx="91440" cy="91440"/>
+          </a:xfrm>
+          <a:prstGeom prst="ellipse">
+            <a:avLst/>
+          </a:prstGeom>
+          <a:solidFill>
+            <a:srgbClr val="C5C9A6"/>
+          </a:solidFill>
+          <a:ln/>
+        </p:spPr>
+      </p:sp>
+      <p:sp>
+        <p:nvSpPr>
+          <p:cNvPr id="24" name="Text 22"/>
+          <p:cNvSpPr/>
+          <p:nvPr/>
+        </p:nvSpPr>
+        <p:spPr>
+          <a:xfrm>
+            <a:off x="7269480" y="3931920"/>
+            <a:ext cx="4160520" cy="1051560"/>
+          </a:xfrm>
+          <a:prstGeom prst="rect">
+            <a:avLst/>
+          </a:prstGeom>
+          <a:noFill/>
+          <a:ln/>
+        </p:spPr>
+        <p:txBody>
+          <a:bodyPr wrap="square" lIns="0" tIns="0" rIns="0" bIns="0" rtlCol="0" anchor="ctr"/>
+          <a:lstStyle/>
+          <a:p>
+            <a:pPr indent="0" marL="0">
+              <a:lnSpc>
+                <a:spcPct val="115000"/>
+              </a:lnSpc>
+              <a:buNone/>
+            </a:pPr>
+            <a:r>
+              <a:rPr lang="en-US" sz="1300" dirty="0">
+                <a:solidFill>
+                  <a:srgbClr val="FFFFFF"/>
+                </a:solidFill>
+                <a:latin typeface="Calibri" pitchFamily="34" charset="0"/>
+                <a:ea typeface="Calibri" pitchFamily="34" charset="-122"/>
+                <a:cs typeface="Calibri" pitchFamily="34" charset="-120"/>
+              </a:rPr>
+              <a:t>Гиперпараметры моделей не подбирались</a:t>
+            </a:r>
+            <a:endParaRPr lang="en-US" sz="1300" dirty="0"/>
+          </a:p>
+        </p:txBody>
+      </p:sp>
+      <p:sp>
+        <p:nvSpPr>
+          <p:cNvPr id="25" name="Shape 23"/>
+          <p:cNvSpPr/>
+          <p:nvPr/>
+        </p:nvSpPr>
+        <p:spPr>
+          <a:xfrm>
+            <a:off x="7040880" y="5463540"/>
+            <a:ext cx="91440" cy="91440"/>
+          </a:xfrm>
+          <a:prstGeom prst="ellipse">
+            <a:avLst/>
+          </a:prstGeom>
+          <a:solidFill>
+            <a:srgbClr val="C5C9A6"/>
+          </a:solidFill>
+          <a:ln/>
+        </p:spPr>
+      </p:sp>
+      <p:sp>
+        <p:nvSpPr>
+          <p:cNvPr id="26" name="Text 24"/>
+          <p:cNvSpPr/>
+          <p:nvPr/>
+        </p:nvSpPr>
+        <p:spPr>
+          <a:xfrm>
+            <a:off x="7269480" y="4983480"/>
+            <a:ext cx="4160520" cy="1051560"/>
+          </a:xfrm>
+          <a:prstGeom prst="rect">
+            <a:avLst/>
+          </a:prstGeom>
+          <a:noFill/>
+          <a:ln/>
+        </p:spPr>
+        <p:txBody>
+          <a:bodyPr wrap="square" lIns="0" tIns="0" rIns="0" bIns="0" rtlCol="0" anchor="ctr"/>
+          <a:lstStyle/>
+          <a:p>
+            <a:pPr indent="0" marL="0">
+              <a:lnSpc>
+                <a:spcPct val="115000"/>
+              </a:lnSpc>
+              <a:buNone/>
+            </a:pPr>
+            <a:r>
+              <a:rPr lang="en-US" sz="1300" dirty="0">
+                <a:solidFill>
+                  <a:srgbClr val="FFFFFF"/>
+                </a:solidFill>
+                <a:latin typeface="Calibri" pitchFamily="34" charset="0"/>
+                <a:ea typeface="Calibri" pitchFamily="34" charset="-122"/>
+                <a:cs typeface="Calibri" pitchFamily="34" charset="-120"/>
+              </a:rPr>
+              <a:t>Новые магазины не сравнивались с прогнозом по аналогу</a:t>
+            </a:r>
+            <a:endParaRPr lang="en-US" sz="1300" dirty="0"/>
+          </a:p>
+        </p:txBody>
+      </p:sp>
+      <p:sp>
+        <p:nvSpPr>
+          <p:cNvPr id="27" name="Text 25"/>
+          <p:cNvSpPr/>
+          <p:nvPr/>
+        </p:nvSpPr>
+        <p:spPr>
+          <a:xfrm>
+            <a:off x="11640312" y="6446520"/>
+            <a:ext cx="365760" cy="274320"/>
+          </a:xfrm>
+          <a:prstGeom prst="rect">
+            <a:avLst/>
+          </a:prstGeom>
+          <a:noFill/>
+          <a:ln/>
+        </p:spPr>
+        <p:txBody>
+          <a:bodyPr wrap="square" rtlCol="0" anchor="ctr"/>
+          <a:lstStyle/>
+          <a:p>
+            <a:pPr algn="r" indent="0" marL="0">
+              <a:buNone/>
+            </a:pPr>
+            <a:r>
+              <a:rPr lang="en-US" sz="1000" dirty="0">
+                <a:solidFill>
+                  <a:srgbClr val="6B7280"/>
+                </a:solidFill>
+                <a:latin typeface="Calibri" pitchFamily="34" charset="0"/>
+                <a:ea typeface="Calibri" pitchFamily="34" charset="-122"/>
+                <a:cs typeface="Calibri" pitchFamily="34" charset="-120"/>
+              </a:rPr>
+              <a:t>11</a:t>
+            </a:r>
+            <a:endParaRPr lang="en-US" sz="1000" dirty="0"/>
+          </a:p>
+        </p:txBody>
+      </p:sp>
+    </p:spTree>
+  </p:cSld>
+  <p:clrMapOvr>
+    <a:masterClrMapping/>
+  </p:clrMapOvr>
+</p:sld>
+</file>
+
+<file path=ppt/slides/slide12.xml><?xml version="1.0" encoding="utf-8"?>
+<p:sld xmlns:a="http://schemas.openxmlformats.org/drawingml/2006/main" xmlns:r="http://schemas.openxmlformats.org/officeDocument/2006/relationships" xmlns:p="http://schemas.openxmlformats.org/presentationml/2006/main">
+  <p:cSld name="Slide 12">
+    <p:bg>
+      <p:bgPr>
+        <a:solidFill>
+          <a:srgbClr val="323C32"/>
+        </a:solidFill>
+      </p:bgPr>
+    </p:bg>
+    <p:spTree>
+      <p:nvGrpSpPr>
+        <p:cNvPr id="1" name=""/>
+        <p:cNvGrpSpPr/>
+        <p:nvPr/>
+      </p:nvGrpSpPr>
+      <p:grpSpPr>
+        <a:xfrm>
+          <a:off x="0" y="0"/>
+          <a:ext cx="0" cy="0"/>
+          <a:chOff x="0" y="0"/>
+          <a:chExt cx="0" cy="0"/>
+        </a:xfrm>
+      </p:grpSpPr>
+      <p:sp>
+        <p:nvSpPr>
+          <p:cNvPr id="2" name="Shape 0"/>
+          <p:cNvSpPr/>
+          <p:nvPr/>
+        </p:nvSpPr>
+        <p:spPr>
+          <a:xfrm>
+            <a:off x="914400" y="914400"/>
+            <a:ext cx="82296" cy="82296"/>
+          </a:xfrm>
+          <a:prstGeom prst="ellipse">
+            <a:avLst/>
+          </a:prstGeom>
+          <a:solidFill>
+            <a:srgbClr val="B61B3B"/>
+          </a:solidFill>
+          <a:ln/>
+        </p:spPr>
+      </p:sp>
+      <p:sp>
+        <p:nvSpPr>
+          <p:cNvPr id="3" name="Shape 1"/>
+          <p:cNvSpPr/>
+          <p:nvPr/>
+        </p:nvSpPr>
+        <p:spPr>
+          <a:xfrm>
+            <a:off x="11155680" y="822960"/>
+            <a:ext cx="82296" cy="82296"/>
+          </a:xfrm>
+          <a:prstGeom prst="ellipse">
+            <a:avLst/>
+          </a:prstGeom>
+          <a:solidFill>
+            <a:srgbClr val="B61B3B"/>
+          </a:solidFill>
+          <a:ln/>
+        </p:spPr>
+      </p:sp>
+      <p:sp>
+        <p:nvSpPr>
+          <p:cNvPr id="4" name="Shape 2"/>
+          <p:cNvSpPr/>
+          <p:nvPr/>
+        </p:nvSpPr>
+        <p:spPr>
+          <a:xfrm>
+            <a:off x="731520" y="6035040"/>
+            <a:ext cx="82296" cy="82296"/>
+          </a:xfrm>
+          <a:prstGeom prst="ellipse">
+            <a:avLst/>
+          </a:prstGeom>
+          <a:solidFill>
+            <a:srgbClr val="B61B3B"/>
+          </a:solidFill>
+          <a:ln/>
+        </p:spPr>
+      </p:sp>
+      <p:sp>
+        <p:nvSpPr>
+          <p:cNvPr id="5" name="Shape 3"/>
+          <p:cNvSpPr/>
+          <p:nvPr/>
+        </p:nvSpPr>
+        <p:spPr>
+          <a:xfrm>
+            <a:off x="11247120" y="5943600"/>
+            <a:ext cx="82296" cy="82296"/>
+          </a:xfrm>
+          <a:prstGeom prst="ellipse">
+            <a:avLst/>
+          </a:prstGeom>
+          <a:solidFill>
+            <a:srgbClr val="B61B3B"/>
+          </a:solidFill>
+          <a:ln/>
+        </p:spPr>
+      </p:sp>
+      <p:sp>
+        <p:nvSpPr>
+          <p:cNvPr id="6" name="Shape 4"/>
+          <p:cNvSpPr/>
+          <p:nvPr/>
+        </p:nvSpPr>
+        <p:spPr>
+          <a:xfrm>
+            <a:off x="1828800" y="5394960"/>
+            <a:ext cx="82296" cy="82296"/>
+          </a:xfrm>
+          <a:prstGeom prst="ellipse">
+            <a:avLst/>
+          </a:prstGeom>
+          <a:solidFill>
+            <a:srgbClr val="B61B3B"/>
+          </a:solidFill>
+          <a:ln/>
+        </p:spPr>
+      </p:sp>
+      <p:sp>
+        <p:nvSpPr>
+          <p:cNvPr id="7" name="Shape 5"/>
+          <p:cNvSpPr/>
+          <p:nvPr/>
+        </p:nvSpPr>
+        <p:spPr>
+          <a:xfrm>
+            <a:off x="10058400" y="1463040"/>
+            <a:ext cx="82296" cy="82296"/>
+          </a:xfrm>
+          <a:prstGeom prst="ellipse">
+            <a:avLst/>
+          </a:prstGeom>
+          <a:solidFill>
+            <a:srgbClr val="B61B3B"/>
+          </a:solidFill>
+          <a:ln/>
+        </p:spPr>
+      </p:sp>
+      <p:sp>
+        <p:nvSpPr>
+          <p:cNvPr id="8" name="Text 6"/>
+          <p:cNvSpPr/>
+          <p:nvPr/>
+        </p:nvSpPr>
+        <p:spPr>
+          <a:xfrm>
+            <a:off x="822960" y="2651760"/>
+            <a:ext cx="10515600" cy="914400"/>
+          </a:xfrm>
+          <a:prstGeom prst="rect">
+            <a:avLst/>
+          </a:prstGeom>
+          <a:noFill/>
+          <a:ln/>
+        </p:spPr>
+        <p:txBody>
+          <a:bodyPr wrap="square" lIns="0" tIns="0" rIns="0" bIns="0" rtlCol="0" anchor="ctr"/>
+          <a:lstStyle/>
+          <a:p>
+            <a:pPr indent="0" marL="0">
+              <a:buNone/>
+            </a:pPr>
+            <a:r>
+              <a:rPr lang="en-US" sz="4000" b="1" dirty="0">
+                <a:solidFill>
+                  <a:srgbClr val="FFFFFF"/>
+                </a:solidFill>
+                <a:latin typeface="Cambria" pitchFamily="34" charset="0"/>
+                <a:ea typeface="Cambria" pitchFamily="34" charset="-122"/>
+                <a:cs typeface="Cambria" pitchFamily="34" charset="-120"/>
+              </a:rPr>
+              <a:t>Спасибо за внимание</a:t>
+            </a:r>
+            <a:endParaRPr lang="en-US" sz="4000" dirty="0"/>
+          </a:p>
+        </p:txBody>
+      </p:sp>
+      <p:sp>
+        <p:nvSpPr>
+          <p:cNvPr id="9" name="Text 7"/>
+          <p:cNvSpPr/>
+          <p:nvPr/>
+        </p:nvSpPr>
+        <p:spPr>
+          <a:xfrm>
+            <a:off x="822960" y="3520440"/>
+            <a:ext cx="10515600" cy="548640"/>
+          </a:xfrm>
+          <a:prstGeom prst="rect">
+            <a:avLst/>
+          </a:prstGeom>
+          <a:noFill/>
+          <a:ln/>
+        </p:spPr>
+        <p:txBody>
+          <a:bodyPr wrap="square" lIns="0" tIns="0" rIns="0" bIns="0" rtlCol="0" anchor="ctr"/>
+          <a:lstStyle/>
+          <a:p>
+            <a:pPr indent="0" marL="0">
+              <a:buNone/>
+            </a:pPr>
+            <a:r>
+              <a:rPr lang="en-US" sz="1800" i="1" dirty="0">
+                <a:solidFill>
+                  <a:srgbClr val="E4E2D3"/>
+                </a:solidFill>
+                <a:latin typeface="Calibri" pitchFamily="34" charset="0"/>
+                <a:ea typeface="Calibri" pitchFamily="34" charset="-122"/>
+                <a:cs typeface="Calibri" pitchFamily="34" charset="-120"/>
+              </a:rPr>
+              <a:t>Готова ответить на вопросы</a:t>
+            </a:r>
+            <a:endParaRPr lang="en-US" sz="1800" dirty="0"/>
+          </a:p>
+        </p:txBody>
+      </p:sp>
+      <p:sp>
+        <p:nvSpPr>
+          <p:cNvPr id="10" name="Shape 8"/>
+          <p:cNvSpPr/>
+          <p:nvPr/>
+        </p:nvSpPr>
+        <p:spPr>
+          <a:xfrm>
+            <a:off x="822960" y="4160520"/>
+            <a:ext cx="2011680" cy="0"/>
+          </a:xfrm>
+          <a:prstGeom prst="line">
+            <a:avLst/>
+          </a:prstGeom>
+          <a:noFill/>
+          <a:ln w="25400">
+            <a:solidFill>
+              <a:srgbClr val="B61B3B"/>
+            </a:solidFill>
+            <a:prstDash val="solid"/>
+          </a:ln>
+        </p:spPr>
+      </p:sp>
+      <p:sp>
+        <p:nvSpPr>
+          <p:cNvPr id="11" name="Text 9"/>
+          <p:cNvSpPr/>
+          <p:nvPr/>
+        </p:nvSpPr>
+        <p:spPr>
+          <a:xfrm>
+            <a:off x="822960" y="5943600"/>
+            <a:ext cx="10058400" cy="457200"/>
+          </a:xfrm>
+          <a:prstGeom prst="rect">
+            <a:avLst/>
+          </a:prstGeom>
+          <a:noFill/>
+          <a:ln/>
+        </p:spPr>
+        <p:txBody>
+          <a:bodyPr wrap="square" lIns="0" tIns="0" rIns="0" bIns="0" rtlCol="0" anchor="ctr"/>
+          <a:lstStyle/>
+          <a:p>
+            <a:pPr indent="0" marL="0">
+              <a:buNone/>
+            </a:pPr>
+            <a:r>
+              <a:rPr lang="en-US" sz="1200" dirty="0">
+                <a:solidFill>
+                  <a:srgbClr val="C5C9A6"/>
+                </a:solidFill>
+                <a:latin typeface="Calibri" pitchFamily="34" charset="0"/>
+                <a:ea typeface="Calibri" pitchFamily="34" charset="-122"/>
+                <a:cs typeface="Calibri" pitchFamily="34" charset="-120"/>
+              </a:rPr>
+              <a:t>Код, выводы по блокам и графики — в приватном репозитории проекта на GitHub</a:t>
+            </a:r>
+            <a:endParaRPr lang="en-US" sz="1200" dirty="0"/>
+          </a:p>
+        </p:txBody>
       </p:sp>
     </p:spTree>
   </p:cSld>
@@ -1657,7 +5150,6 @@
         <a:solidFill>
           <a:srgbClr val="FFFFFF"/>
         </a:solidFill>
-        <a:effectLst/>
       </p:bgPr>
     </p:bg>
     <p:spTree>
@@ -1677,12 +5169,12 @@
       <p:sp>
         <p:nvSpPr>
           <p:cNvPr id="2" name="Text 0"/>
-          <p:cNvSpPr txBox="1"/>
-          <p:nvPr/>
-        </p:nvSpPr>
-        <p:spPr>
-          <a:xfrm>
-            <a:off x="640080" y="457200"/>
+          <p:cNvSpPr/>
+          <p:nvPr/>
+        </p:nvSpPr>
+        <p:spPr>
+          <a:xfrm>
+            <a:off x="640080" y="411480"/>
             <a:ext cx="10881360" cy="640080"/>
           </a:xfrm>
           <a:prstGeom prst="rect">
@@ -1695,13 +5187,13 @@
           <a:bodyPr wrap="square" lIns="0" tIns="0" rIns="0" bIns="0" rtlCol="0" anchor="ctr"/>
           <a:lstStyle/>
           <a:p>
-            <a:pPr marL="0" indent="0">
-              <a:buNone/>
-            </a:pPr>
-            <a:r>
-              <a:rPr lang="en-US" sz="3000" b="1" dirty="0">
-                <a:solidFill>
-                  <a:srgbClr val="1E2761"/>
+            <a:pPr indent="0" marL="0">
+              <a:buNone/>
+            </a:pPr>
+            <a:r>
+              <a:rPr lang="en-US" sz="2800" b="1" dirty="0">
+                <a:solidFill>
+                  <a:srgbClr val="323C32"/>
                 </a:solidFill>
                 <a:latin typeface="Cambria" pitchFamily="34" charset="0"/>
                 <a:ea typeface="Cambria" pitchFamily="34" charset="-122"/>
@@ -1709,36 +5201,36 @@
               </a:rPr>
               <a:t>Проблема: распределение вслепую</a:t>
             </a:r>
-            <a:endParaRPr lang="en-US" sz="3000" dirty="0"/>
+            <a:endParaRPr lang="en-US" sz="2800" dirty="0"/>
           </a:p>
         </p:txBody>
       </p:sp>
       <p:sp>
         <p:nvSpPr>
           <p:cNvPr id="3" name="Text 1"/>
-          <p:cNvSpPr txBox="1"/>
-          <p:nvPr/>
-        </p:nvSpPr>
-        <p:spPr>
-          <a:xfrm>
-            <a:off x="640080" y="1051560"/>
-            <a:ext cx="10515600" cy="457200"/>
-          </a:xfrm>
-          <a:prstGeom prst="rect">
-            <a:avLst/>
-          </a:prstGeom>
-          <a:noFill/>
-          <a:ln/>
-        </p:spPr>
-        <p:txBody>
-          <a:bodyPr wrap="square" lIns="0" tIns="0" rIns="0" bIns="0" rtlCol="0" anchor="ctr"/>
-          <a:lstStyle/>
-          <a:p>
-            <a:pPr marL="0" indent="0">
-              <a:buNone/>
-            </a:pPr>
-            <a:r>
-              <a:rPr lang="en-US" sz="1500" dirty="0">
+          <p:cNvSpPr/>
+          <p:nvPr/>
+        </p:nvSpPr>
+        <p:spPr>
+          <a:xfrm>
+            <a:off x="640080" y="987552"/>
+            <a:ext cx="10881360" cy="365760"/>
+          </a:xfrm>
+          <a:prstGeom prst="rect">
+            <a:avLst/>
+          </a:prstGeom>
+          <a:noFill/>
+          <a:ln/>
+        </p:spPr>
+        <p:txBody>
+          <a:bodyPr wrap="square" lIns="0" tIns="0" rIns="0" bIns="0" rtlCol="0" anchor="ctr"/>
+          <a:lstStyle/>
+          <a:p>
+            <a:pPr indent="0" marL="0">
+              <a:buNone/>
+            </a:pPr>
+            <a:r>
+              <a:rPr lang="en-US" sz="1300" dirty="0">
                 <a:solidFill>
                   <a:srgbClr val="6B7280"/>
                 </a:solidFill>
@@ -1748,7 +5240,7 @@
               </a:rPr>
               <a:t>Решение о первичном распределении принимается 15 октября — до старта продаж</a:t>
             </a:r>
-            <a:endParaRPr lang="en-US" sz="1500" dirty="0"/>
+            <a:endParaRPr lang="en-US" sz="1300" dirty="0"/>
           </a:p>
         </p:txBody>
       </p:sp>
@@ -1760,25 +5252,18 @@
         </p:nvSpPr>
         <p:spPr>
           <a:xfrm>
-            <a:off x="640080" y="1965960"/>
-            <a:ext cx="5074920" cy="2788920"/>
+            <a:off x="640080" y="1828800"/>
+            <a:ext cx="5074920" cy="2651760"/>
           </a:xfrm>
           <a:prstGeom prst="roundRect">
             <a:avLst>
-              <a:gd name="adj" fmla="val 2623"/>
+              <a:gd name="adj" fmla="val 2759"/>
             </a:avLst>
           </a:prstGeom>
           <a:solidFill>
-            <a:srgbClr val="EAF0FB"/>
+            <a:srgbClr val="F1EFE8"/>
           </a:solidFill>
           <a:ln/>
-          <a:effectLst>
-            <a:outerShdw blurRad="101600" dist="38100" dir="5400000" algn="bl" rotWithShape="0">
-              <a:srgbClr val="9AA5B1">
-                <a:alpha val="25000"/>
-              </a:srgbClr>
-            </a:outerShdw>
-          </a:effectLst>
         </p:spPr>
       </p:sp>
       <p:sp>
@@ -1789,14 +5274,14 @@
         </p:nvSpPr>
         <p:spPr>
           <a:xfrm>
-            <a:off x="1005840" y="2331720"/>
+            <a:off x="1005840" y="2194560"/>
             <a:ext cx="685800" cy="685800"/>
           </a:xfrm>
           <a:prstGeom prst="ellipse">
             <a:avLst/>
           </a:prstGeom>
           <a:solidFill>
-            <a:srgbClr val="B85042"/>
+            <a:srgbClr val="B61B3B"/>
           </a:solidFill>
           <a:ln/>
         </p:spPr>
@@ -1804,12 +5289,12 @@
       <p:sp>
         <p:nvSpPr>
           <p:cNvPr id="6" name="Text 4"/>
-          <p:cNvSpPr txBox="1"/>
-          <p:nvPr/>
-        </p:nvSpPr>
-        <p:spPr>
-          <a:xfrm>
-            <a:off x="1005840" y="2331720"/>
+          <p:cNvSpPr/>
+          <p:nvPr/>
+        </p:nvSpPr>
+        <p:spPr>
+          <a:xfrm>
+            <a:off x="1005840" y="2194560"/>
             <a:ext cx="685800" cy="685800"/>
           </a:xfrm>
           <a:prstGeom prst="rect">
@@ -1822,7 +5307,7 @@
           <a:bodyPr wrap="square" lIns="0" tIns="0" rIns="0" bIns="0" rtlCol="0" anchor="ctr"/>
           <a:lstStyle/>
           <a:p>
-            <a:pPr marL="0" indent="0" algn="ctr">
+            <a:pPr algn="ctr" indent="0" marL="0">
               <a:buNone/>
             </a:pPr>
             <a:r>
@@ -1843,31 +5328,31 @@
       <p:sp>
         <p:nvSpPr>
           <p:cNvPr id="7" name="Text 5"/>
-          <p:cNvSpPr txBox="1"/>
-          <p:nvPr/>
-        </p:nvSpPr>
-        <p:spPr>
-          <a:xfrm>
-            <a:off x="1874520" y="2350008"/>
-            <a:ext cx="3611880" cy="457200"/>
-          </a:xfrm>
-          <a:prstGeom prst="rect">
-            <a:avLst/>
-          </a:prstGeom>
-          <a:noFill/>
-          <a:ln/>
-        </p:spPr>
-        <p:txBody>
-          <a:bodyPr wrap="square" lIns="0" tIns="0" rIns="0" bIns="0" rtlCol="0" anchor="ctr"/>
-          <a:lstStyle/>
-          <a:p>
-            <a:pPr marL="0" indent="0">
+          <p:cNvSpPr/>
+          <p:nvPr/>
+        </p:nvSpPr>
+        <p:spPr>
+          <a:xfrm>
+            <a:off x="1874520" y="2212848"/>
+            <a:ext cx="3657600" cy="457200"/>
+          </a:xfrm>
+          <a:prstGeom prst="rect">
+            <a:avLst/>
+          </a:prstGeom>
+          <a:noFill/>
+          <a:ln/>
+        </p:spPr>
+        <p:txBody>
+          <a:bodyPr wrap="square" lIns="0" tIns="0" rIns="0" bIns="0" rtlCol="0" anchor="ctr"/>
+          <a:lstStyle/>
+          <a:p>
+            <a:pPr indent="0" marL="0">
               <a:buNone/>
             </a:pPr>
             <a:r>
               <a:rPr lang="en-US" sz="2200" b="1" dirty="0">
                 <a:solidFill>
-                  <a:srgbClr val="1E2761"/>
+                  <a:srgbClr val="323C32"/>
                 </a:solidFill>
                 <a:latin typeface="Cambria" pitchFamily="34" charset="0"/>
                 <a:ea typeface="Cambria" pitchFamily="34" charset="-122"/>
@@ -1882,31 +5367,31 @@
       <p:sp>
         <p:nvSpPr>
           <p:cNvPr id="8" name="Text 6"/>
-          <p:cNvSpPr txBox="1"/>
-          <p:nvPr/>
-        </p:nvSpPr>
-        <p:spPr>
-          <a:xfrm>
-            <a:off x="1874520" y="2752344"/>
-            <a:ext cx="3611880" cy="320040"/>
-          </a:xfrm>
-          <a:prstGeom prst="rect">
-            <a:avLst/>
-          </a:prstGeom>
-          <a:noFill/>
-          <a:ln/>
-        </p:spPr>
-        <p:txBody>
-          <a:bodyPr wrap="square" lIns="0" tIns="0" rIns="0" bIns="0" rtlCol="0" anchor="ctr"/>
-          <a:lstStyle/>
-          <a:p>
-            <a:pPr marL="0" indent="0">
-              <a:buNone/>
-            </a:pPr>
-            <a:r>
-              <a:rPr lang="en-US" sz="1100" kern="0" spc="100" dirty="0">
-                <a:solidFill>
-                  <a:srgbClr val="B85042"/>
+          <p:cNvSpPr/>
+          <p:nvPr/>
+        </p:nvSpPr>
+        <p:spPr>
+          <a:xfrm>
+            <a:off x="1874520" y="2615184"/>
+            <a:ext cx="3657600" cy="320040"/>
+          </a:xfrm>
+          <a:prstGeom prst="rect">
+            <a:avLst/>
+          </a:prstGeom>
+          <a:noFill/>
+          <a:ln/>
+        </p:spPr>
+        <p:txBody>
+          <a:bodyPr wrap="square" lIns="0" tIns="0" rIns="0" bIns="0" rtlCol="0" anchor="ctr"/>
+          <a:lstStyle/>
+          <a:p>
+            <a:pPr indent="0" marL="0">
+              <a:buNone/>
+            </a:pPr>
+            <a:r>
+              <a:rPr lang="en-US" sz="1100" spc="100" kern="0" dirty="0">
+                <a:solidFill>
+                  <a:srgbClr val="B61B3B"/>
                 </a:solidFill>
                 <a:latin typeface="Calibri" pitchFamily="34" charset="0"/>
                 <a:ea typeface="Calibri" pitchFamily="34" charset="-122"/>
@@ -1921,25 +5406,25 @@
       <p:sp>
         <p:nvSpPr>
           <p:cNvPr id="9" name="Text 7"/>
-          <p:cNvSpPr txBox="1"/>
-          <p:nvPr/>
-        </p:nvSpPr>
-        <p:spPr>
-          <a:xfrm>
-            <a:off x="1005840" y="3383280"/>
-            <a:ext cx="4343400" cy="1188720"/>
-          </a:xfrm>
-          <a:prstGeom prst="rect">
-            <a:avLst/>
-          </a:prstGeom>
-          <a:noFill/>
-          <a:ln/>
-        </p:spPr>
-        <p:txBody>
-          <a:bodyPr wrap="square" lIns="0" tIns="0" rIns="0" bIns="0" rtlCol="0" anchor="ctr"/>
-          <a:lstStyle/>
-          <a:p>
-            <a:pPr marL="0" indent="0">
+          <p:cNvSpPr/>
+          <p:nvPr/>
+        </p:nvSpPr>
+        <p:spPr>
+          <a:xfrm>
+            <a:off x="1005840" y="3154680"/>
+            <a:ext cx="4343400" cy="1097280"/>
+          </a:xfrm>
+          <a:prstGeom prst="rect">
+            <a:avLst/>
+          </a:prstGeom>
+          <a:noFill/>
+          <a:ln/>
+        </p:spPr>
+        <p:txBody>
+          <a:bodyPr wrap="square" lIns="0" tIns="0" rIns="0" bIns="0" rtlCol="0" anchor="t"/>
+          <a:lstStyle/>
+          <a:p>
+            <a:pPr indent="0" marL="0">
               <a:lnSpc>
                 <a:spcPct val="125000"/>
               </a:lnSpc>
@@ -1968,25 +5453,18 @@
         </p:nvSpPr>
         <p:spPr>
           <a:xfrm>
-            <a:off x="5989320" y="1965960"/>
-            <a:ext cx="5074920" cy="2788920"/>
+            <a:off x="5989320" y="1828800"/>
+            <a:ext cx="5074920" cy="2651760"/>
           </a:xfrm>
           <a:prstGeom prst="roundRect">
             <a:avLst>
-              <a:gd name="adj" fmla="val 2623"/>
+              <a:gd name="adj" fmla="val 2759"/>
             </a:avLst>
           </a:prstGeom>
           <a:solidFill>
-            <a:srgbClr val="EAF0FB"/>
+            <a:srgbClr val="F1EFE8"/>
           </a:solidFill>
           <a:ln/>
-          <a:effectLst>
-            <a:outerShdw blurRad="101600" dist="38100" dir="5400000" algn="bl" rotWithShape="0">
-              <a:srgbClr val="9AA5B1">
-                <a:alpha val="25000"/>
-              </a:srgbClr>
-            </a:outerShdw>
-          </a:effectLst>
         </p:spPr>
       </p:sp>
       <p:sp>
@@ -1997,14 +5475,14 @@
         </p:nvSpPr>
         <p:spPr>
           <a:xfrm>
-            <a:off x="6355080" y="2331720"/>
+            <a:off x="6355080" y="2194560"/>
             <a:ext cx="685800" cy="685800"/>
           </a:xfrm>
           <a:prstGeom prst="ellipse">
             <a:avLst/>
           </a:prstGeom>
           <a:solidFill>
-            <a:srgbClr val="1E2761"/>
+            <a:srgbClr val="323C32"/>
           </a:solidFill>
           <a:ln/>
         </p:spPr>
@@ -2012,12 +5490,12 @@
       <p:sp>
         <p:nvSpPr>
           <p:cNvPr id="12" name="Text 10"/>
-          <p:cNvSpPr txBox="1"/>
-          <p:nvPr/>
-        </p:nvSpPr>
-        <p:spPr>
-          <a:xfrm>
-            <a:off x="6355080" y="2331720"/>
+          <p:cNvSpPr/>
+          <p:nvPr/>
+        </p:nvSpPr>
+        <p:spPr>
+          <a:xfrm>
+            <a:off x="6355080" y="2194560"/>
             <a:ext cx="685800" cy="685800"/>
           </a:xfrm>
           <a:prstGeom prst="rect">
@@ -2030,7 +5508,7 @@
           <a:bodyPr wrap="square" lIns="0" tIns="0" rIns="0" bIns="0" rtlCol="0" anchor="ctr"/>
           <a:lstStyle/>
           <a:p>
-            <a:pPr marL="0" indent="0" algn="ctr">
+            <a:pPr algn="ctr" indent="0" marL="0">
               <a:buNone/>
             </a:pPr>
             <a:r>
@@ -2051,31 +5529,31 @@
       <p:sp>
         <p:nvSpPr>
           <p:cNvPr id="13" name="Text 11"/>
-          <p:cNvSpPr txBox="1"/>
-          <p:nvPr/>
-        </p:nvSpPr>
-        <p:spPr>
-          <a:xfrm>
-            <a:off x="7223760" y="2350008"/>
-            <a:ext cx="3611880" cy="457200"/>
-          </a:xfrm>
-          <a:prstGeom prst="rect">
-            <a:avLst/>
-          </a:prstGeom>
-          <a:noFill/>
-          <a:ln/>
-        </p:spPr>
-        <p:txBody>
-          <a:bodyPr wrap="square" lIns="0" tIns="0" rIns="0" bIns="0" rtlCol="0" anchor="ctr"/>
-          <a:lstStyle/>
-          <a:p>
-            <a:pPr marL="0" indent="0">
+          <p:cNvSpPr/>
+          <p:nvPr/>
+        </p:nvSpPr>
+        <p:spPr>
+          <a:xfrm>
+            <a:off x="7223760" y="2212848"/>
+            <a:ext cx="3657600" cy="457200"/>
+          </a:xfrm>
+          <a:prstGeom prst="rect">
+            <a:avLst/>
+          </a:prstGeom>
+          <a:noFill/>
+          <a:ln/>
+        </p:spPr>
+        <p:txBody>
+          <a:bodyPr wrap="square" lIns="0" tIns="0" rIns="0" bIns="0" rtlCol="0" anchor="ctr"/>
+          <a:lstStyle/>
+          <a:p>
+            <a:pPr indent="0" marL="0">
               <a:buNone/>
             </a:pPr>
             <a:r>
               <a:rPr lang="en-US" sz="2200" b="1" dirty="0">
                 <a:solidFill>
-                  <a:srgbClr val="1E2761"/>
+                  <a:srgbClr val="323C32"/>
                 </a:solidFill>
                 <a:latin typeface="Cambria" pitchFamily="34" charset="0"/>
                 <a:ea typeface="Cambria" pitchFamily="34" charset="-122"/>
@@ -2090,31 +5568,31 @@
       <p:sp>
         <p:nvSpPr>
           <p:cNvPr id="14" name="Text 12"/>
-          <p:cNvSpPr txBox="1"/>
-          <p:nvPr/>
-        </p:nvSpPr>
-        <p:spPr>
-          <a:xfrm>
-            <a:off x="7223760" y="2752344"/>
-            <a:ext cx="3611880" cy="320040"/>
-          </a:xfrm>
-          <a:prstGeom prst="rect">
-            <a:avLst/>
-          </a:prstGeom>
-          <a:noFill/>
-          <a:ln/>
-        </p:spPr>
-        <p:txBody>
-          <a:bodyPr wrap="square" lIns="0" tIns="0" rIns="0" bIns="0" rtlCol="0" anchor="ctr"/>
-          <a:lstStyle/>
-          <a:p>
-            <a:pPr marL="0" indent="0">
-              <a:buNone/>
-            </a:pPr>
-            <a:r>
-              <a:rPr lang="en-US" sz="1100" kern="0" spc="100" dirty="0">
-                <a:solidFill>
-                  <a:srgbClr val="1E2761"/>
+          <p:cNvSpPr/>
+          <p:nvPr/>
+        </p:nvSpPr>
+        <p:spPr>
+          <a:xfrm>
+            <a:off x="7223760" y="2615184"/>
+            <a:ext cx="3657600" cy="320040"/>
+          </a:xfrm>
+          <a:prstGeom prst="rect">
+            <a:avLst/>
+          </a:prstGeom>
+          <a:noFill/>
+          <a:ln/>
+        </p:spPr>
+        <p:txBody>
+          <a:bodyPr wrap="square" lIns="0" tIns="0" rIns="0" bIns="0" rtlCol="0" anchor="ctr"/>
+          <a:lstStyle/>
+          <a:p>
+            <a:pPr indent="0" marL="0">
+              <a:buNone/>
+            </a:pPr>
+            <a:r>
+              <a:rPr lang="en-US" sz="1100" spc="100" kern="0" dirty="0">
+                <a:solidFill>
+                  <a:srgbClr val="323C32"/>
                 </a:solidFill>
                 <a:latin typeface="Calibri" pitchFamily="34" charset="0"/>
                 <a:ea typeface="Calibri" pitchFamily="34" charset="-122"/>
@@ -2129,25 +5607,25 @@
       <p:sp>
         <p:nvSpPr>
           <p:cNvPr id="15" name="Text 13"/>
-          <p:cNvSpPr txBox="1"/>
-          <p:nvPr/>
-        </p:nvSpPr>
-        <p:spPr>
-          <a:xfrm>
-            <a:off x="6355080" y="3383280"/>
-            <a:ext cx="4343400" cy="1188720"/>
-          </a:xfrm>
-          <a:prstGeom prst="rect">
-            <a:avLst/>
-          </a:prstGeom>
-          <a:noFill/>
-          <a:ln/>
-        </p:spPr>
-        <p:txBody>
-          <a:bodyPr wrap="square" lIns="0" tIns="0" rIns="0" bIns="0" rtlCol="0" anchor="ctr"/>
-          <a:lstStyle/>
-          <a:p>
-            <a:pPr marL="0" indent="0">
+          <p:cNvSpPr/>
+          <p:nvPr/>
+        </p:nvSpPr>
+        <p:spPr>
+          <a:xfrm>
+            <a:off x="6355080" y="3154680"/>
+            <a:ext cx="4343400" cy="1097280"/>
+          </a:xfrm>
+          <a:prstGeom prst="rect">
+            <a:avLst/>
+          </a:prstGeom>
+          <a:noFill/>
+          <a:ln/>
+        </p:spPr>
+        <p:txBody>
+          <a:bodyPr wrap="square" lIns="0" tIns="0" rIns="0" bIns="0" rtlCol="0" anchor="t"/>
+          <a:lstStyle/>
+          <a:p>
+            <a:pPr indent="0" marL="0">
               <a:lnSpc>
                 <a:spcPct val="125000"/>
               </a:lnSpc>
@@ -2171,51 +5649,12 @@
       <p:sp>
         <p:nvSpPr>
           <p:cNvPr id="16" name="Text 14"/>
-          <p:cNvSpPr txBox="1"/>
-          <p:nvPr/>
-        </p:nvSpPr>
-        <p:spPr>
-          <a:xfrm>
-            <a:off x="640080" y="5074920"/>
-            <a:ext cx="10881360" cy="457200"/>
-          </a:xfrm>
-          <a:prstGeom prst="rect">
-            <a:avLst/>
-          </a:prstGeom>
-          <a:noFill/>
-          <a:ln/>
-        </p:spPr>
-        <p:txBody>
-          <a:bodyPr wrap="square" lIns="0" tIns="0" rIns="0" bIns="0" rtlCol="0" anchor="ctr"/>
-          <a:lstStyle/>
-          <a:p>
-            <a:pPr marL="0" indent="0">
-              <a:buNone/>
-            </a:pPr>
-            <a:r>
-              <a:rPr lang="en-US" sz="1300" i="1" dirty="0">
-                <a:solidFill>
-                  <a:srgbClr val="6B7280"/>
-                </a:solidFill>
-                <a:latin typeface="Calibri" pitchFamily="34" charset="0"/>
-                <a:ea typeface="Calibri" pitchFamily="34" charset="-122"/>
-                <a:cs typeface="Calibri" pitchFamily="34" charset="-120"/>
-              </a:rPr>
-              <a:t>Работа продолжает более раннюю попытку по кварталу 1, доработанную с учётом ревью научного руководителя.</a:t>
-            </a:r>
-            <a:endParaRPr lang="en-US" sz="1300" dirty="0"/>
-          </a:p>
-        </p:txBody>
-      </p:sp>
-      <p:sp>
-        <p:nvSpPr>
-          <p:cNvPr id="17" name="Text 15"/>
-          <p:cNvSpPr txBox="1"/>
-          <p:nvPr/>
-        </p:nvSpPr>
-        <p:spPr>
-          <a:xfrm>
-            <a:off x="640080" y="5806440"/>
+          <p:cNvSpPr/>
+          <p:nvPr/>
+        </p:nvSpPr>
+        <p:spPr>
+          <a:xfrm>
+            <a:off x="640080" y="4937760"/>
             <a:ext cx="10881360" cy="548640"/>
           </a:xfrm>
           <a:prstGeom prst="rect">
@@ -2228,19 +5667,19 @@
           <a:bodyPr wrap="square" lIns="0" tIns="0" rIns="0" bIns="0" rtlCol="0" anchor="ctr"/>
           <a:lstStyle/>
           <a:p>
-            <a:pPr marL="0" indent="0">
+            <a:pPr indent="0" marL="0">
               <a:buNone/>
             </a:pPr>
             <a:r>
               <a:rPr lang="en-US" sz="1600" b="1" dirty="0">
                 <a:solidFill>
-                  <a:srgbClr val="1E2761"/>
+                  <a:srgbClr val="323C32"/>
                 </a:solidFill>
                 <a:latin typeface="Cambria" pitchFamily="34" charset="0"/>
                 <a:ea typeface="Cambria" pitchFamily="34" charset="-122"/>
                 <a:cs typeface="Cambria" pitchFamily="34" charset="-120"/>
               </a:rPr>
-              <a:t>Цель: построить обоснованные правила распределения и оценить их точность против текущей практики</a:t>
+              <a:t>Цель: найти обоснованное правило распределения и честно проверить его точность</a:t>
             </a:r>
             <a:endParaRPr lang="en-US" sz="1600" dirty="0"/>
           </a:p>
@@ -2248,7 +5687,7 @@
       </p:sp>
       <p:sp>
         <p:nvSpPr>
-          <p:cNvPr id="18" name="Text 16"/>
+          <p:cNvPr id="17" name="Text 15"/>
           <p:cNvSpPr/>
           <p:nvPr/>
         </p:nvSpPr>
@@ -2267,7 +5706,7 @@
           <a:bodyPr wrap="square" rtlCol="0" anchor="ctr"/>
           <a:lstStyle/>
           <a:p>
-            <a:pPr marL="0" indent="0" algn="r">
+            <a:pPr algn="r" indent="0" marL="0">
               <a:buNone/>
             </a:pPr>
             <a:r>
@@ -2301,7 +5740,6 @@
         <a:solidFill>
           <a:srgbClr val="FFFFFF"/>
         </a:solidFill>
-        <a:effectLst/>
       </p:bgPr>
     </p:bg>
     <p:spTree>
@@ -2321,12 +5759,12 @@
       <p:sp>
         <p:nvSpPr>
           <p:cNvPr id="2" name="Text 0"/>
-          <p:cNvSpPr txBox="1"/>
-          <p:nvPr/>
-        </p:nvSpPr>
-        <p:spPr>
-          <a:xfrm>
-            <a:off x="640080" y="457200"/>
+          <p:cNvSpPr/>
+          <p:nvPr/>
+        </p:nvSpPr>
+        <p:spPr>
+          <a:xfrm>
+            <a:off x="640080" y="411480"/>
             <a:ext cx="10881360" cy="640080"/>
           </a:xfrm>
           <a:prstGeom prst="rect">
@@ -2339,13 +5777,13 @@
           <a:bodyPr wrap="square" lIns="0" tIns="0" rIns="0" bIns="0" rtlCol="0" anchor="ctr"/>
           <a:lstStyle/>
           <a:p>
-            <a:pPr marL="0" indent="0">
-              <a:buNone/>
-            </a:pPr>
-            <a:r>
-              <a:rPr lang="en-US" sz="3000" b="1" dirty="0">
-                <a:solidFill>
-                  <a:srgbClr val="1E2761"/>
+            <a:pPr indent="0" marL="0">
+              <a:buNone/>
+            </a:pPr>
+            <a:r>
+              <a:rPr lang="en-US" sz="2800" b="1" dirty="0">
+                <a:solidFill>
+                  <a:srgbClr val="323C32"/>
                 </a:solidFill>
                 <a:latin typeface="Cambria" pitchFamily="34" charset="0"/>
                 <a:ea typeface="Cambria" pitchFamily="34" charset="-122"/>
@@ -2353,7 +5791,7 @@
               </a:rPr>
               <a:t>Постановка задачи</a:t>
             </a:r>
-            <a:endParaRPr lang="en-US" sz="3000" dirty="0"/>
+            <a:endParaRPr lang="en-US" sz="2800" dirty="0"/>
           </a:p>
         </p:txBody>
       </p:sp>
@@ -2365,7 +5803,7 @@
         </p:nvSpPr>
         <p:spPr>
           <a:xfrm>
-            <a:off x="640080" y="1417320"/>
+            <a:off x="640080" y="1325880"/>
             <a:ext cx="10881360" cy="1051560"/>
           </a:xfrm>
           <a:prstGeom prst="roundRect">
@@ -2374,7 +5812,7 @@
             </a:avLst>
           </a:prstGeom>
           <a:solidFill>
-            <a:srgbClr val="EAF0FB"/>
+            <a:srgbClr val="F1EFE8"/>
           </a:solidFill>
           <a:ln/>
         </p:spPr>
@@ -2387,14 +5825,14 @@
         </p:nvSpPr>
         <p:spPr>
           <a:xfrm>
-            <a:off x="960120" y="1673352"/>
+            <a:off x="960120" y="1581912"/>
             <a:ext cx="548640" cy="548640"/>
           </a:xfrm>
           <a:prstGeom prst="ellipse">
             <a:avLst/>
           </a:prstGeom>
           <a:solidFill>
-            <a:srgbClr val="1E2761"/>
+            <a:srgbClr val="B61B3B"/>
           </a:solidFill>
           <a:ln/>
         </p:spPr>
@@ -2402,12 +5840,12 @@
       <p:sp>
         <p:nvSpPr>
           <p:cNvPr id="5" name="Text 3"/>
-          <p:cNvSpPr txBox="1"/>
-          <p:nvPr/>
-        </p:nvSpPr>
-        <p:spPr>
-          <a:xfrm>
-            <a:off x="960120" y="1673352"/>
+          <p:cNvSpPr/>
+          <p:nvPr/>
+        </p:nvSpPr>
+        <p:spPr>
+          <a:xfrm>
+            <a:off x="960120" y="1581912"/>
             <a:ext cx="548640" cy="548640"/>
           </a:xfrm>
           <a:prstGeom prst="rect">
@@ -2420,13 +5858,13 @@
           <a:bodyPr wrap="square" lIns="0" tIns="0" rIns="0" bIns="0" rtlCol="0" anchor="ctr"/>
           <a:lstStyle/>
           <a:p>
-            <a:pPr marL="0" indent="0" algn="ctr">
-              <a:buNone/>
-            </a:pPr>
-            <a:r>
-              <a:rPr lang="en-US" sz="2000" b="1" dirty="0">
-                <a:solidFill>
-                  <a:srgbClr val="C9A227"/>
+            <a:pPr algn="ctr" indent="0" marL="0">
+              <a:buNone/>
+            </a:pPr>
+            <a:r>
+              <a:rPr lang="en-US" sz="1800" b="1" dirty="0">
+                <a:solidFill>
+                  <a:srgbClr val="FFFFFF"/>
                 </a:solidFill>
                 <a:latin typeface="Cambria" pitchFamily="34" charset="0"/>
                 <a:ea typeface="Cambria" pitchFamily="34" charset="-122"/>
@@ -2434,19 +5872,19 @@
               </a:rPr>
               <a:t>1</a:t>
             </a:r>
-            <a:endParaRPr lang="en-US" sz="2000" dirty="0"/>
+            <a:endParaRPr lang="en-US" sz="1800" dirty="0"/>
           </a:p>
         </p:txBody>
       </p:sp>
       <p:sp>
         <p:nvSpPr>
           <p:cNvPr id="6" name="Text 4"/>
-          <p:cNvSpPr txBox="1"/>
-          <p:nvPr/>
-        </p:nvSpPr>
-        <p:spPr>
-          <a:xfrm>
-            <a:off x="1828800" y="1545336"/>
+          <p:cNvSpPr/>
+          <p:nvPr/>
+        </p:nvSpPr>
+        <p:spPr>
+          <a:xfrm>
+            <a:off x="1828800" y="1435608"/>
             <a:ext cx="3291840" cy="822960"/>
           </a:xfrm>
           <a:prstGeom prst="rect">
@@ -2459,13 +5897,13 @@
           <a:bodyPr wrap="square" lIns="0" tIns="0" rIns="0" bIns="0" rtlCol="0" anchor="ctr"/>
           <a:lstStyle/>
           <a:p>
-            <a:pPr marL="0" indent="0">
+            <a:pPr indent="0" marL="0">
               <a:buNone/>
             </a:pPr>
             <a:r>
               <a:rPr lang="en-US" sz="1600" b="1" dirty="0">
                 <a:solidFill>
-                  <a:srgbClr val="1E2761"/>
+                  <a:srgbClr val="323C32"/>
                 </a:solidFill>
                 <a:latin typeface="Cambria" pitchFamily="34" charset="0"/>
                 <a:ea typeface="Cambria" pitchFamily="34" charset="-122"/>
@@ -2480,12 +5918,12 @@
       <p:sp>
         <p:nvSpPr>
           <p:cNvPr id="7" name="Text 5"/>
-          <p:cNvSpPr txBox="1"/>
-          <p:nvPr/>
-        </p:nvSpPr>
-        <p:spPr>
-          <a:xfrm>
-            <a:off x="5257800" y="1545336"/>
+          <p:cNvSpPr/>
+          <p:nvPr/>
+        </p:nvSpPr>
+        <p:spPr>
+          <a:xfrm>
+            <a:off x="5257800" y="1435608"/>
             <a:ext cx="6035040" cy="822960"/>
           </a:xfrm>
           <a:prstGeom prst="rect">
@@ -2498,7 +5936,7 @@
           <a:bodyPr wrap="square" lIns="0" tIns="0" rIns="0" bIns="0" rtlCol="0" anchor="ctr"/>
           <a:lstStyle/>
           <a:p>
-            <a:pPr marL="0" indent="0">
+            <a:pPr indent="0" marL="0">
               <a:buNone/>
             </a:pPr>
             <a:r>
@@ -2524,7 +5962,7 @@
         </p:nvSpPr>
         <p:spPr>
           <a:xfrm>
-            <a:off x="640080" y="2624328"/>
+            <a:off x="640080" y="2532888"/>
             <a:ext cx="10881360" cy="1051560"/>
           </a:xfrm>
           <a:prstGeom prst="roundRect">
@@ -2546,14 +5984,14 @@
         </p:nvSpPr>
         <p:spPr>
           <a:xfrm>
-            <a:off x="960120" y="2880360"/>
+            <a:off x="960120" y="2788920"/>
             <a:ext cx="548640" cy="548640"/>
           </a:xfrm>
           <a:prstGeom prst="ellipse">
             <a:avLst/>
           </a:prstGeom>
           <a:solidFill>
-            <a:srgbClr val="1E2761"/>
+            <a:srgbClr val="B61B3B"/>
           </a:solidFill>
           <a:ln/>
         </p:spPr>
@@ -2561,12 +5999,12 @@
       <p:sp>
         <p:nvSpPr>
           <p:cNvPr id="10" name="Text 8"/>
-          <p:cNvSpPr txBox="1"/>
-          <p:nvPr/>
-        </p:nvSpPr>
-        <p:spPr>
-          <a:xfrm>
-            <a:off x="960120" y="2880360"/>
+          <p:cNvSpPr/>
+          <p:nvPr/>
+        </p:nvSpPr>
+        <p:spPr>
+          <a:xfrm>
+            <a:off x="960120" y="2788920"/>
             <a:ext cx="548640" cy="548640"/>
           </a:xfrm>
           <a:prstGeom prst="rect">
@@ -2579,13 +6017,13 @@
           <a:bodyPr wrap="square" lIns="0" tIns="0" rIns="0" bIns="0" rtlCol="0" anchor="ctr"/>
           <a:lstStyle/>
           <a:p>
-            <a:pPr marL="0" indent="0" algn="ctr">
-              <a:buNone/>
-            </a:pPr>
-            <a:r>
-              <a:rPr lang="en-US" sz="2000" b="1" dirty="0">
-                <a:solidFill>
-                  <a:srgbClr val="C9A227"/>
+            <a:pPr algn="ctr" indent="0" marL="0">
+              <a:buNone/>
+            </a:pPr>
+            <a:r>
+              <a:rPr lang="en-US" sz="1800" b="1" dirty="0">
+                <a:solidFill>
+                  <a:srgbClr val="FFFFFF"/>
                 </a:solidFill>
                 <a:latin typeface="Cambria" pitchFamily="34" charset="0"/>
                 <a:ea typeface="Cambria" pitchFamily="34" charset="-122"/>
@@ -2593,19 +6031,19 @@
               </a:rPr>
               <a:t>2</a:t>
             </a:r>
-            <a:endParaRPr lang="en-US" sz="2000" dirty="0"/>
+            <a:endParaRPr lang="en-US" sz="1800" dirty="0"/>
           </a:p>
         </p:txBody>
       </p:sp>
       <p:sp>
         <p:nvSpPr>
           <p:cNvPr id="11" name="Text 9"/>
-          <p:cNvSpPr txBox="1"/>
-          <p:nvPr/>
-        </p:nvSpPr>
-        <p:spPr>
-          <a:xfrm>
-            <a:off x="1828800" y="2752344"/>
+          <p:cNvSpPr/>
+          <p:nvPr/>
+        </p:nvSpPr>
+        <p:spPr>
+          <a:xfrm>
+            <a:off x="1828800" y="2642616"/>
             <a:ext cx="3291840" cy="822960"/>
           </a:xfrm>
           <a:prstGeom prst="rect">
@@ -2618,19 +6056,19 @@
           <a:bodyPr wrap="square" lIns="0" tIns="0" rIns="0" bIns="0" rtlCol="0" anchor="ctr"/>
           <a:lstStyle/>
           <a:p>
-            <a:pPr marL="0" indent="0">
+            <a:pPr indent="0" marL="0">
               <a:buNone/>
             </a:pPr>
             <a:r>
               <a:rPr lang="en-US" sz="1600" b="1" dirty="0">
                 <a:solidFill>
-                  <a:srgbClr val="1E2761"/>
+                  <a:srgbClr val="323C32"/>
                 </a:solidFill>
                 <a:latin typeface="Cambria" pitchFamily="34" charset="0"/>
                 <a:ea typeface="Cambria" pitchFamily="34" charset="-122"/>
                 <a:cs typeface="Cambria" pitchFamily="34" charset="-120"/>
               </a:rPr>
-              <a:t>Точка отсечки признаков</a:t>
+              <a:t>Момент решения</a:t>
             </a:r>
             <a:endParaRPr lang="en-US" sz="1600" dirty="0"/>
           </a:p>
@@ -2639,12 +6077,12 @@
       <p:sp>
         <p:nvSpPr>
           <p:cNvPr id="12" name="Text 10"/>
-          <p:cNvSpPr txBox="1"/>
-          <p:nvPr/>
-        </p:nvSpPr>
-        <p:spPr>
-          <a:xfrm>
-            <a:off x="5257800" y="2752344"/>
+          <p:cNvSpPr/>
+          <p:nvPr/>
+        </p:nvSpPr>
+        <p:spPr>
+          <a:xfrm>
+            <a:off x="5257800" y="2642616"/>
             <a:ext cx="6035040" cy="822960"/>
           </a:xfrm>
           <a:prstGeom prst="rect">
@@ -2657,7 +6095,7 @@
           <a:bodyPr wrap="square" lIns="0" tIns="0" rIns="0" bIns="0" rtlCol="0" anchor="ctr"/>
           <a:lstStyle/>
           <a:p>
-            <a:pPr marL="0" indent="0">
+            <a:pPr indent="0" marL="0">
               <a:buNone/>
             </a:pPr>
             <a:r>
@@ -2669,7 +6107,7 @@
                 <a:ea typeface="Calibri" pitchFamily="34" charset="-122"/>
                 <a:cs typeface="Calibri" pitchFamily="34" charset="-120"/>
               </a:rPr>
-              <a:t>15 октября — только информация, доступная до старта продаж</a:t>
+              <a:t>15 октября — прогноз использует только данные, известные к этой дате</a:t>
             </a:r>
             <a:endParaRPr lang="en-US" sz="1500" dirty="0"/>
           </a:p>
@@ -2683,7 +6121,7 @@
         </p:nvSpPr>
         <p:spPr>
           <a:xfrm>
-            <a:off x="640080" y="3831336"/>
+            <a:off x="640080" y="3739896"/>
             <a:ext cx="10881360" cy="1051560"/>
           </a:xfrm>
           <a:prstGeom prst="roundRect">
@@ -2692,7 +6130,7 @@
             </a:avLst>
           </a:prstGeom>
           <a:solidFill>
-            <a:srgbClr val="EAF0FB"/>
+            <a:srgbClr val="F1EFE8"/>
           </a:solidFill>
           <a:ln/>
         </p:spPr>
@@ -2705,14 +6143,14 @@
         </p:nvSpPr>
         <p:spPr>
           <a:xfrm>
-            <a:off x="960120" y="4087368"/>
+            <a:off x="960120" y="3995928"/>
             <a:ext cx="548640" cy="548640"/>
           </a:xfrm>
           <a:prstGeom prst="ellipse">
             <a:avLst/>
           </a:prstGeom>
           <a:solidFill>
-            <a:srgbClr val="1E2761"/>
+            <a:srgbClr val="B61B3B"/>
           </a:solidFill>
           <a:ln/>
         </p:spPr>
@@ -2720,12 +6158,12 @@
       <p:sp>
         <p:nvSpPr>
           <p:cNvPr id="15" name="Text 13"/>
-          <p:cNvSpPr txBox="1"/>
-          <p:nvPr/>
-        </p:nvSpPr>
-        <p:spPr>
-          <a:xfrm>
-            <a:off x="960120" y="4087368"/>
+          <p:cNvSpPr/>
+          <p:nvPr/>
+        </p:nvSpPr>
+        <p:spPr>
+          <a:xfrm>
+            <a:off x="960120" y="3995928"/>
             <a:ext cx="548640" cy="548640"/>
           </a:xfrm>
           <a:prstGeom prst="rect">
@@ -2738,13 +6176,13 @@
           <a:bodyPr wrap="square" lIns="0" tIns="0" rIns="0" bIns="0" rtlCol="0" anchor="ctr"/>
           <a:lstStyle/>
           <a:p>
-            <a:pPr marL="0" indent="0" algn="ctr">
-              <a:buNone/>
-            </a:pPr>
-            <a:r>
-              <a:rPr lang="en-US" sz="2000" b="1" dirty="0">
-                <a:solidFill>
-                  <a:srgbClr val="C9A227"/>
+            <a:pPr algn="ctr" indent="0" marL="0">
+              <a:buNone/>
+            </a:pPr>
+            <a:r>
+              <a:rPr lang="en-US" sz="1800" b="1" dirty="0">
+                <a:solidFill>
+                  <a:srgbClr val="FFFFFF"/>
                 </a:solidFill>
                 <a:latin typeface="Cambria" pitchFamily="34" charset="0"/>
                 <a:ea typeface="Cambria" pitchFamily="34" charset="-122"/>
@@ -2752,19 +6190,19 @@
               </a:rPr>
               <a:t>3</a:t>
             </a:r>
-            <a:endParaRPr lang="en-US" sz="2000" dirty="0"/>
+            <a:endParaRPr lang="en-US" sz="1800" dirty="0"/>
           </a:p>
         </p:txBody>
       </p:sp>
       <p:sp>
         <p:nvSpPr>
           <p:cNvPr id="16" name="Text 14"/>
-          <p:cNvSpPr txBox="1"/>
-          <p:nvPr/>
-        </p:nvSpPr>
-        <p:spPr>
-          <a:xfrm>
-            <a:off x="1828800" y="3959352"/>
+          <p:cNvSpPr/>
+          <p:nvPr/>
+        </p:nvSpPr>
+        <p:spPr>
+          <a:xfrm>
+            <a:off x="1828800" y="3849624"/>
             <a:ext cx="3291840" cy="822960"/>
           </a:xfrm>
           <a:prstGeom prst="rect">
@@ -2777,13 +6215,13 @@
           <a:bodyPr wrap="square" lIns="0" tIns="0" rIns="0" bIns="0" rtlCol="0" anchor="ctr"/>
           <a:lstStyle/>
           <a:p>
-            <a:pPr marL="0" indent="0">
+            <a:pPr indent="0" marL="0">
               <a:buNone/>
             </a:pPr>
             <a:r>
               <a:rPr lang="en-US" sz="1600" b="1" dirty="0">
                 <a:solidFill>
-                  <a:srgbClr val="1E2761"/>
+                  <a:srgbClr val="323C32"/>
                 </a:solidFill>
                 <a:latin typeface="Cambria" pitchFamily="34" charset="0"/>
                 <a:ea typeface="Cambria" pitchFamily="34" charset="-122"/>
@@ -2798,12 +6236,12 @@
       <p:sp>
         <p:nvSpPr>
           <p:cNvPr id="17" name="Text 15"/>
-          <p:cNvSpPr txBox="1"/>
-          <p:nvPr/>
-        </p:nvSpPr>
-        <p:spPr>
-          <a:xfrm>
-            <a:off x="5257800" y="3959352"/>
+          <p:cNvSpPr/>
+          <p:nvPr/>
+        </p:nvSpPr>
+        <p:spPr>
+          <a:xfrm>
+            <a:off x="5257800" y="3849624"/>
             <a:ext cx="6035040" cy="822960"/>
           </a:xfrm>
           <a:prstGeom prst="rect">
@@ -2816,7 +6254,7 @@
           <a:bodyPr wrap="square" lIns="0" tIns="0" rIns="0" bIns="0" rtlCol="0" anchor="ctr"/>
           <a:lstStyle/>
           <a:p>
-            <a:pPr marL="0" indent="0">
+            <a:pPr indent="0" marL="0">
               <a:buNone/>
             </a:pPr>
             <a:r>
@@ -2828,7 +6266,7 @@
                 <a:ea typeface="Calibri" pitchFamily="34" charset="-122"/>
                 <a:cs typeface="Calibri" pitchFamily="34" charset="-120"/>
               </a:rPr>
-              <a:t>WAPE + bias (не MAPE — устойчивость к низким/нулевым продажам)</a:t>
+              <a:t>WAPE + bias (не MAPE — устойчивость к нулевым продажам)</a:t>
             </a:r>
             <a:endParaRPr lang="en-US" sz="1500" dirty="0"/>
           </a:p>
@@ -2842,7 +6280,7 @@
         </p:nvSpPr>
         <p:spPr>
           <a:xfrm>
-            <a:off x="640080" y="5038344"/>
+            <a:off x="640080" y="4946904"/>
             <a:ext cx="10881360" cy="1051560"/>
           </a:xfrm>
           <a:prstGeom prst="roundRect">
@@ -2864,14 +6302,14 @@
         </p:nvSpPr>
         <p:spPr>
           <a:xfrm>
-            <a:off x="960120" y="5294376"/>
+            <a:off x="960120" y="5202936"/>
             <a:ext cx="548640" cy="548640"/>
           </a:xfrm>
           <a:prstGeom prst="ellipse">
             <a:avLst/>
           </a:prstGeom>
           <a:solidFill>
-            <a:srgbClr val="1E2761"/>
+            <a:srgbClr val="B61B3B"/>
           </a:solidFill>
           <a:ln/>
         </p:spPr>
@@ -2879,12 +6317,12 @@
       <p:sp>
         <p:nvSpPr>
           <p:cNvPr id="20" name="Text 18"/>
-          <p:cNvSpPr txBox="1"/>
-          <p:nvPr/>
-        </p:nvSpPr>
-        <p:spPr>
-          <a:xfrm>
-            <a:off x="960120" y="5294376"/>
+          <p:cNvSpPr/>
+          <p:nvPr/>
+        </p:nvSpPr>
+        <p:spPr>
+          <a:xfrm>
+            <a:off x="960120" y="5202936"/>
             <a:ext cx="548640" cy="548640"/>
           </a:xfrm>
           <a:prstGeom prst="rect">
@@ -2897,13 +6335,13 @@
           <a:bodyPr wrap="square" lIns="0" tIns="0" rIns="0" bIns="0" rtlCol="0" anchor="ctr"/>
           <a:lstStyle/>
           <a:p>
-            <a:pPr marL="0" indent="0" algn="ctr">
-              <a:buNone/>
-            </a:pPr>
-            <a:r>
-              <a:rPr lang="en-US" sz="2000" b="1" dirty="0">
-                <a:solidFill>
-                  <a:srgbClr val="C9A227"/>
+            <a:pPr algn="ctr" indent="0" marL="0">
+              <a:buNone/>
+            </a:pPr>
+            <a:r>
+              <a:rPr lang="en-US" sz="1800" b="1" dirty="0">
+                <a:solidFill>
+                  <a:srgbClr val="FFFFFF"/>
                 </a:solidFill>
                 <a:latin typeface="Cambria" pitchFamily="34" charset="0"/>
                 <a:ea typeface="Cambria" pitchFamily="34" charset="-122"/>
@@ -2911,19 +6349,19 @@
               </a:rPr>
               <a:t>4</a:t>
             </a:r>
-            <a:endParaRPr lang="en-US" sz="2000" dirty="0"/>
+            <a:endParaRPr lang="en-US" sz="1800" dirty="0"/>
           </a:p>
         </p:txBody>
       </p:sp>
       <p:sp>
         <p:nvSpPr>
           <p:cNvPr id="21" name="Text 19"/>
-          <p:cNvSpPr txBox="1"/>
-          <p:nvPr/>
-        </p:nvSpPr>
-        <p:spPr>
-          <a:xfrm>
-            <a:off x="1828800" y="5166360"/>
+          <p:cNvSpPr/>
+          <p:nvPr/>
+        </p:nvSpPr>
+        <p:spPr>
+          <a:xfrm>
+            <a:off x="1828800" y="5056632"/>
             <a:ext cx="3291840" cy="822960"/>
           </a:xfrm>
           <a:prstGeom prst="rect">
@@ -2936,13 +6374,13 @@
           <a:bodyPr wrap="square" lIns="0" tIns="0" rIns="0" bIns="0" rtlCol="0" anchor="ctr"/>
           <a:lstStyle/>
           <a:p>
-            <a:pPr marL="0" indent="0">
+            <a:pPr indent="0" marL="0">
               <a:buNone/>
             </a:pPr>
             <a:r>
               <a:rPr lang="en-US" sz="1600" b="1" dirty="0">
                 <a:solidFill>
-                  <a:srgbClr val="1E2761"/>
+                  <a:srgbClr val="323C32"/>
                 </a:solidFill>
                 <a:latin typeface="Cambria" pitchFamily="34" charset="0"/>
                 <a:ea typeface="Cambria" pitchFamily="34" charset="-122"/>
@@ -2957,12 +6395,12 @@
       <p:sp>
         <p:nvSpPr>
           <p:cNvPr id="22" name="Text 20"/>
-          <p:cNvSpPr txBox="1"/>
-          <p:nvPr/>
-        </p:nvSpPr>
-        <p:spPr>
-          <a:xfrm>
-            <a:off x="5257800" y="5166360"/>
+          <p:cNvSpPr/>
+          <p:nvPr/>
+        </p:nvSpPr>
+        <p:spPr>
+          <a:xfrm>
+            <a:off x="5257800" y="5056632"/>
             <a:ext cx="6035040" cy="822960"/>
           </a:xfrm>
           <a:prstGeom prst="rect">
@@ -2975,7 +6413,7 @@
           <a:bodyPr wrap="square" lIns="0" tIns="0" rIns="0" bIns="0" rtlCol="0" anchor="ctr"/>
           <a:lstStyle/>
           <a:p>
-            <a:pPr marL="0" indent="0">
+            <a:pPr indent="0" marL="0">
               <a:buNone/>
             </a:pPr>
             <a:r>
@@ -2987,7 +6425,7 @@
                 <a:ea typeface="Calibri" pitchFamily="34" charset="-122"/>
                 <a:cs typeface="Calibri" pitchFamily="34" charset="-120"/>
               </a:rPr>
-              <a:t>наивный LFL · fair share · Ridge-регрессия</a:t>
+              <a:t>LFL-бейзлайны (факт 2024 × коэффициент роста) · Ridge · Lasso · Random Forest</a:t>
             </a:r>
             <a:endParaRPr lang="en-US" sz="1500" dirty="0"/>
           </a:p>
@@ -3014,7 +6452,7 @@
           <a:bodyPr wrap="square" rtlCol="0" anchor="ctr"/>
           <a:lstStyle/>
           <a:p>
-            <a:pPr marL="0" indent="0" algn="r">
+            <a:pPr algn="r" indent="0" marL="0">
               <a:buNone/>
             </a:pPr>
             <a:r>
@@ -3048,7 +6486,6 @@
         <a:solidFill>
           <a:srgbClr val="FFFFFF"/>
         </a:solidFill>
-        <a:effectLst/>
       </p:bgPr>
     </p:bg>
     <p:spTree>
@@ -3068,12 +6505,12 @@
       <p:sp>
         <p:nvSpPr>
           <p:cNvPr id="2" name="Text 0"/>
-          <p:cNvSpPr txBox="1"/>
-          <p:nvPr/>
-        </p:nvSpPr>
-        <p:spPr>
-          <a:xfrm>
-            <a:off x="640080" y="457200"/>
+          <p:cNvSpPr/>
+          <p:nvPr/>
+        </p:nvSpPr>
+        <p:spPr>
+          <a:xfrm>
+            <a:off x="640080" y="411480"/>
             <a:ext cx="10881360" cy="640080"/>
           </a:xfrm>
           <a:prstGeom prst="rect">
@@ -3086,13 +6523,13 @@
           <a:bodyPr wrap="square" lIns="0" tIns="0" rIns="0" bIns="0" rtlCol="0" anchor="ctr"/>
           <a:lstStyle/>
           <a:p>
-            <a:pPr marL="0" indent="0">
-              <a:buNone/>
-            </a:pPr>
-            <a:r>
-              <a:rPr lang="en-US" sz="3000" b="1" dirty="0">
-                <a:solidFill>
-                  <a:srgbClr val="1E2761"/>
+            <a:pPr indent="0" marL="0">
+              <a:buNone/>
+            </a:pPr>
+            <a:r>
+              <a:rPr lang="en-US" sz="2800" b="1" dirty="0">
+                <a:solidFill>
+                  <a:srgbClr val="323C32"/>
                 </a:solidFill>
                 <a:latin typeface="Cambria" pitchFamily="34" charset="0"/>
                 <a:ea typeface="Cambria" pitchFamily="34" charset="-122"/>
@@ -3100,38 +6537,38 @@
               </a:rPr>
               <a:t>Данные и методология</a:t>
             </a:r>
-            <a:endParaRPr lang="en-US" sz="3000" dirty="0"/>
+            <a:endParaRPr lang="en-US" sz="2800" dirty="0"/>
           </a:p>
         </p:txBody>
       </p:sp>
       <p:sp>
         <p:nvSpPr>
           <p:cNvPr id="3" name="Text 1"/>
-          <p:cNvSpPr txBox="1"/>
-          <p:nvPr/>
-        </p:nvSpPr>
-        <p:spPr>
-          <a:xfrm>
-            <a:off x="640080" y="1417320"/>
-            <a:ext cx="3291840" cy="777240"/>
-          </a:xfrm>
-          <a:prstGeom prst="rect">
-            <a:avLst/>
-          </a:prstGeom>
-          <a:noFill/>
-          <a:ln/>
-        </p:spPr>
-        <p:txBody>
-          <a:bodyPr wrap="square" lIns="0" tIns="0" rIns="0" bIns="0" rtlCol="0" anchor="ctr"/>
-          <a:lstStyle/>
-          <a:p>
-            <a:pPr marL="0" indent="0">
+          <p:cNvSpPr/>
+          <p:nvPr/>
+        </p:nvSpPr>
+        <p:spPr>
+          <a:xfrm>
+            <a:off x="640080" y="1280160"/>
+            <a:ext cx="3291840" cy="731520"/>
+          </a:xfrm>
+          <a:prstGeom prst="rect">
+            <a:avLst/>
+          </a:prstGeom>
+          <a:noFill/>
+          <a:ln/>
+        </p:spPr>
+        <p:txBody>
+          <a:bodyPr wrap="square" lIns="0" tIns="0" rIns="0" bIns="0" rtlCol="0" anchor="ctr"/>
+          <a:lstStyle/>
+          <a:p>
+            <a:pPr indent="0" marL="0">
               <a:buNone/>
             </a:pPr>
             <a:r>
               <a:rPr lang="en-US" sz="3400" b="1" dirty="0">
                 <a:solidFill>
-                  <a:srgbClr val="C9A227"/>
+                  <a:srgbClr val="B61B3B"/>
                 </a:solidFill>
                 <a:latin typeface="Cambria" pitchFamily="34" charset="0"/>
                 <a:ea typeface="Cambria" pitchFamily="34" charset="-122"/>
@@ -3146,25 +6583,25 @@
       <p:sp>
         <p:nvSpPr>
           <p:cNvPr id="4" name="Text 2"/>
-          <p:cNvSpPr txBox="1"/>
-          <p:nvPr/>
-        </p:nvSpPr>
-        <p:spPr>
-          <a:xfrm>
-            <a:off x="640080" y="2148840"/>
-            <a:ext cx="3291840" cy="457200"/>
-          </a:xfrm>
-          <a:prstGeom prst="rect">
-            <a:avLst/>
-          </a:prstGeom>
-          <a:noFill/>
-          <a:ln/>
-        </p:spPr>
-        <p:txBody>
-          <a:bodyPr wrap="square" lIns="0" tIns="0" rIns="0" bIns="0" rtlCol="0" anchor="ctr"/>
-          <a:lstStyle/>
-          <a:p>
-            <a:pPr marL="0" indent="0">
+          <p:cNvSpPr/>
+          <p:nvPr/>
+        </p:nvSpPr>
+        <p:spPr>
+          <a:xfrm>
+            <a:off x="640080" y="1965960"/>
+            <a:ext cx="3291840" cy="411480"/>
+          </a:xfrm>
+          <a:prstGeom prst="rect">
+            <a:avLst/>
+          </a:prstGeom>
+          <a:noFill/>
+          <a:ln/>
+        </p:spPr>
+        <p:txBody>
+          <a:bodyPr wrap="square" lIns="0" tIns="0" rIns="0" bIns="0" rtlCol="0" anchor="ctr"/>
+          <a:lstStyle/>
+          <a:p>
+            <a:pPr indent="0" marL="0">
               <a:buNone/>
             </a:pPr>
             <a:r>
@@ -3185,31 +6622,31 @@
       <p:sp>
         <p:nvSpPr>
           <p:cNvPr id="5" name="Text 3"/>
-          <p:cNvSpPr txBox="1"/>
-          <p:nvPr/>
-        </p:nvSpPr>
-        <p:spPr>
-          <a:xfrm>
-            <a:off x="4297680" y="1417320"/>
-            <a:ext cx="3291840" cy="777240"/>
-          </a:xfrm>
-          <a:prstGeom prst="rect">
-            <a:avLst/>
-          </a:prstGeom>
-          <a:noFill/>
-          <a:ln/>
-        </p:spPr>
-        <p:txBody>
-          <a:bodyPr wrap="square" lIns="0" tIns="0" rIns="0" bIns="0" rtlCol="0" anchor="ctr"/>
-          <a:lstStyle/>
-          <a:p>
-            <a:pPr marL="0" indent="0">
+          <p:cNvSpPr/>
+          <p:nvPr/>
+        </p:nvSpPr>
+        <p:spPr>
+          <a:xfrm>
+            <a:off x="4297680" y="1280160"/>
+            <a:ext cx="3291840" cy="731520"/>
+          </a:xfrm>
+          <a:prstGeom prst="rect">
+            <a:avLst/>
+          </a:prstGeom>
+          <a:noFill/>
+          <a:ln/>
+        </p:spPr>
+        <p:txBody>
+          <a:bodyPr wrap="square" lIns="0" tIns="0" rIns="0" bIns="0" rtlCol="0" anchor="ctr"/>
+          <a:lstStyle/>
+          <a:p>
+            <a:pPr indent="0" marL="0">
               <a:buNone/>
             </a:pPr>
             <a:r>
               <a:rPr lang="en-US" sz="3400" b="1" dirty="0">
                 <a:solidFill>
-                  <a:srgbClr val="C9A227"/>
+                  <a:srgbClr val="B61B3B"/>
                 </a:solidFill>
                 <a:latin typeface="Cambria" pitchFamily="34" charset="0"/>
                 <a:ea typeface="Cambria" pitchFamily="34" charset="-122"/>
@@ -3224,25 +6661,25 @@
       <p:sp>
         <p:nvSpPr>
           <p:cNvPr id="6" name="Text 4"/>
-          <p:cNvSpPr txBox="1"/>
-          <p:nvPr/>
-        </p:nvSpPr>
-        <p:spPr>
-          <a:xfrm>
-            <a:off x="4297680" y="2148840"/>
-            <a:ext cx="3291840" cy="457200"/>
-          </a:xfrm>
-          <a:prstGeom prst="rect">
-            <a:avLst/>
-          </a:prstGeom>
-          <a:noFill/>
-          <a:ln/>
-        </p:spPr>
-        <p:txBody>
-          <a:bodyPr wrap="square" lIns="0" tIns="0" rIns="0" bIns="0" rtlCol="0" anchor="ctr"/>
-          <a:lstStyle/>
-          <a:p>
-            <a:pPr marL="0" indent="0">
+          <p:cNvSpPr/>
+          <p:nvPr/>
+        </p:nvSpPr>
+        <p:spPr>
+          <a:xfrm>
+            <a:off x="4297680" y="1965960"/>
+            <a:ext cx="3291840" cy="411480"/>
+          </a:xfrm>
+          <a:prstGeom prst="rect">
+            <a:avLst/>
+          </a:prstGeom>
+          <a:noFill/>
+          <a:ln/>
+        </p:spPr>
+        <p:txBody>
+          <a:bodyPr wrap="square" lIns="0" tIns="0" rIns="0" bIns="0" rtlCol="0" anchor="ctr"/>
+          <a:lstStyle/>
+          <a:p>
+            <a:pPr indent="0" marL="0">
               <a:buNone/>
             </a:pPr>
             <a:r>
@@ -3263,31 +6700,31 @@
       <p:sp>
         <p:nvSpPr>
           <p:cNvPr id="7" name="Text 5"/>
-          <p:cNvSpPr txBox="1"/>
-          <p:nvPr/>
-        </p:nvSpPr>
-        <p:spPr>
-          <a:xfrm>
-            <a:off x="7955280" y="1417320"/>
-            <a:ext cx="3291840" cy="777240"/>
-          </a:xfrm>
-          <a:prstGeom prst="rect">
-            <a:avLst/>
-          </a:prstGeom>
-          <a:noFill/>
-          <a:ln/>
-        </p:spPr>
-        <p:txBody>
-          <a:bodyPr wrap="square" lIns="0" tIns="0" rIns="0" bIns="0" rtlCol="0" anchor="ctr"/>
-          <a:lstStyle/>
-          <a:p>
-            <a:pPr marL="0" indent="0">
+          <p:cNvSpPr/>
+          <p:nvPr/>
+        </p:nvSpPr>
+        <p:spPr>
+          <a:xfrm>
+            <a:off x="7955280" y="1280160"/>
+            <a:ext cx="3291840" cy="731520"/>
+          </a:xfrm>
+          <a:prstGeom prst="rect">
+            <a:avLst/>
+          </a:prstGeom>
+          <a:noFill/>
+          <a:ln/>
+        </p:spPr>
+        <p:txBody>
+          <a:bodyPr wrap="square" lIns="0" tIns="0" rIns="0" bIns="0" rtlCol="0" anchor="ctr"/>
+          <a:lstStyle/>
+          <a:p>
+            <a:pPr indent="0" marL="0">
               <a:buNone/>
             </a:pPr>
             <a:r>
               <a:rPr lang="en-US" sz="3400" b="1" dirty="0">
                 <a:solidFill>
-                  <a:srgbClr val="C9A227"/>
+                  <a:srgbClr val="B61B3B"/>
                 </a:solidFill>
                 <a:latin typeface="Cambria" pitchFamily="34" charset="0"/>
                 <a:ea typeface="Cambria" pitchFamily="34" charset="-122"/>
@@ -3302,25 +6739,25 @@
       <p:sp>
         <p:nvSpPr>
           <p:cNvPr id="8" name="Text 6"/>
-          <p:cNvSpPr txBox="1"/>
-          <p:nvPr/>
-        </p:nvSpPr>
-        <p:spPr>
-          <a:xfrm>
-            <a:off x="7955280" y="2148840"/>
-            <a:ext cx="3291840" cy="457200"/>
-          </a:xfrm>
-          <a:prstGeom prst="rect">
-            <a:avLst/>
-          </a:prstGeom>
-          <a:noFill/>
-          <a:ln/>
-        </p:spPr>
-        <p:txBody>
-          <a:bodyPr wrap="square" lIns="0" tIns="0" rIns="0" bIns="0" rtlCol="0" anchor="ctr"/>
-          <a:lstStyle/>
-          <a:p>
-            <a:pPr marL="0" indent="0">
+          <p:cNvSpPr/>
+          <p:nvPr/>
+        </p:nvSpPr>
+        <p:spPr>
+          <a:xfrm>
+            <a:off x="7955280" y="1965960"/>
+            <a:ext cx="3291840" cy="411480"/>
+          </a:xfrm>
+          <a:prstGeom prst="rect">
+            <a:avLst/>
+          </a:prstGeom>
+          <a:noFill/>
+          <a:ln/>
+        </p:spPr>
+        <p:txBody>
+          <a:bodyPr wrap="square" lIns="0" tIns="0" rIns="0" bIns="0" rtlCol="0" anchor="ctr"/>
+          <a:lstStyle/>
+          <a:p>
+            <a:pPr indent="0" marL="0">
               <a:buNone/>
             </a:pPr>
             <a:r>
@@ -3346,7 +6783,7 @@
         </p:nvSpPr>
         <p:spPr>
           <a:xfrm>
-            <a:off x="640080" y="2788920"/>
+            <a:off x="640080" y="2606040"/>
             <a:ext cx="10881360" cy="0"/>
           </a:xfrm>
           <a:prstGeom prst="line">
@@ -3369,14 +6806,14 @@
         </p:nvSpPr>
         <p:spPr>
           <a:xfrm>
-            <a:off x="640080" y="3063240"/>
+            <a:off x="640080" y="3017520"/>
             <a:ext cx="457200" cy="457200"/>
           </a:xfrm>
           <a:prstGeom prst="ellipse">
             <a:avLst/>
           </a:prstGeom>
           <a:solidFill>
-            <a:srgbClr val="1E2761"/>
+            <a:srgbClr val="323C32"/>
           </a:solidFill>
           <a:ln/>
         </p:spPr>
@@ -3384,12 +6821,12 @@
       <p:sp>
         <p:nvSpPr>
           <p:cNvPr id="11" name="Text 9"/>
-          <p:cNvSpPr txBox="1"/>
-          <p:nvPr/>
-        </p:nvSpPr>
-        <p:spPr>
-          <a:xfrm>
-            <a:off x="640080" y="3063240"/>
+          <p:cNvSpPr/>
+          <p:nvPr/>
+        </p:nvSpPr>
+        <p:spPr>
+          <a:xfrm>
+            <a:off x="640080" y="3017520"/>
             <a:ext cx="457200" cy="457200"/>
           </a:xfrm>
           <a:prstGeom prst="rect">
@@ -3402,13 +6839,13 @@
           <a:bodyPr wrap="square" lIns="0" tIns="0" rIns="0" bIns="0" rtlCol="0" anchor="ctr"/>
           <a:lstStyle/>
           <a:p>
-            <a:pPr marL="0" indent="0" algn="ctr">
-              <a:buNone/>
-            </a:pPr>
-            <a:r>
-              <a:rPr lang="en-US" sz="2000" b="1" dirty="0">
-                <a:solidFill>
-                  <a:srgbClr val="C9A227"/>
+            <a:pPr algn="ctr" indent="0" marL="0">
+              <a:buNone/>
+            </a:pPr>
+            <a:r>
+              <a:rPr lang="en-US" sz="1600" b="1" dirty="0">
+                <a:solidFill>
+                  <a:srgbClr val="FFFFFF"/>
                 </a:solidFill>
                 <a:latin typeface="Cambria" pitchFamily="34" charset="0"/>
                 <a:ea typeface="Cambria" pitchFamily="34" charset="-122"/>
@@ -3416,38 +6853,38 @@
               </a:rPr>
               <a:t>✓</a:t>
             </a:r>
-            <a:endParaRPr lang="en-US" sz="2000" dirty="0"/>
+            <a:endParaRPr lang="en-US" sz="1600" dirty="0"/>
           </a:p>
         </p:txBody>
       </p:sp>
       <p:sp>
         <p:nvSpPr>
           <p:cNvPr id="12" name="Text 10"/>
-          <p:cNvSpPr txBox="1"/>
-          <p:nvPr/>
-        </p:nvSpPr>
-        <p:spPr>
-          <a:xfrm>
-            <a:off x="1325880" y="3017520"/>
-            <a:ext cx="2743200" cy="548640"/>
-          </a:xfrm>
-          <a:prstGeom prst="rect">
-            <a:avLst/>
-          </a:prstGeom>
-          <a:noFill/>
-          <a:ln/>
-        </p:spPr>
-        <p:txBody>
-          <a:bodyPr wrap="square" lIns="0" tIns="0" rIns="0" bIns="0" rtlCol="0" anchor="ctr"/>
-          <a:lstStyle/>
-          <a:p>
-            <a:pPr marL="0" indent="0">
+          <p:cNvSpPr/>
+          <p:nvPr/>
+        </p:nvSpPr>
+        <p:spPr>
+          <a:xfrm>
+            <a:off x="1325880" y="2880360"/>
+            <a:ext cx="2743200" cy="731520"/>
+          </a:xfrm>
+          <a:prstGeom prst="rect">
+            <a:avLst/>
+          </a:prstGeom>
+          <a:noFill/>
+          <a:ln/>
+        </p:spPr>
+        <p:txBody>
+          <a:bodyPr wrap="square" lIns="0" tIns="0" rIns="0" bIns="0" rtlCol="0" anchor="ctr"/>
+          <a:lstStyle/>
+          <a:p>
+            <a:pPr indent="0" marL="0">
               <a:buNone/>
             </a:pPr>
             <a:r>
               <a:rPr lang="en-US" sz="1500" b="1" dirty="0">
                 <a:solidFill>
-                  <a:srgbClr val="1E2761"/>
+                  <a:srgbClr val="323C32"/>
                 </a:solidFill>
                 <a:latin typeface="Cambria" pitchFamily="34" charset="0"/>
                 <a:ea typeface="Cambria" pitchFamily="34" charset="-122"/>
@@ -3462,27 +6899,27 @@
       <p:sp>
         <p:nvSpPr>
           <p:cNvPr id="13" name="Text 11"/>
-          <p:cNvSpPr txBox="1"/>
-          <p:nvPr/>
-        </p:nvSpPr>
-        <p:spPr>
-          <a:xfrm>
-            <a:off x="4160520" y="3017520"/>
-            <a:ext cx="7360920" cy="822960"/>
-          </a:xfrm>
-          <a:prstGeom prst="rect">
-            <a:avLst/>
-          </a:prstGeom>
-          <a:noFill/>
-          <a:ln/>
-        </p:spPr>
-        <p:txBody>
-          <a:bodyPr wrap="square" lIns="0" tIns="0" rIns="0" bIns="0" rtlCol="0" anchor="ctr"/>
-          <a:lstStyle/>
-          <a:p>
-            <a:pPr marL="0" indent="0">
+          <p:cNvSpPr/>
+          <p:nvPr/>
+        </p:nvSpPr>
+        <p:spPr>
+          <a:xfrm>
+            <a:off x="4160520" y="2880360"/>
+            <a:ext cx="7360920" cy="731520"/>
+          </a:xfrm>
+          <a:prstGeom prst="rect">
+            <a:avLst/>
+          </a:prstGeom>
+          <a:noFill/>
+          <a:ln/>
+        </p:spPr>
+        <p:txBody>
+          <a:bodyPr wrap="square" lIns="0" tIns="0" rIns="0" bIns="0" rtlCol="0" anchor="ctr"/>
+          <a:lstStyle/>
+          <a:p>
+            <a:pPr indent="0" marL="0">
               <a:lnSpc>
-                <a:spcPct val="120000"/>
+                <a:spcPct val="115000"/>
               </a:lnSpc>
               <a:buNone/>
             </a:pPr>
@@ -3495,7 +6932,7 @@
                 <a:ea typeface="Calibri" pitchFamily="34" charset="-122"/>
                 <a:cs typeface="Calibri" pitchFamily="34" charset="-120"/>
               </a:rPr>
-              <a:t>Правило заполнения пропусков нулями (проверено на примере), нормализация регистра подгрупп, составной ключ «категория | группа | подгруппа»</a:t>
+              <a:t>Пропуски = нули (проверено на примере), единый регистр, составной ключ «категория | группа | подгруппа»</a:t>
             </a:r>
             <a:endParaRPr lang="en-US" sz="1300" dirty="0"/>
           </a:p>
@@ -3516,7 +6953,7 @@
             <a:avLst/>
           </a:prstGeom>
           <a:solidFill>
-            <a:srgbClr val="1E2761"/>
+            <a:srgbClr val="323C32"/>
           </a:solidFill>
           <a:ln/>
         </p:spPr>
@@ -3524,7 +6961,7 @@
       <p:sp>
         <p:nvSpPr>
           <p:cNvPr id="15" name="Text 13"/>
-          <p:cNvSpPr txBox="1"/>
+          <p:cNvSpPr/>
           <p:nvPr/>
         </p:nvSpPr>
         <p:spPr>
@@ -3542,13 +6979,13 @@
           <a:bodyPr wrap="square" lIns="0" tIns="0" rIns="0" bIns="0" rtlCol="0" anchor="ctr"/>
           <a:lstStyle/>
           <a:p>
-            <a:pPr marL="0" indent="0" algn="ctr">
-              <a:buNone/>
-            </a:pPr>
-            <a:r>
-              <a:rPr lang="en-US" sz="2000" b="1" dirty="0">
-                <a:solidFill>
-                  <a:srgbClr val="C9A227"/>
+            <a:pPr algn="ctr" indent="0" marL="0">
+              <a:buNone/>
+            </a:pPr>
+            <a:r>
+              <a:rPr lang="en-US" sz="1600" b="1" dirty="0">
+                <a:solidFill>
+                  <a:srgbClr val="FFFFFF"/>
                 </a:solidFill>
                 <a:latin typeface="Cambria" pitchFamily="34" charset="0"/>
                 <a:ea typeface="Cambria" pitchFamily="34" charset="-122"/>
@@ -3556,38 +6993,38 @@
               </a:rPr>
               <a:t>✓</a:t>
             </a:r>
-            <a:endParaRPr lang="en-US" sz="2000" dirty="0"/>
+            <a:endParaRPr lang="en-US" sz="1600" dirty="0"/>
           </a:p>
         </p:txBody>
       </p:sp>
       <p:sp>
         <p:nvSpPr>
           <p:cNvPr id="16" name="Text 14"/>
-          <p:cNvSpPr txBox="1"/>
-          <p:nvPr/>
-        </p:nvSpPr>
-        <p:spPr>
-          <a:xfrm>
-            <a:off x="1325880" y="4069080"/>
-            <a:ext cx="2743200" cy="548640"/>
-          </a:xfrm>
-          <a:prstGeom prst="rect">
-            <a:avLst/>
-          </a:prstGeom>
-          <a:noFill/>
-          <a:ln/>
-        </p:spPr>
-        <p:txBody>
-          <a:bodyPr wrap="square" lIns="0" tIns="0" rIns="0" bIns="0" rtlCol="0" anchor="ctr"/>
-          <a:lstStyle/>
-          <a:p>
-            <a:pPr marL="0" indent="0">
+          <p:cNvSpPr/>
+          <p:nvPr/>
+        </p:nvSpPr>
+        <p:spPr>
+          <a:xfrm>
+            <a:off x="1325880" y="3977640"/>
+            <a:ext cx="2743200" cy="731520"/>
+          </a:xfrm>
+          <a:prstGeom prst="rect">
+            <a:avLst/>
+          </a:prstGeom>
+          <a:noFill/>
+          <a:ln/>
+        </p:spPr>
+        <p:txBody>
+          <a:bodyPr wrap="square" lIns="0" tIns="0" rIns="0" bIns="0" rtlCol="0" anchor="ctr"/>
+          <a:lstStyle/>
+          <a:p>
+            <a:pPr indent="0" marL="0">
               <a:buNone/>
             </a:pPr>
             <a:r>
               <a:rPr lang="en-US" sz="1500" b="1" dirty="0">
                 <a:solidFill>
-                  <a:srgbClr val="1E2761"/>
+                  <a:srgbClr val="323C32"/>
                 </a:solidFill>
                 <a:latin typeface="Cambria" pitchFamily="34" charset="0"/>
                 <a:ea typeface="Cambria" pitchFamily="34" charset="-122"/>
@@ -3602,27 +7039,27 @@
       <p:sp>
         <p:nvSpPr>
           <p:cNvPr id="17" name="Text 15"/>
-          <p:cNvSpPr txBox="1"/>
-          <p:nvPr/>
-        </p:nvSpPr>
-        <p:spPr>
-          <a:xfrm>
-            <a:off x="4160520" y="4069080"/>
-            <a:ext cx="7360920" cy="822960"/>
-          </a:xfrm>
-          <a:prstGeom prst="rect">
-            <a:avLst/>
-          </a:prstGeom>
-          <a:noFill/>
-          <a:ln/>
-        </p:spPr>
-        <p:txBody>
-          <a:bodyPr wrap="square" lIns="0" tIns="0" rIns="0" bIns="0" rtlCol="0" anchor="ctr"/>
-          <a:lstStyle/>
-          <a:p>
-            <a:pPr marL="0" indent="0">
+          <p:cNvSpPr/>
+          <p:nvPr/>
+        </p:nvSpPr>
+        <p:spPr>
+          <a:xfrm>
+            <a:off x="4160520" y="3977640"/>
+            <a:ext cx="7360920" cy="731520"/>
+          </a:xfrm>
+          <a:prstGeom prst="rect">
+            <a:avLst/>
+          </a:prstGeom>
+          <a:noFill/>
+          <a:ln/>
+        </p:spPr>
+        <p:txBody>
+          <a:bodyPr wrap="square" lIns="0" tIns="0" rIns="0" bIns="0" rtlCol="0" anchor="ctr"/>
+          <a:lstStyle/>
+          <a:p>
+            <a:pPr indent="0" marL="0">
               <a:lnSpc>
-                <a:spcPct val="120000"/>
+                <a:spcPct val="115000"/>
               </a:lnSpc>
               <a:buNone/>
             </a:pPr>
@@ -3635,7 +7072,7 @@
                 <a:ea typeface="Calibri" pitchFamily="34" charset="-122"/>
                 <a:cs typeface="Calibri" pitchFamily="34" charset="-120"/>
               </a:rPr>
-              <a:t>ever_active — пара в ассортименте; is_stockout — дефицит на конец недели; коэффициент роста сети по октябрю = 0.945</a:t>
+              <a:t>ever_active — товар в ассортименте магазина; is_stockout — нулевой остаток на конец недели</a:t>
             </a:r>
             <a:endParaRPr lang="en-US" sz="1300" dirty="0"/>
           </a:p>
@@ -3649,14 +7086,14 @@
         </p:nvSpPr>
         <p:spPr>
           <a:xfrm>
-            <a:off x="640080" y="5166360"/>
+            <a:off x="640080" y="5212080"/>
             <a:ext cx="457200" cy="457200"/>
           </a:xfrm>
           <a:prstGeom prst="ellipse">
             <a:avLst/>
           </a:prstGeom>
           <a:solidFill>
-            <a:srgbClr val="1E2761"/>
+            <a:srgbClr val="323C32"/>
           </a:solidFill>
           <a:ln/>
         </p:spPr>
@@ -3664,12 +7101,12 @@
       <p:sp>
         <p:nvSpPr>
           <p:cNvPr id="19" name="Text 17"/>
-          <p:cNvSpPr txBox="1"/>
-          <p:nvPr/>
-        </p:nvSpPr>
-        <p:spPr>
-          <a:xfrm>
-            <a:off x="640080" y="5166360"/>
+          <p:cNvSpPr/>
+          <p:nvPr/>
+        </p:nvSpPr>
+        <p:spPr>
+          <a:xfrm>
+            <a:off x="640080" y="5212080"/>
             <a:ext cx="457200" cy="457200"/>
           </a:xfrm>
           <a:prstGeom prst="rect">
@@ -3682,13 +7119,13 @@
           <a:bodyPr wrap="square" lIns="0" tIns="0" rIns="0" bIns="0" rtlCol="0" anchor="ctr"/>
           <a:lstStyle/>
           <a:p>
-            <a:pPr marL="0" indent="0" algn="ctr">
-              <a:buNone/>
-            </a:pPr>
-            <a:r>
-              <a:rPr lang="en-US" sz="2000" b="1" dirty="0">
-                <a:solidFill>
-                  <a:srgbClr val="C9A227"/>
+            <a:pPr algn="ctr" indent="0" marL="0">
+              <a:buNone/>
+            </a:pPr>
+            <a:r>
+              <a:rPr lang="en-US" sz="1600" b="1" dirty="0">
+                <a:solidFill>
+                  <a:srgbClr val="FFFFFF"/>
                 </a:solidFill>
                 <a:latin typeface="Cambria" pitchFamily="34" charset="0"/>
                 <a:ea typeface="Cambria" pitchFamily="34" charset="-122"/>
@@ -3696,44 +7133,44 @@
               </a:rPr>
               <a:t>✓</a:t>
             </a:r>
-            <a:endParaRPr lang="en-US" sz="2000" dirty="0"/>
+            <a:endParaRPr lang="en-US" sz="1600" dirty="0"/>
           </a:p>
         </p:txBody>
       </p:sp>
       <p:sp>
         <p:nvSpPr>
           <p:cNvPr id="20" name="Text 18"/>
-          <p:cNvSpPr txBox="1"/>
-          <p:nvPr/>
-        </p:nvSpPr>
-        <p:spPr>
-          <a:xfrm>
-            <a:off x="1325880" y="5120640"/>
-            <a:ext cx="2743200" cy="548640"/>
-          </a:xfrm>
-          <a:prstGeom prst="rect">
-            <a:avLst/>
-          </a:prstGeom>
-          <a:noFill/>
-          <a:ln/>
-        </p:spPr>
-        <p:txBody>
-          <a:bodyPr wrap="square" lIns="0" tIns="0" rIns="0" bIns="0" rtlCol="0" anchor="ctr"/>
-          <a:lstStyle/>
-          <a:p>
-            <a:pPr marL="0" indent="0">
+          <p:cNvSpPr/>
+          <p:nvPr/>
+        </p:nvSpPr>
+        <p:spPr>
+          <a:xfrm>
+            <a:off x="1325880" y="5074920"/>
+            <a:ext cx="2743200" cy="731520"/>
+          </a:xfrm>
+          <a:prstGeom prst="rect">
+            <a:avLst/>
+          </a:prstGeom>
+          <a:noFill/>
+          <a:ln/>
+        </p:spPr>
+        <p:txBody>
+          <a:bodyPr wrap="square" lIns="0" tIns="0" rIns="0" bIns="0" rtlCol="0" anchor="ctr"/>
+          <a:lstStyle/>
+          <a:p>
+            <a:pPr indent="0" marL="0">
               <a:buNone/>
             </a:pPr>
             <a:r>
               <a:rPr lang="en-US" sz="1500" b="1" dirty="0">
                 <a:solidFill>
-                  <a:srgbClr val="1E2761"/>
+                  <a:srgbClr val="323C32"/>
                 </a:solidFill>
                 <a:latin typeface="Cambria" pitchFamily="34" charset="0"/>
                 <a:ea typeface="Cambria" pitchFamily="34" charset="-122"/>
                 <a:cs typeface="Cambria" pitchFamily="34" charset="-120"/>
               </a:rPr>
-              <a:t>Проверка честности</a:t>
+              <a:t>Окна периода</a:t>
             </a:r>
             <a:endParaRPr lang="en-US" sz="1500" dirty="0"/>
           </a:p>
@@ -3742,27 +7179,27 @@
       <p:sp>
         <p:nvSpPr>
           <p:cNvPr id="21" name="Text 19"/>
-          <p:cNvSpPr txBox="1"/>
-          <p:nvPr/>
-        </p:nvSpPr>
-        <p:spPr>
-          <a:xfrm>
-            <a:off x="4160520" y="5120640"/>
-            <a:ext cx="7360920" cy="822960"/>
-          </a:xfrm>
-          <a:prstGeom prst="rect">
-            <a:avLst/>
-          </a:prstGeom>
-          <a:noFill/>
-          <a:ln/>
-        </p:spPr>
-        <p:txBody>
-          <a:bodyPr wrap="square" lIns="0" tIns="0" rIns="0" bIns="0" rtlCol="0" anchor="ctr"/>
-          <a:lstStyle/>
-          <a:p>
-            <a:pPr marL="0" indent="0">
+          <p:cNvSpPr/>
+          <p:nvPr/>
+        </p:nvSpPr>
+        <p:spPr>
+          <a:xfrm>
+            <a:off x="4160520" y="5074920"/>
+            <a:ext cx="7360920" cy="731520"/>
+          </a:xfrm>
+          <a:prstGeom prst="rect">
+            <a:avLst/>
+          </a:prstGeom>
+          <a:noFill/>
+          <a:ln/>
+        </p:spPr>
+        <p:txBody>
+          <a:bodyPr wrap="square" lIns="0" tIns="0" rIns="0" bIns="0" rtlCol="0" anchor="ctr"/>
+          <a:lstStyle/>
+          <a:p>
+            <a:pPr indent="0" marL="0">
               <a:lnSpc>
-                <a:spcPct val="120000"/>
+                <a:spcPct val="115000"/>
               </a:lnSpc>
               <a:buNone/>
             </a:pPr>
@@ -3775,7 +7212,7 @@
                 <a:ea typeface="Calibri" pitchFamily="34" charset="-122"/>
                 <a:cs typeface="Calibri" pitchFamily="34" charset="-120"/>
               </a:rPr>
-              <a:t>Разбиение train/test по магазинам (0 пересечений); отсечка признаков до 15 октября — без утечки данных</a:t>
+              <a:t>Октябрь — признаки, ноябрь–декабрь — целевая переменная, январь вне прогноза (распродажи, а не спрос)</a:t>
             </a:r>
             <a:endParaRPr lang="en-US" sz="1300" dirty="0"/>
           </a:p>
@@ -3802,7 +7239,7 @@
           <a:bodyPr wrap="square" rtlCol="0" anchor="ctr"/>
           <a:lstStyle/>
           <a:p>
-            <a:pPr marL="0" indent="0" algn="r">
+            <a:pPr algn="r" indent="0" marL="0">
               <a:buNone/>
             </a:pPr>
             <a:r>
@@ -3836,7 +7273,6 @@
         <a:solidFill>
           <a:srgbClr val="FFFFFF"/>
         </a:solidFill>
-        <a:effectLst/>
       </p:bgPr>
     </p:bg>
     <p:spTree>
@@ -3856,31 +7292,31 @@
       <p:sp>
         <p:nvSpPr>
           <p:cNvPr id="2" name="Text 0"/>
-          <p:cNvSpPr txBox="1"/>
+          <p:cNvSpPr/>
           <p:nvPr/>
         </p:nvSpPr>
         <p:spPr>
           <a:xfrm>
             <a:off x="640080" y="411480"/>
-            <a:ext cx="10881360" cy="594360"/>
-          </a:xfrm>
-          <a:prstGeom prst="rect">
-            <a:avLst/>
-          </a:prstGeom>
-          <a:noFill/>
-          <a:ln/>
-        </p:spPr>
-        <p:txBody>
-          <a:bodyPr wrap="square" lIns="0" tIns="0" rIns="0" bIns="0" rtlCol="0" anchor="ctr"/>
-          <a:lstStyle/>
-          <a:p>
-            <a:pPr marL="0" indent="0">
+            <a:ext cx="10881360" cy="640080"/>
+          </a:xfrm>
+          <a:prstGeom prst="rect">
+            <a:avLst/>
+          </a:prstGeom>
+          <a:noFill/>
+          <a:ln/>
+        </p:spPr>
+        <p:txBody>
+          <a:bodyPr wrap="square" lIns="0" tIns="0" rIns="0" bIns="0" rtlCol="0" anchor="ctr"/>
+          <a:lstStyle/>
+          <a:p>
+            <a:pPr indent="0" marL="0">
               <a:buNone/>
             </a:pPr>
             <a:r>
               <a:rPr lang="en-US" sz="2800" b="1" dirty="0">
                 <a:solidFill>
-                  <a:srgbClr val="1E2761"/>
+                  <a:srgbClr val="323C32"/>
                 </a:solidFill>
                 <a:latin typeface="Cambria" pitchFamily="34" charset="0"/>
                 <a:ea typeface="Cambria" pitchFamily="34" charset="-122"/>
@@ -3894,85 +7330,46 @@
       </p:sp>
       <p:pic>
         <p:nvPicPr>
-          <p:cNvPr id="3" name="Image 0" descr="02_weekly_dynamics.png"/>
+          <p:cNvPr id="3" name="Image 0" descr="02_weekly_dynamics_nb.png">    </p:cNvPr>
           <p:cNvPicPr>
             <a:picLocks noChangeAspect="1"/>
           </p:cNvPicPr>
           <p:nvPr/>
         </p:nvPicPr>
         <p:blipFill>
-          <a:blip r:embed="rId3"/>
+          <a:blip r:embed="rId1"/>
           <a:stretch>
             <a:fillRect/>
           </a:stretch>
         </p:blipFill>
         <p:spPr>
           <a:xfrm>
-            <a:off x="502920" y="1143000"/>
-            <a:ext cx="6537960" cy="3977640"/>
+            <a:off x="594360" y="1325880"/>
+            <a:ext cx="7309128" cy="2999232"/>
           </a:xfrm>
           <a:prstGeom prst="rect">
             <a:avLst/>
           </a:prstGeom>
         </p:spPr>
       </p:pic>
-      <p:sp>
-        <p:nvSpPr>
-          <p:cNvPr id="4" name="Text 1"/>
-          <p:cNvSpPr txBox="1"/>
-          <p:nvPr/>
-        </p:nvSpPr>
-        <p:spPr>
-          <a:xfrm>
-            <a:off x="502920" y="5193792"/>
-            <a:ext cx="6537960" cy="502920"/>
-          </a:xfrm>
-          <a:prstGeom prst="rect">
-            <a:avLst/>
-          </a:prstGeom>
-          <a:noFill/>
-          <a:ln/>
-        </p:spPr>
-        <p:txBody>
-          <a:bodyPr wrap="square" lIns="0" tIns="0" rIns="0" bIns="0" rtlCol="0" anchor="ctr"/>
-          <a:lstStyle/>
-          <a:p>
-            <a:pPr marL="0" indent="0">
-              <a:buNone/>
-            </a:pPr>
-            <a:r>
-              <a:rPr lang="en-US" sz="1250" i="1" dirty="0">
-                <a:solidFill>
-                  <a:srgbClr val="6B7280"/>
-                </a:solidFill>
-                <a:latin typeface="Calibri" pitchFamily="34" charset="0"/>
-                <a:ea typeface="Calibri" pitchFamily="34" charset="-122"/>
-                <a:cs typeface="Calibri" pitchFamily="34" charset="-120"/>
-              </a:rPr>
-              <a:t>Пик — неделя 52 в обоих сезонах: 860 257 шт. (2024) и 789 716 шт. (2025)</a:t>
-            </a:r>
-            <a:endParaRPr lang="en-US" sz="1250" dirty="0"/>
-          </a:p>
-        </p:txBody>
-      </p:sp>
       <p:pic>
         <p:nvPicPr>
-          <p:cNvPr id="5" name="Image 1" descr="05_abc_xyz_matrix.png"/>
+          <p:cNvPr id="4" name="Image 1" descr="05_abc_xyz_matrix.png">    </p:cNvPr>
           <p:cNvPicPr>
             <a:picLocks noChangeAspect="1"/>
           </p:cNvPicPr>
           <p:nvPr/>
         </p:nvPicPr>
         <p:blipFill>
-          <a:blip r:embed="rId4"/>
+          <a:blip r:embed="rId2"/>
           <a:stretch>
             <a:fillRect/>
           </a:stretch>
         </p:blipFill>
         <p:spPr>
           <a:xfrm>
-            <a:off x="7269480" y="1143000"/>
-            <a:ext cx="4343400" cy="3794760"/>
+            <a:off x="8177808" y="1325880"/>
+            <a:ext cx="3545092" cy="2999232"/>
           </a:xfrm>
           <a:prstGeom prst="rect">
             <a:avLst/>
@@ -3981,30 +7378,30 @@
       </p:pic>
       <p:sp>
         <p:nvSpPr>
-          <p:cNvPr id="6" name="Text 2"/>
-          <p:cNvSpPr txBox="1"/>
-          <p:nvPr/>
-        </p:nvSpPr>
-        <p:spPr>
-          <a:xfrm>
-            <a:off x="7269480" y="5010912"/>
-            <a:ext cx="4343400" cy="685800"/>
-          </a:xfrm>
-          <a:prstGeom prst="rect">
-            <a:avLst/>
-          </a:prstGeom>
-          <a:noFill/>
-          <a:ln/>
-        </p:spPr>
-        <p:txBody>
-          <a:bodyPr wrap="square" lIns="0" tIns="0" rIns="0" bIns="0" rtlCol="0" anchor="ctr"/>
-          <a:lstStyle/>
-          <a:p>
-            <a:pPr marL="0" indent="0">
-              <a:buNone/>
-            </a:pPr>
-            <a:r>
-              <a:rPr lang="en-US" sz="1250" i="1" dirty="0">
+          <p:cNvPr id="5" name="Text 1"/>
+          <p:cNvSpPr/>
+          <p:nvPr/>
+        </p:nvSpPr>
+        <p:spPr>
+          <a:xfrm>
+            <a:off x="594360" y="4480560"/>
+            <a:ext cx="7315200" cy="457200"/>
+          </a:xfrm>
+          <a:prstGeom prst="rect">
+            <a:avLst/>
+          </a:prstGeom>
+          <a:noFill/>
+          <a:ln/>
+        </p:spPr>
+        <p:txBody>
+          <a:bodyPr wrap="square" lIns="0" tIns="0" rIns="0" bIns="0" rtlCol="0" anchor="ctr"/>
+          <a:lstStyle/>
+          <a:p>
+            <a:pPr indent="0" marL="0">
+              <a:buNone/>
+            </a:pPr>
+            <a:r>
+              <a:rPr lang="en-US" sz="1300" i="1" dirty="0">
                 <a:solidFill>
                   <a:srgbClr val="6B7280"/>
                 </a:solidFill>
@@ -4012,15 +7409,93 @@
                 <a:ea typeface="Calibri" pitchFamily="34" charset="-122"/>
                 <a:cs typeface="Calibri" pitchFamily="34" charset="-120"/>
               </a:rPr>
-              <a:t>Золотой фонд (AX) — всего 2 подгруппы: шапки, перчатки</a:t>
-            </a:r>
-            <a:endParaRPr lang="en-US" sz="1250" dirty="0"/>
+              <a:t>Пик — неделя 52 в обоих сезонах: 860 257 шт. (2024) и 789 716 шт. (2025)</a:t>
+            </a:r>
+            <a:endParaRPr lang="en-US" sz="1300" dirty="0"/>
+          </a:p>
+        </p:txBody>
+      </p:sp>
+      <p:sp>
+        <p:nvSpPr>
+          <p:cNvPr id="6" name="Text 2"/>
+          <p:cNvSpPr/>
+          <p:nvPr/>
+        </p:nvSpPr>
+        <p:spPr>
+          <a:xfrm>
+            <a:off x="8183880" y="4480560"/>
+            <a:ext cx="3566160" cy="685800"/>
+          </a:xfrm>
+          <a:prstGeom prst="rect">
+            <a:avLst/>
+          </a:prstGeom>
+          <a:noFill/>
+          <a:ln/>
+        </p:spPr>
+        <p:txBody>
+          <a:bodyPr wrap="square" lIns="0" tIns="0" rIns="0" bIns="0" rtlCol="0" anchor="ctr"/>
+          <a:lstStyle/>
+          <a:p>
+            <a:pPr indent="0" marL="0">
+              <a:buNone/>
+            </a:pPr>
+            <a:r>
+              <a:rPr lang="en-US" sz="1300" i="1" dirty="0">
+                <a:solidFill>
+                  <a:srgbClr val="6B7280"/>
+                </a:solidFill>
+                <a:latin typeface="Calibri" pitchFamily="34" charset="0"/>
+                <a:ea typeface="Calibri" pitchFamily="34" charset="-122"/>
+                <a:cs typeface="Calibri" pitchFamily="34" charset="-120"/>
+              </a:rPr>
+              <a:t>Стабильных и доходных (AX) — всего 2 подгруппы: шапки и перчатки</a:t>
+            </a:r>
+            <a:endParaRPr lang="en-US" sz="1300" dirty="0"/>
           </a:p>
         </p:txBody>
       </p:sp>
       <p:sp>
         <p:nvSpPr>
           <p:cNvPr id="7" name="Text 3"/>
+          <p:cNvSpPr/>
+          <p:nvPr/>
+        </p:nvSpPr>
+        <p:spPr>
+          <a:xfrm>
+            <a:off x="594360" y="5440680"/>
+            <a:ext cx="10972800" cy="640080"/>
+          </a:xfrm>
+          <a:prstGeom prst="rect">
+            <a:avLst/>
+          </a:prstGeom>
+          <a:noFill/>
+          <a:ln/>
+        </p:spPr>
+        <p:txBody>
+          <a:bodyPr wrap="square" lIns="0" tIns="0" rIns="0" bIns="0" rtlCol="0" anchor="ctr"/>
+          <a:lstStyle/>
+          <a:p>
+            <a:pPr indent="0" marL="0">
+              <a:buNone/>
+            </a:pPr>
+            <a:r>
+              <a:rPr lang="en-US" sz="1500" b="1" dirty="0">
+                <a:solidFill>
+                  <a:srgbClr val="323C32"/>
+                </a:solidFill>
+                <a:latin typeface="Cambria" pitchFamily="34" charset="0"/>
+                <a:ea typeface="Cambria" pitchFamily="34" charset="-122"/>
+                <a:cs typeface="Cambria" pitchFamily="34" charset="-120"/>
+              </a:rPr>
+              <a:t>Спрос сжат в последние недели перед Новым годом — основная масса покупок приходится на финальный рывок</a:t>
+            </a:r>
+            <a:endParaRPr lang="en-US" sz="1500" dirty="0"/>
+          </a:p>
+        </p:txBody>
+      </p:sp>
+      <p:sp>
+        <p:nvSpPr>
+          <p:cNvPr id="8" name="Text 4"/>
           <p:cNvSpPr/>
           <p:nvPr/>
         </p:nvSpPr>
@@ -4039,7 +7514,7 @@
           <a:bodyPr wrap="square" rtlCol="0" anchor="ctr"/>
           <a:lstStyle/>
           <a:p>
-            <a:pPr marL="0" indent="0" algn="r">
+            <a:pPr algn="r" indent="0" marL="0">
               <a:buNone/>
             </a:pPr>
             <a:r>
@@ -4073,7 +7548,6 @@
         <a:solidFill>
           <a:srgbClr val="FFFFFF"/>
         </a:solidFill>
-        <a:effectLst/>
       </p:bgPr>
     </p:bg>
     <p:spTree>
@@ -4093,31 +7567,31 @@
       <p:sp>
         <p:nvSpPr>
           <p:cNvPr id="2" name="Text 0"/>
-          <p:cNvSpPr txBox="1"/>
+          <p:cNvSpPr/>
           <p:nvPr/>
         </p:nvSpPr>
         <p:spPr>
           <a:xfrm>
             <a:off x="640080" y="411480"/>
-            <a:ext cx="10881360" cy="594360"/>
-          </a:xfrm>
-          <a:prstGeom prst="rect">
-            <a:avLst/>
-          </a:prstGeom>
-          <a:noFill/>
-          <a:ln/>
-        </p:spPr>
-        <p:txBody>
-          <a:bodyPr wrap="square" lIns="0" tIns="0" rIns="0" bIns="0" rtlCol="0" anchor="ctr"/>
-          <a:lstStyle/>
-          <a:p>
-            <a:pPr marL="0" indent="0">
+            <a:ext cx="10881360" cy="640080"/>
+          </a:xfrm>
+          <a:prstGeom prst="rect">
+            <a:avLst/>
+          </a:prstGeom>
+          <a:noFill/>
+          <a:ln/>
+        </p:spPr>
+        <p:txBody>
+          <a:bodyPr wrap="square" lIns="0" tIns="0" rIns="0" bIns="0" rtlCol="0" anchor="ctr"/>
+          <a:lstStyle/>
+          <a:p>
+            <a:pPr indent="0" marL="0">
               <a:buNone/>
             </a:pPr>
             <a:r>
               <a:rPr lang="en-US" sz="2800" b="1" dirty="0">
                 <a:solidFill>
-                  <a:srgbClr val="1E2761"/>
+                  <a:srgbClr val="323C32"/>
                 </a:solidFill>
                 <a:latin typeface="Cambria" pitchFamily="34" charset="0"/>
                 <a:ea typeface="Cambria" pitchFamily="34" charset="-122"/>
@@ -4137,16 +7611,16 @@
         </p:nvSpPr>
         <p:spPr>
           <a:xfrm>
-            <a:off x="502920" y="1234440"/>
-            <a:ext cx="5577840" cy="2331720"/>
+            <a:off x="640080" y="1188720"/>
+            <a:ext cx="5394960" cy="1600200"/>
           </a:xfrm>
           <a:prstGeom prst="roundRect">
             <a:avLst>
-              <a:gd name="adj" fmla="val 3137"/>
+              <a:gd name="adj" fmla="val 4571"/>
             </a:avLst>
           </a:prstGeom>
           <a:solidFill>
-            <a:srgbClr val="1E2761"/>
+            <a:srgbClr val="7E1013"/>
           </a:solidFill>
           <a:ln/>
         </p:spPr>
@@ -4154,31 +7628,31 @@
       <p:sp>
         <p:nvSpPr>
           <p:cNvPr id="4" name="Text 2"/>
-          <p:cNvSpPr txBox="1"/>
-          <p:nvPr/>
-        </p:nvSpPr>
-        <p:spPr>
-          <a:xfrm>
-            <a:off x="777240" y="1527048"/>
-            <a:ext cx="5029200" cy="594360"/>
-          </a:xfrm>
-          <a:prstGeom prst="rect">
-            <a:avLst/>
-          </a:prstGeom>
-          <a:noFill/>
-          <a:ln/>
-        </p:spPr>
-        <p:txBody>
-          <a:bodyPr wrap="square" lIns="0" tIns="0" rIns="0" bIns="0" rtlCol="0" anchor="ctr"/>
-          <a:lstStyle/>
-          <a:p>
-            <a:pPr marL="0" indent="0">
-              <a:buNone/>
-            </a:pPr>
-            <a:r>
-              <a:rPr lang="en-US" sz="3200" b="1" dirty="0">
-                <a:solidFill>
-                  <a:srgbClr val="C9A227"/>
+          <p:cNvSpPr/>
+          <p:nvPr/>
+        </p:nvSpPr>
+        <p:spPr>
+          <a:xfrm>
+            <a:off x="914400" y="1298448"/>
+            <a:ext cx="2377440" cy="685800"/>
+          </a:xfrm>
+          <a:prstGeom prst="rect">
+            <a:avLst/>
+          </a:prstGeom>
+          <a:noFill/>
+          <a:ln/>
+        </p:spPr>
+        <p:txBody>
+          <a:bodyPr wrap="square" lIns="0" tIns="0" rIns="0" bIns="0" rtlCol="0" anchor="ctr"/>
+          <a:lstStyle/>
+          <a:p>
+            <a:pPr indent="0" marL="0">
+              <a:buNone/>
+            </a:pPr>
+            <a:r>
+              <a:rPr lang="en-US" sz="3000" b="1" dirty="0">
+                <a:solidFill>
+                  <a:srgbClr val="FFFFFF"/>
                 </a:solidFill>
                 <a:latin typeface="Cambria" pitchFamily="34" charset="0"/>
                 <a:ea typeface="Cambria" pitchFamily="34" charset="-122"/>
@@ -4186,38 +7660,38 @@
               </a:rPr>
               <a:t>ρ = 0.906</a:t>
             </a:r>
-            <a:endParaRPr lang="en-US" sz="3200" dirty="0"/>
+            <a:endParaRPr lang="en-US" sz="3000" dirty="0"/>
           </a:p>
         </p:txBody>
       </p:sp>
       <p:sp>
         <p:nvSpPr>
           <p:cNvPr id="5" name="Text 3"/>
-          <p:cNvSpPr txBox="1"/>
-          <p:nvPr/>
-        </p:nvSpPr>
-        <p:spPr>
-          <a:xfrm>
-            <a:off x="777240" y="2130552"/>
-            <a:ext cx="5029200" cy="320040"/>
-          </a:xfrm>
-          <a:prstGeom prst="rect">
-            <a:avLst/>
-          </a:prstGeom>
-          <a:noFill/>
-          <a:ln/>
-        </p:spPr>
-        <p:txBody>
-          <a:bodyPr wrap="square" lIns="0" tIns="0" rIns="0" bIns="0" rtlCol="0" anchor="ctr"/>
-          <a:lstStyle/>
-          <a:p>
-            <a:pPr marL="0" indent="0">
-              <a:buNone/>
-            </a:pPr>
-            <a:r>
-              <a:rPr lang="en-US" sz="1200" dirty="0">
-                <a:solidFill>
-                  <a:srgbClr val="EAF0FB"/>
+          <p:cNvSpPr/>
+          <p:nvPr/>
+        </p:nvSpPr>
+        <p:spPr>
+          <a:xfrm>
+            <a:off x="914400" y="1965960"/>
+            <a:ext cx="2377440" cy="320040"/>
+          </a:xfrm>
+          <a:prstGeom prst="rect">
+            <a:avLst/>
+          </a:prstGeom>
+          <a:noFill/>
+          <a:ln/>
+        </p:spPr>
+        <p:txBody>
+          <a:bodyPr wrap="square" lIns="0" tIns="0" rIns="0" bIns="0" rtlCol="0" anchor="ctr"/>
+          <a:lstStyle/>
+          <a:p>
+            <a:pPr indent="0" marL="0">
+              <a:buNone/>
+            </a:pPr>
+            <a:r>
+              <a:rPr lang="en-US" sz="1100" dirty="0">
+                <a:solidFill>
+                  <a:srgbClr val="F3D6DC"/>
                 </a:solidFill>
                 <a:latin typeface="Calibri" pitchFamily="34" charset="0"/>
                 <a:ea typeface="Calibri" pitchFamily="34" charset="-122"/>
@@ -4225,39 +7699,39 @@
               </a:rPr>
               <a:t>Спирмен, p &lt; 0.0001</a:t>
             </a:r>
-            <a:endParaRPr lang="en-US" sz="1200" dirty="0"/>
+            <a:endParaRPr lang="en-US" sz="1100" dirty="0"/>
           </a:p>
         </p:txBody>
       </p:sp>
       <p:sp>
         <p:nvSpPr>
           <p:cNvPr id="6" name="Text 4"/>
-          <p:cNvSpPr txBox="1"/>
-          <p:nvPr/>
-        </p:nvSpPr>
-        <p:spPr>
-          <a:xfrm>
-            <a:off x="777240" y="2514600"/>
-            <a:ext cx="5029200" cy="914400"/>
-          </a:xfrm>
-          <a:prstGeom prst="rect">
-            <a:avLst/>
-          </a:prstGeom>
-          <a:noFill/>
-          <a:ln/>
-        </p:spPr>
-        <p:txBody>
-          <a:bodyPr wrap="square" lIns="0" tIns="0" rIns="0" bIns="0" rtlCol="0" anchor="ctr"/>
-          <a:lstStyle/>
-          <a:p>
-            <a:pPr marL="0" indent="0">
+          <p:cNvSpPr/>
+          <p:nvPr/>
+        </p:nvSpPr>
+        <p:spPr>
+          <a:xfrm>
+            <a:off x="3337560" y="1325880"/>
+            <a:ext cx="2514600" cy="1325880"/>
+          </a:xfrm>
+          <a:prstGeom prst="rect">
+            <a:avLst/>
+          </a:prstGeom>
+          <a:noFill/>
+          <a:ln/>
+        </p:spPr>
+        <p:txBody>
+          <a:bodyPr wrap="square" lIns="0" tIns="0" rIns="0" bIns="0" rtlCol="0" anchor="ctr"/>
+          <a:lstStyle/>
+          <a:p>
+            <a:pPr indent="0" marL="0">
               <a:lnSpc>
-                <a:spcPct val="125000"/>
+                <a:spcPct val="115000"/>
               </a:lnSpc>
               <a:buNone/>
             </a:pPr>
             <a:r>
-              <a:rPr lang="en-US" sz="1300" dirty="0">
+              <a:rPr lang="en-US" sz="1250" dirty="0">
                 <a:solidFill>
                   <a:srgbClr val="FFFFFF"/>
                 </a:solidFill>
@@ -4265,9 +7739,9 @@
                 <a:ea typeface="Calibri" pitchFamily="34" charset="-122"/>
                 <a:cs typeface="Calibri" pitchFamily="34" charset="-120"/>
               </a:rPr>
-              <a:t>Структура спроса устойчива между сезонами — ранги подгрупп сохраняются, что обосновывает LFL-прогноз.</a:t>
-            </a:r>
-            <a:endParaRPr lang="en-US" sz="1300" dirty="0"/>
+              <a:t>Ранги подгрупп устойчивы между сезонами — это обосновывает прогноз от прошлого года</a:t>
+            </a:r>
+            <a:endParaRPr lang="en-US" sz="1250" dirty="0"/>
           </a:p>
         </p:txBody>
       </p:sp>
@@ -4279,16 +7753,16 @@
         </p:nvSpPr>
         <p:spPr>
           <a:xfrm>
-            <a:off x="502920" y="3794760"/>
-            <a:ext cx="5577840" cy="2331720"/>
+            <a:off x="6172200" y="1188720"/>
+            <a:ext cx="5394960" cy="1600200"/>
           </a:xfrm>
           <a:prstGeom prst="roundRect">
             <a:avLst>
-              <a:gd name="adj" fmla="val 3137"/>
+              <a:gd name="adj" fmla="val 4571"/>
             </a:avLst>
           </a:prstGeom>
           <a:solidFill>
-            <a:srgbClr val="1E2761"/>
+            <a:srgbClr val="7E1013"/>
           </a:solidFill>
           <a:ln/>
         </p:spPr>
@@ -4296,31 +7770,31 @@
       <p:sp>
         <p:nvSpPr>
           <p:cNvPr id="8" name="Text 6"/>
-          <p:cNvSpPr txBox="1"/>
-          <p:nvPr/>
-        </p:nvSpPr>
-        <p:spPr>
-          <a:xfrm>
-            <a:off x="777240" y="4087368"/>
-            <a:ext cx="5029200" cy="594360"/>
-          </a:xfrm>
-          <a:prstGeom prst="rect">
-            <a:avLst/>
-          </a:prstGeom>
-          <a:noFill/>
-          <a:ln/>
-        </p:spPr>
-        <p:txBody>
-          <a:bodyPr wrap="square" lIns="0" tIns="0" rIns="0" bIns="0" rtlCol="0" anchor="ctr"/>
-          <a:lstStyle/>
-          <a:p>
-            <a:pPr marL="0" indent="0">
-              <a:buNone/>
-            </a:pPr>
-            <a:r>
-              <a:rPr lang="en-US" sz="3200" b="1" dirty="0">
-                <a:solidFill>
-                  <a:srgbClr val="C9A227"/>
+          <p:cNvSpPr/>
+          <p:nvPr/>
+        </p:nvSpPr>
+        <p:spPr>
+          <a:xfrm>
+            <a:off x="6446520" y="1298448"/>
+            <a:ext cx="2377440" cy="685800"/>
+          </a:xfrm>
+          <a:prstGeom prst="rect">
+            <a:avLst/>
+          </a:prstGeom>
+          <a:noFill/>
+          <a:ln/>
+        </p:spPr>
+        <p:txBody>
+          <a:bodyPr wrap="square" lIns="0" tIns="0" rIns="0" bIns="0" rtlCol="0" anchor="ctr"/>
+          <a:lstStyle/>
+          <a:p>
+            <a:pPr indent="0" marL="0">
+              <a:buNone/>
+            </a:pPr>
+            <a:r>
+              <a:rPr lang="en-US" sz="3000" b="1" dirty="0">
+                <a:solidFill>
+                  <a:srgbClr val="FFFFFF"/>
                 </a:solidFill>
                 <a:latin typeface="Cambria" pitchFamily="34" charset="0"/>
                 <a:ea typeface="Cambria" pitchFamily="34" charset="-122"/>
@@ -4328,38 +7802,38 @@
               </a:rPr>
               <a:t>× 5.2</a:t>
             </a:r>
-            <a:endParaRPr lang="en-US" sz="3200" dirty="0"/>
+            <a:endParaRPr lang="en-US" sz="3000" dirty="0"/>
           </a:p>
         </p:txBody>
       </p:sp>
       <p:sp>
         <p:nvSpPr>
           <p:cNvPr id="9" name="Text 7"/>
-          <p:cNvSpPr txBox="1"/>
-          <p:nvPr/>
-        </p:nvSpPr>
-        <p:spPr>
-          <a:xfrm>
-            <a:off x="777240" y="4690872"/>
-            <a:ext cx="5029200" cy="320040"/>
-          </a:xfrm>
-          <a:prstGeom prst="rect">
-            <a:avLst/>
-          </a:prstGeom>
-          <a:noFill/>
-          <a:ln/>
-        </p:spPr>
-        <p:txBody>
-          <a:bodyPr wrap="square" lIns="0" tIns="0" rIns="0" bIns="0" rtlCol="0" anchor="ctr"/>
-          <a:lstStyle/>
-          <a:p>
-            <a:pPr marL="0" indent="0">
-              <a:buNone/>
-            </a:pPr>
-            <a:r>
-              <a:rPr lang="en-US" sz="1200" dirty="0">
-                <a:solidFill>
-                  <a:srgbClr val="EAF0FB"/>
+          <p:cNvSpPr/>
+          <p:nvPr/>
+        </p:nvSpPr>
+        <p:spPr>
+          <a:xfrm>
+            <a:off x="6446520" y="1965960"/>
+            <a:ext cx="2377440" cy="320040"/>
+          </a:xfrm>
+          <a:prstGeom prst="rect">
+            <a:avLst/>
+          </a:prstGeom>
+          <a:noFill/>
+          <a:ln/>
+        </p:spPr>
+        <p:txBody>
+          <a:bodyPr wrap="square" lIns="0" tIns="0" rIns="0" bIns="0" rtlCol="0" anchor="ctr"/>
+          <a:lstStyle/>
+          <a:p>
+            <a:pPr indent="0" marL="0">
+              <a:buNone/>
+            </a:pPr>
+            <a:r>
+              <a:rPr lang="en-US" sz="1100" dirty="0">
+                <a:solidFill>
+                  <a:srgbClr val="F3D6DC"/>
                 </a:solidFill>
                 <a:latin typeface="Calibri" pitchFamily="34" charset="0"/>
                 <a:ea typeface="Calibri" pitchFamily="34" charset="-122"/>
@@ -4367,39 +7841,39 @@
               </a:rPr>
               <a:t>Манна-Уитни, p &lt; 0.00001</a:t>
             </a:r>
-            <a:endParaRPr lang="en-US" sz="1200" dirty="0"/>
+            <a:endParaRPr lang="en-US" sz="1100" dirty="0"/>
           </a:p>
         </p:txBody>
       </p:sp>
       <p:sp>
         <p:nvSpPr>
           <p:cNvPr id="10" name="Text 8"/>
-          <p:cNvSpPr txBox="1"/>
-          <p:nvPr/>
-        </p:nvSpPr>
-        <p:spPr>
-          <a:xfrm>
-            <a:off x="777240" y="5074920"/>
-            <a:ext cx="5029200" cy="914400"/>
-          </a:xfrm>
-          <a:prstGeom prst="rect">
-            <a:avLst/>
-          </a:prstGeom>
-          <a:noFill/>
-          <a:ln/>
-        </p:spPr>
-        <p:txBody>
-          <a:bodyPr wrap="square" lIns="0" tIns="0" rIns="0" bIns="0" rtlCol="0" anchor="ctr"/>
-          <a:lstStyle/>
-          <a:p>
-            <a:pPr marL="0" indent="0">
+          <p:cNvSpPr/>
+          <p:nvPr/>
+        </p:nvSpPr>
+        <p:spPr>
+          <a:xfrm>
+            <a:off x="8869680" y="1325880"/>
+            <a:ext cx="2514600" cy="1325880"/>
+          </a:xfrm>
+          <a:prstGeom prst="rect">
+            <a:avLst/>
+          </a:prstGeom>
+          <a:noFill/>
+          <a:ln/>
+        </p:spPr>
+        <p:txBody>
+          <a:bodyPr wrap="square" lIns="0" tIns="0" rIns="0" bIns="0" rtlCol="0" anchor="ctr"/>
+          <a:lstStyle/>
+          <a:p>
+            <a:pPr indent="0" marL="0">
               <a:lnSpc>
-                <a:spcPct val="125000"/>
+                <a:spcPct val="115000"/>
               </a:lnSpc>
               <a:buNone/>
             </a:pPr>
             <a:r>
-              <a:rPr lang="en-US" sz="1300" dirty="0">
+              <a:rPr lang="en-US" sz="1250" dirty="0">
                 <a:solidFill>
                   <a:srgbClr val="FFFFFF"/>
                 </a:solidFill>
@@ -4407,30 +7881,30 @@
                 <a:ea typeface="Calibri" pitchFamily="34" charset="-122"/>
                 <a:cs typeface="Calibri" pitchFamily="34" charset="-120"/>
               </a:rPr>
-              <a:t>Дефицит на Дальнем Востоке (25.7%) значимо выше остальной сети (4.9%).</a:t>
-            </a:r>
-            <a:endParaRPr lang="en-US" sz="1300" dirty="0"/>
+              <a:t>Дефицит на Дальнем Востоке 25.7% против 4.9% по остальной сети</a:t>
+            </a:r>
+            <a:endParaRPr lang="en-US" sz="1250" dirty="0"/>
           </a:p>
         </p:txBody>
       </p:sp>
       <p:pic>
         <p:nvPicPr>
-          <p:cNvPr id="11" name="Image 0" descr="04_stockout_by_cluster.png"/>
+          <p:cNvPr id="11" name="Image 0" descr="04_stockout_by_cluster.png">    </p:cNvPr>
           <p:cNvPicPr>
             <a:picLocks noChangeAspect="1"/>
           </p:cNvPicPr>
           <p:nvPr/>
         </p:nvPicPr>
         <p:blipFill>
-          <a:blip r:embed="rId3"/>
+          <a:blip r:embed="rId1"/>
           <a:stretch>
             <a:fillRect/>
           </a:stretch>
         </p:blipFill>
         <p:spPr>
           <a:xfrm>
-            <a:off x="6355080" y="1691640"/>
-            <a:ext cx="5257800" cy="4069080"/>
+            <a:off x="1796796" y="2971800"/>
+            <a:ext cx="8595360" cy="3512611"/>
           </a:xfrm>
           <a:prstGeom prst="rect">
             <a:avLst/>
@@ -4458,7 +7932,7 @@
           <a:bodyPr wrap="square" rtlCol="0" anchor="ctr"/>
           <a:lstStyle/>
           <a:p>
-            <a:pPr marL="0" indent="0" algn="r">
+            <a:pPr algn="r" indent="0" marL="0">
               <a:buNone/>
             </a:pPr>
             <a:r>
@@ -4492,7 +7966,6 @@
         <a:solidFill>
           <a:srgbClr val="FFFFFF"/>
         </a:solidFill>
-        <a:effectLst/>
       </p:bgPr>
     </p:bg>
     <p:spTree>
@@ -4512,37 +7985,37 @@
       <p:sp>
         <p:nvSpPr>
           <p:cNvPr id="2" name="Text 0"/>
-          <p:cNvSpPr txBox="1"/>
+          <p:cNvSpPr/>
           <p:nvPr/>
         </p:nvSpPr>
         <p:spPr>
           <a:xfrm>
             <a:off x="640080" y="411480"/>
-            <a:ext cx="10881360" cy="594360"/>
-          </a:xfrm>
-          <a:prstGeom prst="rect">
-            <a:avLst/>
-          </a:prstGeom>
-          <a:noFill/>
-          <a:ln/>
-        </p:spPr>
-        <p:txBody>
-          <a:bodyPr wrap="square" lIns="0" tIns="0" rIns="0" bIns="0" rtlCol="0" anchor="ctr"/>
-          <a:lstStyle/>
-          <a:p>
-            <a:pPr marL="0" indent="0">
+            <a:ext cx="10881360" cy="640080"/>
+          </a:xfrm>
+          <a:prstGeom prst="rect">
+            <a:avLst/>
+          </a:prstGeom>
+          <a:noFill/>
+          <a:ln/>
+        </p:spPr>
+        <p:txBody>
+          <a:bodyPr wrap="square" lIns="0" tIns="0" rIns="0" bIns="0" rtlCol="0" anchor="ctr"/>
+          <a:lstStyle/>
+          <a:p>
+            <a:pPr indent="0" marL="0">
               <a:buNone/>
             </a:pPr>
             <a:r>
               <a:rPr lang="en-US" sz="2800" b="1" dirty="0">
                 <a:solidFill>
-                  <a:srgbClr val="1E2761"/>
+                  <a:srgbClr val="323C32"/>
                 </a:solidFill>
                 <a:latin typeface="Cambria" pitchFamily="34" charset="0"/>
                 <a:ea typeface="Cambria" pitchFamily="34" charset="-122"/>
                 <a:cs typeface="Cambria" pitchFamily="34" charset="-120"/>
               </a:rPr>
-              <a:t>Результаты: сравнение трёх методов</a:t>
+              <a:t>Две схемы проверки моделей</a:t>
             </a:r>
             <a:endParaRPr lang="en-US" sz="2800" dirty="0"/>
           </a:p>
@@ -4551,25 +8024,25 @@
       <p:sp>
         <p:nvSpPr>
           <p:cNvPr id="3" name="Text 1"/>
-          <p:cNvSpPr txBox="1"/>
-          <p:nvPr/>
-        </p:nvSpPr>
-        <p:spPr>
-          <a:xfrm>
-            <a:off x="640080" y="960120"/>
-            <a:ext cx="10515600" cy="365760"/>
-          </a:xfrm>
-          <a:prstGeom prst="rect">
-            <a:avLst/>
-          </a:prstGeom>
-          <a:noFill/>
-          <a:ln/>
-        </p:spPr>
-        <p:txBody>
-          <a:bodyPr wrap="square" lIns="0" tIns="0" rIns="0" bIns="0" rtlCol="0" anchor="ctr"/>
-          <a:lstStyle/>
-          <a:p>
-            <a:pPr marL="0" indent="0">
+          <p:cNvSpPr/>
+          <p:nvPr/>
+        </p:nvSpPr>
+        <p:spPr>
+          <a:xfrm>
+            <a:off x="640080" y="987552"/>
+            <a:ext cx="10881360" cy="365760"/>
+          </a:xfrm>
+          <a:prstGeom prst="rect">
+            <a:avLst/>
+          </a:prstGeom>
+          <a:noFill/>
+          <a:ln/>
+        </p:spPr>
+        <p:txBody>
+          <a:bodyPr wrap="square" lIns="0" tIns="0" rIns="0" bIns="0" rtlCol="0" anchor="ctr"/>
+          <a:lstStyle/>
+          <a:p>
+            <a:pPr indent="0" marL="0">
               <a:buNone/>
             </a:pPr>
             <a:r>
@@ -4581,144 +8054,918 @@
                 <a:ea typeface="Calibri" pitchFamily="34" charset="-122"/>
                 <a:cs typeface="Calibri" pitchFamily="34" charset="-120"/>
               </a:rPr>
-              <a:t>Честная проверка на 36 отложенных магазинах, не участвовавших в обучении</a:t>
+              <a:t>Главный вопрос: что модель имеет право знать в момент решения</a:t>
             </a:r>
             <a:endParaRPr lang="en-US" sz="1300" dirty="0"/>
           </a:p>
         </p:txBody>
       </p:sp>
-      <p:pic>
-        <p:nvPicPr>
-          <p:cNvPr id="4" name="Image 0" descr="07_wape_comparison.png"/>
-          <p:cNvPicPr>
-            <a:picLocks noChangeAspect="1"/>
-          </p:cNvPicPr>
-          <p:nvPr/>
-        </p:nvPicPr>
-        <p:blipFill>
-          <a:blip r:embed="rId3"/>
-          <a:stretch>
-            <a:fillRect/>
-          </a:stretch>
-        </p:blipFill>
-        <p:spPr>
-          <a:xfrm>
-            <a:off x="502920" y="1508760"/>
-            <a:ext cx="5577840" cy="3794760"/>
-          </a:xfrm>
-          <a:prstGeom prst="rect">
-            <a:avLst/>
-          </a:prstGeom>
-        </p:spPr>
-      </p:pic>
-      <p:pic>
-        <p:nvPicPr>
-          <p:cNvPr id="5" name="Image 1" descr="06_wape_bias_by_cluster.png"/>
-          <p:cNvPicPr>
-            <a:picLocks noChangeAspect="1"/>
-          </p:cNvPicPr>
-          <p:nvPr/>
-        </p:nvPicPr>
-        <p:blipFill>
-          <a:blip r:embed="rId4"/>
-          <a:stretch>
-            <a:fillRect/>
-          </a:stretch>
-        </p:blipFill>
-        <p:spPr>
-          <a:xfrm>
-            <a:off x="6355080" y="1508760"/>
-            <a:ext cx="5257800" cy="3200400"/>
-          </a:xfrm>
-          <a:prstGeom prst="rect">
-            <a:avLst/>
-          </a:prstGeom>
-        </p:spPr>
-      </p:pic>
-      <p:sp>
-        <p:nvSpPr>
-          <p:cNvPr id="6" name="Text 2"/>
-          <p:cNvSpPr txBox="1"/>
-          <p:nvPr/>
-        </p:nvSpPr>
-        <p:spPr>
-          <a:xfrm>
-            <a:off x="6355080" y="4754880"/>
-            <a:ext cx="5257800" cy="365760"/>
-          </a:xfrm>
-          <a:prstGeom prst="rect">
-            <a:avLst/>
-          </a:prstGeom>
-          <a:noFill/>
-          <a:ln/>
-        </p:spPr>
-        <p:txBody>
-          <a:bodyPr wrap="square" lIns="0" tIns="0" rIns="0" bIns="0" rtlCol="0" anchor="ctr"/>
-          <a:lstStyle/>
-          <a:p>
-            <a:pPr marL="0" indent="0">
-              <a:buNone/>
-            </a:pPr>
-            <a:r>
-              <a:rPr lang="en-US" sz="1150" i="1" dirty="0">
-                <a:solidFill>
-                  <a:srgbClr val="6B7280"/>
+      <p:sp>
+        <p:nvSpPr>
+          <p:cNvPr id="4" name="Shape 2"/>
+          <p:cNvSpPr/>
+          <p:nvPr/>
+        </p:nvSpPr>
+        <p:spPr>
+          <a:xfrm>
+            <a:off x="640080" y="1463040"/>
+            <a:ext cx="5349240" cy="3977640"/>
+          </a:xfrm>
+          <a:prstGeom prst="roundRect">
+            <a:avLst>
+              <a:gd name="adj" fmla="val 1839"/>
+            </a:avLst>
+          </a:prstGeom>
+          <a:solidFill>
+            <a:srgbClr val="F1EFE8"/>
+          </a:solidFill>
+          <a:ln/>
+        </p:spPr>
+      </p:sp>
+      <p:sp>
+        <p:nvSpPr>
+          <p:cNvPr id="5" name="Shape 3"/>
+          <p:cNvSpPr/>
+          <p:nvPr/>
+        </p:nvSpPr>
+        <p:spPr>
+          <a:xfrm>
+            <a:off x="640080" y="1463040"/>
+            <a:ext cx="5349240" cy="868680"/>
+          </a:xfrm>
+          <a:prstGeom prst="rect">
+            <a:avLst/>
+          </a:prstGeom>
+          <a:solidFill>
+            <a:srgbClr val="323C32"/>
+          </a:solidFill>
+          <a:ln/>
+        </p:spPr>
+      </p:sp>
+      <p:sp>
+        <p:nvSpPr>
+          <p:cNvPr id="6" name="Text 4"/>
+          <p:cNvSpPr/>
+          <p:nvPr/>
+        </p:nvSpPr>
+        <p:spPr>
+          <a:xfrm>
+            <a:off x="914400" y="1536192"/>
+            <a:ext cx="4754880" cy="274320"/>
+          </a:xfrm>
+          <a:prstGeom prst="rect">
+            <a:avLst/>
+          </a:prstGeom>
+          <a:noFill/>
+          <a:ln/>
+        </p:spPr>
+        <p:txBody>
+          <a:bodyPr wrap="square" lIns="0" tIns="0" rIns="0" bIns="0" rtlCol="0" anchor="ctr"/>
+          <a:lstStyle/>
+          <a:p>
+            <a:pPr indent="0" marL="0">
+              <a:buNone/>
+            </a:pPr>
+            <a:r>
+              <a:rPr lang="en-US" sz="1000" b="1" spc="150" kern="0" dirty="0">
+                <a:solidFill>
+                  <a:srgbClr val="E4E2D3"/>
                 </a:solidFill>
                 <a:latin typeface="Calibri" pitchFamily="34" charset="0"/>
                 <a:ea typeface="Calibri" pitchFamily="34" charset="-122"/>
                 <a:cs typeface="Calibri" pitchFamily="34" charset="-120"/>
               </a:rPr>
-              <a:t>Точность бейзлайнов по кластерам — база для сравнения с Ridge</a:t>
-            </a:r>
-            <a:endParaRPr lang="en-US" sz="1150" dirty="0"/>
-          </a:p>
-        </p:txBody>
-      </p:sp>
-      <p:sp>
-        <p:nvSpPr>
-          <p:cNvPr id="7" name="Text 3"/>
-          <p:cNvSpPr txBox="1"/>
-          <p:nvPr/>
-        </p:nvSpPr>
-        <p:spPr>
-          <a:xfrm>
-            <a:off x="502920" y="5349240"/>
-            <a:ext cx="11155680" cy="822960"/>
-          </a:xfrm>
-          <a:prstGeom prst="rect">
-            <a:avLst/>
-          </a:prstGeom>
-          <a:noFill/>
-          <a:ln/>
-        </p:spPr>
-        <p:txBody>
-          <a:bodyPr wrap="square" lIns="0" tIns="0" rIns="0" bIns="0" rtlCol="0" anchor="ctr"/>
-          <a:lstStyle/>
-          <a:p>
-            <a:pPr marL="0" indent="0">
-              <a:lnSpc>
-                <a:spcPct val="120000"/>
-              </a:lnSpc>
-              <a:buNone/>
-            </a:pPr>
-            <a:r>
-              <a:rPr lang="en-US" sz="1450" b="1" dirty="0">
-                <a:solidFill>
-                  <a:srgbClr val="1E2761"/>
+              <a:t>ОСНОВНАЯ СХЕМА</a:t>
+            </a:r>
+            <a:endParaRPr lang="en-US" sz="1000" dirty="0"/>
+          </a:p>
+        </p:txBody>
+      </p:sp>
+      <p:sp>
+        <p:nvSpPr>
+          <p:cNvPr id="7" name="Text 5"/>
+          <p:cNvSpPr/>
+          <p:nvPr/>
+        </p:nvSpPr>
+        <p:spPr>
+          <a:xfrm>
+            <a:off x="914400" y="1810512"/>
+            <a:ext cx="4754880" cy="457200"/>
+          </a:xfrm>
+          <a:prstGeom prst="rect">
+            <a:avLst/>
+          </a:prstGeom>
+          <a:noFill/>
+          <a:ln/>
+        </p:spPr>
+        <p:txBody>
+          <a:bodyPr wrap="square" lIns="0" tIns="0" rIns="0" bIns="0" rtlCol="0" anchor="ctr"/>
+          <a:lstStyle/>
+          <a:p>
+            <a:pPr indent="0" marL="0">
+              <a:buNone/>
+            </a:pPr>
+            <a:r>
+              <a:rPr lang="en-US" sz="2000" b="1" dirty="0">
+                <a:solidFill>
+                  <a:srgbClr val="FFFFFF"/>
                 </a:solidFill>
                 <a:latin typeface="Cambria" pitchFamily="34" charset="0"/>
                 <a:ea typeface="Cambria" pitchFamily="34" charset="-122"/>
                 <a:cs typeface="Cambria" pitchFamily="34" charset="-120"/>
               </a:rPr>
-              <a:t>Наивный LFL и Fair Share совпали математически — единый коэффициент роста усредняет разную динамику кластеров. Ridge, подбирая веса отдельно, снижает ошибку на треть (bias: 16.4% → 6.2%).</a:t>
-            </a:r>
-            <a:endParaRPr lang="en-US" sz="1450" dirty="0"/>
-          </a:p>
-        </p:txBody>
-      </p:sp>
-      <p:sp>
-        <p:nvSpPr>
-          <p:cNvPr id="8" name="Text 4"/>
+              <a:t>Прогноз на 15 октября</a:t>
+            </a:r>
+            <a:endParaRPr lang="en-US" sz="2000" dirty="0"/>
+          </a:p>
+        </p:txBody>
+      </p:sp>
+      <p:sp>
+        <p:nvSpPr>
+          <p:cNvPr id="8" name="Text 6"/>
+          <p:cNvSpPr/>
+          <p:nvPr/>
+        </p:nvSpPr>
+        <p:spPr>
+          <a:xfrm>
+            <a:off x="914400" y="2514600"/>
+            <a:ext cx="1691640" cy="640080"/>
+          </a:xfrm>
+          <a:prstGeom prst="rect">
+            <a:avLst/>
+          </a:prstGeom>
+          <a:noFill/>
+          <a:ln/>
+        </p:spPr>
+        <p:txBody>
+          <a:bodyPr wrap="square" lIns="0" tIns="0" rIns="0" bIns="0" rtlCol="0" anchor="ctr"/>
+          <a:lstStyle/>
+          <a:p>
+            <a:pPr indent="0" marL="0">
+              <a:buNone/>
+            </a:pPr>
+            <a:r>
+              <a:rPr lang="en-US" sz="1200" b="1" dirty="0">
+                <a:solidFill>
+                  <a:srgbClr val="6B7280"/>
+                </a:solidFill>
+                <a:latin typeface="Calibri" pitchFamily="34" charset="0"/>
+                <a:ea typeface="Calibri" pitchFamily="34" charset="-122"/>
+                <a:cs typeface="Calibri" pitchFamily="34" charset="-120"/>
+              </a:rPr>
+              <a:t>Обучение</a:t>
+            </a:r>
+            <a:endParaRPr lang="en-US" sz="1200" dirty="0"/>
+          </a:p>
+        </p:txBody>
+      </p:sp>
+      <p:sp>
+        <p:nvSpPr>
+          <p:cNvPr id="9" name="Text 7"/>
+          <p:cNvSpPr/>
+          <p:nvPr/>
+        </p:nvSpPr>
+        <p:spPr>
+          <a:xfrm>
+            <a:off x="2651760" y="2514600"/>
+            <a:ext cx="3108960" cy="640080"/>
+          </a:xfrm>
+          <a:prstGeom prst="rect">
+            <a:avLst/>
+          </a:prstGeom>
+          <a:noFill/>
+          <a:ln/>
+        </p:spPr>
+        <p:txBody>
+          <a:bodyPr wrap="square" lIns="0" tIns="0" rIns="0" bIns="0" rtlCol="0" anchor="ctr"/>
+          <a:lstStyle/>
+          <a:p>
+            <a:pPr indent="0" marL="0">
+              <a:buNone/>
+            </a:pPr>
+            <a:r>
+              <a:rPr lang="en-US" sz="1300" dirty="0">
+                <a:solidFill>
+                  <a:srgbClr val="1F2937"/>
+                </a:solidFill>
+                <a:latin typeface="Calibri" pitchFamily="34" charset="0"/>
+                <a:ea typeface="Calibri" pitchFamily="34" charset="-122"/>
+                <a:cs typeface="Calibri" pitchFamily="34" charset="-120"/>
+              </a:rPr>
+              <a:t>сезон 2024: начало октября → продажи ноября–декабря</a:t>
+            </a:r>
+            <a:endParaRPr lang="en-US" sz="1300" dirty="0"/>
+          </a:p>
+        </p:txBody>
+      </p:sp>
+      <p:sp>
+        <p:nvSpPr>
+          <p:cNvPr id="10" name="Text 8"/>
+          <p:cNvSpPr/>
+          <p:nvPr/>
+        </p:nvSpPr>
+        <p:spPr>
+          <a:xfrm>
+            <a:off x="914400" y="3227832"/>
+            <a:ext cx="1691640" cy="640080"/>
+          </a:xfrm>
+          <a:prstGeom prst="rect">
+            <a:avLst/>
+          </a:prstGeom>
+          <a:noFill/>
+          <a:ln/>
+        </p:spPr>
+        <p:txBody>
+          <a:bodyPr wrap="square" lIns="0" tIns="0" rIns="0" bIns="0" rtlCol="0" anchor="ctr"/>
+          <a:lstStyle/>
+          <a:p>
+            <a:pPr indent="0" marL="0">
+              <a:buNone/>
+            </a:pPr>
+            <a:r>
+              <a:rPr lang="en-US" sz="1200" b="1" dirty="0">
+                <a:solidFill>
+                  <a:srgbClr val="6B7280"/>
+                </a:solidFill>
+                <a:latin typeface="Calibri" pitchFamily="34" charset="0"/>
+                <a:ea typeface="Calibri" pitchFamily="34" charset="-122"/>
+                <a:cs typeface="Calibri" pitchFamily="34" charset="-120"/>
+              </a:rPr>
+              <a:t>Проверка</a:t>
+            </a:r>
+            <a:endParaRPr lang="en-US" sz="1200" dirty="0"/>
+          </a:p>
+        </p:txBody>
+      </p:sp>
+      <p:sp>
+        <p:nvSpPr>
+          <p:cNvPr id="11" name="Text 9"/>
+          <p:cNvSpPr/>
+          <p:nvPr/>
+        </p:nvSpPr>
+        <p:spPr>
+          <a:xfrm>
+            <a:off x="2651760" y="3227832"/>
+            <a:ext cx="3108960" cy="640080"/>
+          </a:xfrm>
+          <a:prstGeom prst="rect">
+            <a:avLst/>
+          </a:prstGeom>
+          <a:noFill/>
+          <a:ln/>
+        </p:spPr>
+        <p:txBody>
+          <a:bodyPr wrap="square" lIns="0" tIns="0" rIns="0" bIns="0" rtlCol="0" anchor="ctr"/>
+          <a:lstStyle/>
+          <a:p>
+            <a:pPr indent="0" marL="0">
+              <a:buNone/>
+            </a:pPr>
+            <a:r>
+              <a:rPr lang="en-US" sz="1300" dirty="0">
+                <a:solidFill>
+                  <a:srgbClr val="1F2937"/>
+                </a:solidFill>
+                <a:latin typeface="Calibri" pitchFamily="34" charset="0"/>
+                <a:ea typeface="Calibri" pitchFamily="34" charset="-122"/>
+                <a:cs typeface="Calibri" pitchFamily="34" charset="-120"/>
+              </a:rPr>
+              <a:t>сезон 2025, все сопоставимые пары</a:t>
+            </a:r>
+            <a:endParaRPr lang="en-US" sz="1300" dirty="0"/>
+          </a:p>
+        </p:txBody>
+      </p:sp>
+      <p:sp>
+        <p:nvSpPr>
+          <p:cNvPr id="12" name="Text 10"/>
+          <p:cNvSpPr/>
+          <p:nvPr/>
+        </p:nvSpPr>
+        <p:spPr>
+          <a:xfrm>
+            <a:off x="914400" y="3941064"/>
+            <a:ext cx="1691640" cy="640080"/>
+          </a:xfrm>
+          <a:prstGeom prst="rect">
+            <a:avLst/>
+          </a:prstGeom>
+          <a:noFill/>
+          <a:ln/>
+        </p:spPr>
+        <p:txBody>
+          <a:bodyPr wrap="square" lIns="0" tIns="0" rIns="0" bIns="0" rtlCol="0" anchor="ctr"/>
+          <a:lstStyle/>
+          <a:p>
+            <a:pPr indent="0" marL="0">
+              <a:buNone/>
+            </a:pPr>
+            <a:r>
+              <a:rPr lang="en-US" sz="1200" b="1" dirty="0">
+                <a:solidFill>
+                  <a:srgbClr val="6B7280"/>
+                </a:solidFill>
+                <a:latin typeface="Calibri" pitchFamily="34" charset="0"/>
+                <a:ea typeface="Calibri" pitchFamily="34" charset="-122"/>
+                <a:cs typeface="Calibri" pitchFamily="34" charset="-120"/>
+              </a:rPr>
+              <a:t>Признаки</a:t>
+            </a:r>
+            <a:endParaRPr lang="en-US" sz="1200" dirty="0"/>
+          </a:p>
+        </p:txBody>
+      </p:sp>
+      <p:sp>
+        <p:nvSpPr>
+          <p:cNvPr id="13" name="Text 11"/>
+          <p:cNvSpPr/>
+          <p:nvPr/>
+        </p:nvSpPr>
+        <p:spPr>
+          <a:xfrm>
+            <a:off x="2651760" y="3941064"/>
+            <a:ext cx="3108960" cy="640080"/>
+          </a:xfrm>
+          <a:prstGeom prst="rect">
+            <a:avLst/>
+          </a:prstGeom>
+          <a:noFill/>
+          <a:ln/>
+        </p:spPr>
+        <p:txBody>
+          <a:bodyPr wrap="square" lIns="0" tIns="0" rIns="0" bIns="0" rtlCol="0" anchor="ctr"/>
+          <a:lstStyle/>
+          <a:p>
+            <a:pPr indent="0" marL="0">
+              <a:buNone/>
+            </a:pPr>
+            <a:r>
+              <a:rPr lang="en-US" sz="1300" dirty="0">
+                <a:solidFill>
+                  <a:srgbClr val="1F2937"/>
+                </a:solidFill>
+                <a:latin typeface="Calibri" pitchFamily="34" charset="0"/>
+                <a:ea typeface="Calibri" pitchFamily="34" charset="-122"/>
+                <a:cs typeface="Calibri" pitchFamily="34" charset="-120"/>
+              </a:rPr>
+              <a:t>продажи W40–W41, атрибуты магазина, подгруппа</a:t>
+            </a:r>
+            <a:endParaRPr lang="en-US" sz="1300" dirty="0"/>
+          </a:p>
+        </p:txBody>
+      </p:sp>
+      <p:sp>
+        <p:nvSpPr>
+          <p:cNvPr id="14" name="Text 12"/>
+          <p:cNvSpPr/>
+          <p:nvPr/>
+        </p:nvSpPr>
+        <p:spPr>
+          <a:xfrm>
+            <a:off x="914400" y="4654296"/>
+            <a:ext cx="1691640" cy="640080"/>
+          </a:xfrm>
+          <a:prstGeom prst="rect">
+            <a:avLst/>
+          </a:prstGeom>
+          <a:noFill/>
+          <a:ln/>
+        </p:spPr>
+        <p:txBody>
+          <a:bodyPr wrap="square" lIns="0" tIns="0" rIns="0" bIns="0" rtlCol="0" anchor="ctr"/>
+          <a:lstStyle/>
+          <a:p>
+            <a:pPr indent="0" marL="0">
+              <a:buNone/>
+            </a:pPr>
+            <a:r>
+              <a:rPr lang="en-US" sz="1200" b="1" dirty="0">
+                <a:solidFill>
+                  <a:srgbClr val="6B7280"/>
+                </a:solidFill>
+                <a:latin typeface="Calibri" pitchFamily="34" charset="0"/>
+                <a:ea typeface="Calibri" pitchFamily="34" charset="-122"/>
+                <a:cs typeface="Calibri" pitchFamily="34" charset="-120"/>
+              </a:rPr>
+              <a:t>Продажи сезона 2025</a:t>
+            </a:r>
+            <a:endParaRPr lang="en-US" sz="1200" dirty="0"/>
+          </a:p>
+        </p:txBody>
+      </p:sp>
+      <p:sp>
+        <p:nvSpPr>
+          <p:cNvPr id="15" name="Text 13"/>
+          <p:cNvSpPr/>
+          <p:nvPr/>
+        </p:nvSpPr>
+        <p:spPr>
+          <a:xfrm>
+            <a:off x="2651760" y="4654296"/>
+            <a:ext cx="3108960" cy="640080"/>
+          </a:xfrm>
+          <a:prstGeom prst="rect">
+            <a:avLst/>
+          </a:prstGeom>
+          <a:noFill/>
+          <a:ln/>
+        </p:spPr>
+        <p:txBody>
+          <a:bodyPr wrap="square" lIns="0" tIns="0" rIns="0" bIns="0" rtlCol="0" anchor="ctr"/>
+          <a:lstStyle/>
+          <a:p>
+            <a:pPr indent="0" marL="0">
+              <a:buNone/>
+            </a:pPr>
+            <a:r>
+              <a:rPr lang="en-US" sz="1300" b="1" dirty="0">
+                <a:solidFill>
+                  <a:srgbClr val="697044"/>
+                </a:solidFill>
+                <a:latin typeface="Calibri" pitchFamily="34" charset="0"/>
+                <a:ea typeface="Calibri" pitchFamily="34" charset="-122"/>
+                <a:cs typeface="Calibri" pitchFamily="34" charset="-120"/>
+              </a:rPr>
+              <a:t>не используются</a:t>
+            </a:r>
+            <a:endParaRPr lang="en-US" sz="1300" dirty="0"/>
+          </a:p>
+        </p:txBody>
+      </p:sp>
+      <p:sp>
+        <p:nvSpPr>
+          <p:cNvPr id="16" name="Shape 14"/>
+          <p:cNvSpPr/>
+          <p:nvPr/>
+        </p:nvSpPr>
+        <p:spPr>
+          <a:xfrm>
+            <a:off x="6199632" y="1463040"/>
+            <a:ext cx="5349240" cy="3977640"/>
+          </a:xfrm>
+          <a:prstGeom prst="roundRect">
+            <a:avLst>
+              <a:gd name="adj" fmla="val 1839"/>
+            </a:avLst>
+          </a:prstGeom>
+          <a:solidFill>
+            <a:srgbClr val="F1EFE8"/>
+          </a:solidFill>
+          <a:ln/>
+        </p:spPr>
+      </p:sp>
+      <p:sp>
+        <p:nvSpPr>
+          <p:cNvPr id="17" name="Shape 15"/>
+          <p:cNvSpPr/>
+          <p:nvPr/>
+        </p:nvSpPr>
+        <p:spPr>
+          <a:xfrm>
+            <a:off x="6199632" y="1463040"/>
+            <a:ext cx="5349240" cy="868680"/>
+          </a:xfrm>
+          <a:prstGeom prst="rect">
+            <a:avLst/>
+          </a:prstGeom>
+          <a:solidFill>
+            <a:srgbClr val="697044"/>
+          </a:solidFill>
+          <a:ln/>
+        </p:spPr>
+      </p:sp>
+      <p:sp>
+        <p:nvSpPr>
+          <p:cNvPr id="18" name="Text 16"/>
+          <p:cNvSpPr/>
+          <p:nvPr/>
+        </p:nvSpPr>
+        <p:spPr>
+          <a:xfrm>
+            <a:off x="6473952" y="1536192"/>
+            <a:ext cx="4754880" cy="274320"/>
+          </a:xfrm>
+          <a:prstGeom prst="rect">
+            <a:avLst/>
+          </a:prstGeom>
+          <a:noFill/>
+          <a:ln/>
+        </p:spPr>
+        <p:txBody>
+          <a:bodyPr wrap="square" lIns="0" tIns="0" rIns="0" bIns="0" rtlCol="0" anchor="ctr"/>
+          <a:lstStyle/>
+          <a:p>
+            <a:pPr indent="0" marL="0">
+              <a:buNone/>
+            </a:pPr>
+            <a:r>
+              <a:rPr lang="en-US" sz="1000" b="1" spc="150" kern="0" dirty="0">
+                <a:solidFill>
+                  <a:srgbClr val="E4E2D3"/>
+                </a:solidFill>
+                <a:latin typeface="Calibri" pitchFamily="34" charset="0"/>
+                <a:ea typeface="Calibri" pitchFamily="34" charset="-122"/>
+                <a:cs typeface="Calibri" pitchFamily="34" charset="-120"/>
+              </a:rPr>
+              <a:t>ОЦЕНКА ПОТЕНЦИАЛА</a:t>
+            </a:r>
+            <a:endParaRPr lang="en-US" sz="1000" dirty="0"/>
+          </a:p>
+        </p:txBody>
+      </p:sp>
+      <p:sp>
+        <p:nvSpPr>
+          <p:cNvPr id="19" name="Text 17"/>
+          <p:cNvSpPr/>
+          <p:nvPr/>
+        </p:nvSpPr>
+        <p:spPr>
+          <a:xfrm>
+            <a:off x="6473952" y="1810512"/>
+            <a:ext cx="4754880" cy="457200"/>
+          </a:xfrm>
+          <a:prstGeom prst="rect">
+            <a:avLst/>
+          </a:prstGeom>
+          <a:noFill/>
+          <a:ln/>
+        </p:spPr>
+        <p:txBody>
+          <a:bodyPr wrap="square" lIns="0" tIns="0" rIns="0" bIns="0" rtlCol="0" anchor="ctr"/>
+          <a:lstStyle/>
+          <a:p>
+            <a:pPr indent="0" marL="0">
+              <a:buNone/>
+            </a:pPr>
+            <a:r>
+              <a:rPr lang="en-US" sz="2000" b="1" dirty="0">
+                <a:solidFill>
+                  <a:srgbClr val="FFFFFF"/>
+                </a:solidFill>
+                <a:latin typeface="Cambria" pitchFamily="34" charset="0"/>
+                <a:ea typeface="Cambria" pitchFamily="34" charset="-122"/>
+                <a:cs typeface="Cambria" pitchFamily="34" charset="-120"/>
+              </a:rPr>
+              <a:t>Внутри сезона</a:t>
+            </a:r>
+            <a:endParaRPr lang="en-US" sz="2000" dirty="0"/>
+          </a:p>
+        </p:txBody>
+      </p:sp>
+      <p:sp>
+        <p:nvSpPr>
+          <p:cNvPr id="20" name="Text 18"/>
+          <p:cNvSpPr/>
+          <p:nvPr/>
+        </p:nvSpPr>
+        <p:spPr>
+          <a:xfrm>
+            <a:off x="6473952" y="2514600"/>
+            <a:ext cx="1691640" cy="640080"/>
+          </a:xfrm>
+          <a:prstGeom prst="rect">
+            <a:avLst/>
+          </a:prstGeom>
+          <a:noFill/>
+          <a:ln/>
+        </p:spPr>
+        <p:txBody>
+          <a:bodyPr wrap="square" lIns="0" tIns="0" rIns="0" bIns="0" rtlCol="0" anchor="ctr"/>
+          <a:lstStyle/>
+          <a:p>
+            <a:pPr indent="0" marL="0">
+              <a:buNone/>
+            </a:pPr>
+            <a:r>
+              <a:rPr lang="en-US" sz="1200" b="1" dirty="0">
+                <a:solidFill>
+                  <a:srgbClr val="6B7280"/>
+                </a:solidFill>
+                <a:latin typeface="Calibri" pitchFamily="34" charset="0"/>
+                <a:ea typeface="Calibri" pitchFamily="34" charset="-122"/>
+                <a:cs typeface="Calibri" pitchFamily="34" charset="-120"/>
+              </a:rPr>
+              <a:t>Обучение</a:t>
+            </a:r>
+            <a:endParaRPr lang="en-US" sz="1200" dirty="0"/>
+          </a:p>
+        </p:txBody>
+      </p:sp>
+      <p:sp>
+        <p:nvSpPr>
+          <p:cNvPr id="21" name="Text 19"/>
+          <p:cNvSpPr/>
+          <p:nvPr/>
+        </p:nvSpPr>
+        <p:spPr>
+          <a:xfrm>
+            <a:off x="8211312" y="2514600"/>
+            <a:ext cx="3108960" cy="640080"/>
+          </a:xfrm>
+          <a:prstGeom prst="rect">
+            <a:avLst/>
+          </a:prstGeom>
+          <a:noFill/>
+          <a:ln/>
+        </p:spPr>
+        <p:txBody>
+          <a:bodyPr wrap="square" lIns="0" tIns="0" rIns="0" bIns="0" rtlCol="0" anchor="ctr"/>
+          <a:lstStyle/>
+          <a:p>
+            <a:pPr indent="0" marL="0">
+              <a:buNone/>
+            </a:pPr>
+            <a:r>
+              <a:rPr lang="en-US" sz="1300" dirty="0">
+                <a:solidFill>
+                  <a:srgbClr val="1F2937"/>
+                </a:solidFill>
+                <a:latin typeface="Calibri" pitchFamily="34" charset="0"/>
+                <a:ea typeface="Calibri" pitchFamily="34" charset="-122"/>
+                <a:cs typeface="Calibri" pitchFamily="34" charset="-120"/>
+              </a:rPr>
+              <a:t>106 магазинов, продажи сезона 2025</a:t>
+            </a:r>
+            <a:endParaRPr lang="en-US" sz="1300" dirty="0"/>
+          </a:p>
+        </p:txBody>
+      </p:sp>
+      <p:sp>
+        <p:nvSpPr>
+          <p:cNvPr id="22" name="Text 20"/>
+          <p:cNvSpPr/>
+          <p:nvPr/>
+        </p:nvSpPr>
+        <p:spPr>
+          <a:xfrm>
+            <a:off x="6473952" y="3227832"/>
+            <a:ext cx="1691640" cy="640080"/>
+          </a:xfrm>
+          <a:prstGeom prst="rect">
+            <a:avLst/>
+          </a:prstGeom>
+          <a:noFill/>
+          <a:ln/>
+        </p:spPr>
+        <p:txBody>
+          <a:bodyPr wrap="square" lIns="0" tIns="0" rIns="0" bIns="0" rtlCol="0" anchor="ctr"/>
+          <a:lstStyle/>
+          <a:p>
+            <a:pPr indent="0" marL="0">
+              <a:buNone/>
+            </a:pPr>
+            <a:r>
+              <a:rPr lang="en-US" sz="1200" b="1" dirty="0">
+                <a:solidFill>
+                  <a:srgbClr val="6B7280"/>
+                </a:solidFill>
+                <a:latin typeface="Calibri" pitchFamily="34" charset="0"/>
+                <a:ea typeface="Calibri" pitchFamily="34" charset="-122"/>
+                <a:cs typeface="Calibri" pitchFamily="34" charset="-120"/>
+              </a:rPr>
+              <a:t>Проверка</a:t>
+            </a:r>
+            <a:endParaRPr lang="en-US" sz="1200" dirty="0"/>
+          </a:p>
+        </p:txBody>
+      </p:sp>
+      <p:sp>
+        <p:nvSpPr>
+          <p:cNvPr id="23" name="Text 21"/>
+          <p:cNvSpPr/>
+          <p:nvPr/>
+        </p:nvSpPr>
+        <p:spPr>
+          <a:xfrm>
+            <a:off x="8211312" y="3227832"/>
+            <a:ext cx="3108960" cy="640080"/>
+          </a:xfrm>
+          <a:prstGeom prst="rect">
+            <a:avLst/>
+          </a:prstGeom>
+          <a:noFill/>
+          <a:ln/>
+        </p:spPr>
+        <p:txBody>
+          <a:bodyPr wrap="square" lIns="0" tIns="0" rIns="0" bIns="0" rtlCol="0" anchor="ctr"/>
+          <a:lstStyle/>
+          <a:p>
+            <a:pPr indent="0" marL="0">
+              <a:buNone/>
+            </a:pPr>
+            <a:r>
+              <a:rPr lang="en-US" sz="1300" dirty="0">
+                <a:solidFill>
+                  <a:srgbClr val="1F2937"/>
+                </a:solidFill>
+                <a:latin typeface="Calibri" pitchFamily="34" charset="0"/>
+                <a:ea typeface="Calibri" pitchFamily="34" charset="-122"/>
+                <a:cs typeface="Calibri" pitchFamily="34" charset="-120"/>
+              </a:rPr>
+              <a:t>36 других магазинов того же сезона</a:t>
+            </a:r>
+            <a:endParaRPr lang="en-US" sz="1300" dirty="0"/>
+          </a:p>
+        </p:txBody>
+      </p:sp>
+      <p:sp>
+        <p:nvSpPr>
+          <p:cNvPr id="24" name="Text 22"/>
+          <p:cNvSpPr/>
+          <p:nvPr/>
+        </p:nvSpPr>
+        <p:spPr>
+          <a:xfrm>
+            <a:off x="6473952" y="3941064"/>
+            <a:ext cx="1691640" cy="640080"/>
+          </a:xfrm>
+          <a:prstGeom prst="rect">
+            <a:avLst/>
+          </a:prstGeom>
+          <a:noFill/>
+          <a:ln/>
+        </p:spPr>
+        <p:txBody>
+          <a:bodyPr wrap="square" lIns="0" tIns="0" rIns="0" bIns="0" rtlCol="0" anchor="ctr"/>
+          <a:lstStyle/>
+          <a:p>
+            <a:pPr indent="0" marL="0">
+              <a:buNone/>
+            </a:pPr>
+            <a:r>
+              <a:rPr lang="en-US" sz="1200" b="1" dirty="0">
+                <a:solidFill>
+                  <a:srgbClr val="6B7280"/>
+                </a:solidFill>
+                <a:latin typeface="Calibri" pitchFamily="34" charset="0"/>
+                <a:ea typeface="Calibri" pitchFamily="34" charset="-122"/>
+                <a:cs typeface="Calibri" pitchFamily="34" charset="-120"/>
+              </a:rPr>
+              <a:t>Признаки</a:t>
+            </a:r>
+            <a:endParaRPr lang="en-US" sz="1200" dirty="0"/>
+          </a:p>
+        </p:txBody>
+      </p:sp>
+      <p:sp>
+        <p:nvSpPr>
+          <p:cNvPr id="25" name="Text 23"/>
+          <p:cNvSpPr/>
+          <p:nvPr/>
+        </p:nvSpPr>
+        <p:spPr>
+          <a:xfrm>
+            <a:off x="8211312" y="3941064"/>
+            <a:ext cx="3108960" cy="640080"/>
+          </a:xfrm>
+          <a:prstGeom prst="rect">
+            <a:avLst/>
+          </a:prstGeom>
+          <a:noFill/>
+          <a:ln/>
+        </p:spPr>
+        <p:txBody>
+          <a:bodyPr wrap="square" lIns="0" tIns="0" rIns="0" bIns="0" rtlCol="0" anchor="ctr"/>
+          <a:lstStyle/>
+          <a:p>
+            <a:pPr indent="0" marL="0">
+              <a:buNone/>
+            </a:pPr>
+            <a:r>
+              <a:rPr lang="en-US" sz="1300" dirty="0">
+                <a:solidFill>
+                  <a:srgbClr val="1F2937"/>
+                </a:solidFill>
+                <a:latin typeface="Calibri" pitchFamily="34" charset="0"/>
+                <a:ea typeface="Calibri" pitchFamily="34" charset="-122"/>
+                <a:cs typeface="Calibri" pitchFamily="34" charset="-120"/>
+              </a:rPr>
+              <a:t>продажи прошлого сезона, дефицит, атрибуты</a:t>
+            </a:r>
+            <a:endParaRPr lang="en-US" sz="1300" dirty="0"/>
+          </a:p>
+        </p:txBody>
+      </p:sp>
+      <p:sp>
+        <p:nvSpPr>
+          <p:cNvPr id="26" name="Text 24"/>
+          <p:cNvSpPr/>
+          <p:nvPr/>
+        </p:nvSpPr>
+        <p:spPr>
+          <a:xfrm>
+            <a:off x="6473952" y="4654296"/>
+            <a:ext cx="1691640" cy="640080"/>
+          </a:xfrm>
+          <a:prstGeom prst="rect">
+            <a:avLst/>
+          </a:prstGeom>
+          <a:noFill/>
+          <a:ln/>
+        </p:spPr>
+        <p:txBody>
+          <a:bodyPr wrap="square" lIns="0" tIns="0" rIns="0" bIns="0" rtlCol="0" anchor="ctr"/>
+          <a:lstStyle/>
+          <a:p>
+            <a:pPr indent="0" marL="0">
+              <a:buNone/>
+            </a:pPr>
+            <a:r>
+              <a:rPr lang="en-US" sz="1200" b="1" dirty="0">
+                <a:solidFill>
+                  <a:srgbClr val="6B7280"/>
+                </a:solidFill>
+                <a:latin typeface="Calibri" pitchFamily="34" charset="0"/>
+                <a:ea typeface="Calibri" pitchFamily="34" charset="-122"/>
+                <a:cs typeface="Calibri" pitchFamily="34" charset="-120"/>
+              </a:rPr>
+              <a:t>Продажи сезона 2025</a:t>
+            </a:r>
+            <a:endParaRPr lang="en-US" sz="1200" dirty="0"/>
+          </a:p>
+        </p:txBody>
+      </p:sp>
+      <p:sp>
+        <p:nvSpPr>
+          <p:cNvPr id="27" name="Text 25"/>
+          <p:cNvSpPr/>
+          <p:nvPr/>
+        </p:nvSpPr>
+        <p:spPr>
+          <a:xfrm>
+            <a:off x="8211312" y="4654296"/>
+            <a:ext cx="3108960" cy="640080"/>
+          </a:xfrm>
+          <a:prstGeom prst="rect">
+            <a:avLst/>
+          </a:prstGeom>
+          <a:noFill/>
+          <a:ln/>
+        </p:spPr>
+        <p:txBody>
+          <a:bodyPr wrap="square" lIns="0" tIns="0" rIns="0" bIns="0" rtlCol="0" anchor="ctr"/>
+          <a:lstStyle/>
+          <a:p>
+            <a:pPr indent="0" marL="0">
+              <a:buNone/>
+            </a:pPr>
+            <a:r>
+              <a:rPr lang="en-US" sz="1300" b="1" dirty="0">
+                <a:solidFill>
+                  <a:srgbClr val="B61B3B"/>
+                </a:solidFill>
+                <a:latin typeface="Calibri" pitchFamily="34" charset="0"/>
+                <a:ea typeface="Calibri" pitchFamily="34" charset="-122"/>
+                <a:cs typeface="Calibri" pitchFamily="34" charset="-120"/>
+              </a:rPr>
+              <a:t>используются — у остальных магазинов</a:t>
+            </a:r>
+            <a:endParaRPr lang="en-US" sz="1300" dirty="0"/>
+          </a:p>
+        </p:txBody>
+      </p:sp>
+      <p:sp>
+        <p:nvSpPr>
+          <p:cNvPr id="28" name="Text 26"/>
+          <p:cNvSpPr/>
+          <p:nvPr/>
+        </p:nvSpPr>
+        <p:spPr>
+          <a:xfrm>
+            <a:off x="640080" y="5669280"/>
+            <a:ext cx="10881360" cy="548640"/>
+          </a:xfrm>
+          <a:prstGeom prst="rect">
+            <a:avLst/>
+          </a:prstGeom>
+          <a:noFill/>
+          <a:ln/>
+        </p:spPr>
+        <p:txBody>
+          <a:bodyPr wrap="square" lIns="0" tIns="0" rIns="0" bIns="0" rtlCol="0" anchor="ctr"/>
+          <a:lstStyle/>
+          <a:p>
+            <a:pPr indent="0" marL="0">
+              <a:buNone/>
+            </a:pPr>
+            <a:r>
+              <a:rPr lang="en-US" sz="1500" b="1" dirty="0">
+                <a:solidFill>
+                  <a:srgbClr val="323C32"/>
+                </a:solidFill>
+                <a:latin typeface="Cambria" pitchFamily="34" charset="0"/>
+                <a:ea typeface="Cambria" pitchFamily="34" charset="-122"/>
+                <a:cs typeface="Cambria" pitchFamily="34" charset="-120"/>
+              </a:rPr>
+              <a:t>На 15 октября продаж сезона ещё нет: для первичного распределения — только левая схема</a:t>
+            </a:r>
+            <a:endParaRPr lang="en-US" sz="1500" dirty="0"/>
+          </a:p>
+        </p:txBody>
+      </p:sp>
+      <p:sp>
+        <p:nvSpPr>
+          <p:cNvPr id="29" name="Text 27"/>
           <p:cNvSpPr/>
           <p:nvPr/>
         </p:nvSpPr>
@@ -4737,7 +8984,7 @@
           <a:bodyPr wrap="square" rtlCol="0" anchor="ctr"/>
           <a:lstStyle/>
           <a:p>
-            <a:pPr marL="0" indent="0" algn="r">
+            <a:pPr algn="r" indent="0" marL="0">
               <a:buNone/>
             </a:pPr>
             <a:r>
@@ -4771,7 +9018,6 @@
         <a:solidFill>
           <a:srgbClr val="FFFFFF"/>
         </a:solidFill>
-        <a:effectLst/>
       </p:bgPr>
     </p:bg>
     <p:spTree>
@@ -4791,37 +9037,37 @@
       <p:sp>
         <p:nvSpPr>
           <p:cNvPr id="2" name="Text 0"/>
-          <p:cNvSpPr txBox="1"/>
+          <p:cNvSpPr/>
           <p:nvPr/>
         </p:nvSpPr>
         <p:spPr>
           <a:xfrm>
             <a:off x="640080" y="411480"/>
-            <a:ext cx="10881360" cy="594360"/>
-          </a:xfrm>
-          <a:prstGeom prst="rect">
-            <a:avLst/>
-          </a:prstGeom>
-          <a:noFill/>
-          <a:ln/>
-        </p:spPr>
-        <p:txBody>
-          <a:bodyPr wrap="square" lIns="0" tIns="0" rIns="0" bIns="0" rtlCol="0" anchor="ctr"/>
-          <a:lstStyle/>
-          <a:p>
-            <a:pPr marL="0" indent="0">
+            <a:ext cx="10881360" cy="640080"/>
+          </a:xfrm>
+          <a:prstGeom prst="rect">
+            <a:avLst/>
+          </a:prstGeom>
+          <a:noFill/>
+          <a:ln/>
+        </p:spPr>
+        <p:txBody>
+          <a:bodyPr wrap="square" lIns="0" tIns="0" rIns="0" bIns="0" rtlCol="0" anchor="ctr"/>
+          <a:lstStyle/>
+          <a:p>
+            <a:pPr indent="0" marL="0">
               <a:buNone/>
             </a:pPr>
             <a:r>
               <a:rPr lang="en-US" sz="2800" b="1" dirty="0">
                 <a:solidFill>
-                  <a:srgbClr val="1E2761"/>
+                  <a:srgbClr val="323C32"/>
                 </a:solidFill>
                 <a:latin typeface="Cambria" pitchFamily="34" charset="0"/>
                 <a:ea typeface="Cambria" pitchFamily="34" charset="-122"/>
                 <a:cs typeface="Cambria" pitchFamily="34" charset="-120"/>
               </a:rPr>
-              <a:t>Рекомендации и дальнейшее развитие</a:t>
+              <a:t>15 октября: простое правило не хуже моделей</a:t>
             </a:r>
             <a:endParaRPr lang="en-US" sz="2800" dirty="0"/>
           </a:p>
@@ -4829,249 +9075,214 @@
       </p:sp>
       <p:sp>
         <p:nvSpPr>
-          <p:cNvPr id="3" name="Shape 1"/>
-          <p:cNvSpPr/>
-          <p:nvPr/>
-        </p:nvSpPr>
-        <p:spPr>
-          <a:xfrm>
-            <a:off x="502920" y="1188720"/>
-            <a:ext cx="5486400" cy="4892040"/>
-          </a:xfrm>
-          <a:prstGeom prst="roundRect">
-            <a:avLst>
-              <a:gd name="adj" fmla="val 1495"/>
-            </a:avLst>
-          </a:prstGeom>
-          <a:solidFill>
-            <a:srgbClr val="EAF0FB"/>
-          </a:solidFill>
-          <a:ln/>
-        </p:spPr>
-      </p:sp>
-      <p:sp>
-        <p:nvSpPr>
-          <p:cNvPr id="4" name="Text 2"/>
-          <p:cNvSpPr txBox="1"/>
-          <p:nvPr/>
-        </p:nvSpPr>
-        <p:spPr>
-          <a:xfrm>
-            <a:off x="777240" y="1371600"/>
-            <a:ext cx="4937760" cy="365760"/>
-          </a:xfrm>
-          <a:prstGeom prst="rect">
-            <a:avLst/>
-          </a:prstGeom>
-          <a:noFill/>
-          <a:ln/>
-        </p:spPr>
-        <p:txBody>
-          <a:bodyPr wrap="square" lIns="0" tIns="0" rIns="0" bIns="0" rtlCol="0" anchor="ctr"/>
-          <a:lstStyle/>
-          <a:p>
-            <a:pPr marL="0" indent="0">
-              <a:buNone/>
-            </a:pPr>
-            <a:r>
-              <a:rPr lang="en-US" sz="1300" b="1" kern="0" spc="150" dirty="0">
-                <a:solidFill>
-                  <a:srgbClr val="1E2761"/>
+          <p:cNvPr id="3" name="Text 1"/>
+          <p:cNvSpPr/>
+          <p:nvPr/>
+        </p:nvSpPr>
+        <p:spPr>
+          <a:xfrm>
+            <a:off x="640080" y="987552"/>
+            <a:ext cx="10881360" cy="365760"/>
+          </a:xfrm>
+          <a:prstGeom prst="rect">
+            <a:avLst/>
+          </a:prstGeom>
+          <a:noFill/>
+          <a:ln/>
+        </p:spPr>
+        <p:txBody>
+          <a:bodyPr wrap="square" lIns="0" tIns="0" rIns="0" bIns="0" rtlCol="0" anchor="ctr"/>
+          <a:lstStyle/>
+          <a:p>
+            <a:pPr indent="0" marL="0">
+              <a:buNone/>
+            </a:pPr>
+            <a:r>
+              <a:rPr lang="en-US" sz="1300" dirty="0">
+                <a:solidFill>
+                  <a:srgbClr val="6B7280"/>
                 </a:solidFill>
                 <a:latin typeface="Calibri" pitchFamily="34" charset="0"/>
                 <a:ea typeface="Calibri" pitchFamily="34" charset="-122"/>
                 <a:cs typeface="Calibri" pitchFamily="34" charset="-120"/>
               </a:rPr>
-              <a:t>РЕКОМЕНДАЦИИ</a:t>
+              <a:t>Обучение на сезоне 2024, проверка на сезоне 2025, только данные до 15 октября · 10 720 пар</a:t>
             </a:r>
             <a:endParaRPr lang="en-US" sz="1300" dirty="0"/>
           </a:p>
         </p:txBody>
       </p:sp>
-      <p:sp>
-        <p:nvSpPr>
-          <p:cNvPr id="5" name="Shape 3"/>
-          <p:cNvSpPr/>
-          <p:nvPr/>
-        </p:nvSpPr>
-        <p:spPr>
-          <a:xfrm>
-            <a:off x="777240" y="2057400"/>
-            <a:ext cx="384048" cy="384048"/>
-          </a:xfrm>
-          <a:prstGeom prst="ellipse">
-            <a:avLst/>
+      <p:pic>
+        <p:nvPicPr>
+          <p:cNvPr id="4" name="Image 0" descr="09_temporal_comparison.png">    </p:cNvPr>
+          <p:cNvPicPr>
+            <a:picLocks noChangeAspect="1"/>
+          </p:cNvPicPr>
+          <p:nvPr/>
+        </p:nvPicPr>
+        <p:blipFill>
+          <a:blip r:embed="rId1"/>
+          <a:stretch>
+            <a:fillRect/>
+          </a:stretch>
+        </p:blipFill>
+        <p:spPr>
+          <a:xfrm>
+            <a:off x="548640" y="1554480"/>
+            <a:ext cx="6858000" cy="3427286"/>
+          </a:xfrm>
+          <a:prstGeom prst="rect">
+            <a:avLst/>
+          </a:prstGeom>
+        </p:spPr>
+      </p:pic>
+      <p:sp>
+        <p:nvSpPr>
+          <p:cNvPr id="5" name="Shape 2"/>
+          <p:cNvSpPr/>
+          <p:nvPr/>
+        </p:nvSpPr>
+        <p:spPr>
+          <a:xfrm>
+            <a:off x="7726680" y="1554480"/>
+            <a:ext cx="3931920" cy="1508760"/>
+          </a:xfrm>
+          <a:prstGeom prst="roundRect">
+            <a:avLst>
+              <a:gd name="adj" fmla="val 4848"/>
+            </a:avLst>
           </a:prstGeom>
           <a:solidFill>
-            <a:srgbClr val="C9A227"/>
+            <a:srgbClr val="7E1013"/>
           </a:solidFill>
           <a:ln/>
         </p:spPr>
       </p:sp>
       <p:sp>
         <p:nvSpPr>
-          <p:cNvPr id="6" name="Text 4"/>
-          <p:cNvSpPr txBox="1"/>
-          <p:nvPr/>
-        </p:nvSpPr>
-        <p:spPr>
-          <a:xfrm>
-            <a:off x="777240" y="2057400"/>
-            <a:ext cx="384048" cy="384048"/>
-          </a:xfrm>
-          <a:prstGeom prst="rect">
-            <a:avLst/>
-          </a:prstGeom>
-          <a:noFill/>
-          <a:ln/>
-        </p:spPr>
-        <p:txBody>
-          <a:bodyPr wrap="square" lIns="0" tIns="0" rIns="0" bIns="0" rtlCol="0" anchor="ctr"/>
-          <a:lstStyle/>
-          <a:p>
-            <a:pPr marL="0" indent="0" algn="ctr">
-              <a:buNone/>
-            </a:pPr>
-            <a:r>
-              <a:rPr lang="en-US" sz="2000" b="1" dirty="0">
-                <a:solidFill>
-                  <a:srgbClr val="141B47"/>
+          <p:cNvPr id="6" name="Text 3"/>
+          <p:cNvSpPr/>
+          <p:nvPr/>
+        </p:nvSpPr>
+        <p:spPr>
+          <a:xfrm>
+            <a:off x="7955280" y="1645920"/>
+            <a:ext cx="3566160" cy="731520"/>
+          </a:xfrm>
+          <a:prstGeom prst="rect">
+            <a:avLst/>
+          </a:prstGeom>
+          <a:noFill/>
+          <a:ln/>
+        </p:spPr>
+        <p:txBody>
+          <a:bodyPr wrap="square" lIns="0" tIns="0" rIns="0" bIns="0" rtlCol="0" anchor="ctr"/>
+          <a:lstStyle/>
+          <a:p>
+            <a:pPr indent="0" marL="0">
+              <a:buNone/>
+            </a:pPr>
+            <a:r>
+              <a:rPr lang="en-US" sz="3400" b="1" dirty="0">
+                <a:solidFill>
+                  <a:srgbClr val="FFFFFF"/>
                 </a:solidFill>
                 <a:latin typeface="Cambria" pitchFamily="34" charset="0"/>
                 <a:ea typeface="Cambria" pitchFamily="34" charset="-122"/>
                 <a:cs typeface="Cambria" pitchFamily="34" charset="-120"/>
               </a:rPr>
-              <a:t>1</a:t>
-            </a:r>
-            <a:endParaRPr lang="en-US" sz="2000" dirty="0"/>
-          </a:p>
-        </p:txBody>
-      </p:sp>
-      <p:sp>
-        <p:nvSpPr>
-          <p:cNvPr id="7" name="Text 5"/>
-          <p:cNvSpPr txBox="1"/>
-          <p:nvPr/>
-        </p:nvSpPr>
-        <p:spPr>
-          <a:xfrm>
-            <a:off x="1335024" y="1757201"/>
-            <a:ext cx="4480560" cy="1051560"/>
-          </a:xfrm>
-          <a:prstGeom prst="rect">
-            <a:avLst/>
-          </a:prstGeom>
-          <a:noFill/>
-          <a:ln/>
-        </p:spPr>
-        <p:txBody>
-          <a:bodyPr wrap="square" lIns="0" tIns="0" rIns="0" bIns="0" rtlCol="0" anchor="ctr"/>
-          <a:lstStyle/>
-          <a:p>
-            <a:pPr marL="0" indent="0">
+              <a:t>45.8%</a:t>
+            </a:r>
+            <a:endParaRPr lang="en-US" sz="3400" dirty="0"/>
+          </a:p>
+        </p:txBody>
+      </p:sp>
+      <p:sp>
+        <p:nvSpPr>
+          <p:cNvPr id="7" name="Text 4"/>
+          <p:cNvSpPr/>
+          <p:nvPr/>
+        </p:nvSpPr>
+        <p:spPr>
+          <a:xfrm>
+            <a:off x="7955280" y="2331720"/>
+            <a:ext cx="3566160" cy="640080"/>
+          </a:xfrm>
+          <a:prstGeom prst="rect">
+            <a:avLst/>
+          </a:prstGeom>
+          <a:noFill/>
+          <a:ln/>
+        </p:spPr>
+        <p:txBody>
+          <a:bodyPr wrap="square" lIns="0" tIns="0" rIns="0" bIns="0" rtlCol="0" anchor="ctr"/>
+          <a:lstStyle/>
+          <a:p>
+            <a:pPr indent="0" marL="0">
               <a:lnSpc>
-                <a:spcPct val="120000"/>
+                <a:spcPct val="110000"/>
               </a:lnSpc>
               <a:buNone/>
             </a:pPr>
             <a:r>
-              <a:rPr lang="en-US" sz="1300" dirty="0">
-                <a:solidFill>
-                  <a:srgbClr val="1F2937"/>
+              <a:rPr lang="en-US" sz="1250" dirty="0">
+                <a:solidFill>
+                  <a:srgbClr val="FFFFFF"/>
                 </a:solidFill>
                 <a:latin typeface="Calibri" pitchFamily="34" charset="0"/>
                 <a:ea typeface="Calibri" pitchFamily="34" charset="-122"/>
                 <a:cs typeface="Calibri" pitchFamily="34" charset="-120"/>
               </a:rPr>
-              <a:t>Дифференцировать коэффициент роста по кластерам вместо единого сетевого значения</a:t>
-            </a:r>
-            <a:endParaRPr lang="en-US" sz="1300" dirty="0"/>
-          </a:p>
-        </p:txBody>
-      </p:sp>
-      <p:sp>
-        <p:nvSpPr>
-          <p:cNvPr id="8" name="Shape 6"/>
-          <p:cNvSpPr/>
-          <p:nvPr/>
-        </p:nvSpPr>
-        <p:spPr>
-          <a:xfrm>
-            <a:off x="777240" y="3337560"/>
-            <a:ext cx="384048" cy="384048"/>
+              <a:t>лучшая ошибка — LFL с единым коэффициентом роста по началу октября</a:t>
+            </a:r>
+            <a:endParaRPr lang="en-US" sz="1250" dirty="0"/>
+          </a:p>
+        </p:txBody>
+      </p:sp>
+      <p:sp>
+        <p:nvSpPr>
+          <p:cNvPr id="8" name="Shape 5"/>
+          <p:cNvSpPr/>
+          <p:nvPr/>
+        </p:nvSpPr>
+        <p:spPr>
+          <a:xfrm>
+            <a:off x="7726680" y="3634740"/>
+            <a:ext cx="91440" cy="91440"/>
           </a:xfrm>
           <a:prstGeom prst="ellipse">
             <a:avLst/>
           </a:prstGeom>
           <a:solidFill>
-            <a:srgbClr val="C9A227"/>
+            <a:srgbClr val="B61B3B"/>
           </a:solidFill>
           <a:ln/>
         </p:spPr>
       </p:sp>
       <p:sp>
         <p:nvSpPr>
-          <p:cNvPr id="9" name="Text 7"/>
-          <p:cNvSpPr txBox="1"/>
-          <p:nvPr/>
-        </p:nvSpPr>
-        <p:spPr>
-          <a:xfrm>
-            <a:off x="777240" y="3337560"/>
-            <a:ext cx="384048" cy="384048"/>
-          </a:xfrm>
-          <a:prstGeom prst="rect">
-            <a:avLst/>
-          </a:prstGeom>
-          <a:noFill/>
-          <a:ln/>
-        </p:spPr>
-        <p:txBody>
-          <a:bodyPr wrap="square" lIns="0" tIns="0" rIns="0" bIns="0" rtlCol="0" anchor="ctr"/>
-          <a:lstStyle/>
-          <a:p>
-            <a:pPr marL="0" indent="0" algn="ctr">
-              <a:buNone/>
-            </a:pPr>
-            <a:r>
-              <a:rPr lang="en-US" sz="2000" b="1" dirty="0">
-                <a:solidFill>
-                  <a:srgbClr val="141B47"/>
-                </a:solidFill>
-                <a:latin typeface="Cambria" pitchFamily="34" charset="0"/>
-                <a:ea typeface="Cambria" pitchFamily="34" charset="-122"/>
-                <a:cs typeface="Cambria" pitchFamily="34" charset="-120"/>
-              </a:rPr>
-              <a:t>2</a:t>
-            </a:r>
-            <a:endParaRPr lang="en-US" sz="2000" dirty="0"/>
-          </a:p>
-        </p:txBody>
-      </p:sp>
-      <p:sp>
-        <p:nvSpPr>
-          <p:cNvPr id="10" name="Text 8"/>
-          <p:cNvSpPr txBox="1"/>
-          <p:nvPr/>
-        </p:nvSpPr>
-        <p:spPr>
-          <a:xfrm>
-            <a:off x="1325880" y="3014932"/>
-            <a:ext cx="4480560" cy="1051560"/>
-          </a:xfrm>
-          <a:prstGeom prst="rect">
-            <a:avLst/>
-          </a:prstGeom>
-          <a:noFill/>
-          <a:ln/>
-        </p:spPr>
-        <p:txBody>
-          <a:bodyPr wrap="square" lIns="0" tIns="0" rIns="0" bIns="0" rtlCol="0" anchor="ctr"/>
-          <a:lstStyle/>
-          <a:p>
-            <a:pPr marL="0" indent="0">
+          <p:cNvPr id="9" name="Text 6"/>
+          <p:cNvSpPr/>
+          <p:nvPr/>
+        </p:nvSpPr>
+        <p:spPr>
+          <a:xfrm>
+            <a:off x="7955280" y="3246120"/>
+            <a:ext cx="3703320" cy="868680"/>
+          </a:xfrm>
+          <a:prstGeom prst="rect">
+            <a:avLst/>
+          </a:prstGeom>
+          <a:noFill/>
+          <a:ln/>
+        </p:spPr>
+        <p:txBody>
+          <a:bodyPr wrap="square" lIns="0" tIns="0" rIns="0" bIns="0" rtlCol="0" anchor="ctr"/>
+          <a:lstStyle/>
+          <a:p>
+            <a:pPr indent="0" marL="0">
               <a:lnSpc>
-                <a:spcPct val="120000"/>
+                <a:spcPct val="115000"/>
               </a:lnSpc>
               <a:buNone/>
             </a:pPr>
@@ -5084,7 +9295,7 @@
                 <a:ea typeface="Calibri" pitchFamily="34" charset="-122"/>
                 <a:cs typeface="Calibri" pitchFamily="34" charset="-120"/>
               </a:rPr>
-              <a:t>Пересмотреть логистику для Дальнего Востока — упущенная выручка 306 883 руб. за сезон</a:t>
+              <a:t>Random Forest 46.8% — почти вровень; без истории прошлого сезона моделям не хватает данных</a:t>
             </a:r>
             <a:endParaRPr lang="en-US" sz="1300" dirty="0"/>
           </a:p>
@@ -5092,87 +9303,48 @@
       </p:sp>
       <p:sp>
         <p:nvSpPr>
-          <p:cNvPr id="11" name="Shape 9"/>
-          <p:cNvSpPr/>
-          <p:nvPr/>
-        </p:nvSpPr>
-        <p:spPr>
-          <a:xfrm>
-            <a:off x="777240" y="4617720"/>
-            <a:ext cx="384048" cy="384048"/>
+          <p:cNvPr id="10" name="Shape 7"/>
+          <p:cNvSpPr/>
+          <p:nvPr/>
+        </p:nvSpPr>
+        <p:spPr>
+          <a:xfrm>
+            <a:off x="7726680" y="4503420"/>
+            <a:ext cx="91440" cy="91440"/>
           </a:xfrm>
           <a:prstGeom prst="ellipse">
             <a:avLst/>
           </a:prstGeom>
           <a:solidFill>
-            <a:srgbClr val="C9A227"/>
+            <a:srgbClr val="B61B3B"/>
           </a:solidFill>
           <a:ln/>
         </p:spPr>
       </p:sp>
       <p:sp>
         <p:nvSpPr>
-          <p:cNvPr id="12" name="Text 10"/>
-          <p:cNvSpPr txBox="1"/>
-          <p:nvPr/>
-        </p:nvSpPr>
-        <p:spPr>
-          <a:xfrm>
-            <a:off x="777240" y="4617720"/>
-            <a:ext cx="384048" cy="384048"/>
-          </a:xfrm>
-          <a:prstGeom prst="rect">
-            <a:avLst/>
-          </a:prstGeom>
-          <a:noFill/>
-          <a:ln/>
-        </p:spPr>
-        <p:txBody>
-          <a:bodyPr wrap="square" lIns="0" tIns="0" rIns="0" bIns="0" rtlCol="0" anchor="ctr"/>
-          <a:lstStyle/>
-          <a:p>
-            <a:pPr marL="0" indent="0" algn="ctr">
-              <a:buNone/>
-            </a:pPr>
-            <a:r>
-              <a:rPr lang="en-US" sz="2000" b="1" dirty="0">
-                <a:solidFill>
-                  <a:srgbClr val="141B47"/>
-                </a:solidFill>
-                <a:latin typeface="Cambria" pitchFamily="34" charset="0"/>
-                <a:ea typeface="Cambria" pitchFamily="34" charset="-122"/>
-                <a:cs typeface="Cambria" pitchFamily="34" charset="-120"/>
-              </a:rPr>
-              <a:t>3</a:t>
-            </a:r>
-            <a:endParaRPr lang="en-US" sz="2000" dirty="0"/>
-          </a:p>
-        </p:txBody>
-      </p:sp>
-      <p:sp>
-        <p:nvSpPr>
-          <p:cNvPr id="13" name="Text 11"/>
-          <p:cNvSpPr txBox="1"/>
-          <p:nvPr/>
-        </p:nvSpPr>
-        <p:spPr>
-          <a:xfrm>
-            <a:off x="1371600" y="4283964"/>
-            <a:ext cx="4480560" cy="1051560"/>
-          </a:xfrm>
-          <a:prstGeom prst="rect">
-            <a:avLst/>
-          </a:prstGeom>
-          <a:noFill/>
-          <a:ln/>
-        </p:spPr>
-        <p:txBody>
-          <a:bodyPr wrap="square" lIns="0" tIns="0" rIns="0" bIns="0" rtlCol="0" anchor="ctr"/>
-          <a:lstStyle/>
-          <a:p>
-            <a:pPr marL="0" indent="0">
+          <p:cNvPr id="11" name="Text 8"/>
+          <p:cNvSpPr/>
+          <p:nvPr/>
+        </p:nvSpPr>
+        <p:spPr>
+          <a:xfrm>
+            <a:off x="7955280" y="4114800"/>
+            <a:ext cx="3703320" cy="868680"/>
+          </a:xfrm>
+          <a:prstGeom prst="rect">
+            <a:avLst/>
+          </a:prstGeom>
+          <a:noFill/>
+          <a:ln/>
+        </p:spPr>
+        <p:txBody>
+          <a:bodyPr wrap="square" lIns="0" tIns="0" rIns="0" bIns="0" rtlCol="0" anchor="ctr"/>
+          <a:lstStyle/>
+          <a:p>
+            <a:pPr indent="0" marL="0">
               <a:lnSpc>
-                <a:spcPct val="120000"/>
+                <a:spcPct val="115000"/>
               </a:lnSpc>
               <a:buNone/>
             </a:pPr>
@@ -5185,7 +9357,7 @@
                 <a:ea typeface="Calibri" pitchFamily="34" charset="-122"/>
                 <a:cs typeface="Calibri" pitchFamily="34" charset="-120"/>
               </a:rPr>
-              <a:t>Доверять модели AX/AY-подгруппы; для CZ сохранять экспертный контроль</a:t>
+              <a:t>Коэффициенты по кластерам и подгруппам хуже: у 74% пар в начале октября продаж ещё нет</a:t>
             </a:r>
             <a:endParaRPr lang="en-US" sz="1300" dirty="0"/>
           </a:p>
@@ -5193,60 +9365,61 @@
       </p:sp>
       <p:sp>
         <p:nvSpPr>
-          <p:cNvPr id="14" name="Shape 12"/>
-          <p:cNvSpPr/>
-          <p:nvPr/>
-        </p:nvSpPr>
-        <p:spPr>
-          <a:xfrm>
-            <a:off x="6199632" y="1188720"/>
-            <a:ext cx="5440680" cy="4892040"/>
-          </a:xfrm>
-          <a:prstGeom prst="roundRect">
-            <a:avLst>
-              <a:gd name="adj" fmla="val 1495"/>
-            </a:avLst>
+          <p:cNvPr id="12" name="Shape 9"/>
+          <p:cNvSpPr/>
+          <p:nvPr/>
+        </p:nvSpPr>
+        <p:spPr>
+          <a:xfrm>
+            <a:off x="7726680" y="5372100"/>
+            <a:ext cx="91440" cy="91440"/>
+          </a:xfrm>
+          <a:prstGeom prst="ellipse">
+            <a:avLst/>
           </a:prstGeom>
           <a:solidFill>
-            <a:srgbClr val="1E2761"/>
+            <a:srgbClr val="B61B3B"/>
           </a:solidFill>
           <a:ln/>
         </p:spPr>
       </p:sp>
       <p:sp>
         <p:nvSpPr>
-          <p:cNvPr id="15" name="Text 13"/>
-          <p:cNvSpPr txBox="1"/>
-          <p:nvPr/>
-        </p:nvSpPr>
-        <p:spPr>
-          <a:xfrm>
-            <a:off x="6473952" y="1371600"/>
-            <a:ext cx="4892040" cy="365760"/>
-          </a:xfrm>
-          <a:prstGeom prst="rect">
-            <a:avLst/>
-          </a:prstGeom>
-          <a:noFill/>
-          <a:ln/>
-        </p:spPr>
-        <p:txBody>
-          <a:bodyPr wrap="square" lIns="0" tIns="0" rIns="0" bIns="0" rtlCol="0" anchor="ctr"/>
-          <a:lstStyle/>
-          <a:p>
-            <a:pPr marL="0" indent="0">
-              <a:buNone/>
-            </a:pPr>
-            <a:r>
-              <a:rPr lang="en-US" sz="1300" b="1" kern="0" spc="150" dirty="0">
-                <a:solidFill>
-                  <a:srgbClr val="C9A227"/>
+          <p:cNvPr id="13" name="Text 10"/>
+          <p:cNvSpPr/>
+          <p:nvPr/>
+        </p:nvSpPr>
+        <p:spPr>
+          <a:xfrm>
+            <a:off x="7955280" y="4983480"/>
+            <a:ext cx="3703320" cy="868680"/>
+          </a:xfrm>
+          <a:prstGeom prst="rect">
+            <a:avLst/>
+          </a:prstGeom>
+          <a:noFill/>
+          <a:ln/>
+        </p:spPr>
+        <p:txBody>
+          <a:bodyPr wrap="square" lIns="0" tIns="0" rIns="0" bIns="0" rtlCol="0" anchor="ctr"/>
+          <a:lstStyle/>
+          <a:p>
+            <a:pPr indent="0" marL="0">
+              <a:lnSpc>
+                <a:spcPct val="115000"/>
+              </a:lnSpc>
+              <a:buNone/>
+            </a:pPr>
+            <a:r>
+              <a:rPr lang="en-US" sz="1300" dirty="0">
+                <a:solidFill>
+                  <a:srgbClr val="1F2937"/>
                 </a:solidFill>
                 <a:latin typeface="Calibri" pitchFamily="34" charset="0"/>
                 <a:ea typeface="Calibri" pitchFamily="34" charset="-122"/>
                 <a:cs typeface="Calibri" pitchFamily="34" charset="-120"/>
               </a:rPr>
-              <a:t>ОГРАНИЧЕНИЯ И РАЗВИТИЕ</a:t>
+              <a:t>Строгий коэффициент (0.886 вместо 0.945) снизил ошибку LFL с 50.0% до 45.8%</a:t>
             </a:r>
             <a:endParaRPr lang="en-US" sz="1300" dirty="0"/>
           </a:p>
@@ -5254,193 +9427,7 @@
       </p:sp>
       <p:sp>
         <p:nvSpPr>
-          <p:cNvPr id="16" name="Shape 14"/>
-          <p:cNvSpPr/>
-          <p:nvPr/>
-        </p:nvSpPr>
-        <p:spPr>
-          <a:xfrm>
-            <a:off x="6473952" y="2167128"/>
-            <a:ext cx="91440" cy="91440"/>
-          </a:xfrm>
-          <a:prstGeom prst="ellipse">
-            <a:avLst/>
-          </a:prstGeom>
-          <a:solidFill>
-            <a:srgbClr val="C9A227"/>
-          </a:solidFill>
-          <a:ln/>
-        </p:spPr>
-      </p:sp>
-      <p:sp>
-        <p:nvSpPr>
-          <p:cNvPr id="17" name="Text 15"/>
-          <p:cNvSpPr txBox="1"/>
-          <p:nvPr/>
-        </p:nvSpPr>
-        <p:spPr>
-          <a:xfrm>
-            <a:off x="6720840" y="1714500"/>
-            <a:ext cx="4709160" cy="1051560"/>
-          </a:xfrm>
-          <a:prstGeom prst="rect">
-            <a:avLst/>
-          </a:prstGeom>
-          <a:noFill/>
-          <a:ln/>
-        </p:spPr>
-        <p:txBody>
-          <a:bodyPr wrap="square" lIns="0" tIns="0" rIns="0" bIns="0" rtlCol="0" anchor="ctr"/>
-          <a:lstStyle/>
-          <a:p>
-            <a:pPr marL="0" indent="0">
-              <a:lnSpc>
-                <a:spcPct val="120000"/>
-              </a:lnSpc>
-              <a:buNone/>
-            </a:pPr>
-            <a:r>
-              <a:rPr lang="en-US" sz="1300" dirty="0">
-                <a:solidFill>
-                  <a:srgbClr val="FFFFFF"/>
-                </a:solidFill>
-                <a:latin typeface="Calibri" pitchFamily="34" charset="0"/>
-                <a:ea typeface="Calibri" pitchFamily="34" charset="-122"/>
-                <a:cs typeface="Calibri" pitchFamily="34" charset="-120"/>
-              </a:rPr>
-              <a:t>Дефицит определён косвенно — справочник планового ассортимента недоступен</a:t>
-            </a:r>
-            <a:endParaRPr lang="en-US" sz="1300" dirty="0"/>
-          </a:p>
-        </p:txBody>
-      </p:sp>
-      <p:sp>
-        <p:nvSpPr>
-          <p:cNvPr id="18" name="Shape 16"/>
-          <p:cNvSpPr/>
-          <p:nvPr/>
-        </p:nvSpPr>
-        <p:spPr>
-          <a:xfrm>
-            <a:off x="6473952" y="3584448"/>
-            <a:ext cx="91440" cy="91440"/>
-          </a:xfrm>
-          <a:prstGeom prst="ellipse">
-            <a:avLst/>
-          </a:prstGeom>
-          <a:solidFill>
-            <a:srgbClr val="C9A227"/>
-          </a:solidFill>
-          <a:ln/>
-        </p:spPr>
-      </p:sp>
-      <p:sp>
-        <p:nvSpPr>
-          <p:cNvPr id="19" name="Text 17"/>
-          <p:cNvSpPr txBox="1"/>
-          <p:nvPr/>
-        </p:nvSpPr>
-        <p:spPr>
-          <a:xfrm>
-            <a:off x="6720840" y="3104388"/>
-            <a:ext cx="4709160" cy="1051560"/>
-          </a:xfrm>
-          <a:prstGeom prst="rect">
-            <a:avLst/>
-          </a:prstGeom>
-          <a:noFill/>
-          <a:ln/>
-        </p:spPr>
-        <p:txBody>
-          <a:bodyPr wrap="square" lIns="0" tIns="0" rIns="0" bIns="0" rtlCol="0" anchor="ctr"/>
-          <a:lstStyle/>
-          <a:p>
-            <a:pPr marL="0" indent="0">
-              <a:lnSpc>
-                <a:spcPct val="120000"/>
-              </a:lnSpc>
-              <a:buNone/>
-            </a:pPr>
-            <a:r>
-              <a:rPr lang="en-US" sz="1300" dirty="0">
-                <a:solidFill>
-                  <a:srgbClr val="FFFFFF"/>
-                </a:solidFill>
-                <a:latin typeface="Calibri" pitchFamily="34" charset="0"/>
-                <a:ea typeface="Calibri" pitchFamily="34" charset="-122"/>
-                <a:cs typeface="Calibri" pitchFamily="34" charset="-120"/>
-              </a:rPr>
-              <a:t>Прогноз обучен на одном сезоне (2024 → 2025)</a:t>
-            </a:r>
-            <a:endParaRPr lang="en-US" sz="1300" dirty="0"/>
-          </a:p>
-        </p:txBody>
-      </p:sp>
-      <p:sp>
-        <p:nvSpPr>
-          <p:cNvPr id="20" name="Shape 18"/>
-          <p:cNvSpPr/>
-          <p:nvPr/>
-        </p:nvSpPr>
-        <p:spPr>
-          <a:xfrm>
-            <a:off x="6473952" y="5001768"/>
-            <a:ext cx="91440" cy="91440"/>
-          </a:xfrm>
-          <a:prstGeom prst="ellipse">
-            <a:avLst/>
-          </a:prstGeom>
-          <a:solidFill>
-            <a:srgbClr val="C9A227"/>
-          </a:solidFill>
-          <a:ln/>
-        </p:spPr>
-      </p:sp>
-      <p:sp>
-        <p:nvSpPr>
-          <p:cNvPr id="21" name="Text 19"/>
-          <p:cNvSpPr txBox="1"/>
-          <p:nvPr/>
-        </p:nvSpPr>
-        <p:spPr>
-          <a:xfrm>
-            <a:off x="6720840" y="4519293"/>
-            <a:ext cx="4709160" cy="1051560"/>
-          </a:xfrm>
-          <a:prstGeom prst="rect">
-            <a:avLst/>
-          </a:prstGeom>
-          <a:noFill/>
-          <a:ln/>
-        </p:spPr>
-        <p:txBody>
-          <a:bodyPr wrap="square" lIns="0" tIns="0" rIns="0" bIns="0" rtlCol="0" anchor="ctr"/>
-          <a:lstStyle/>
-          <a:p>
-            <a:pPr marL="0" indent="0">
-              <a:lnSpc>
-                <a:spcPct val="120000"/>
-              </a:lnSpc>
-              <a:buNone/>
-            </a:pPr>
-            <a:r>
-              <a:rPr lang="en-US" sz="1300" dirty="0">
-                <a:solidFill>
-                  <a:srgbClr val="FFFFFF"/>
-                </a:solidFill>
-                <a:latin typeface="Calibri" pitchFamily="34" charset="0"/>
-                <a:ea typeface="Calibri" pitchFamily="34" charset="-122"/>
-                <a:cs typeface="Calibri" pitchFamily="34" charset="-120"/>
-              </a:rPr>
-              <a:t>Далее: коррекция целевой переменной на стокаут, точка отсечки «пополнение по ходу сезона», второй сезон обучения</a:t>
-            </a:r>
-            <a:endParaRPr lang="en-US" sz="1300" dirty="0"/>
-          </a:p>
-        </p:txBody>
-      </p:sp>
-      <p:sp>
-        <p:nvSpPr>
-          <p:cNvPr id="22" name="Text 20"/>
+          <p:cNvPr id="14" name="Text 11"/>
           <p:cNvSpPr/>
           <p:nvPr/>
         </p:nvSpPr>
@@ -5459,7 +9446,7 @@
           <a:bodyPr wrap="square" rtlCol="0" anchor="ctr"/>
           <a:lstStyle/>
           <a:p>
-            <a:pPr marL="0" indent="0" algn="r">
+            <a:pPr algn="r" indent="0" marL="0">
               <a:buNone/>
             </a:pPr>
             <a:r>
@@ -5491,9 +9478,8 @@
     <p:bg>
       <p:bgPr>
         <a:solidFill>
-          <a:srgbClr val="1E2761"/>
+          <a:srgbClr val="FFFFFF"/>
         </a:solidFill>
-        <a:effectLst/>
       </p:bgPr>
     </p:bg>
     <p:spTree>
@@ -5512,194 +9498,69 @@
       </p:grpSpPr>
       <p:sp>
         <p:nvSpPr>
-          <p:cNvPr id="2" name="Shape 0"/>
-          <p:cNvSpPr/>
-          <p:nvPr/>
-        </p:nvSpPr>
-        <p:spPr>
-          <a:xfrm>
-            <a:off x="0" y="0"/>
-            <a:ext cx="12188952" cy="6858000"/>
-          </a:xfrm>
-          <a:prstGeom prst="rect">
-            <a:avLst/>
-          </a:prstGeom>
-          <a:solidFill>
-            <a:srgbClr val="141B47">
-              <a:alpha val="60000"/>
-            </a:srgbClr>
-          </a:solidFill>
-          <a:ln/>
-        </p:spPr>
-      </p:sp>
-      <p:sp>
-        <p:nvSpPr>
-          <p:cNvPr id="3" name="Shape 1"/>
-          <p:cNvSpPr/>
-          <p:nvPr/>
-        </p:nvSpPr>
-        <p:spPr>
-          <a:xfrm>
-            <a:off x="1005840" y="1097280"/>
-            <a:ext cx="82296" cy="82296"/>
-          </a:xfrm>
-          <a:prstGeom prst="ellipse">
-            <a:avLst/>
-          </a:prstGeom>
-          <a:solidFill>
-            <a:srgbClr val="C9A227"/>
-          </a:solidFill>
-          <a:ln/>
-        </p:spPr>
-      </p:sp>
-      <p:sp>
-        <p:nvSpPr>
-          <p:cNvPr id="4" name="Shape 2"/>
-          <p:cNvSpPr/>
-          <p:nvPr/>
-        </p:nvSpPr>
-        <p:spPr>
-          <a:xfrm>
-            <a:off x="10972800" y="914400"/>
-            <a:ext cx="82296" cy="82296"/>
-          </a:xfrm>
-          <a:prstGeom prst="ellipse">
-            <a:avLst/>
-          </a:prstGeom>
-          <a:solidFill>
-            <a:srgbClr val="C9A227"/>
-          </a:solidFill>
-          <a:ln/>
-        </p:spPr>
-      </p:sp>
-      <p:sp>
-        <p:nvSpPr>
-          <p:cNvPr id="5" name="Shape 3"/>
-          <p:cNvSpPr/>
-          <p:nvPr/>
-        </p:nvSpPr>
-        <p:spPr>
-          <a:xfrm>
-            <a:off x="914400" y="5760720"/>
-            <a:ext cx="82296" cy="82296"/>
-          </a:xfrm>
-          <a:prstGeom prst="ellipse">
-            <a:avLst/>
-          </a:prstGeom>
-          <a:solidFill>
-            <a:srgbClr val="C9A227"/>
-          </a:solidFill>
-          <a:ln/>
-        </p:spPr>
-      </p:sp>
-      <p:sp>
-        <p:nvSpPr>
-          <p:cNvPr id="6" name="Shape 4"/>
-          <p:cNvSpPr/>
-          <p:nvPr/>
-        </p:nvSpPr>
-        <p:spPr>
-          <a:xfrm>
-            <a:off x="11064240" y="5669280"/>
-            <a:ext cx="82296" cy="82296"/>
-          </a:xfrm>
-          <a:prstGeom prst="ellipse">
-            <a:avLst/>
-          </a:prstGeom>
-          <a:solidFill>
-            <a:srgbClr val="C9A227"/>
-          </a:solidFill>
-          <a:ln/>
-        </p:spPr>
-      </p:sp>
-      <p:sp>
-        <p:nvSpPr>
-          <p:cNvPr id="7" name="Text 5"/>
-          <p:cNvSpPr txBox="1"/>
-          <p:nvPr/>
-        </p:nvSpPr>
-        <p:spPr>
-          <a:xfrm>
-            <a:off x="822960" y="2651760"/>
-            <a:ext cx="10515600" cy="914400"/>
-          </a:xfrm>
-          <a:prstGeom prst="rect">
-            <a:avLst/>
-          </a:prstGeom>
-          <a:noFill/>
-          <a:ln/>
-        </p:spPr>
-        <p:txBody>
-          <a:bodyPr wrap="square" lIns="0" tIns="0" rIns="0" bIns="0" rtlCol="0" anchor="ctr"/>
-          <a:lstStyle/>
-          <a:p>
-            <a:pPr marL="0" indent="0">
-              <a:buNone/>
-            </a:pPr>
-            <a:r>
-              <a:rPr lang="en-US" sz="4000" b="1" dirty="0">
-                <a:solidFill>
-                  <a:srgbClr val="FFFFFF"/>
+          <p:cNvPr id="2" name="Text 0"/>
+          <p:cNvSpPr/>
+          <p:nvPr/>
+        </p:nvSpPr>
+        <p:spPr>
+          <a:xfrm>
+            <a:off x="640080" y="411480"/>
+            <a:ext cx="10881360" cy="640080"/>
+          </a:xfrm>
+          <a:prstGeom prst="rect">
+            <a:avLst/>
+          </a:prstGeom>
+          <a:noFill/>
+          <a:ln/>
+        </p:spPr>
+        <p:txBody>
+          <a:bodyPr wrap="square" lIns="0" tIns="0" rIns="0" bIns="0" rtlCol="0" anchor="ctr"/>
+          <a:lstStyle/>
+          <a:p>
+            <a:pPr indent="0" marL="0">
+              <a:buNone/>
+            </a:pPr>
+            <a:r>
+              <a:rPr lang="en-US" sz="2800" b="1" dirty="0">
+                <a:solidFill>
+                  <a:srgbClr val="323C32"/>
                 </a:solidFill>
                 <a:latin typeface="Cambria" pitchFamily="34" charset="0"/>
                 <a:ea typeface="Cambria" pitchFamily="34" charset="-122"/>
                 <a:cs typeface="Cambria" pitchFamily="34" charset="-120"/>
               </a:rPr>
-              <a:t>Спасибо за внимание</a:t>
-            </a:r>
-            <a:endParaRPr lang="en-US" sz="4000" dirty="0"/>
-          </a:p>
-        </p:txBody>
-      </p:sp>
-      <p:sp>
-        <p:nvSpPr>
-          <p:cNvPr id="9" name="Shape 7"/>
-          <p:cNvSpPr/>
-          <p:nvPr/>
-        </p:nvSpPr>
-        <p:spPr>
-          <a:xfrm>
-            <a:off x="822959" y="3566160"/>
-            <a:ext cx="6190315" cy="0"/>
-          </a:xfrm>
-          <a:prstGeom prst="line">
-            <a:avLst/>
-          </a:prstGeom>
-          <a:noFill/>
-          <a:ln w="25400">
-            <a:solidFill>
-              <a:srgbClr val="C9A227"/>
-            </a:solidFill>
-            <a:prstDash val="solid"/>
-          </a:ln>
-        </p:spPr>
-      </p:sp>
-      <p:sp>
-        <p:nvSpPr>
-          <p:cNvPr id="10" name="Text 8"/>
-          <p:cNvSpPr txBox="1"/>
-          <p:nvPr/>
-        </p:nvSpPr>
-        <p:spPr>
-          <a:xfrm>
-            <a:off x="822960" y="5943600"/>
-            <a:ext cx="10058400" cy="457200"/>
-          </a:xfrm>
-          <a:prstGeom prst="rect">
-            <a:avLst/>
-          </a:prstGeom>
-          <a:noFill/>
-          <a:ln/>
-        </p:spPr>
-        <p:txBody>
-          <a:bodyPr wrap="square" lIns="0" tIns="0" rIns="0" bIns="0" rtlCol="0" anchor="ctr"/>
-          <a:lstStyle/>
-          <a:p>
-            <a:pPr marL="0" indent="0">
-              <a:buNone/>
-            </a:pPr>
-            <a:r>
-              <a:rPr lang="en-US" sz="1200" dirty="0">
+              <a:t>Потенциал моделей внутри сезона</a:t>
+            </a:r>
+            <a:endParaRPr lang="en-US" sz="2800" dirty="0"/>
+          </a:p>
+        </p:txBody>
+      </p:sp>
+      <p:sp>
+        <p:nvSpPr>
+          <p:cNvPr id="3" name="Text 1"/>
+          <p:cNvSpPr/>
+          <p:nvPr/>
+        </p:nvSpPr>
+        <p:spPr>
+          <a:xfrm>
+            <a:off x="640080" y="987552"/>
+            <a:ext cx="10881360" cy="365760"/>
+          </a:xfrm>
+          <a:prstGeom prst="rect">
+            <a:avLst/>
+          </a:prstGeom>
+          <a:noFill/>
+          <a:ln/>
+        </p:spPr>
+        <p:txBody>
+          <a:bodyPr wrap="square" lIns="0" tIns="0" rIns="0" bIns="0" rtlCol="0" anchor="ctr"/>
+          <a:lstStyle/>
+          <a:p>
+            <a:pPr indent="0" marL="0">
+              <a:buNone/>
+            </a:pPr>
+            <a:r>
+              <a:rPr lang="en-US" sz="1300" dirty="0">
                 <a:solidFill>
                   <a:srgbClr val="6B7280"/>
                 </a:solidFill>
@@ -5707,9 +9568,361 @@
                 <a:ea typeface="Calibri" pitchFamily="34" charset="-122"/>
                 <a:cs typeface="Calibri" pitchFamily="34" charset="-120"/>
               </a:rPr>
-              <a:t>Код, данные и подробные выводы — в приватном репозитории проекта на GitHub</a:t>
-            </a:r>
-            <a:endParaRPr lang="en-US" sz="1200" dirty="0"/>
+              <a:t>36 отложенных магазинов · модели обучены на продажах сезона 2025 остальной сети</a:t>
+            </a:r>
+            <a:endParaRPr lang="en-US" sz="1300" dirty="0"/>
+          </a:p>
+        </p:txBody>
+      </p:sp>
+      <p:pic>
+        <p:nvPicPr>
+          <p:cNvPr id="4" name="Image 0" descr="08_wape_comparison_all.png">    </p:cNvPr>
+          <p:cNvPicPr>
+            <a:picLocks noChangeAspect="1"/>
+          </p:cNvPicPr>
+          <p:nvPr/>
+        </p:nvPicPr>
+        <p:blipFill>
+          <a:blip r:embed="rId1"/>
+          <a:stretch>
+            <a:fillRect/>
+          </a:stretch>
+        </p:blipFill>
+        <p:spPr>
+          <a:xfrm>
+            <a:off x="548640" y="1554480"/>
+            <a:ext cx="6653083" cy="3611880"/>
+          </a:xfrm>
+          <a:prstGeom prst="rect">
+            <a:avLst/>
+          </a:prstGeom>
+        </p:spPr>
+      </p:pic>
+      <p:sp>
+        <p:nvSpPr>
+          <p:cNvPr id="5" name="Shape 2"/>
+          <p:cNvSpPr/>
+          <p:nvPr/>
+        </p:nvSpPr>
+        <p:spPr>
+          <a:xfrm>
+            <a:off x="7498080" y="1554480"/>
+            <a:ext cx="4160520" cy="1508760"/>
+          </a:xfrm>
+          <a:prstGeom prst="roundRect">
+            <a:avLst>
+              <a:gd name="adj" fmla="val 4848"/>
+            </a:avLst>
+          </a:prstGeom>
+          <a:solidFill>
+            <a:srgbClr val="7E1013"/>
+          </a:solidFill>
+          <a:ln/>
+        </p:spPr>
+      </p:sp>
+      <p:sp>
+        <p:nvSpPr>
+          <p:cNvPr id="6" name="Text 3"/>
+          <p:cNvSpPr/>
+          <p:nvPr/>
+        </p:nvSpPr>
+        <p:spPr>
+          <a:xfrm>
+            <a:off x="7726680" y="1645920"/>
+            <a:ext cx="3749040" cy="731520"/>
+          </a:xfrm>
+          <a:prstGeom prst="rect">
+            <a:avLst/>
+          </a:prstGeom>
+          <a:noFill/>
+          <a:ln/>
+        </p:spPr>
+        <p:txBody>
+          <a:bodyPr wrap="square" lIns="0" tIns="0" rIns="0" bIns="0" rtlCol="0" anchor="ctr"/>
+          <a:lstStyle/>
+          <a:p>
+            <a:pPr indent="0" marL="0">
+              <a:buNone/>
+            </a:pPr>
+            <a:r>
+              <a:rPr lang="en-US" sz="3400" b="1" dirty="0">
+                <a:solidFill>
+                  <a:srgbClr val="FFFFFF"/>
+                </a:solidFill>
+                <a:latin typeface="Cambria" pitchFamily="34" charset="0"/>
+                <a:ea typeface="Cambria" pitchFamily="34" charset="-122"/>
+                <a:cs typeface="Cambria" pitchFamily="34" charset="-120"/>
+              </a:rPr>
+              <a:t>29.6%</a:t>
+            </a:r>
+            <a:endParaRPr lang="en-US" sz="3400" dirty="0"/>
+          </a:p>
+        </p:txBody>
+      </p:sp>
+      <p:sp>
+        <p:nvSpPr>
+          <p:cNvPr id="7" name="Text 4"/>
+          <p:cNvSpPr/>
+          <p:nvPr/>
+        </p:nvSpPr>
+        <p:spPr>
+          <a:xfrm>
+            <a:off x="7726680" y="2331720"/>
+            <a:ext cx="3749040" cy="640080"/>
+          </a:xfrm>
+          <a:prstGeom prst="rect">
+            <a:avLst/>
+          </a:prstGeom>
+          <a:noFill/>
+          <a:ln/>
+        </p:spPr>
+        <p:txBody>
+          <a:bodyPr wrap="square" lIns="0" tIns="0" rIns="0" bIns="0" rtlCol="0" anchor="ctr"/>
+          <a:lstStyle/>
+          <a:p>
+            <a:pPr indent="0" marL="0">
+              <a:lnSpc>
+                <a:spcPct val="110000"/>
+              </a:lnSpc>
+              <a:buNone/>
+            </a:pPr>
+            <a:r>
+              <a:rPr lang="en-US" sz="1250" dirty="0">
+                <a:solidFill>
+                  <a:srgbClr val="FFFFFF"/>
+                </a:solidFill>
+                <a:latin typeface="Calibri" pitchFamily="34" charset="0"/>
+                <a:ea typeface="Calibri" pitchFamily="34" charset="-122"/>
+                <a:cs typeface="Calibri" pitchFamily="34" charset="-120"/>
+              </a:rPr>
+              <a:t>Random Forest против 51.7% у бейзлайна, смещение всего 0.7%</a:t>
+            </a:r>
+            <a:endParaRPr lang="en-US" sz="1250" dirty="0"/>
+          </a:p>
+        </p:txBody>
+      </p:sp>
+      <p:sp>
+        <p:nvSpPr>
+          <p:cNvPr id="8" name="Shape 5"/>
+          <p:cNvSpPr/>
+          <p:nvPr/>
+        </p:nvSpPr>
+        <p:spPr>
+          <a:xfrm>
+            <a:off x="7498080" y="3634740"/>
+            <a:ext cx="91440" cy="91440"/>
+          </a:xfrm>
+          <a:prstGeom prst="ellipse">
+            <a:avLst/>
+          </a:prstGeom>
+          <a:solidFill>
+            <a:srgbClr val="B61B3B"/>
+          </a:solidFill>
+          <a:ln/>
+        </p:spPr>
+      </p:sp>
+      <p:sp>
+        <p:nvSpPr>
+          <p:cNvPr id="9" name="Text 6"/>
+          <p:cNvSpPr/>
+          <p:nvPr/>
+        </p:nvSpPr>
+        <p:spPr>
+          <a:xfrm>
+            <a:off x="7726680" y="3246120"/>
+            <a:ext cx="3931920" cy="868680"/>
+          </a:xfrm>
+          <a:prstGeom prst="rect">
+            <a:avLst/>
+          </a:prstGeom>
+          <a:noFill/>
+          <a:ln/>
+        </p:spPr>
+        <p:txBody>
+          <a:bodyPr wrap="square" lIns="0" tIns="0" rIns="0" bIns="0" rtlCol="0" anchor="ctr"/>
+          <a:lstStyle/>
+          <a:p>
+            <a:pPr indent="0" marL="0">
+              <a:lnSpc>
+                <a:spcPct val="115000"/>
+              </a:lnSpc>
+              <a:buNone/>
+            </a:pPr>
+            <a:r>
+              <a:rPr lang="en-US" sz="1300" dirty="0">
+                <a:solidFill>
+                  <a:srgbClr val="1F2937"/>
+                </a:solidFill>
+                <a:latin typeface="Calibri" pitchFamily="34" charset="0"/>
+                <a:ea typeface="Calibri" pitchFamily="34" charset="-122"/>
+                <a:cs typeface="Calibri" pitchFamily="34" charset="-120"/>
+              </a:rPr>
+              <a:t>Лес лучший в 7 из 9 кластеров; главный признак — продажи прошлого сезона (82%)</a:t>
+            </a:r>
+            <a:endParaRPr lang="en-US" sz="1300" dirty="0"/>
+          </a:p>
+        </p:txBody>
+      </p:sp>
+      <p:sp>
+        <p:nvSpPr>
+          <p:cNvPr id="10" name="Shape 7"/>
+          <p:cNvSpPr/>
+          <p:nvPr/>
+        </p:nvSpPr>
+        <p:spPr>
+          <a:xfrm>
+            <a:off x="7498080" y="4503420"/>
+            <a:ext cx="91440" cy="91440"/>
+          </a:xfrm>
+          <a:prstGeom prst="ellipse">
+            <a:avLst/>
+          </a:prstGeom>
+          <a:solidFill>
+            <a:srgbClr val="B61B3B"/>
+          </a:solidFill>
+          <a:ln/>
+        </p:spPr>
+      </p:sp>
+      <p:sp>
+        <p:nvSpPr>
+          <p:cNvPr id="11" name="Text 8"/>
+          <p:cNvSpPr/>
+          <p:nvPr/>
+        </p:nvSpPr>
+        <p:spPr>
+          <a:xfrm>
+            <a:off x="7726680" y="4114800"/>
+            <a:ext cx="3931920" cy="868680"/>
+          </a:xfrm>
+          <a:prstGeom prst="rect">
+            <a:avLst/>
+          </a:prstGeom>
+          <a:noFill/>
+          <a:ln/>
+        </p:spPr>
+        <p:txBody>
+          <a:bodyPr wrap="square" lIns="0" tIns="0" rIns="0" bIns="0" rtlCol="0" anchor="ctr"/>
+          <a:lstStyle/>
+          <a:p>
+            <a:pPr indent="0" marL="0">
+              <a:lnSpc>
+                <a:spcPct val="115000"/>
+              </a:lnSpc>
+              <a:buNone/>
+            </a:pPr>
+            <a:r>
+              <a:rPr lang="en-US" sz="1300" dirty="0">
+                <a:solidFill>
+                  <a:srgbClr val="1F2937"/>
+                </a:solidFill>
+                <a:latin typeface="Calibri" pitchFamily="34" charset="0"/>
+                <a:ea typeface="Calibri" pitchFamily="34" charset="-122"/>
+                <a:cs typeface="Calibri" pitchFamily="34" charset="-120"/>
+              </a:rPr>
+              <a:t>Lasso оставил 15 признаков из 96 и потерял всего 2 п.п. точности</a:t>
+            </a:r>
+            <a:endParaRPr lang="en-US" sz="1300" dirty="0"/>
+          </a:p>
+        </p:txBody>
+      </p:sp>
+      <p:sp>
+        <p:nvSpPr>
+          <p:cNvPr id="12" name="Shape 9"/>
+          <p:cNvSpPr/>
+          <p:nvPr/>
+        </p:nvSpPr>
+        <p:spPr>
+          <a:xfrm>
+            <a:off x="7498080" y="5372100"/>
+            <a:ext cx="91440" cy="91440"/>
+          </a:xfrm>
+          <a:prstGeom prst="ellipse">
+            <a:avLst/>
+          </a:prstGeom>
+          <a:solidFill>
+            <a:srgbClr val="B61B3B"/>
+          </a:solidFill>
+          <a:ln/>
+        </p:spPr>
+      </p:sp>
+      <p:sp>
+        <p:nvSpPr>
+          <p:cNvPr id="13" name="Text 10"/>
+          <p:cNvSpPr/>
+          <p:nvPr/>
+        </p:nvSpPr>
+        <p:spPr>
+          <a:xfrm>
+            <a:off x="7726680" y="4983480"/>
+            <a:ext cx="3931920" cy="868680"/>
+          </a:xfrm>
+          <a:prstGeom prst="rect">
+            <a:avLst/>
+          </a:prstGeom>
+          <a:noFill/>
+          <a:ln/>
+        </p:spPr>
+        <p:txBody>
+          <a:bodyPr wrap="square" lIns="0" tIns="0" rIns="0" bIns="0" rtlCol="0" anchor="ctr"/>
+          <a:lstStyle/>
+          <a:p>
+            <a:pPr indent="0" marL="0">
+              <a:lnSpc>
+                <a:spcPct val="115000"/>
+              </a:lnSpc>
+              <a:buNone/>
+            </a:pPr>
+            <a:r>
+              <a:rPr lang="en-US" sz="1300" dirty="0">
+                <a:solidFill>
+                  <a:srgbClr val="1F2937"/>
+                </a:solidFill>
+                <a:latin typeface="Calibri" pitchFamily="34" charset="0"/>
+                <a:ea typeface="Calibri" pitchFamily="34" charset="-122"/>
+                <a:cs typeface="Calibri" pitchFamily="34" charset="-120"/>
+              </a:rPr>
+              <a:t>На 15 октября этих данных нет — это потенциал для перераспределения по ходу сезона</a:t>
+            </a:r>
+            <a:endParaRPr lang="en-US" sz="1300" dirty="0"/>
+          </a:p>
+        </p:txBody>
+      </p:sp>
+      <p:sp>
+        <p:nvSpPr>
+          <p:cNvPr id="14" name="Text 11"/>
+          <p:cNvSpPr/>
+          <p:nvPr/>
+        </p:nvSpPr>
+        <p:spPr>
+          <a:xfrm>
+            <a:off x="11640312" y="6446520"/>
+            <a:ext cx="365760" cy="274320"/>
+          </a:xfrm>
+          <a:prstGeom prst="rect">
+            <a:avLst/>
+          </a:prstGeom>
+          <a:noFill/>
+          <a:ln/>
+        </p:spPr>
+        <p:txBody>
+          <a:bodyPr wrap="square" rtlCol="0" anchor="ctr"/>
+          <a:lstStyle/>
+          <a:p>
+            <a:pPr algn="r" indent="0" marL="0">
+              <a:buNone/>
+            </a:pPr>
+            <a:r>
+              <a:rPr lang="en-US" sz="1000" dirty="0">
+                <a:solidFill>
+                  <a:srgbClr val="6B7280"/>
+                </a:solidFill>
+                <a:latin typeface="Calibri" pitchFamily="34" charset="0"/>
+                <a:ea typeface="Calibri" pitchFamily="34" charset="-122"/>
+                <a:cs typeface="Calibri" pitchFamily="34" charset="-120"/>
+              </a:rPr>
+              <a:t>9</a:t>
+            </a:r>
+            <a:endParaRPr lang="en-US" sz="1000" dirty="0"/>
           </a:p>
         </p:txBody>
       </p:sp>
@@ -6014,319 +10227,4 @@
     </a:ext>
   </a:extLst>
 </a:theme>
-</file>
-
-<file path=ppt/theme/theme2.xml><?xml version="1.0" encoding="utf-8"?>
-<a:theme xmlns:a="http://schemas.openxmlformats.org/drawingml/2006/main" name="Тема Office">
-  <a:themeElements>
-    <a:clrScheme name="Стандартная">
-      <a:dk1>
-        <a:sysClr val="windowText" lastClr="000000"/>
-      </a:dk1>
-      <a:lt1>
-        <a:sysClr val="window" lastClr="FFFFFF"/>
-      </a:lt1>
-      <a:dk2>
-        <a:srgbClr val="0E2841"/>
-      </a:dk2>
-      <a:lt2>
-        <a:srgbClr val="E8E8E8"/>
-      </a:lt2>
-      <a:accent1>
-        <a:srgbClr val="156082"/>
-      </a:accent1>
-      <a:accent2>
-        <a:srgbClr val="E97132"/>
-      </a:accent2>
-      <a:accent3>
-        <a:srgbClr val="196B24"/>
-      </a:accent3>
-      <a:accent4>
-        <a:srgbClr val="0F9ED5"/>
-      </a:accent4>
-      <a:accent5>
-        <a:srgbClr val="A02B93"/>
-      </a:accent5>
-      <a:accent6>
-        <a:srgbClr val="4EA72E"/>
-      </a:accent6>
-      <a:hlink>
-        <a:srgbClr val="467886"/>
-      </a:hlink>
-      <a:folHlink>
-        <a:srgbClr val="96607D"/>
-      </a:folHlink>
-    </a:clrScheme>
-    <a:fontScheme name="Стандартная">
-      <a:majorFont>
-        <a:latin typeface="Aptos Display" panose="02110004020202020204"/>
-        <a:ea typeface=""/>
-        <a:cs typeface=""/>
-        <a:font script="Jpan" typeface="游ゴシック Light"/>
-        <a:font script="Hang" typeface="맑은 고딕"/>
-        <a:font script="Hans" typeface="等线 Light"/>
-        <a:font script="Hant" typeface="新細明體"/>
-        <a:font script="Arab" typeface="Times New Roman"/>
-        <a:font script="Hebr" typeface="Times New Roman"/>
-        <a:font script="Thai" typeface="Angsana New"/>
-        <a:font script="Ethi" typeface="Nyala"/>
-        <a:font script="Beng" typeface="Vrinda"/>
-        <a:font script="Gujr" typeface="Shruti"/>
-        <a:font script="Khmr" typeface="MoolBoran"/>
-        <a:font script="Knda" typeface="Tunga"/>
-        <a:font script="Guru" typeface="Raavi"/>
-        <a:font script="Cans" typeface="Euphemia"/>
-        <a:font script="Cher" typeface="Plantagenet Cherokee"/>
-        <a:font script="Yiii" typeface="Microsoft Yi Baiti"/>
-        <a:font script="Tibt" typeface="Microsoft Himalaya"/>
-        <a:font script="Thaa" typeface="MV Boli"/>
-        <a:font script="Deva" typeface="Mangal"/>
-        <a:font script="Telu" typeface="Gautami"/>
-        <a:font script="Taml" typeface="Latha"/>
-        <a:font script="Syrc" typeface="Estrangelo Edessa"/>
-        <a:font script="Orya" typeface="Kalinga"/>
-        <a:font script="Mlym" typeface="Kartika"/>
-        <a:font script="Laoo" typeface="DokChampa"/>
-        <a:font script="Sinh" typeface="Iskoola Pota"/>
-        <a:font script="Mong" typeface="Mongolian Baiti"/>
-        <a:font script="Viet" typeface="Times New Roman"/>
-        <a:font script="Uigh" typeface="Microsoft Uighur"/>
-        <a:font script="Geor" typeface="Sylfaen"/>
-        <a:font script="Armn" typeface="Arial"/>
-        <a:font script="Bugi" typeface="Leelawadee UI"/>
-        <a:font script="Bopo" typeface="Microsoft JhengHei"/>
-        <a:font script="Java" typeface="Javanese Text"/>
-        <a:font script="Lisu" typeface="Segoe UI"/>
-        <a:font script="Mymr" typeface="Myanmar Text"/>
-        <a:font script="Nkoo" typeface="Ebrima"/>
-        <a:font script="Olck" typeface="Nirmala UI"/>
-        <a:font script="Osma" typeface="Ebrima"/>
-        <a:font script="Phag" typeface="Phagspa"/>
-        <a:font script="Syrn" typeface="Estrangelo Edessa"/>
-        <a:font script="Syrj" typeface="Estrangelo Edessa"/>
-        <a:font script="Syre" typeface="Estrangelo Edessa"/>
-        <a:font script="Sora" typeface="Nirmala UI"/>
-        <a:font script="Tale" typeface="Microsoft Tai Le"/>
-        <a:font script="Talu" typeface="Microsoft New Tai Lue"/>
-        <a:font script="Tfng" typeface="Ebrima"/>
-      </a:majorFont>
-      <a:minorFont>
-        <a:latin typeface="Aptos" panose="02110004020202020204"/>
-        <a:ea typeface=""/>
-        <a:cs typeface=""/>
-        <a:font script="Jpan" typeface="游ゴシック"/>
-        <a:font script="Hang" typeface="맑은 고딕"/>
-        <a:font script="Hans" typeface="等线"/>
-        <a:font script="Hant" typeface="新細明體"/>
-        <a:font script="Arab" typeface="Arial"/>
-        <a:font script="Hebr" typeface="Arial"/>
-        <a:font script="Thai" typeface="Cordia New"/>
-        <a:font script="Ethi" typeface="Nyala"/>
-        <a:font script="Beng" typeface="Vrinda"/>
-        <a:font script="Gujr" typeface="Shruti"/>
-        <a:font script="Khmr" typeface="DaunPenh"/>
-        <a:font script="Knda" typeface="Tunga"/>
-        <a:font script="Guru" typeface="Raavi"/>
-        <a:font script="Cans" typeface="Euphemia"/>
-        <a:font script="Cher" typeface="Plantagenet Cherokee"/>
-        <a:font script="Yiii" typeface="Microsoft Yi Baiti"/>
-        <a:font script="Tibt" typeface="Microsoft Himalaya"/>
-        <a:font script="Thaa" typeface="MV Boli"/>
-        <a:font script="Deva" typeface="Mangal"/>
-        <a:font script="Telu" typeface="Gautami"/>
-        <a:font script="Taml" typeface="Latha"/>
-        <a:font script="Syrc" typeface="Estrangelo Edessa"/>
-        <a:font script="Orya" typeface="Kalinga"/>
-        <a:font script="Mlym" typeface="Kartika"/>
-        <a:font script="Laoo" typeface="DokChampa"/>
-        <a:font script="Sinh" typeface="Iskoola Pota"/>
-        <a:font script="Mong" typeface="Mongolian Baiti"/>
-        <a:font script="Viet" typeface="Arial"/>
-        <a:font script="Uigh" typeface="Microsoft Uighur"/>
-        <a:font script="Geor" typeface="Sylfaen"/>
-        <a:font script="Armn" typeface="Arial"/>
-        <a:font script="Bugi" typeface="Leelawadee UI"/>
-        <a:font script="Bopo" typeface="Microsoft JhengHei"/>
-        <a:font script="Java" typeface="Javanese Text"/>
-        <a:font script="Lisu" typeface="Segoe UI"/>
-        <a:font script="Mymr" typeface="Myanmar Text"/>
-        <a:font script="Nkoo" typeface="Ebrima"/>
-        <a:font script="Olck" typeface="Nirmala UI"/>
-        <a:font script="Osma" typeface="Ebrima"/>
-        <a:font script="Phag" typeface="Phagspa"/>
-        <a:font script="Syrn" typeface="Estrangelo Edessa"/>
-        <a:font script="Syrj" typeface="Estrangelo Edessa"/>
-        <a:font script="Syre" typeface="Estrangelo Edessa"/>
-        <a:font script="Sora" typeface="Nirmala UI"/>
-        <a:font script="Tale" typeface="Microsoft Tai Le"/>
-        <a:font script="Talu" typeface="Microsoft New Tai Lue"/>
-        <a:font script="Tfng" typeface="Ebrima"/>
-      </a:minorFont>
-    </a:fontScheme>
-    <a:fmtScheme name="Стандартная">
-      <a:fillStyleLst>
-        <a:solidFill>
-          <a:schemeClr val="phClr"/>
-        </a:solidFill>
-        <a:gradFill rotWithShape="1">
-          <a:gsLst>
-            <a:gs pos="0">
-              <a:schemeClr val="phClr">
-                <a:lumMod val="110000"/>
-                <a:satMod val="105000"/>
-                <a:tint val="67000"/>
-              </a:schemeClr>
-            </a:gs>
-            <a:gs pos="50000">
-              <a:schemeClr val="phClr">
-                <a:lumMod val="105000"/>
-                <a:satMod val="103000"/>
-                <a:tint val="73000"/>
-              </a:schemeClr>
-            </a:gs>
-            <a:gs pos="100000">
-              <a:schemeClr val="phClr">
-                <a:lumMod val="105000"/>
-                <a:satMod val="109000"/>
-                <a:tint val="81000"/>
-              </a:schemeClr>
-            </a:gs>
-          </a:gsLst>
-          <a:lin ang="5400000" scaled="0"/>
-        </a:gradFill>
-        <a:gradFill rotWithShape="1">
-          <a:gsLst>
-            <a:gs pos="0">
-              <a:schemeClr val="phClr">
-                <a:satMod val="103000"/>
-                <a:lumMod val="102000"/>
-                <a:tint val="94000"/>
-              </a:schemeClr>
-            </a:gs>
-            <a:gs pos="50000">
-              <a:schemeClr val="phClr">
-                <a:satMod val="110000"/>
-                <a:lumMod val="100000"/>
-                <a:shade val="100000"/>
-              </a:schemeClr>
-            </a:gs>
-            <a:gs pos="100000">
-              <a:schemeClr val="phClr">
-                <a:lumMod val="99000"/>
-                <a:satMod val="120000"/>
-                <a:shade val="78000"/>
-              </a:schemeClr>
-            </a:gs>
-          </a:gsLst>
-          <a:lin ang="5400000" scaled="0"/>
-        </a:gradFill>
-      </a:fillStyleLst>
-      <a:lnStyleLst>
-        <a:ln w="12700" cap="flat" cmpd="sng" algn="ctr">
-          <a:solidFill>
-            <a:schemeClr val="phClr"/>
-          </a:solidFill>
-          <a:prstDash val="solid"/>
-          <a:miter lim="800000"/>
-        </a:ln>
-        <a:ln w="19050" cap="flat" cmpd="sng" algn="ctr">
-          <a:solidFill>
-            <a:schemeClr val="phClr"/>
-          </a:solidFill>
-          <a:prstDash val="solid"/>
-          <a:miter lim="800000"/>
-        </a:ln>
-        <a:ln w="25400" cap="flat" cmpd="sng" algn="ctr">
-          <a:solidFill>
-            <a:schemeClr val="phClr"/>
-          </a:solidFill>
-          <a:prstDash val="solid"/>
-          <a:miter lim="800000"/>
-        </a:ln>
-      </a:lnStyleLst>
-      <a:effectStyleLst>
-        <a:effectStyle>
-          <a:effectLst/>
-        </a:effectStyle>
-        <a:effectStyle>
-          <a:effectLst/>
-        </a:effectStyle>
-        <a:effectStyle>
-          <a:effectLst>
-            <a:outerShdw blurRad="57150" dist="19050" dir="5400000" algn="ctr" rotWithShape="0">
-              <a:srgbClr val="000000">
-                <a:alpha val="63000"/>
-              </a:srgbClr>
-            </a:outerShdw>
-          </a:effectLst>
-        </a:effectStyle>
-      </a:effectStyleLst>
-      <a:bgFillStyleLst>
-        <a:solidFill>
-          <a:schemeClr val="phClr"/>
-        </a:solidFill>
-        <a:solidFill>
-          <a:schemeClr val="phClr">
-            <a:tint val="95000"/>
-            <a:satMod val="170000"/>
-          </a:schemeClr>
-        </a:solidFill>
-        <a:gradFill rotWithShape="1">
-          <a:gsLst>
-            <a:gs pos="0">
-              <a:schemeClr val="phClr">
-                <a:tint val="93000"/>
-                <a:satMod val="150000"/>
-                <a:shade val="98000"/>
-                <a:lumMod val="102000"/>
-              </a:schemeClr>
-            </a:gs>
-            <a:gs pos="50000">
-              <a:schemeClr val="phClr">
-                <a:tint val="98000"/>
-                <a:satMod val="130000"/>
-                <a:shade val="90000"/>
-                <a:lumMod val="103000"/>
-              </a:schemeClr>
-            </a:gs>
-            <a:gs pos="100000">
-              <a:schemeClr val="phClr">
-                <a:shade val="63000"/>
-                <a:satMod val="120000"/>
-              </a:schemeClr>
-            </a:gs>
-          </a:gsLst>
-          <a:lin ang="5400000" scaled="0"/>
-        </a:gradFill>
-      </a:bgFillStyleLst>
-    </a:fmtScheme>
-  </a:themeElements>
-  <a:objectDefaults>
-    <a:lnDef>
-      <a:spPr/>
-      <a:bodyPr/>
-      <a:lstStyle/>
-      <a:style>
-        <a:lnRef idx="2">
-          <a:schemeClr val="accent1"/>
-        </a:lnRef>
-        <a:fillRef idx="0">
-          <a:schemeClr val="accent1"/>
-        </a:fillRef>
-        <a:effectRef idx="1">
-          <a:schemeClr val="accent1"/>
-        </a:effectRef>
-        <a:fontRef idx="minor">
-          <a:schemeClr val="tx1"/>
-        </a:fontRef>
-      </a:style>
-    </a:lnDef>
-  </a:objectDefaults>
-  <a:extraClrSchemeLst/>
-  <a:extLst>
-    <a:ext uri="{05A4C25C-085E-4340-85A3-A5531E510DB2}">
-      <thm15:themeFamily xmlns:thm15="http://schemas.microsoft.com/office/thememl/2012/main" name="Office Theme" id="{2E142A2C-CD16-42D6-873A-C26D2A0506FA}" vid="{1BDDFF52-6CD6-40A5-AB3C-68EB2F1E4D0A}"/>
-    </a:ext>
-  </a:extLst>
-</a:theme>
 </file>
--- a/presentation/presentation.pptx
+++ b/presentation/presentation.pptx
@@ -4,6 +4,9 @@
   <p:sldMasterIdLst>
     <p:sldMasterId id="2147483648" r:id="rId1"/>
   </p:sldMasterIdLst>
+  <p:notesMasterIdLst>
+    <p:notesMasterId r:id="rId14"/>
+  </p:notesMasterIdLst>
   <p:sldIdLst>
     <p:sldId id="256" r:id="rId2"/>
     <p:sldId id="257" r:id="rId3"/>
@@ -18,9 +21,6 @@
     <p:sldId id="266" r:id="rId12"/>
     <p:sldId id="267" r:id="rId13"/>
   </p:sldIdLst>
-  <p:notesMasterIdLst>
-    <p:notesMasterId r:id="rId14"/>
-  </p:notesMasterIdLst>
   <p:sldSz cx="12192000" cy="6858000"/>
   <p:notesSz cx="6858000" cy="12192000"/>
   <p:defaultTextStyle>
@@ -115,6 +115,11 @@
       </a:defRPr>
     </a:lvl9pPr>
   </p:defaultTextStyle>
+  <p:extLst>
+    <p:ext uri="{EFAFB233-063F-42B5-8137-9DF3F51BA10A}">
+      <p15:sldGuideLst xmlns:p15="http://schemas.microsoft.com/office/powerpoint/2012/main"/>
+    </p:ext>
+  </p:extLst>
 </p:presentation>
 </file>
 
@@ -140,234 +145,10 @@
           <a:chExt cx="0" cy="0"/>
         </a:xfrm>
       </p:grpSpPr>
-      <p:sp>
-        <p:nvSpPr>
-          <p:cNvPr id="2" name="Header Placeholder 1"/>
-          <p:cNvSpPr>
-            <a:spLocks noGrp="1"/>
-          </p:cNvSpPr>
-          <p:nvPr>
-            <p:ph type="hdr" sz="quarter"/>
-          </p:nvPr>
-        </p:nvSpPr>
-        <p:spPr>
-          <a:xfrm>
-            <a:off x="0" y="0"/>
-            <a:ext cx="2971800" cy="458788"/>
-          </a:xfrm>
-          <a:prstGeom prst="rect">
-            <a:avLst/>
-          </a:prstGeom>
-        </p:spPr>
-        <p:txBody>
-          <a:bodyPr vert="horz" lIns="91440" tIns="45720" rIns="91440" bIns="45720" rtlCol="0"/>
-          <a:lstStyle>
-            <a:lvl1pPr algn="l">
-              <a:defRPr sz="1200"/>
-            </a:lvl1pPr>
-          </a:lstStyle>
-          <a:p>
-            <a:endParaRPr lang="en-US"/>
-          </a:p>
-        </p:txBody>
-      </p:sp>
-      <p:sp>
-        <p:nvSpPr>
-          <p:cNvPr id="3" name="Date Placeholder 2"/>
-          <p:cNvSpPr>
-            <a:spLocks noGrp="1"/>
-          </p:cNvSpPr>
-          <p:nvPr>
-            <p:ph type="dt" idx="1"/>
-          </p:nvPr>
-        </p:nvSpPr>
-        <p:spPr>
-          <a:xfrm>
-            <a:off x="3884613" y="0"/>
-            <a:ext cx="2971800" cy="458788"/>
-          </a:xfrm>
-          <a:prstGeom prst="rect">
-            <a:avLst/>
-          </a:prstGeom>
-        </p:spPr>
-        <p:txBody>
-          <a:bodyPr vert="horz" lIns="91440" tIns="45720" rIns="91440" bIns="45720" rtlCol="0"/>
-          <a:lstStyle>
-            <a:lvl1pPr algn="r">
-              <a:defRPr sz="1200"/>
-            </a:lvl1pPr>
-          </a:lstStyle>
-          <a:p>
-            <a:fld id="{5282F153-3F37-0F45-9E97-73ACFA13230C}" type="datetimeFigureOut">
-              <a:rPr lang="en-US"/>
-              <a:t>7/23/19</a:t>
-            </a:fld>
-            <a:endParaRPr lang="en-US"/>
-          </a:p>
-        </p:txBody>
-      </p:sp>
-      <p:sp>
-        <p:nvSpPr>
-          <p:cNvPr id="4" name="Slide Image Placeholder 3"/>
-          <p:cNvSpPr>
-            <a:spLocks noGrp="1" noRot="1" noChangeAspect="1"/>
-          </p:cNvSpPr>
-          <p:nvPr>
-            <p:ph type="sldImg" idx="2"/>
-          </p:nvPr>
-        </p:nvSpPr>
-        <p:spPr>
-          <a:xfrm>
-            <a:off x="685800" y="1143000"/>
-            <a:ext cx="5486400" cy="3086100"/>
-          </a:xfrm>
-          <a:prstGeom prst="rect">
-            <a:avLst/>
-          </a:prstGeom>
-          <a:noFill/>
-          <a:ln w="12700">
-            <a:solidFill>
-              <a:prstClr val="black"/>
-            </a:solidFill>
-          </a:ln>
-        </p:spPr>
-        <p:txBody>
-          <a:bodyPr vert="horz" lIns="91440" tIns="45720" rIns="91440" bIns="45720" rtlCol="0" anchor="ctr"/>
-          <a:lstStyle/>
-          <a:p>
-            <a:endParaRPr lang="en-US"/>
-          </a:p>
-        </p:txBody>
-      </p:sp>
-      <p:sp>
-        <p:nvSpPr>
-          <p:cNvPr id="5" name="Notes Placeholder 4"/>
-          <p:cNvSpPr>
-            <a:spLocks noGrp="1"/>
-          </p:cNvSpPr>
-          <p:nvPr>
-            <p:ph type="body" sz="quarter" idx="3"/>
-          </p:nvPr>
-        </p:nvSpPr>
-        <p:spPr>
-          <a:xfrm>
-            <a:off x="685800" y="4400550"/>
-            <a:ext cx="5486400" cy="3600450"/>
-          </a:xfrm>
-          <a:prstGeom prst="rect">
-            <a:avLst/>
-          </a:prstGeom>
-        </p:spPr>
-        <p:txBody>
-          <a:bodyPr vert="horz" lIns="91440" tIns="45720" rIns="91440" bIns="45720" rtlCol="0"/>
-          <a:lstStyle/>
-          <a:p>
-            <a:pPr lvl="0"/>
-            <a:r>
-              <a:rPr lang="en-US"/>
-              <a:t>Click to edit Master text styles</a:t>
-            </a:r>
-          </a:p>
-          <a:p>
-            <a:pPr lvl="1"/>
-            <a:r>
-              <a:rPr lang="en-US"/>
-              <a:t>Second level</a:t>
-            </a:r>
-          </a:p>
-          <a:p>
-            <a:pPr lvl="2"/>
-            <a:r>
-              <a:rPr lang="en-US"/>
-              <a:t>Third level</a:t>
-            </a:r>
-          </a:p>
-          <a:p>
-            <a:pPr lvl="3"/>
-            <a:r>
-              <a:rPr lang="en-US"/>
-              <a:t>Fourth level</a:t>
-            </a:r>
-          </a:p>
-          <a:p>
-            <a:pPr lvl="4"/>
-            <a:r>
-              <a:rPr lang="en-US"/>
-              <a:t>Fifth level</a:t>
-            </a:r>
-          </a:p>
-        </p:txBody>
-      </p:sp>
-      <p:sp>
-        <p:nvSpPr>
-          <p:cNvPr id="6" name="Footer Placeholder 5"/>
-          <p:cNvSpPr>
-            <a:spLocks noGrp="1"/>
-          </p:cNvSpPr>
-          <p:nvPr>
-            <p:ph type="ftr" sz="quarter" idx="4"/>
-          </p:nvPr>
-        </p:nvSpPr>
-        <p:spPr>
-          <a:xfrm>
-            <a:off x="0" y="8685213"/>
-            <a:ext cx="2971800" cy="458787"/>
-          </a:xfrm>
-          <a:prstGeom prst="rect">
-            <a:avLst/>
-          </a:prstGeom>
-        </p:spPr>
-        <p:txBody>
-          <a:bodyPr vert="horz" lIns="91440" tIns="45720" rIns="91440" bIns="45720" rtlCol="0" anchor="b"/>
-          <a:lstStyle>
-            <a:lvl1pPr algn="l">
-              <a:defRPr sz="1200"/>
-            </a:lvl1pPr>
-          </a:lstStyle>
-          <a:p>
-            <a:endParaRPr lang="en-US"/>
-          </a:p>
-        </p:txBody>
-      </p:sp>
-      <p:sp>
-        <p:nvSpPr>
-          <p:cNvPr id="7" name="Slide Number Placeholder 6"/>
-          <p:cNvSpPr>
-            <a:spLocks noGrp="1"/>
-          </p:cNvSpPr>
-          <p:nvPr>
-            <p:ph type="sldNum" sz="quarter" idx="5"/>
-          </p:nvPr>
-        </p:nvSpPr>
-        <p:spPr>
-          <a:xfrm>
-            <a:off x="3884613" y="8685213"/>
-            <a:ext cx="2971800" cy="458787"/>
-          </a:xfrm>
-          <a:prstGeom prst="rect">
-            <a:avLst/>
-          </a:prstGeom>
-        </p:spPr>
-        <p:txBody>
-          <a:bodyPr vert="horz" lIns="91440" tIns="45720" rIns="91440" bIns="45720" rtlCol="0" anchor="b"/>
-          <a:lstStyle>
-            <a:lvl1pPr algn="r">
-              <a:defRPr sz="1200"/>
-            </a:lvl1pPr>
-          </a:lstStyle>
-          <a:p>
-            <a:fld id="{CE5E9CC1-C706-0F49-92D6-E571CC5EEA8F}" type="slidenum">
-              <a:rPr lang="en-US"/>
-              <a:t>‹#›</a:t>
-            </a:fld>
-            <a:endParaRPr lang="en-US"/>
-          </a:p>
-        </p:txBody>
-      </p:sp>
     </p:spTree>
     <p:extLst>
       <p:ext uri="{BB962C8B-B14F-4D97-AF65-F5344CB8AC3E}">
-        <p14:creationId xmlns:p14="http://schemas.microsoft.com/office/powerpoint/2010/main" val="1024086991"/>
+        <p14:creationId xmlns:p14="http://schemas.microsoft.com/office/powerpoint/2010/main" val="1175941594"/>
       </p:ext>
     </p:extLst>
   </p:cSld>
@@ -511,9 +292,7 @@
           <a:bodyPr/>
           <a:lstStyle/>
           <a:p>
-            <a:r>
-              <a:t>Добрый день! Меня зовут Настасия Ерёмина. Тема проекта — прогнозирование спроса на новогодний ассортимент розничной сети в разрезе «магазин и товарная подгруппа» для первичного распределения товара.</a:t>
-            </a:r>
+            <a:endParaRPr dirty="0"/>
           </a:p>
         </p:txBody>
       </p:sp>
@@ -597,9 +376,7 @@
           <a:bodyPr/>
           <a:lstStyle/>
           <a:p>
-            <a:r>
-              <a:t>Ни один артикул не менял подгруппу, но в 2025 году печенье продавалось новыми артикулами под группой «сладости», а не «хлебобулочные изделия». Общий спрос стабилен, но для прогноза по подгруппам это два разных товара: две подгруппы дают больше четверти ошибки бейзлайна. До сезона этот сдвиг не виден — около 10 пунктов ошибки любого метода, а модели внутри сезона его «выучили», отсюда примерно 40 процентов их выигрыша.</a:t>
-            </a:r>
+            <a:endParaRPr dirty="0"/>
           </a:p>
         </p:txBody>
       </p:sp>
@@ -683,9 +460,7 @@
           <a:bodyPr/>
           <a:lstStyle/>
           <a:p>
-            <a:r>
-              <a:t>Рекомендации. Для первичного распределения — LFL с единым коэффициентом роста по началу октября. Для Дальнего Востока — пересмотреть логистику: упущенная выручка около 307 тысяч рублей за сезон в масштабированных цифрах. При смене ассортимента — переносить историю продаж вручную. Модели — для перераспределения в сезоне; следующий шаг — проверить их на первых неделях ноября. Ограничения: дефицит определён косвенно, один сезон обучения, гиперпараметры не подбирались.</a:t>
-            </a:r>
+            <a:endParaRPr dirty="0"/>
           </a:p>
         </p:txBody>
       </p:sp>
@@ -769,9 +544,7 @@
           <a:bodyPr/>
           <a:lstStyle/>
           <a:p>
-            <a:r>
-              <a:t>Спасибо за внимание, готова ответить на вопросы.</a:t>
-            </a:r>
+            <a:endParaRPr dirty="0"/>
           </a:p>
         </p:txBody>
       </p:sp>
@@ -855,9 +628,7 @@
           <a:bodyPr/>
           <a:lstStyle/>
           <a:p>
-            <a:r>
-              <a:t>В сети товаров для дома, декора и подарков больше 170 магазинов. Проблема, которую решает эта работа: новогодний товар распределяется по магазинам в середине октября, до старта продаж, по экспертной оценке, и точность такого распределения на данных никто не проверял. Из-за этого сеть теряет дважды: там, где товара не хватило, полка пустеет и продажи упущены, а там, где его слишком много, после 31 декабря он замораживает деньги и уходит в уценку. Цель работы — найти обоснованное правило первичного распределения и честно проверить, насколько оно точное.</a:t>
-            </a:r>
+            <a:endParaRPr dirty="0"/>
           </a:p>
         </p:txBody>
       </p:sp>
@@ -941,9 +712,7 @@
           <a:bodyPr/>
           <a:lstStyle/>
           <a:p>
-            <a:r>
-              <a:t>Я прогнозирую продажи пары «магазин и подгруппа» за ноябрь и декабрь. Решение принимается 15 октября, поэтому прогноз может использовать только то, что известно к этой дате. Метрика — WAPE, взвешенная процентная ошибка, устойчивая к нулевым продажам; дополнительно смотрю bias — систематическое завышение или занижение. Сравниваю простое правило LFL — прошлогодние продажи, умноженные на коэффициент роста, — и три модели машинного обучения.</a:t>
-            </a:r>
+            <a:endParaRPr dirty="0"/>
           </a:p>
         </p:txBody>
       </p:sp>
@@ -1027,15 +796,7 @@
           <a:bodyPr/>
           <a:lstStyle/>
           <a:p>
-            <a:r>
-              <a:t>Данные — 36 недельных выгрузок из 1С, 3,4 миллиона строк; после агрегации — 172 магазина и 83 подгруппы. В остатках, продажах и поставках было много пустых ячеек. Чтобы понять, что они значат, я проверила конкретный пример: в начале недели остаток две штуки, продано две штуки, а в конце недели ячейка пустая. Значит, пустая ячейка — это ноль, и я заменила такие пропуски нулями.</a:t>
-            </a:r>
-          </a:p>
-          <a:p/>
-          <a:p>
-            <a:r>
-              <a:t>Вторая сложность: справочника, какие товары каким магазинам назначены, нет. Если у пары «магазин и товар» весь сезон одни нули, это может быть и дефицит, и товар, который магазину просто не положен. Поэтому я считаю товар ассортиментным, если за сезон у него хотя бы раз был остаток, продажа или поставка; только тогда нулевой остаток засчитывается как дефицит. Январь в прогноз не входит: это распродажи, а не спрос.</a:t>
-            </a:r>
+            <a:endParaRPr dirty="0"/>
           </a:p>
         </p:txBody>
       </p:sp>
@@ -1119,9 +880,7 @@
           <a:bodyPr/>
           <a:lstStyle/>
           <a:p>
-            <a:r>
-              <a:t>Слева — суммарные продажи сети по неделям: по горизонтали недели с начала октября до начала февраля, по вертикали тысячи проданных штук. Пик спроса я не назначала, его показали данные: последняя неделя перед Новым годом в обоих сезонах. Справа — матрица ABC-XYZ, в каждой клетке число подгрупп. Буква A, B или C — вклад в выручку, X, Y или Z — насколько ровно подгруппа продаётся. Доходных и стабильных подгрупп всего две — шапки и перчатки; большинство доходных продаются скачками, это и есть предновогодний пик.</a:t>
-            </a:r>
+            <a:endParaRPr dirty="0"/>
           </a:p>
         </p:txBody>
       </p:sp>
@@ -1205,9 +964,7 @@
           <a:bodyPr/>
           <a:lstStyle/>
           <a:p>
-            <a:r>
-              <a:t>Я проверила две гипотезы. Первая: лидеры продаж прошлого сезона остаются лидерами и в этом. Я расставила подгруппы по местам в рейтинге выручки и сравнила места двух сезонов: корреляция Спирмена 0,906, рейтинг почти не меняется. Это обосновывает прогноз от прошлого года. Вторая: на Дальнем Востоке дефицит выше, чем в остальной сети. На диаграмме размаха видно, что доля недель с дефицитом там 25,7 процента против 4,9 по сети, в 5,2 раза выше; тест Манна-Уитни подтверждает различие.</a:t>
-            </a:r>
+            <a:endParaRPr dirty="0"/>
           </a:p>
         </p:txBody>
       </p:sp>
@@ -1291,9 +1048,7 @@
           <a:bodyPr/>
           <a:lstStyle/>
           <a:p>
-            <a:r>
-              <a:t>Как проверить прогноз? Я сделала это двумя способами. Основной — честная имитация 15 октября: модель учится на сезоне 2024 и прогнозирует сезон 2025, зная только то, что было известно к 15 октября. Второй — внутри сезона: модель видит реальные продажи ноября и декабря у одних магазинов и прогнозирует остальные. На 15 октября таких данных ещё нет, поэтому второй способ показывает не прогноз для распределения, а насколько модели полезны позже, когда сезон уже идёт.</a:t>
-            </a:r>
+            <a:endParaRPr dirty="0"/>
           </a:p>
         </p:txBody>
       </p:sp>
@@ -1377,9 +1132,7 @@
           <a:bodyPr/>
           <a:lstStyle/>
           <a:p>
-            <a:r>
-              <a:t>Это главный результат. Лучший метод — простой LFL с единым коэффициентом роста по первым двум неделям октября: ошибка 45,8 процента. Случайный лес почти сравнялся — 46,8, Ridge сильно хуже. Без истории прошлого сезона моделям не хватает данных: у трёх четвертей пар в начале октября продаж ещё нет. По той же причине отдельные коэффициенты по кластерам и подгруппам ухудшают прогноз — они слишком шумные.</a:t>
-            </a:r>
+            <a:endParaRPr dirty="0"/>
           </a:p>
         </p:txBody>
       </p:sp>
@@ -1463,9 +1216,7 @@
           <a:bodyPr/>
           <a:lstStyle/>
           <a:p>
-            <a:r>
-              <a:t>Если известны продажи текущего сезона в остальной сети, модели раскрываются. На 36 отложенных магазинах случайный лес снижает ошибку до 29,6 процента против 51,7 у бейзлайна, почти без систематического смещения. Это потенциал для перераспределения товара по ходу сезона. Часть этого выигрыша связана с одной находкой — о ней на следующем слайде.</a:t>
-            </a:r>
+            <a:endParaRPr dirty="0"/>
           </a:p>
         </p:txBody>
       </p:sp>
@@ -1538,6 +1289,11 @@
 <file path=ppt/slideMasters/slideMaster1.xml><?xml version="1.0" encoding="utf-8"?>
 <p:sldMaster xmlns:a="http://schemas.openxmlformats.org/drawingml/2006/main" xmlns:r="http://schemas.openxmlformats.org/officeDocument/2006/relationships" xmlns:p="http://schemas.openxmlformats.org/presentationml/2006/main">
   <p:cSld>
+    <p:bg>
+      <p:bgRef idx="1001">
+        <a:schemeClr val="bg1"/>
+      </p:bgRef>
+    </p:bg>
     <p:spTree>
       <p:nvGrpSpPr>
         <p:cNvPr id="1" name=""/>
@@ -1820,6 +1576,7 @@
         <a:solidFill>
           <a:srgbClr val="323C32"/>
         </a:solidFill>
+        <a:effectLst/>
       </p:bgPr>
     </p:bg>
     <p:spTree>
@@ -1977,11 +1734,11 @@
           <a:bodyPr wrap="square" lIns="0" tIns="0" rIns="0" bIns="0" rtlCol="0" anchor="ctr"/>
           <a:lstStyle/>
           <a:p>
-            <a:pPr indent="0" marL="0">
-              <a:buNone/>
-            </a:pPr>
-            <a:r>
-              <a:rPr lang="en-US" sz="1300" spc="200" kern="0" dirty="0">
+            <a:pPr marL="0" indent="0">
+              <a:buNone/>
+            </a:pPr>
+            <a:r>
+              <a:rPr lang="en-US" sz="1300" kern="0" spc="200" dirty="0">
                 <a:solidFill>
                   <a:srgbClr val="C5C9A6"/>
                 </a:solidFill>
@@ -2016,7 +1773,7 @@
           <a:bodyPr wrap="square" lIns="0" tIns="0" rIns="0" bIns="0" rtlCol="0" anchor="ctr"/>
           <a:lstStyle/>
           <a:p>
-            <a:pPr indent="0" marL="0">
+            <a:pPr marL="0" indent="0">
               <a:lnSpc>
                 <a:spcPct val="110000"/>
               </a:lnSpc>
@@ -2058,7 +1815,7 @@
           <a:bodyPr wrap="square" lIns="0" tIns="0" rIns="0" bIns="0" rtlCol="0" anchor="ctr"/>
           <a:lstStyle/>
           <a:p>
-            <a:pPr indent="0" marL="0">
+            <a:pPr marL="0" indent="0">
               <a:buNone/>
             </a:pPr>
             <a:r>
@@ -2115,6 +1872,7 @@
         <a:solidFill>
           <a:srgbClr val="FFFFFF"/>
         </a:solidFill>
+        <a:effectLst/>
       </p:bgPr>
     </p:bg>
     <p:spTree>
@@ -2152,7 +1910,7 @@
           <a:bodyPr wrap="square" lIns="0" tIns="0" rIns="0" bIns="0" rtlCol="0" anchor="ctr"/>
           <a:lstStyle/>
           <a:p>
-            <a:pPr indent="0" marL="0">
+            <a:pPr marL="0" indent="0">
               <a:buNone/>
             </a:pPr>
             <a:r>
@@ -2191,7 +1949,7 @@
           <a:bodyPr wrap="square" lIns="0" tIns="0" rIns="0" bIns="0" rtlCol="0" anchor="ctr"/>
           <a:lstStyle/>
           <a:p>
-            <a:pPr indent="0" marL="0">
+            <a:pPr marL="0" indent="0">
               <a:buNone/>
             </a:pPr>
             <a:r>
@@ -2225,18 +1983,48 @@
         </p:nvGraphicFramePr>
         <p:xfrm>
           <a:off x="640080" y="1645920"/>
-          <a:ext cx="6766560" cy="914400"/>
+          <a:ext cx="6766560" cy="2267712"/>
         </p:xfrm>
         <a:graphic>
           <a:graphicData uri="http://schemas.openxmlformats.org/drawingml/2006/table">
             <a:tbl>
               <a:tblPr/>
               <a:tblGrid>
-                <a:gridCol w="2651760"/>
-                <a:gridCol w="914400"/>
-                <a:gridCol w="1051560"/>
-                <a:gridCol w="914400"/>
-                <a:gridCol w="1234440"/>
+                <a:gridCol w="2651760">
+                  <a:extLst>
+                    <a:ext uri="{9D8B030D-6E8A-4147-A177-3AD203B41FA5}">
+                      <a16:colId xmlns:a16="http://schemas.microsoft.com/office/drawing/2014/main" val="20000"/>
+                    </a:ext>
+                  </a:extLst>
+                </a:gridCol>
+                <a:gridCol w="914400">
+                  <a:extLst>
+                    <a:ext uri="{9D8B030D-6E8A-4147-A177-3AD203B41FA5}">
+                      <a16:colId xmlns:a16="http://schemas.microsoft.com/office/drawing/2014/main" val="20001"/>
+                    </a:ext>
+                  </a:extLst>
+                </a:gridCol>
+                <a:gridCol w="1051560">
+                  <a:extLst>
+                    <a:ext uri="{9D8B030D-6E8A-4147-A177-3AD203B41FA5}">
+                      <a16:colId xmlns:a16="http://schemas.microsoft.com/office/drawing/2014/main" val="20002"/>
+                    </a:ext>
+                  </a:extLst>
+                </a:gridCol>
+                <a:gridCol w="914400">
+                  <a:extLst>
+                    <a:ext uri="{9D8B030D-6E8A-4147-A177-3AD203B41FA5}">
+                      <a16:colId xmlns:a16="http://schemas.microsoft.com/office/drawing/2014/main" val="20003"/>
+                    </a:ext>
+                  </a:extLst>
+                </a:gridCol>
+                <a:gridCol w="1234440">
+                  <a:extLst>
+                    <a:ext uri="{9D8B030D-6E8A-4147-A177-3AD203B41FA5}">
+                      <a16:colId xmlns:a16="http://schemas.microsoft.com/office/drawing/2014/main" val="20004"/>
+                    </a:ext>
+                  </a:extLst>
+                </a:gridCol>
               </a:tblGrid>
               <a:tr h="566928">
                 <a:tc>
@@ -2244,7 +2032,7 @@
                     <a:bodyPr/>
                     <a:lstStyle/>
                     <a:p>
-                      <a:pPr algn="ctr" indent="0" marL="0">
+                      <a:pPr marL="0" indent="0" algn="ctr">
                         <a:buNone/>
                       </a:pPr>
                       <a:r>
@@ -2265,7 +2053,7 @@
                       </a:endParaRPr>
                     </a:p>
                   </a:txBody>
-                  <a:tcPr marL="91440" marR="91440" marT="45720" marB="45720" anchor="ctr">
+                  <a:tcPr anchor="ctr">
                     <a:lnL w="9525" cap="flat" cmpd="sng" algn="ctr">
                       <a:solidFill>
                         <a:srgbClr val="D9D6CC"/>
@@ -2312,7 +2100,7 @@
                     <a:bodyPr/>
                     <a:lstStyle/>
                     <a:p>
-                      <a:pPr algn="ctr" indent="0" marL="0">
+                      <a:pPr marL="0" indent="0" algn="ctr">
                         <a:buNone/>
                       </a:pPr>
                       <a:r>
@@ -2333,7 +2121,7 @@
                       </a:endParaRPr>
                     </a:p>
                   </a:txBody>
-                  <a:tcPr marL="91440" marR="91440" marT="45720" marB="45720" anchor="ctr">
+                  <a:tcPr anchor="ctr">
                     <a:lnL w="9525" cap="flat" cmpd="sng" algn="ctr">
                       <a:solidFill>
                         <a:srgbClr val="D9D6CC"/>
@@ -2380,7 +2168,7 @@
                     <a:bodyPr/>
                     <a:lstStyle/>
                     <a:p>
-                      <a:pPr algn="ctr" indent="0" marL="0">
+                      <a:pPr marL="0" indent="0" algn="ctr">
                         <a:buNone/>
                       </a:pPr>
                       <a:r>
@@ -2401,7 +2189,7 @@
                       </a:endParaRPr>
                     </a:p>
                   </a:txBody>
-                  <a:tcPr marL="91440" marR="91440" marT="45720" marB="45720" anchor="ctr">
+                  <a:tcPr anchor="ctr">
                     <a:lnL w="9525" cap="flat" cmpd="sng" algn="ctr">
                       <a:solidFill>
                         <a:srgbClr val="D9D6CC"/>
@@ -2448,7 +2236,7 @@
                     <a:bodyPr/>
                     <a:lstStyle/>
                     <a:p>
-                      <a:pPr algn="ctr" indent="0" marL="0">
+                      <a:pPr marL="0" indent="0" algn="ctr">
                         <a:buNone/>
                       </a:pPr>
                       <a:r>
@@ -2469,7 +2257,7 @@
                       </a:endParaRPr>
                     </a:p>
                   </a:txBody>
-                  <a:tcPr marL="91440" marR="91440" marT="45720" marB="45720" anchor="ctr">
+                  <a:tcPr anchor="ctr">
                     <a:lnL w="9525" cap="flat" cmpd="sng" algn="ctr">
                       <a:solidFill>
                         <a:srgbClr val="D9D6CC"/>
@@ -2516,7 +2304,7 @@
                     <a:bodyPr/>
                     <a:lstStyle/>
                     <a:p>
-                      <a:pPr algn="ctr" indent="0" marL="0">
+                      <a:pPr marL="0" indent="0" algn="ctr">
                         <a:buNone/>
                       </a:pPr>
                       <a:r>
@@ -2537,7 +2325,7 @@
                       </a:endParaRPr>
                     </a:p>
                   </a:txBody>
-                  <a:tcPr marL="91440" marR="91440" marT="45720" marB="45720" anchor="ctr">
+                  <a:tcPr anchor="ctr">
                     <a:lnL w="9525" cap="flat" cmpd="sng" algn="ctr">
                       <a:solidFill>
                         <a:srgbClr val="D9D6CC"/>
@@ -2579,6 +2367,11 @@
                     </a:solidFill>
                   </a:tcPr>
                 </a:tc>
+                <a:extLst>
+                  <a:ext uri="{0D108BD9-81ED-4DB2-BD59-A6C34878D82A}">
+                    <a16:rowId xmlns:a16="http://schemas.microsoft.com/office/drawing/2014/main" val="10000"/>
+                  </a:ext>
+                </a:extLst>
               </a:tr>
               <a:tr h="566928">
                 <a:tc>
@@ -2586,7 +2379,7 @@
                     <a:bodyPr/>
                     <a:lstStyle/>
                     <a:p>
-                      <a:pPr algn="l" indent="0" marL="0">
+                      <a:pPr marL="0" indent="0" algn="l">
                         <a:buNone/>
                       </a:pPr>
                       <a:r>
@@ -2607,7 +2400,7 @@
                       </a:endParaRPr>
                     </a:p>
                   </a:txBody>
-                  <a:tcPr marL="91440" marR="91440" marT="45720" marB="45720" anchor="ctr">
+                  <a:tcPr anchor="ctr">
                     <a:lnL w="9525" cap="flat" cmpd="sng" algn="ctr">
                       <a:solidFill>
                         <a:srgbClr val="D9D6CC"/>
@@ -2654,7 +2447,7 @@
                     <a:bodyPr/>
                     <a:lstStyle/>
                     <a:p>
-                      <a:pPr algn="ctr" indent="0" marL="0">
+                      <a:pPr marL="0" indent="0" algn="ctr">
                         <a:buNone/>
                       </a:pPr>
                       <a:r>
@@ -2675,7 +2468,7 @@
                       </a:endParaRPr>
                     </a:p>
                   </a:txBody>
-                  <a:tcPr marL="91440" marR="91440" marT="45720" marB="45720" anchor="ctr">
+                  <a:tcPr anchor="ctr">
                     <a:lnL w="9525" cap="flat" cmpd="sng" algn="ctr">
                       <a:solidFill>
                         <a:srgbClr val="D9D6CC"/>
@@ -2722,7 +2515,7 @@
                     <a:bodyPr/>
                     <a:lstStyle/>
                     <a:p>
-                      <a:pPr algn="ctr" indent="0" marL="0">
+                      <a:pPr marL="0" indent="0" algn="ctr">
                         <a:buNone/>
                       </a:pPr>
                       <a:r>
@@ -2743,7 +2536,7 @@
                       </a:endParaRPr>
                     </a:p>
                   </a:txBody>
-                  <a:tcPr marL="91440" marR="91440" marT="45720" marB="45720" anchor="ctr">
+                  <a:tcPr anchor="ctr">
                     <a:lnL w="9525" cap="flat" cmpd="sng" algn="ctr">
                       <a:solidFill>
                         <a:srgbClr val="D9D6CC"/>
@@ -2790,7 +2583,7 @@
                     <a:bodyPr/>
                     <a:lstStyle/>
                     <a:p>
-                      <a:pPr algn="ctr" indent="0" marL="0">
+                      <a:pPr marL="0" indent="0" algn="ctr">
                         <a:buNone/>
                       </a:pPr>
                       <a:r>
@@ -2811,7 +2604,7 @@
                       </a:endParaRPr>
                     </a:p>
                   </a:txBody>
-                  <a:tcPr marL="91440" marR="91440" marT="45720" marB="45720" anchor="ctr">
+                  <a:tcPr anchor="ctr">
                     <a:lnL w="9525" cap="flat" cmpd="sng" algn="ctr">
                       <a:solidFill>
                         <a:srgbClr val="D9D6CC"/>
@@ -2858,7 +2651,7 @@
                     <a:bodyPr/>
                     <a:lstStyle/>
                     <a:p>
-                      <a:pPr algn="ctr" indent="0" marL="0">
+                      <a:pPr marL="0" indent="0" algn="ctr">
                         <a:buNone/>
                       </a:pPr>
                       <a:r>
@@ -2879,7 +2672,7 @@
                       </a:endParaRPr>
                     </a:p>
                   </a:txBody>
-                  <a:tcPr marL="91440" marR="91440" marT="45720" marB="45720" anchor="ctr">
+                  <a:tcPr anchor="ctr">
                     <a:lnL w="9525" cap="flat" cmpd="sng" algn="ctr">
                       <a:solidFill>
                         <a:srgbClr val="D9D6CC"/>
@@ -2921,6 +2714,11 @@
                     </a:solidFill>
                   </a:tcPr>
                 </a:tc>
+                <a:extLst>
+                  <a:ext uri="{0D108BD9-81ED-4DB2-BD59-A6C34878D82A}">
+                    <a16:rowId xmlns:a16="http://schemas.microsoft.com/office/drawing/2014/main" val="10001"/>
+                  </a:ext>
+                </a:extLst>
               </a:tr>
               <a:tr h="566928">
                 <a:tc>
@@ -2928,7 +2726,7 @@
                     <a:bodyPr/>
                     <a:lstStyle/>
                     <a:p>
-                      <a:pPr algn="l" indent="0" marL="0">
+                      <a:pPr marL="0" indent="0" algn="l">
                         <a:buNone/>
                       </a:pPr>
                       <a:r>
@@ -2949,7 +2747,7 @@
                       </a:endParaRPr>
                     </a:p>
                   </a:txBody>
-                  <a:tcPr marL="91440" marR="91440" marT="45720" marB="45720" anchor="ctr">
+                  <a:tcPr anchor="ctr">
                     <a:lnL w="9525" cap="flat" cmpd="sng" algn="ctr">
                       <a:solidFill>
                         <a:srgbClr val="D9D6CC"/>
@@ -2996,7 +2794,7 @@
                     <a:bodyPr/>
                     <a:lstStyle/>
                     <a:p>
-                      <a:pPr algn="ctr" indent="0" marL="0">
+                      <a:pPr marL="0" indent="0" algn="ctr">
                         <a:buNone/>
                       </a:pPr>
                       <a:r>
@@ -3017,7 +2815,7 @@
                       </a:endParaRPr>
                     </a:p>
                   </a:txBody>
-                  <a:tcPr marL="91440" marR="91440" marT="45720" marB="45720" anchor="ctr">
+                  <a:tcPr anchor="ctr">
                     <a:lnL w="9525" cap="flat" cmpd="sng" algn="ctr">
                       <a:solidFill>
                         <a:srgbClr val="D9D6CC"/>
@@ -3064,7 +2862,7 @@
                     <a:bodyPr/>
                     <a:lstStyle/>
                     <a:p>
-                      <a:pPr algn="ctr" indent="0" marL="0">
+                      <a:pPr marL="0" indent="0" algn="ctr">
                         <a:buNone/>
                       </a:pPr>
                       <a:r>
@@ -3085,7 +2883,7 @@
                       </a:endParaRPr>
                     </a:p>
                   </a:txBody>
-                  <a:tcPr marL="91440" marR="91440" marT="45720" marB="45720" anchor="ctr">
+                  <a:tcPr anchor="ctr">
                     <a:lnL w="9525" cap="flat" cmpd="sng" algn="ctr">
                       <a:solidFill>
                         <a:srgbClr val="D9D6CC"/>
@@ -3132,7 +2930,7 @@
                     <a:bodyPr/>
                     <a:lstStyle/>
                     <a:p>
-                      <a:pPr algn="ctr" indent="0" marL="0">
+                      <a:pPr marL="0" indent="0" algn="ctr">
                         <a:buNone/>
                       </a:pPr>
                       <a:r>
@@ -3153,7 +2951,7 @@
                       </a:endParaRPr>
                     </a:p>
                   </a:txBody>
-                  <a:tcPr marL="91440" marR="91440" marT="45720" marB="45720" anchor="ctr">
+                  <a:tcPr anchor="ctr">
                     <a:lnL w="9525" cap="flat" cmpd="sng" algn="ctr">
                       <a:solidFill>
                         <a:srgbClr val="D9D6CC"/>
@@ -3200,7 +2998,7 @@
                     <a:bodyPr/>
                     <a:lstStyle/>
                     <a:p>
-                      <a:pPr algn="ctr" indent="0" marL="0">
+                      <a:pPr marL="0" indent="0" algn="ctr">
                         <a:buNone/>
                       </a:pPr>
                       <a:r>
@@ -3221,7 +3019,7 @@
                       </a:endParaRPr>
                     </a:p>
                   </a:txBody>
-                  <a:tcPr marL="91440" marR="91440" marT="45720" marB="45720" anchor="ctr">
+                  <a:tcPr anchor="ctr">
                     <a:lnL w="9525" cap="flat" cmpd="sng" algn="ctr">
                       <a:solidFill>
                         <a:srgbClr val="D9D6CC"/>
@@ -3263,6 +3061,11 @@
                     </a:solidFill>
                   </a:tcPr>
                 </a:tc>
+                <a:extLst>
+                  <a:ext uri="{0D108BD9-81ED-4DB2-BD59-A6C34878D82A}">
+                    <a16:rowId xmlns:a16="http://schemas.microsoft.com/office/drawing/2014/main" val="10002"/>
+                  </a:ext>
+                </a:extLst>
               </a:tr>
               <a:tr h="566928">
                 <a:tc>
@@ -3270,7 +3073,7 @@
                     <a:bodyPr/>
                     <a:lstStyle/>
                     <a:p>
-                      <a:pPr algn="l" indent="0" marL="0">
+                      <a:pPr marL="0" indent="0" algn="l">
                         <a:buNone/>
                       </a:pPr>
                       <a:r>
@@ -3291,7 +3094,7 @@
                       </a:endParaRPr>
                     </a:p>
                   </a:txBody>
-                  <a:tcPr marL="91440" marR="91440" marT="45720" marB="45720" anchor="ctr">
+                  <a:tcPr anchor="ctr">
                     <a:lnL w="9525" cap="flat" cmpd="sng" algn="ctr">
                       <a:solidFill>
                         <a:srgbClr val="D9D6CC"/>
@@ -3338,7 +3141,7 @@
                     <a:bodyPr/>
                     <a:lstStyle/>
                     <a:p>
-                      <a:pPr algn="ctr" indent="0" marL="0">
+                      <a:pPr marL="0" indent="0" algn="ctr">
                         <a:buNone/>
                       </a:pPr>
                       <a:endParaRPr lang="en-US" sz="1300" dirty="0">
@@ -3348,7 +3151,7 @@
                       </a:endParaRPr>
                     </a:p>
                   </a:txBody>
-                  <a:tcPr marL="91440" marR="91440" marT="45720" marB="45720" anchor="ctr">
+                  <a:tcPr anchor="ctr">
                     <a:lnL w="9525" cap="flat" cmpd="sng" algn="ctr">
                       <a:solidFill>
                         <a:srgbClr val="D9D6CC"/>
@@ -3395,7 +3198,7 @@
                     <a:bodyPr/>
                     <a:lstStyle/>
                     <a:p>
-                      <a:pPr algn="ctr" indent="0" marL="0">
+                      <a:pPr marL="0" indent="0" algn="ctr">
                         <a:buNone/>
                       </a:pPr>
                       <a:r>
@@ -3416,7 +3219,7 @@
                       </a:endParaRPr>
                     </a:p>
                   </a:txBody>
-                  <a:tcPr marL="91440" marR="91440" marT="45720" marB="45720" anchor="ctr">
+                  <a:tcPr anchor="ctr">
                     <a:lnL w="9525" cap="flat" cmpd="sng" algn="ctr">
                       <a:solidFill>
                         <a:srgbClr val="D9D6CC"/>
@@ -3463,7 +3266,7 @@
                     <a:bodyPr/>
                     <a:lstStyle/>
                     <a:p>
-                      <a:pPr algn="ctr" indent="0" marL="0">
+                      <a:pPr marL="0" indent="0" algn="ctr">
                         <a:buNone/>
                       </a:pPr>
                       <a:endParaRPr lang="en-US" sz="1300" dirty="0">
@@ -3473,7 +3276,7 @@
                       </a:endParaRPr>
                     </a:p>
                   </a:txBody>
-                  <a:tcPr marL="91440" marR="91440" marT="45720" marB="45720" anchor="ctr">
+                  <a:tcPr anchor="ctr">
                     <a:lnL w="9525" cap="flat" cmpd="sng" algn="ctr">
                       <a:solidFill>
                         <a:srgbClr val="D9D6CC"/>
@@ -3520,7 +3323,7 @@
                     <a:bodyPr/>
                     <a:lstStyle/>
                     <a:p>
-                      <a:pPr algn="ctr" indent="0" marL="0">
+                      <a:pPr marL="0" indent="0" algn="ctr">
                         <a:buNone/>
                       </a:pPr>
                       <a:r>
@@ -3541,7 +3344,7 @@
                       </a:endParaRPr>
                     </a:p>
                   </a:txBody>
-                  <a:tcPr marL="91440" marR="91440" marT="45720" marB="45720" anchor="ctr">
+                  <a:tcPr anchor="ctr">
                     <a:lnL w="9525" cap="flat" cmpd="sng" algn="ctr">
                       <a:solidFill>
                         <a:srgbClr val="D9D6CC"/>
@@ -3583,6 +3386,11 @@
                     </a:solidFill>
                   </a:tcPr>
                 </a:tc>
+                <a:extLst>
+                  <a:ext uri="{0D108BD9-81ED-4DB2-BD59-A6C34878D82A}">
+                    <a16:rowId xmlns:a16="http://schemas.microsoft.com/office/drawing/2014/main" val="10003"/>
+                  </a:ext>
+                </a:extLst>
               </a:tr>
             </a:tbl>
           </a:graphicData>
@@ -3609,7 +3417,7 @@
           <a:bodyPr wrap="square" lIns="0" tIns="0" rIns="0" bIns="0" rtlCol="0" anchor="ctr"/>
           <a:lstStyle/>
           <a:p>
-            <a:pPr indent="0" marL="0">
+            <a:pPr marL="0" indent="0">
               <a:lnSpc>
                 <a:spcPct val="115000"/>
               </a:lnSpc>
@@ -3673,7 +3481,7 @@
           <a:bodyPr wrap="square" lIns="0" tIns="0" rIns="0" bIns="0" rtlCol="0" anchor="ctr"/>
           <a:lstStyle/>
           <a:p>
-            <a:pPr indent="0" marL="0">
+            <a:pPr marL="0" indent="0">
               <a:buNone/>
             </a:pPr>
             <a:r>
@@ -3712,7 +3520,7 @@
           <a:bodyPr wrap="square" lIns="0" tIns="0" rIns="0" bIns="0" rtlCol="0" anchor="ctr"/>
           <a:lstStyle/>
           <a:p>
-            <a:pPr indent="0" marL="0">
+            <a:pPr marL="0" indent="0">
               <a:lnSpc>
                 <a:spcPct val="110000"/>
               </a:lnSpc>
@@ -3774,7 +3582,7 @@
           <a:bodyPr wrap="square" lIns="0" tIns="0" rIns="0" bIns="0" rtlCol="0" anchor="ctr"/>
           <a:lstStyle/>
           <a:p>
-            <a:pPr indent="0" marL="0">
+            <a:pPr marL="0" indent="0">
               <a:lnSpc>
                 <a:spcPct val="115000"/>
               </a:lnSpc>
@@ -3797,7 +3605,7 @@
       </p:sp>
       <p:sp>
         <p:nvSpPr>
-          <p:cNvPr id="11" name="Shape 8"/>
+          <p:cNvPr id="4" name="Shape 8"/>
           <p:cNvSpPr/>
           <p:nvPr/>
         </p:nvSpPr>
@@ -3836,7 +3644,7 @@
           <a:bodyPr wrap="square" lIns="0" tIns="0" rIns="0" bIns="0" rtlCol="0" anchor="ctr"/>
           <a:lstStyle/>
           <a:p>
-            <a:pPr indent="0" marL="0">
+            <a:pPr marL="0" indent="0">
               <a:lnSpc>
                 <a:spcPct val="115000"/>
               </a:lnSpc>
@@ -3898,7 +3706,7 @@
           <a:bodyPr wrap="square" lIns="0" tIns="0" rIns="0" bIns="0" rtlCol="0" anchor="ctr"/>
           <a:lstStyle/>
           <a:p>
-            <a:pPr indent="0" marL="0">
+            <a:pPr marL="0" indent="0">
               <a:lnSpc>
                 <a:spcPct val="115000"/>
               </a:lnSpc>
@@ -3940,7 +3748,7 @@
           <a:bodyPr wrap="square" rtlCol="0" anchor="ctr"/>
           <a:lstStyle/>
           <a:p>
-            <a:pPr algn="r" indent="0" marL="0">
+            <a:pPr marL="0" indent="0" algn="r">
               <a:buNone/>
             </a:pPr>
             <a:r>
@@ -3974,6 +3782,7 @@
         <a:solidFill>
           <a:srgbClr val="FFFFFF"/>
         </a:solidFill>
+        <a:effectLst/>
       </p:bgPr>
     </p:bg>
     <p:spTree>
@@ -4011,7 +3820,7 @@
           <a:bodyPr wrap="square" lIns="0" tIns="0" rIns="0" bIns="0" rtlCol="0" anchor="ctr"/>
           <a:lstStyle/>
           <a:p>
-            <a:pPr indent="0" marL="0">
+            <a:pPr marL="0" indent="0">
               <a:buNone/>
             </a:pPr>
             <a:r>
@@ -4072,11 +3881,11 @@
           <a:bodyPr wrap="square" lIns="0" tIns="0" rIns="0" bIns="0" rtlCol="0" anchor="ctr"/>
           <a:lstStyle/>
           <a:p>
-            <a:pPr indent="0" marL="0">
-              <a:buNone/>
-            </a:pPr>
-            <a:r>
-              <a:rPr lang="en-US" sz="1300" b="1" spc="150" kern="0" dirty="0">
+            <a:pPr marL="0" indent="0">
+              <a:buNone/>
+            </a:pPr>
+            <a:r>
+              <a:rPr lang="en-US" sz="1300" b="1" kern="0" spc="150" dirty="0">
                 <a:solidFill>
                   <a:srgbClr val="323C32"/>
                 </a:solidFill>
@@ -4131,7 +3940,7 @@
           <a:bodyPr wrap="square" lIns="0" tIns="0" rIns="0" bIns="0" rtlCol="0" anchor="ctr"/>
           <a:lstStyle/>
           <a:p>
-            <a:pPr algn="ctr" indent="0" marL="0">
+            <a:pPr marL="0" indent="0" algn="ctr">
               <a:buNone/>
             </a:pPr>
             <a:r>
@@ -4170,7 +3979,7 @@
           <a:bodyPr wrap="square" lIns="0" tIns="0" rIns="0" bIns="0" rtlCol="0" anchor="ctr"/>
           <a:lstStyle/>
           <a:p>
-            <a:pPr indent="0" marL="0">
+            <a:pPr marL="0" indent="0">
               <a:lnSpc>
                 <a:spcPct val="115000"/>
               </a:lnSpc>
@@ -4232,7 +4041,7 @@
           <a:bodyPr wrap="square" lIns="0" tIns="0" rIns="0" bIns="0" rtlCol="0" anchor="ctr"/>
           <a:lstStyle/>
           <a:p>
-            <a:pPr algn="ctr" indent="0" marL="0">
+            <a:pPr marL="0" indent="0" algn="ctr">
               <a:buNone/>
             </a:pPr>
             <a:r>
@@ -4271,7 +4080,7 @@
           <a:bodyPr wrap="square" lIns="0" tIns="0" rIns="0" bIns="0" rtlCol="0" anchor="ctr"/>
           <a:lstStyle/>
           <a:p>
-            <a:pPr indent="0" marL="0">
+            <a:pPr marL="0" indent="0">
               <a:lnSpc>
                 <a:spcPct val="115000"/>
               </a:lnSpc>
@@ -4333,7 +4142,7 @@
           <a:bodyPr wrap="square" lIns="0" tIns="0" rIns="0" bIns="0" rtlCol="0" anchor="ctr"/>
           <a:lstStyle/>
           <a:p>
-            <a:pPr algn="ctr" indent="0" marL="0">
+            <a:pPr marL="0" indent="0" algn="ctr">
               <a:buNone/>
             </a:pPr>
             <a:r>
@@ -4372,7 +4181,7 @@
           <a:bodyPr wrap="square" lIns="0" tIns="0" rIns="0" bIns="0" rtlCol="0" anchor="ctr"/>
           <a:lstStyle/>
           <a:p>
-            <a:pPr indent="0" marL="0">
+            <a:pPr marL="0" indent="0">
               <a:lnSpc>
                 <a:spcPct val="115000"/>
               </a:lnSpc>
@@ -4434,7 +4243,7 @@
           <a:bodyPr wrap="square" lIns="0" tIns="0" rIns="0" bIns="0" rtlCol="0" anchor="ctr"/>
           <a:lstStyle/>
           <a:p>
-            <a:pPr algn="ctr" indent="0" marL="0">
+            <a:pPr marL="0" indent="0" algn="ctr">
               <a:buNone/>
             </a:pPr>
             <a:r>
@@ -4473,7 +4282,7 @@
           <a:bodyPr wrap="square" lIns="0" tIns="0" rIns="0" bIns="0" rtlCol="0" anchor="ctr"/>
           <a:lstStyle/>
           <a:p>
-            <a:pPr indent="0" marL="0">
+            <a:pPr marL="0" indent="0">
               <a:lnSpc>
                 <a:spcPct val="115000"/>
               </a:lnSpc>
@@ -4537,11 +4346,11 @@
           <a:bodyPr wrap="square" lIns="0" tIns="0" rIns="0" bIns="0" rtlCol="0" anchor="ctr"/>
           <a:lstStyle/>
           <a:p>
-            <a:pPr indent="0" marL="0">
-              <a:buNone/>
-            </a:pPr>
-            <a:r>
-              <a:rPr lang="en-US" sz="1300" b="1" spc="150" kern="0" dirty="0">
+            <a:pPr marL="0" indent="0">
+              <a:buNone/>
+            </a:pPr>
+            <a:r>
+              <a:rPr lang="en-US" sz="1300" b="1" kern="0" spc="150" dirty="0">
                 <a:solidFill>
                   <a:srgbClr val="C5C9A6"/>
                 </a:solidFill>
@@ -4596,7 +4405,7 @@
           <a:bodyPr wrap="square" lIns="0" tIns="0" rIns="0" bIns="0" rtlCol="0" anchor="ctr"/>
           <a:lstStyle/>
           <a:p>
-            <a:pPr indent="0" marL="0">
+            <a:pPr marL="0" indent="0">
               <a:lnSpc>
                 <a:spcPct val="115000"/>
               </a:lnSpc>
@@ -4658,7 +4467,7 @@
           <a:bodyPr wrap="square" lIns="0" tIns="0" rIns="0" bIns="0" rtlCol="0" anchor="ctr"/>
           <a:lstStyle/>
           <a:p>
-            <a:pPr indent="0" marL="0">
+            <a:pPr marL="0" indent="0">
               <a:lnSpc>
                 <a:spcPct val="115000"/>
               </a:lnSpc>
@@ -4720,7 +4529,7 @@
           <a:bodyPr wrap="square" lIns="0" tIns="0" rIns="0" bIns="0" rtlCol="0" anchor="ctr"/>
           <a:lstStyle/>
           <a:p>
-            <a:pPr indent="0" marL="0">
+            <a:pPr marL="0" indent="0">
               <a:lnSpc>
                 <a:spcPct val="115000"/>
               </a:lnSpc>
@@ -4782,7 +4591,7 @@
           <a:bodyPr wrap="square" lIns="0" tIns="0" rIns="0" bIns="0" rtlCol="0" anchor="ctr"/>
           <a:lstStyle/>
           <a:p>
-            <a:pPr indent="0" marL="0">
+            <a:pPr marL="0" indent="0">
               <a:lnSpc>
                 <a:spcPct val="115000"/>
               </a:lnSpc>
@@ -4824,7 +4633,7 @@
           <a:bodyPr wrap="square" rtlCol="0" anchor="ctr"/>
           <a:lstStyle/>
           <a:p>
-            <a:pPr algn="r" indent="0" marL="0">
+            <a:pPr marL="0" indent="0" algn="r">
               <a:buNone/>
             </a:pPr>
             <a:r>
@@ -4858,6 +4667,7 @@
         <a:solidFill>
           <a:srgbClr val="323C32"/>
         </a:solidFill>
+        <a:effectLst/>
       </p:bgPr>
     </p:bg>
     <p:spTree>
@@ -5015,7 +4825,7 @@
           <a:bodyPr wrap="square" lIns="0" tIns="0" rIns="0" bIns="0" rtlCol="0" anchor="ctr"/>
           <a:lstStyle/>
           <a:p>
-            <a:pPr indent="0" marL="0">
+            <a:pPr marL="0" indent="0">
               <a:buNone/>
             </a:pPr>
             <a:r>
@@ -5054,7 +4864,7 @@
           <a:bodyPr wrap="square" lIns="0" tIns="0" rIns="0" bIns="0" rtlCol="0" anchor="ctr"/>
           <a:lstStyle/>
           <a:p>
-            <a:pPr indent="0" marL="0">
+            <a:pPr marL="0" indent="0">
               <a:buNone/>
             </a:pPr>
             <a:r>
@@ -5116,7 +4926,7 @@
           <a:bodyPr wrap="square" lIns="0" tIns="0" rIns="0" bIns="0" rtlCol="0" anchor="ctr"/>
           <a:lstStyle/>
           <a:p>
-            <a:pPr indent="0" marL="0">
+            <a:pPr marL="0" indent="0">
               <a:buNone/>
             </a:pPr>
             <a:r>
@@ -5150,6 +4960,7 @@
         <a:solidFill>
           <a:srgbClr val="FFFFFF"/>
         </a:solidFill>
+        <a:effectLst/>
       </p:bgPr>
     </p:bg>
     <p:spTree>
@@ -5187,7 +4998,7 @@
           <a:bodyPr wrap="square" lIns="0" tIns="0" rIns="0" bIns="0" rtlCol="0" anchor="ctr"/>
           <a:lstStyle/>
           <a:p>
-            <a:pPr indent="0" marL="0">
+            <a:pPr marL="0" indent="0">
               <a:buNone/>
             </a:pPr>
             <a:r>
@@ -5226,7 +5037,7 @@
           <a:bodyPr wrap="square" lIns="0" tIns="0" rIns="0" bIns="0" rtlCol="0" anchor="ctr"/>
           <a:lstStyle/>
           <a:p>
-            <a:pPr indent="0" marL="0">
+            <a:pPr marL="0" indent="0">
               <a:buNone/>
             </a:pPr>
             <a:r>
@@ -5307,7 +5118,7 @@
           <a:bodyPr wrap="square" lIns="0" tIns="0" rIns="0" bIns="0" rtlCol="0" anchor="ctr"/>
           <a:lstStyle/>
           <a:p>
-            <a:pPr algn="ctr" indent="0" marL="0">
+            <a:pPr marL="0" indent="0" algn="ctr">
               <a:buNone/>
             </a:pPr>
             <a:r>
@@ -5346,7 +5157,7 @@
           <a:bodyPr wrap="square" lIns="0" tIns="0" rIns="0" bIns="0" rtlCol="0" anchor="ctr"/>
           <a:lstStyle/>
           <a:p>
-            <a:pPr indent="0" marL="0">
+            <a:pPr marL="0" indent="0">
               <a:buNone/>
             </a:pPr>
             <a:r>
@@ -5385,11 +5196,11 @@
           <a:bodyPr wrap="square" lIns="0" tIns="0" rIns="0" bIns="0" rtlCol="0" anchor="ctr"/>
           <a:lstStyle/>
           <a:p>
-            <a:pPr indent="0" marL="0">
-              <a:buNone/>
-            </a:pPr>
-            <a:r>
-              <a:rPr lang="en-US" sz="1100" spc="100" kern="0" dirty="0">
+            <a:pPr marL="0" indent="0">
+              <a:buNone/>
+            </a:pPr>
+            <a:r>
+              <a:rPr lang="en-US" sz="1100" kern="0" spc="100" dirty="0">
                 <a:solidFill>
                   <a:srgbClr val="B61B3B"/>
                 </a:solidFill>
@@ -5424,7 +5235,7 @@
           <a:bodyPr wrap="square" lIns="0" tIns="0" rIns="0" bIns="0" rtlCol="0" anchor="t"/>
           <a:lstStyle/>
           <a:p>
-            <a:pPr indent="0" marL="0">
+            <a:pPr marL="0" indent="0">
               <a:lnSpc>
                 <a:spcPct val="125000"/>
               </a:lnSpc>
@@ -5508,7 +5319,7 @@
           <a:bodyPr wrap="square" lIns="0" tIns="0" rIns="0" bIns="0" rtlCol="0" anchor="ctr"/>
           <a:lstStyle/>
           <a:p>
-            <a:pPr algn="ctr" indent="0" marL="0">
+            <a:pPr marL="0" indent="0" algn="ctr">
               <a:buNone/>
             </a:pPr>
             <a:r>
@@ -5547,7 +5358,7 @@
           <a:bodyPr wrap="square" lIns="0" tIns="0" rIns="0" bIns="0" rtlCol="0" anchor="ctr"/>
           <a:lstStyle/>
           <a:p>
-            <a:pPr indent="0" marL="0">
+            <a:pPr marL="0" indent="0">
               <a:buNone/>
             </a:pPr>
             <a:r>
@@ -5586,11 +5397,11 @@
           <a:bodyPr wrap="square" lIns="0" tIns="0" rIns="0" bIns="0" rtlCol="0" anchor="ctr"/>
           <a:lstStyle/>
           <a:p>
-            <a:pPr indent="0" marL="0">
-              <a:buNone/>
-            </a:pPr>
-            <a:r>
-              <a:rPr lang="en-US" sz="1100" spc="100" kern="0" dirty="0">
+            <a:pPr marL="0" indent="0">
+              <a:buNone/>
+            </a:pPr>
+            <a:r>
+              <a:rPr lang="en-US" sz="1100" kern="0" spc="100" dirty="0">
                 <a:solidFill>
                   <a:srgbClr val="323C32"/>
                 </a:solidFill>
@@ -5625,7 +5436,7 @@
           <a:bodyPr wrap="square" lIns="0" tIns="0" rIns="0" bIns="0" rtlCol="0" anchor="t"/>
           <a:lstStyle/>
           <a:p>
-            <a:pPr indent="0" marL="0">
+            <a:pPr marL="0" indent="0">
               <a:lnSpc>
                 <a:spcPct val="125000"/>
               </a:lnSpc>
@@ -5667,7 +5478,7 @@
           <a:bodyPr wrap="square" lIns="0" tIns="0" rIns="0" bIns="0" rtlCol="0" anchor="ctr"/>
           <a:lstStyle/>
           <a:p>
-            <a:pPr indent="0" marL="0">
+            <a:pPr marL="0" indent="0">
               <a:buNone/>
             </a:pPr>
             <a:r>
@@ -5706,7 +5517,7 @@
           <a:bodyPr wrap="square" rtlCol="0" anchor="ctr"/>
           <a:lstStyle/>
           <a:p>
-            <a:pPr algn="r" indent="0" marL="0">
+            <a:pPr marL="0" indent="0" algn="r">
               <a:buNone/>
             </a:pPr>
             <a:r>
@@ -5740,6 +5551,7 @@
         <a:solidFill>
           <a:srgbClr val="FFFFFF"/>
         </a:solidFill>
+        <a:effectLst/>
       </p:bgPr>
     </p:bg>
     <p:spTree>
@@ -5777,7 +5589,7 @@
           <a:bodyPr wrap="square" lIns="0" tIns="0" rIns="0" bIns="0" rtlCol="0" anchor="ctr"/>
           <a:lstStyle/>
           <a:p>
-            <a:pPr indent="0" marL="0">
+            <a:pPr marL="0" indent="0">
               <a:buNone/>
             </a:pPr>
             <a:r>
@@ -5858,7 +5670,7 @@
           <a:bodyPr wrap="square" lIns="0" tIns="0" rIns="0" bIns="0" rtlCol="0" anchor="ctr"/>
           <a:lstStyle/>
           <a:p>
-            <a:pPr algn="ctr" indent="0" marL="0">
+            <a:pPr marL="0" indent="0" algn="ctr">
               <a:buNone/>
             </a:pPr>
             <a:r>
@@ -5897,7 +5709,7 @@
           <a:bodyPr wrap="square" lIns="0" tIns="0" rIns="0" bIns="0" rtlCol="0" anchor="ctr"/>
           <a:lstStyle/>
           <a:p>
-            <a:pPr indent="0" marL="0">
+            <a:pPr marL="0" indent="0">
               <a:buNone/>
             </a:pPr>
             <a:r>
@@ -5936,7 +5748,7 @@
           <a:bodyPr wrap="square" lIns="0" tIns="0" rIns="0" bIns="0" rtlCol="0" anchor="ctr"/>
           <a:lstStyle/>
           <a:p>
-            <a:pPr indent="0" marL="0">
+            <a:pPr marL="0" indent="0">
               <a:buNone/>
             </a:pPr>
             <a:r>
@@ -6017,7 +5829,7 @@
           <a:bodyPr wrap="square" lIns="0" tIns="0" rIns="0" bIns="0" rtlCol="0" anchor="ctr"/>
           <a:lstStyle/>
           <a:p>
-            <a:pPr algn="ctr" indent="0" marL="0">
+            <a:pPr marL="0" indent="0" algn="ctr">
               <a:buNone/>
             </a:pPr>
             <a:r>
@@ -6056,7 +5868,7 @@
           <a:bodyPr wrap="square" lIns="0" tIns="0" rIns="0" bIns="0" rtlCol="0" anchor="ctr"/>
           <a:lstStyle/>
           <a:p>
-            <a:pPr indent="0" marL="0">
+            <a:pPr marL="0" indent="0">
               <a:buNone/>
             </a:pPr>
             <a:r>
@@ -6095,7 +5907,7 @@
           <a:bodyPr wrap="square" lIns="0" tIns="0" rIns="0" bIns="0" rtlCol="0" anchor="ctr"/>
           <a:lstStyle/>
           <a:p>
-            <a:pPr indent="0" marL="0">
+            <a:pPr marL="0" indent="0">
               <a:buNone/>
             </a:pPr>
             <a:r>
@@ -6176,7 +5988,7 @@
           <a:bodyPr wrap="square" lIns="0" tIns="0" rIns="0" bIns="0" rtlCol="0" anchor="ctr"/>
           <a:lstStyle/>
           <a:p>
-            <a:pPr algn="ctr" indent="0" marL="0">
+            <a:pPr marL="0" indent="0" algn="ctr">
               <a:buNone/>
             </a:pPr>
             <a:r>
@@ -6215,7 +6027,7 @@
           <a:bodyPr wrap="square" lIns="0" tIns="0" rIns="0" bIns="0" rtlCol="0" anchor="ctr"/>
           <a:lstStyle/>
           <a:p>
-            <a:pPr indent="0" marL="0">
+            <a:pPr marL="0" indent="0">
               <a:buNone/>
             </a:pPr>
             <a:r>
@@ -6254,7 +6066,7 @@
           <a:bodyPr wrap="square" lIns="0" tIns="0" rIns="0" bIns="0" rtlCol="0" anchor="ctr"/>
           <a:lstStyle/>
           <a:p>
-            <a:pPr indent="0" marL="0">
+            <a:pPr marL="0" indent="0">
               <a:buNone/>
             </a:pPr>
             <a:r>
@@ -6335,7 +6147,7 @@
           <a:bodyPr wrap="square" lIns="0" tIns="0" rIns="0" bIns="0" rtlCol="0" anchor="ctr"/>
           <a:lstStyle/>
           <a:p>
-            <a:pPr algn="ctr" indent="0" marL="0">
+            <a:pPr marL="0" indent="0" algn="ctr">
               <a:buNone/>
             </a:pPr>
             <a:r>
@@ -6374,7 +6186,7 @@
           <a:bodyPr wrap="square" lIns="0" tIns="0" rIns="0" bIns="0" rtlCol="0" anchor="ctr"/>
           <a:lstStyle/>
           <a:p>
-            <a:pPr indent="0" marL="0">
+            <a:pPr marL="0" indent="0">
               <a:buNone/>
             </a:pPr>
             <a:r>
@@ -6413,7 +6225,7 @@
           <a:bodyPr wrap="square" lIns="0" tIns="0" rIns="0" bIns="0" rtlCol="0" anchor="ctr"/>
           <a:lstStyle/>
           <a:p>
-            <a:pPr indent="0" marL="0">
+            <a:pPr marL="0" indent="0">
               <a:buNone/>
             </a:pPr>
             <a:r>
@@ -6452,7 +6264,7 @@
           <a:bodyPr wrap="square" rtlCol="0" anchor="ctr"/>
           <a:lstStyle/>
           <a:p>
-            <a:pPr algn="r" indent="0" marL="0">
+            <a:pPr marL="0" indent="0" algn="r">
               <a:buNone/>
             </a:pPr>
             <a:r>
@@ -6486,6 +6298,7 @@
         <a:solidFill>
           <a:srgbClr val="FFFFFF"/>
         </a:solidFill>
+        <a:effectLst/>
       </p:bgPr>
     </p:bg>
     <p:spTree>
@@ -6523,7 +6336,7 @@
           <a:bodyPr wrap="square" lIns="0" tIns="0" rIns="0" bIns="0" rtlCol="0" anchor="ctr"/>
           <a:lstStyle/>
           <a:p>
-            <a:pPr indent="0" marL="0">
+            <a:pPr marL="0" indent="0">
               <a:buNone/>
             </a:pPr>
             <a:r>
@@ -6562,7 +6375,7 @@
           <a:bodyPr wrap="square" lIns="0" tIns="0" rIns="0" bIns="0" rtlCol="0" anchor="ctr"/>
           <a:lstStyle/>
           <a:p>
-            <a:pPr indent="0" marL="0">
+            <a:pPr marL="0" indent="0">
               <a:buNone/>
             </a:pPr>
             <a:r>
@@ -6601,7 +6414,7 @@
           <a:bodyPr wrap="square" lIns="0" tIns="0" rIns="0" bIns="0" rtlCol="0" anchor="ctr"/>
           <a:lstStyle/>
           <a:p>
-            <a:pPr indent="0" marL="0">
+            <a:pPr marL="0" indent="0">
               <a:buNone/>
             </a:pPr>
             <a:r>
@@ -6640,7 +6453,7 @@
           <a:bodyPr wrap="square" lIns="0" tIns="0" rIns="0" bIns="0" rtlCol="0" anchor="ctr"/>
           <a:lstStyle/>
           <a:p>
-            <a:pPr indent="0" marL="0">
+            <a:pPr marL="0" indent="0">
               <a:buNone/>
             </a:pPr>
             <a:r>
@@ -6679,7 +6492,7 @@
           <a:bodyPr wrap="square" lIns="0" tIns="0" rIns="0" bIns="0" rtlCol="0" anchor="ctr"/>
           <a:lstStyle/>
           <a:p>
-            <a:pPr indent="0" marL="0">
+            <a:pPr marL="0" indent="0">
               <a:buNone/>
             </a:pPr>
             <a:r>
@@ -6718,7 +6531,7 @@
           <a:bodyPr wrap="square" lIns="0" tIns="0" rIns="0" bIns="0" rtlCol="0" anchor="ctr"/>
           <a:lstStyle/>
           <a:p>
-            <a:pPr indent="0" marL="0">
+            <a:pPr marL="0" indent="0">
               <a:buNone/>
             </a:pPr>
             <a:r>
@@ -6757,7 +6570,7 @@
           <a:bodyPr wrap="square" lIns="0" tIns="0" rIns="0" bIns="0" rtlCol="0" anchor="ctr"/>
           <a:lstStyle/>
           <a:p>
-            <a:pPr indent="0" marL="0">
+            <a:pPr marL="0" indent="0">
               <a:buNone/>
             </a:pPr>
             <a:r>
@@ -6839,7 +6652,7 @@
           <a:bodyPr wrap="square" lIns="0" tIns="0" rIns="0" bIns="0" rtlCol="0" anchor="ctr"/>
           <a:lstStyle/>
           <a:p>
-            <a:pPr algn="ctr" indent="0" marL="0">
+            <a:pPr marL="0" indent="0" algn="ctr">
               <a:buNone/>
             </a:pPr>
             <a:r>
@@ -6878,7 +6691,7 @@
           <a:bodyPr wrap="square" lIns="0" tIns="0" rIns="0" bIns="0" rtlCol="0" anchor="ctr"/>
           <a:lstStyle/>
           <a:p>
-            <a:pPr indent="0" marL="0">
+            <a:pPr marL="0" indent="0">
               <a:buNone/>
             </a:pPr>
             <a:r>
@@ -6917,7 +6730,7 @@
           <a:bodyPr wrap="square" lIns="0" tIns="0" rIns="0" bIns="0" rtlCol="0" anchor="ctr"/>
           <a:lstStyle/>
           <a:p>
-            <a:pPr indent="0" marL="0">
+            <a:pPr marL="0" indent="0">
               <a:lnSpc>
                 <a:spcPct val="115000"/>
               </a:lnSpc>
@@ -6979,7 +6792,7 @@
           <a:bodyPr wrap="square" lIns="0" tIns="0" rIns="0" bIns="0" rtlCol="0" anchor="ctr"/>
           <a:lstStyle/>
           <a:p>
-            <a:pPr algn="ctr" indent="0" marL="0">
+            <a:pPr marL="0" indent="0" algn="ctr">
               <a:buNone/>
             </a:pPr>
             <a:r>
@@ -7018,7 +6831,7 @@
           <a:bodyPr wrap="square" lIns="0" tIns="0" rIns="0" bIns="0" rtlCol="0" anchor="ctr"/>
           <a:lstStyle/>
           <a:p>
-            <a:pPr indent="0" marL="0">
+            <a:pPr marL="0" indent="0">
               <a:buNone/>
             </a:pPr>
             <a:r>
@@ -7057,7 +6870,7 @@
           <a:bodyPr wrap="square" lIns="0" tIns="0" rIns="0" bIns="0" rtlCol="0" anchor="ctr"/>
           <a:lstStyle/>
           <a:p>
-            <a:pPr indent="0" marL="0">
+            <a:pPr marL="0" indent="0">
               <a:lnSpc>
                 <a:spcPct val="115000"/>
               </a:lnSpc>
@@ -7119,7 +6932,7 @@
           <a:bodyPr wrap="square" lIns="0" tIns="0" rIns="0" bIns="0" rtlCol="0" anchor="ctr"/>
           <a:lstStyle/>
           <a:p>
-            <a:pPr algn="ctr" indent="0" marL="0">
+            <a:pPr marL="0" indent="0" algn="ctr">
               <a:buNone/>
             </a:pPr>
             <a:r>
@@ -7158,7 +6971,7 @@
           <a:bodyPr wrap="square" lIns="0" tIns="0" rIns="0" bIns="0" rtlCol="0" anchor="ctr"/>
           <a:lstStyle/>
           <a:p>
-            <a:pPr indent="0" marL="0">
+            <a:pPr marL="0" indent="0">
               <a:buNone/>
             </a:pPr>
             <a:r>
@@ -7197,7 +7010,7 @@
           <a:bodyPr wrap="square" lIns="0" tIns="0" rIns="0" bIns="0" rtlCol="0" anchor="ctr"/>
           <a:lstStyle/>
           <a:p>
-            <a:pPr indent="0" marL="0">
+            <a:pPr marL="0" indent="0">
               <a:lnSpc>
                 <a:spcPct val="115000"/>
               </a:lnSpc>
@@ -7239,7 +7052,7 @@
           <a:bodyPr wrap="square" rtlCol="0" anchor="ctr"/>
           <a:lstStyle/>
           <a:p>
-            <a:pPr algn="r" indent="0" marL="0">
+            <a:pPr marL="0" indent="0" algn="r">
               <a:buNone/>
             </a:pPr>
             <a:r>
@@ -7273,6 +7086,7 @@
         <a:solidFill>
           <a:srgbClr val="FFFFFF"/>
         </a:solidFill>
+        <a:effectLst/>
       </p:bgPr>
     </p:bg>
     <p:spTree>
@@ -7310,7 +7124,7 @@
           <a:bodyPr wrap="square" lIns="0" tIns="0" rIns="0" bIns="0" rtlCol="0" anchor="ctr"/>
           <a:lstStyle/>
           <a:p>
-            <a:pPr indent="0" marL="0">
+            <a:pPr marL="0" indent="0">
               <a:buNone/>
             </a:pPr>
             <a:r>
@@ -7330,14 +7144,14 @@
       </p:sp>
       <p:pic>
         <p:nvPicPr>
-          <p:cNvPr id="3" name="Image 0" descr="02_weekly_dynamics_nb.png">    </p:cNvPr>
+          <p:cNvPr id="3" name="Image 0" descr="02_weekly_dynamics_nb.png"/>
           <p:cNvPicPr>
             <a:picLocks noChangeAspect="1"/>
           </p:cNvPicPr>
           <p:nvPr/>
         </p:nvPicPr>
         <p:blipFill>
-          <a:blip r:embed="rId1"/>
+          <a:blip r:embed="rId3"/>
           <a:stretch>
             <a:fillRect/>
           </a:stretch>
@@ -7354,14 +7168,14 @@
       </p:pic>
       <p:pic>
         <p:nvPicPr>
-          <p:cNvPr id="4" name="Image 1" descr="05_abc_xyz_matrix.png">    </p:cNvPr>
+          <p:cNvPr id="4" name="Image 1" descr="05_abc_xyz_matrix.png"/>
           <p:cNvPicPr>
             <a:picLocks noChangeAspect="1"/>
           </p:cNvPicPr>
           <p:nvPr/>
         </p:nvPicPr>
         <p:blipFill>
-          <a:blip r:embed="rId2"/>
+          <a:blip r:embed="rId4"/>
           <a:stretch>
             <a:fillRect/>
           </a:stretch>
@@ -7397,7 +7211,7 @@
           <a:bodyPr wrap="square" lIns="0" tIns="0" rIns="0" bIns="0" rtlCol="0" anchor="ctr"/>
           <a:lstStyle/>
           <a:p>
-            <a:pPr indent="0" marL="0">
+            <a:pPr marL="0" indent="0">
               <a:buNone/>
             </a:pPr>
             <a:r>
@@ -7436,7 +7250,7 @@
           <a:bodyPr wrap="square" lIns="0" tIns="0" rIns="0" bIns="0" rtlCol="0" anchor="ctr"/>
           <a:lstStyle/>
           <a:p>
-            <a:pPr indent="0" marL="0">
+            <a:pPr marL="0" indent="0">
               <a:buNone/>
             </a:pPr>
             <a:r>
@@ -7475,7 +7289,7 @@
           <a:bodyPr wrap="square" lIns="0" tIns="0" rIns="0" bIns="0" rtlCol="0" anchor="ctr"/>
           <a:lstStyle/>
           <a:p>
-            <a:pPr indent="0" marL="0">
+            <a:pPr marL="0" indent="0">
               <a:buNone/>
             </a:pPr>
             <a:r>
@@ -7514,7 +7328,7 @@
           <a:bodyPr wrap="square" rtlCol="0" anchor="ctr"/>
           <a:lstStyle/>
           <a:p>
-            <a:pPr algn="r" indent="0" marL="0">
+            <a:pPr marL="0" indent="0" algn="r">
               <a:buNone/>
             </a:pPr>
             <a:r>
@@ -7548,6 +7362,7 @@
         <a:solidFill>
           <a:srgbClr val="FFFFFF"/>
         </a:solidFill>
+        <a:effectLst/>
       </p:bgPr>
     </p:bg>
     <p:spTree>
@@ -7585,7 +7400,7 @@
           <a:bodyPr wrap="square" lIns="0" tIns="0" rIns="0" bIns="0" rtlCol="0" anchor="ctr"/>
           <a:lstStyle/>
           <a:p>
-            <a:pPr indent="0" marL="0">
+            <a:pPr marL="0" indent="0">
               <a:buNone/>
             </a:pPr>
             <a:r>
@@ -7646,7 +7461,7 @@
           <a:bodyPr wrap="square" lIns="0" tIns="0" rIns="0" bIns="0" rtlCol="0" anchor="ctr"/>
           <a:lstStyle/>
           <a:p>
-            <a:pPr indent="0" marL="0">
+            <a:pPr marL="0" indent="0">
               <a:buNone/>
             </a:pPr>
             <a:r>
@@ -7685,7 +7500,7 @@
           <a:bodyPr wrap="square" lIns="0" tIns="0" rIns="0" bIns="0" rtlCol="0" anchor="ctr"/>
           <a:lstStyle/>
           <a:p>
-            <a:pPr indent="0" marL="0">
+            <a:pPr marL="0" indent="0">
               <a:buNone/>
             </a:pPr>
             <a:r>
@@ -7724,7 +7539,7 @@
           <a:bodyPr wrap="square" lIns="0" tIns="0" rIns="0" bIns="0" rtlCol="0" anchor="ctr"/>
           <a:lstStyle/>
           <a:p>
-            <a:pPr indent="0" marL="0">
+            <a:pPr marL="0" indent="0">
               <a:lnSpc>
                 <a:spcPct val="115000"/>
               </a:lnSpc>
@@ -7788,7 +7603,7 @@
           <a:bodyPr wrap="square" lIns="0" tIns="0" rIns="0" bIns="0" rtlCol="0" anchor="ctr"/>
           <a:lstStyle/>
           <a:p>
-            <a:pPr indent="0" marL="0">
+            <a:pPr marL="0" indent="0">
               <a:buNone/>
             </a:pPr>
             <a:r>
@@ -7827,7 +7642,7 @@
           <a:bodyPr wrap="square" lIns="0" tIns="0" rIns="0" bIns="0" rtlCol="0" anchor="ctr"/>
           <a:lstStyle/>
           <a:p>
-            <a:pPr indent="0" marL="0">
+            <a:pPr marL="0" indent="0">
               <a:buNone/>
             </a:pPr>
             <a:r>
@@ -7866,7 +7681,7 @@
           <a:bodyPr wrap="square" lIns="0" tIns="0" rIns="0" bIns="0" rtlCol="0" anchor="ctr"/>
           <a:lstStyle/>
           <a:p>
-            <a:pPr indent="0" marL="0">
+            <a:pPr marL="0" indent="0">
               <a:lnSpc>
                 <a:spcPct val="115000"/>
               </a:lnSpc>
@@ -7889,14 +7704,14 @@
       </p:sp>
       <p:pic>
         <p:nvPicPr>
-          <p:cNvPr id="11" name="Image 0" descr="04_stockout_by_cluster.png">    </p:cNvPr>
+          <p:cNvPr id="11" name="Image 0" descr="04_stockout_by_cluster.png"/>
           <p:cNvPicPr>
             <a:picLocks noChangeAspect="1"/>
           </p:cNvPicPr>
           <p:nvPr/>
         </p:nvPicPr>
         <p:blipFill>
-          <a:blip r:embed="rId1"/>
+          <a:blip r:embed="rId3"/>
           <a:stretch>
             <a:fillRect/>
           </a:stretch>
@@ -7932,7 +7747,7 @@
           <a:bodyPr wrap="square" rtlCol="0" anchor="ctr"/>
           <a:lstStyle/>
           <a:p>
-            <a:pPr algn="r" indent="0" marL="0">
+            <a:pPr marL="0" indent="0" algn="r">
               <a:buNone/>
             </a:pPr>
             <a:r>
@@ -7966,6 +7781,7 @@
         <a:solidFill>
           <a:srgbClr val="FFFFFF"/>
         </a:solidFill>
+        <a:effectLst/>
       </p:bgPr>
     </p:bg>
     <p:spTree>
@@ -8003,7 +7819,7 @@
           <a:bodyPr wrap="square" lIns="0" tIns="0" rIns="0" bIns="0" rtlCol="0" anchor="ctr"/>
           <a:lstStyle/>
           <a:p>
-            <a:pPr indent="0" marL="0">
+            <a:pPr marL="0" indent="0">
               <a:buNone/>
             </a:pPr>
             <a:r>
@@ -8042,7 +7858,7 @@
           <a:bodyPr wrap="square" lIns="0" tIns="0" rIns="0" bIns="0" rtlCol="0" anchor="ctr"/>
           <a:lstStyle/>
           <a:p>
-            <a:pPr indent="0" marL="0">
+            <a:pPr marL="0" indent="0">
               <a:buNone/>
             </a:pPr>
             <a:r>
@@ -8123,11 +7939,11 @@
           <a:bodyPr wrap="square" lIns="0" tIns="0" rIns="0" bIns="0" rtlCol="0" anchor="ctr"/>
           <a:lstStyle/>
           <a:p>
-            <a:pPr indent="0" marL="0">
-              <a:buNone/>
-            </a:pPr>
-            <a:r>
-              <a:rPr lang="en-US" sz="1000" b="1" spc="150" kern="0" dirty="0">
+            <a:pPr marL="0" indent="0">
+              <a:buNone/>
+            </a:pPr>
+            <a:r>
+              <a:rPr lang="en-US" sz="1000" b="1" kern="0" spc="150" dirty="0">
                 <a:solidFill>
                   <a:srgbClr val="E4E2D3"/>
                 </a:solidFill>
@@ -8162,7 +7978,7 @@
           <a:bodyPr wrap="square" lIns="0" tIns="0" rIns="0" bIns="0" rtlCol="0" anchor="ctr"/>
           <a:lstStyle/>
           <a:p>
-            <a:pPr indent="0" marL="0">
+            <a:pPr marL="0" indent="0">
               <a:buNone/>
             </a:pPr>
             <a:r>
@@ -8201,7 +8017,7 @@
           <a:bodyPr wrap="square" lIns="0" tIns="0" rIns="0" bIns="0" rtlCol="0" anchor="ctr"/>
           <a:lstStyle/>
           <a:p>
-            <a:pPr indent="0" marL="0">
+            <a:pPr marL="0" indent="0">
               <a:buNone/>
             </a:pPr>
             <a:r>
@@ -8240,7 +8056,7 @@
           <a:bodyPr wrap="square" lIns="0" tIns="0" rIns="0" bIns="0" rtlCol="0" anchor="ctr"/>
           <a:lstStyle/>
           <a:p>
-            <a:pPr indent="0" marL="0">
+            <a:pPr marL="0" indent="0">
               <a:buNone/>
             </a:pPr>
             <a:r>
@@ -8279,7 +8095,7 @@
           <a:bodyPr wrap="square" lIns="0" tIns="0" rIns="0" bIns="0" rtlCol="0" anchor="ctr"/>
           <a:lstStyle/>
           <a:p>
-            <a:pPr indent="0" marL="0">
+            <a:pPr marL="0" indent="0">
               <a:buNone/>
             </a:pPr>
             <a:r>
@@ -8318,7 +8134,7 @@
           <a:bodyPr wrap="square" lIns="0" tIns="0" rIns="0" bIns="0" rtlCol="0" anchor="ctr"/>
           <a:lstStyle/>
           <a:p>
-            <a:pPr indent="0" marL="0">
+            <a:pPr marL="0" indent="0">
               <a:buNone/>
             </a:pPr>
             <a:r>
@@ -8357,7 +8173,7 @@
           <a:bodyPr wrap="square" lIns="0" tIns="0" rIns="0" bIns="0" rtlCol="0" anchor="ctr"/>
           <a:lstStyle/>
           <a:p>
-            <a:pPr indent="0" marL="0">
+            <a:pPr marL="0" indent="0">
               <a:buNone/>
             </a:pPr>
             <a:r>
@@ -8396,7 +8212,7 @@
           <a:bodyPr wrap="square" lIns="0" tIns="0" rIns="0" bIns="0" rtlCol="0" anchor="ctr"/>
           <a:lstStyle/>
           <a:p>
-            <a:pPr indent="0" marL="0">
+            <a:pPr marL="0" indent="0">
               <a:buNone/>
             </a:pPr>
             <a:r>
@@ -8435,7 +8251,7 @@
           <a:bodyPr wrap="square" lIns="0" tIns="0" rIns="0" bIns="0" rtlCol="0" anchor="ctr"/>
           <a:lstStyle/>
           <a:p>
-            <a:pPr indent="0" marL="0">
+            <a:pPr marL="0" indent="0">
               <a:buNone/>
             </a:pPr>
             <a:r>
@@ -8474,7 +8290,7 @@
           <a:bodyPr wrap="square" lIns="0" tIns="0" rIns="0" bIns="0" rtlCol="0" anchor="ctr"/>
           <a:lstStyle/>
           <a:p>
-            <a:pPr indent="0" marL="0">
+            <a:pPr marL="0" indent="0">
               <a:buNone/>
             </a:pPr>
             <a:r>
@@ -8555,11 +8371,11 @@
           <a:bodyPr wrap="square" lIns="0" tIns="0" rIns="0" bIns="0" rtlCol="0" anchor="ctr"/>
           <a:lstStyle/>
           <a:p>
-            <a:pPr indent="0" marL="0">
-              <a:buNone/>
-            </a:pPr>
-            <a:r>
-              <a:rPr lang="en-US" sz="1000" b="1" spc="150" kern="0" dirty="0">
+            <a:pPr marL="0" indent="0">
+              <a:buNone/>
+            </a:pPr>
+            <a:r>
+              <a:rPr lang="en-US" sz="1000" b="1" kern="0" spc="150" dirty="0">
                 <a:solidFill>
                   <a:srgbClr val="E4E2D3"/>
                 </a:solidFill>
@@ -8594,7 +8410,7 @@
           <a:bodyPr wrap="square" lIns="0" tIns="0" rIns="0" bIns="0" rtlCol="0" anchor="ctr"/>
           <a:lstStyle/>
           <a:p>
-            <a:pPr indent="0" marL="0">
+            <a:pPr marL="0" indent="0">
               <a:buNone/>
             </a:pPr>
             <a:r>
@@ -8633,7 +8449,7 @@
           <a:bodyPr wrap="square" lIns="0" tIns="0" rIns="0" bIns="0" rtlCol="0" anchor="ctr"/>
           <a:lstStyle/>
           <a:p>
-            <a:pPr indent="0" marL="0">
+            <a:pPr marL="0" indent="0">
               <a:buNone/>
             </a:pPr>
             <a:r>
@@ -8672,7 +8488,7 @@
           <a:bodyPr wrap="square" lIns="0" tIns="0" rIns="0" bIns="0" rtlCol="0" anchor="ctr"/>
           <a:lstStyle/>
           <a:p>
-            <a:pPr indent="0" marL="0">
+            <a:pPr marL="0" indent="0">
               <a:buNone/>
             </a:pPr>
             <a:r>
@@ -8711,7 +8527,7 @@
           <a:bodyPr wrap="square" lIns="0" tIns="0" rIns="0" bIns="0" rtlCol="0" anchor="ctr"/>
           <a:lstStyle/>
           <a:p>
-            <a:pPr indent="0" marL="0">
+            <a:pPr marL="0" indent="0">
               <a:buNone/>
             </a:pPr>
             <a:r>
@@ -8750,7 +8566,7 @@
           <a:bodyPr wrap="square" lIns="0" tIns="0" rIns="0" bIns="0" rtlCol="0" anchor="ctr"/>
           <a:lstStyle/>
           <a:p>
-            <a:pPr indent="0" marL="0">
+            <a:pPr marL="0" indent="0">
               <a:buNone/>
             </a:pPr>
             <a:r>
@@ -8789,7 +8605,7 @@
           <a:bodyPr wrap="square" lIns="0" tIns="0" rIns="0" bIns="0" rtlCol="0" anchor="ctr"/>
           <a:lstStyle/>
           <a:p>
-            <a:pPr indent="0" marL="0">
+            <a:pPr marL="0" indent="0">
               <a:buNone/>
             </a:pPr>
             <a:r>
@@ -8828,7 +8644,7 @@
           <a:bodyPr wrap="square" lIns="0" tIns="0" rIns="0" bIns="0" rtlCol="0" anchor="ctr"/>
           <a:lstStyle/>
           <a:p>
-            <a:pPr indent="0" marL="0">
+            <a:pPr marL="0" indent="0">
               <a:buNone/>
             </a:pPr>
             <a:r>
@@ -8867,7 +8683,7 @@
           <a:bodyPr wrap="square" lIns="0" tIns="0" rIns="0" bIns="0" rtlCol="0" anchor="ctr"/>
           <a:lstStyle/>
           <a:p>
-            <a:pPr indent="0" marL="0">
+            <a:pPr marL="0" indent="0">
               <a:buNone/>
             </a:pPr>
             <a:r>
@@ -8906,7 +8722,7 @@
           <a:bodyPr wrap="square" lIns="0" tIns="0" rIns="0" bIns="0" rtlCol="0" anchor="ctr"/>
           <a:lstStyle/>
           <a:p>
-            <a:pPr indent="0" marL="0">
+            <a:pPr marL="0" indent="0">
               <a:buNone/>
             </a:pPr>
             <a:r>
@@ -8945,7 +8761,7 @@
           <a:bodyPr wrap="square" lIns="0" tIns="0" rIns="0" bIns="0" rtlCol="0" anchor="ctr"/>
           <a:lstStyle/>
           <a:p>
-            <a:pPr indent="0" marL="0">
+            <a:pPr marL="0" indent="0">
               <a:buNone/>
             </a:pPr>
             <a:r>
@@ -8984,7 +8800,7 @@
           <a:bodyPr wrap="square" rtlCol="0" anchor="ctr"/>
           <a:lstStyle/>
           <a:p>
-            <a:pPr algn="r" indent="0" marL="0">
+            <a:pPr marL="0" indent="0" algn="r">
               <a:buNone/>
             </a:pPr>
             <a:r>
@@ -9018,6 +8834,7 @@
         <a:solidFill>
           <a:srgbClr val="FFFFFF"/>
         </a:solidFill>
+        <a:effectLst/>
       </p:bgPr>
     </p:bg>
     <p:spTree>
@@ -9055,7 +8872,7 @@
           <a:bodyPr wrap="square" lIns="0" tIns="0" rIns="0" bIns="0" rtlCol="0" anchor="ctr"/>
           <a:lstStyle/>
           <a:p>
-            <a:pPr indent="0" marL="0">
+            <a:pPr marL="0" indent="0">
               <a:buNone/>
             </a:pPr>
             <a:r>
@@ -9094,7 +8911,7 @@
           <a:bodyPr wrap="square" lIns="0" tIns="0" rIns="0" bIns="0" rtlCol="0" anchor="ctr"/>
           <a:lstStyle/>
           <a:p>
-            <a:pPr indent="0" marL="0">
+            <a:pPr marL="0" indent="0">
               <a:buNone/>
             </a:pPr>
             <a:r>
@@ -9114,14 +8931,14 @@
       </p:sp>
       <p:pic>
         <p:nvPicPr>
-          <p:cNvPr id="4" name="Image 0" descr="09_temporal_comparison.png">    </p:cNvPr>
+          <p:cNvPr id="4" name="Image 0" descr="09_temporal_comparison.png"/>
           <p:cNvPicPr>
             <a:picLocks noChangeAspect="1"/>
           </p:cNvPicPr>
           <p:nvPr/>
         </p:nvPicPr>
         <p:blipFill>
-          <a:blip r:embed="rId1"/>
+          <a:blip r:embed="rId3"/>
           <a:stretch>
             <a:fillRect/>
           </a:stretch>
@@ -9179,7 +8996,7 @@
           <a:bodyPr wrap="square" lIns="0" tIns="0" rIns="0" bIns="0" rtlCol="0" anchor="ctr"/>
           <a:lstStyle/>
           <a:p>
-            <a:pPr indent="0" marL="0">
+            <a:pPr marL="0" indent="0">
               <a:buNone/>
             </a:pPr>
             <a:r>
@@ -9218,7 +9035,7 @@
           <a:bodyPr wrap="square" lIns="0" tIns="0" rIns="0" bIns="0" rtlCol="0" anchor="ctr"/>
           <a:lstStyle/>
           <a:p>
-            <a:pPr indent="0" marL="0">
+            <a:pPr marL="0" indent="0">
               <a:lnSpc>
                 <a:spcPct val="110000"/>
               </a:lnSpc>
@@ -9280,7 +9097,7 @@
           <a:bodyPr wrap="square" lIns="0" tIns="0" rIns="0" bIns="0" rtlCol="0" anchor="ctr"/>
           <a:lstStyle/>
           <a:p>
-            <a:pPr indent="0" marL="0">
+            <a:pPr marL="0" indent="0">
               <a:lnSpc>
                 <a:spcPct val="115000"/>
               </a:lnSpc>
@@ -9342,7 +9159,7 @@
           <a:bodyPr wrap="square" lIns="0" tIns="0" rIns="0" bIns="0" rtlCol="0" anchor="ctr"/>
           <a:lstStyle/>
           <a:p>
-            <a:pPr indent="0" marL="0">
+            <a:pPr marL="0" indent="0">
               <a:lnSpc>
                 <a:spcPct val="115000"/>
               </a:lnSpc>
@@ -9404,7 +9221,7 @@
           <a:bodyPr wrap="square" lIns="0" tIns="0" rIns="0" bIns="0" rtlCol="0" anchor="ctr"/>
           <a:lstStyle/>
           <a:p>
-            <a:pPr indent="0" marL="0">
+            <a:pPr marL="0" indent="0">
               <a:lnSpc>
                 <a:spcPct val="115000"/>
               </a:lnSpc>
@@ -9446,7 +9263,7 @@
           <a:bodyPr wrap="square" rtlCol="0" anchor="ctr"/>
           <a:lstStyle/>
           <a:p>
-            <a:pPr algn="r" indent="0" marL="0">
+            <a:pPr marL="0" indent="0" algn="r">
               <a:buNone/>
             </a:pPr>
             <a:r>
@@ -9480,6 +9297,7 @@
         <a:solidFill>
           <a:srgbClr val="FFFFFF"/>
         </a:solidFill>
+        <a:effectLst/>
       </p:bgPr>
     </p:bg>
     <p:spTree>
@@ -9517,7 +9335,7 @@
           <a:bodyPr wrap="square" lIns="0" tIns="0" rIns="0" bIns="0" rtlCol="0" anchor="ctr"/>
           <a:lstStyle/>
           <a:p>
-            <a:pPr indent="0" marL="0">
+            <a:pPr marL="0" indent="0">
               <a:buNone/>
             </a:pPr>
             <a:r>
@@ -9556,7 +9374,7 @@
           <a:bodyPr wrap="square" lIns="0" tIns="0" rIns="0" bIns="0" rtlCol="0" anchor="ctr"/>
           <a:lstStyle/>
           <a:p>
-            <a:pPr indent="0" marL="0">
+            <a:pPr marL="0" indent="0">
               <a:buNone/>
             </a:pPr>
             <a:r>
@@ -9576,14 +9394,14 @@
       </p:sp>
       <p:pic>
         <p:nvPicPr>
-          <p:cNvPr id="4" name="Image 0" descr="08_wape_comparison_all.png">    </p:cNvPr>
+          <p:cNvPr id="4" name="Image 0" descr="08_wape_comparison_all.png"/>
           <p:cNvPicPr>
             <a:picLocks noChangeAspect="1"/>
           </p:cNvPicPr>
           <p:nvPr/>
         </p:nvPicPr>
         <p:blipFill>
-          <a:blip r:embed="rId1"/>
+          <a:blip r:embed="rId3"/>
           <a:stretch>
             <a:fillRect/>
           </a:stretch>
@@ -9641,7 +9459,7 @@
           <a:bodyPr wrap="square" lIns="0" tIns="0" rIns="0" bIns="0" rtlCol="0" anchor="ctr"/>
           <a:lstStyle/>
           <a:p>
-            <a:pPr indent="0" marL="0">
+            <a:pPr marL="0" indent="0">
               <a:buNone/>
             </a:pPr>
             <a:r>
@@ -9680,7 +9498,7 @@
           <a:bodyPr wrap="square" lIns="0" tIns="0" rIns="0" bIns="0" rtlCol="0" anchor="ctr"/>
           <a:lstStyle/>
           <a:p>
-            <a:pPr indent="0" marL="0">
+            <a:pPr marL="0" indent="0">
               <a:lnSpc>
                 <a:spcPct val="110000"/>
               </a:lnSpc>
@@ -9742,7 +9560,7 @@
           <a:bodyPr wrap="square" lIns="0" tIns="0" rIns="0" bIns="0" rtlCol="0" anchor="ctr"/>
           <a:lstStyle/>
           <a:p>
-            <a:pPr indent="0" marL="0">
+            <a:pPr marL="0" indent="0">
               <a:lnSpc>
                 <a:spcPct val="115000"/>
               </a:lnSpc>
@@ -9804,7 +9622,7 @@
           <a:bodyPr wrap="square" lIns="0" tIns="0" rIns="0" bIns="0" rtlCol="0" anchor="ctr"/>
           <a:lstStyle/>
           <a:p>
-            <a:pPr indent="0" marL="0">
+            <a:pPr marL="0" indent="0">
               <a:lnSpc>
                 <a:spcPct val="115000"/>
               </a:lnSpc>
@@ -9866,7 +9684,7 @@
           <a:bodyPr wrap="square" lIns="0" tIns="0" rIns="0" bIns="0" rtlCol="0" anchor="ctr"/>
           <a:lstStyle/>
           <a:p>
-            <a:pPr indent="0" marL="0">
+            <a:pPr marL="0" indent="0">
               <a:lnSpc>
                 <a:spcPct val="115000"/>
               </a:lnSpc>
@@ -9908,7 +9726,7 @@
           <a:bodyPr wrap="square" rtlCol="0" anchor="ctr"/>
           <a:lstStyle/>
           <a:p>
-            <a:pPr algn="r" indent="0" marL="0">
+            <a:pPr marL="0" indent="0" algn="r">
               <a:buNone/>
             </a:pPr>
             <a:r>
@@ -10227,4 +10045,319 @@
     </a:ext>
   </a:extLst>
 </a:theme>
+</file>
+
+<file path=ppt/theme/theme2.xml><?xml version="1.0" encoding="utf-8"?>
+<a:theme xmlns:a="http://schemas.openxmlformats.org/drawingml/2006/main" name="Тема Office">
+  <a:themeElements>
+    <a:clrScheme name="Стандартная">
+      <a:dk1>
+        <a:sysClr val="windowText" lastClr="000000"/>
+      </a:dk1>
+      <a:lt1>
+        <a:sysClr val="window" lastClr="FFFFFF"/>
+      </a:lt1>
+      <a:dk2>
+        <a:srgbClr val="0E2841"/>
+      </a:dk2>
+      <a:lt2>
+        <a:srgbClr val="E8E8E8"/>
+      </a:lt2>
+      <a:accent1>
+        <a:srgbClr val="156082"/>
+      </a:accent1>
+      <a:accent2>
+        <a:srgbClr val="E97132"/>
+      </a:accent2>
+      <a:accent3>
+        <a:srgbClr val="196B24"/>
+      </a:accent3>
+      <a:accent4>
+        <a:srgbClr val="0F9ED5"/>
+      </a:accent4>
+      <a:accent5>
+        <a:srgbClr val="A02B93"/>
+      </a:accent5>
+      <a:accent6>
+        <a:srgbClr val="4EA72E"/>
+      </a:accent6>
+      <a:hlink>
+        <a:srgbClr val="467886"/>
+      </a:hlink>
+      <a:folHlink>
+        <a:srgbClr val="96607D"/>
+      </a:folHlink>
+    </a:clrScheme>
+    <a:fontScheme name="Стандартная">
+      <a:majorFont>
+        <a:latin typeface="Aptos Display" panose="02110004020202020204"/>
+        <a:ea typeface=""/>
+        <a:cs typeface=""/>
+        <a:font script="Jpan" typeface="游ゴシック Light"/>
+        <a:font script="Hang" typeface="맑은 고딕"/>
+        <a:font script="Hans" typeface="等线 Light"/>
+        <a:font script="Hant" typeface="新細明體"/>
+        <a:font script="Arab" typeface="Times New Roman"/>
+        <a:font script="Hebr" typeface="Times New Roman"/>
+        <a:font script="Thai" typeface="Angsana New"/>
+        <a:font script="Ethi" typeface="Nyala"/>
+        <a:font script="Beng" typeface="Vrinda"/>
+        <a:font script="Gujr" typeface="Shruti"/>
+        <a:font script="Khmr" typeface="MoolBoran"/>
+        <a:font script="Knda" typeface="Tunga"/>
+        <a:font script="Guru" typeface="Raavi"/>
+        <a:font script="Cans" typeface="Euphemia"/>
+        <a:font script="Cher" typeface="Plantagenet Cherokee"/>
+        <a:font script="Yiii" typeface="Microsoft Yi Baiti"/>
+        <a:font script="Tibt" typeface="Microsoft Himalaya"/>
+        <a:font script="Thaa" typeface="MV Boli"/>
+        <a:font script="Deva" typeface="Mangal"/>
+        <a:font script="Telu" typeface="Gautami"/>
+        <a:font script="Taml" typeface="Latha"/>
+        <a:font script="Syrc" typeface="Estrangelo Edessa"/>
+        <a:font script="Orya" typeface="Kalinga"/>
+        <a:font script="Mlym" typeface="Kartika"/>
+        <a:font script="Laoo" typeface="DokChampa"/>
+        <a:font script="Sinh" typeface="Iskoola Pota"/>
+        <a:font script="Mong" typeface="Mongolian Baiti"/>
+        <a:font script="Viet" typeface="Times New Roman"/>
+        <a:font script="Uigh" typeface="Microsoft Uighur"/>
+        <a:font script="Geor" typeface="Sylfaen"/>
+        <a:font script="Armn" typeface="Arial"/>
+        <a:font script="Bugi" typeface="Leelawadee UI"/>
+        <a:font script="Bopo" typeface="Microsoft JhengHei"/>
+        <a:font script="Java" typeface="Javanese Text"/>
+        <a:font script="Lisu" typeface="Segoe UI"/>
+        <a:font script="Mymr" typeface="Myanmar Text"/>
+        <a:font script="Nkoo" typeface="Ebrima"/>
+        <a:font script="Olck" typeface="Nirmala UI"/>
+        <a:font script="Osma" typeface="Ebrima"/>
+        <a:font script="Phag" typeface="Phagspa"/>
+        <a:font script="Syrn" typeface="Estrangelo Edessa"/>
+        <a:font script="Syrj" typeface="Estrangelo Edessa"/>
+        <a:font script="Syre" typeface="Estrangelo Edessa"/>
+        <a:font script="Sora" typeface="Nirmala UI"/>
+        <a:font script="Tale" typeface="Microsoft Tai Le"/>
+        <a:font script="Talu" typeface="Microsoft New Tai Lue"/>
+        <a:font script="Tfng" typeface="Ebrima"/>
+      </a:majorFont>
+      <a:minorFont>
+        <a:latin typeface="Aptos" panose="02110004020202020204"/>
+        <a:ea typeface=""/>
+        <a:cs typeface=""/>
+        <a:font script="Jpan" typeface="游ゴシック"/>
+        <a:font script="Hang" typeface="맑은 고딕"/>
+        <a:font script="Hans" typeface="等线"/>
+        <a:font script="Hant" typeface="新細明體"/>
+        <a:font script="Arab" typeface="Arial"/>
+        <a:font script="Hebr" typeface="Arial"/>
+        <a:font script="Thai" typeface="Cordia New"/>
+        <a:font script="Ethi" typeface="Nyala"/>
+        <a:font script="Beng" typeface="Vrinda"/>
+        <a:font script="Gujr" typeface="Shruti"/>
+        <a:font script="Khmr" typeface="DaunPenh"/>
+        <a:font script="Knda" typeface="Tunga"/>
+        <a:font script="Guru" typeface="Raavi"/>
+        <a:font script="Cans" typeface="Euphemia"/>
+        <a:font script="Cher" typeface="Plantagenet Cherokee"/>
+        <a:font script="Yiii" typeface="Microsoft Yi Baiti"/>
+        <a:font script="Tibt" typeface="Microsoft Himalaya"/>
+        <a:font script="Thaa" typeface="MV Boli"/>
+        <a:font script="Deva" typeface="Mangal"/>
+        <a:font script="Telu" typeface="Gautami"/>
+        <a:font script="Taml" typeface="Latha"/>
+        <a:font script="Syrc" typeface="Estrangelo Edessa"/>
+        <a:font script="Orya" typeface="Kalinga"/>
+        <a:font script="Mlym" typeface="Kartika"/>
+        <a:font script="Laoo" typeface="DokChampa"/>
+        <a:font script="Sinh" typeface="Iskoola Pota"/>
+        <a:font script="Mong" typeface="Mongolian Baiti"/>
+        <a:font script="Viet" typeface="Arial"/>
+        <a:font script="Uigh" typeface="Microsoft Uighur"/>
+        <a:font script="Geor" typeface="Sylfaen"/>
+        <a:font script="Armn" typeface="Arial"/>
+        <a:font script="Bugi" typeface="Leelawadee UI"/>
+        <a:font script="Bopo" typeface="Microsoft JhengHei"/>
+        <a:font script="Java" typeface="Javanese Text"/>
+        <a:font script="Lisu" typeface="Segoe UI"/>
+        <a:font script="Mymr" typeface="Myanmar Text"/>
+        <a:font script="Nkoo" typeface="Ebrima"/>
+        <a:font script="Olck" typeface="Nirmala UI"/>
+        <a:font script="Osma" typeface="Ebrima"/>
+        <a:font script="Phag" typeface="Phagspa"/>
+        <a:font script="Syrn" typeface="Estrangelo Edessa"/>
+        <a:font script="Syrj" typeface="Estrangelo Edessa"/>
+        <a:font script="Syre" typeface="Estrangelo Edessa"/>
+        <a:font script="Sora" typeface="Nirmala UI"/>
+        <a:font script="Tale" typeface="Microsoft Tai Le"/>
+        <a:font script="Talu" typeface="Microsoft New Tai Lue"/>
+        <a:font script="Tfng" typeface="Ebrima"/>
+      </a:minorFont>
+    </a:fontScheme>
+    <a:fmtScheme name="Стандартная">
+      <a:fillStyleLst>
+        <a:solidFill>
+          <a:schemeClr val="phClr"/>
+        </a:solidFill>
+        <a:gradFill rotWithShape="1">
+          <a:gsLst>
+            <a:gs pos="0">
+              <a:schemeClr val="phClr">
+                <a:lumMod val="110000"/>
+                <a:satMod val="105000"/>
+                <a:tint val="67000"/>
+              </a:schemeClr>
+            </a:gs>
+            <a:gs pos="50000">
+              <a:schemeClr val="phClr">
+                <a:lumMod val="105000"/>
+                <a:satMod val="103000"/>
+                <a:tint val="73000"/>
+              </a:schemeClr>
+            </a:gs>
+            <a:gs pos="100000">
+              <a:schemeClr val="phClr">
+                <a:lumMod val="105000"/>
+                <a:satMod val="109000"/>
+                <a:tint val="81000"/>
+              </a:schemeClr>
+            </a:gs>
+          </a:gsLst>
+          <a:lin ang="5400000" scaled="0"/>
+        </a:gradFill>
+        <a:gradFill rotWithShape="1">
+          <a:gsLst>
+            <a:gs pos="0">
+              <a:schemeClr val="phClr">
+                <a:satMod val="103000"/>
+                <a:lumMod val="102000"/>
+                <a:tint val="94000"/>
+              </a:schemeClr>
+            </a:gs>
+            <a:gs pos="50000">
+              <a:schemeClr val="phClr">
+                <a:satMod val="110000"/>
+                <a:lumMod val="100000"/>
+                <a:shade val="100000"/>
+              </a:schemeClr>
+            </a:gs>
+            <a:gs pos="100000">
+              <a:schemeClr val="phClr">
+                <a:lumMod val="99000"/>
+                <a:satMod val="120000"/>
+                <a:shade val="78000"/>
+              </a:schemeClr>
+            </a:gs>
+          </a:gsLst>
+          <a:lin ang="5400000" scaled="0"/>
+        </a:gradFill>
+      </a:fillStyleLst>
+      <a:lnStyleLst>
+        <a:ln w="12700" cap="flat" cmpd="sng" algn="ctr">
+          <a:solidFill>
+            <a:schemeClr val="phClr"/>
+          </a:solidFill>
+          <a:prstDash val="solid"/>
+          <a:miter lim="800000"/>
+        </a:ln>
+        <a:ln w="19050" cap="flat" cmpd="sng" algn="ctr">
+          <a:solidFill>
+            <a:schemeClr val="phClr"/>
+          </a:solidFill>
+          <a:prstDash val="solid"/>
+          <a:miter lim="800000"/>
+        </a:ln>
+        <a:ln w="25400" cap="flat" cmpd="sng" algn="ctr">
+          <a:solidFill>
+            <a:schemeClr val="phClr"/>
+          </a:solidFill>
+          <a:prstDash val="solid"/>
+          <a:miter lim="800000"/>
+        </a:ln>
+      </a:lnStyleLst>
+      <a:effectStyleLst>
+        <a:effectStyle>
+          <a:effectLst/>
+        </a:effectStyle>
+        <a:effectStyle>
+          <a:effectLst/>
+        </a:effectStyle>
+        <a:effectStyle>
+          <a:effectLst>
+            <a:outerShdw blurRad="57150" dist="19050" dir="5400000" algn="ctr" rotWithShape="0">
+              <a:srgbClr val="000000">
+                <a:alpha val="63000"/>
+              </a:srgbClr>
+            </a:outerShdw>
+          </a:effectLst>
+        </a:effectStyle>
+      </a:effectStyleLst>
+      <a:bgFillStyleLst>
+        <a:solidFill>
+          <a:schemeClr val="phClr"/>
+        </a:solidFill>
+        <a:solidFill>
+          <a:schemeClr val="phClr">
+            <a:tint val="95000"/>
+            <a:satMod val="170000"/>
+          </a:schemeClr>
+        </a:solidFill>
+        <a:gradFill rotWithShape="1">
+          <a:gsLst>
+            <a:gs pos="0">
+              <a:schemeClr val="phClr">
+                <a:tint val="93000"/>
+                <a:satMod val="150000"/>
+                <a:shade val="98000"/>
+                <a:lumMod val="102000"/>
+              </a:schemeClr>
+            </a:gs>
+            <a:gs pos="50000">
+              <a:schemeClr val="phClr">
+                <a:tint val="98000"/>
+                <a:satMod val="130000"/>
+                <a:shade val="90000"/>
+                <a:lumMod val="103000"/>
+              </a:schemeClr>
+            </a:gs>
+            <a:gs pos="100000">
+              <a:schemeClr val="phClr">
+                <a:shade val="63000"/>
+                <a:satMod val="120000"/>
+              </a:schemeClr>
+            </a:gs>
+          </a:gsLst>
+          <a:lin ang="5400000" scaled="0"/>
+        </a:gradFill>
+      </a:bgFillStyleLst>
+    </a:fmtScheme>
+  </a:themeElements>
+  <a:objectDefaults>
+    <a:lnDef>
+      <a:spPr/>
+      <a:bodyPr/>
+      <a:lstStyle/>
+      <a:style>
+        <a:lnRef idx="2">
+          <a:schemeClr val="accent1"/>
+        </a:lnRef>
+        <a:fillRef idx="0">
+          <a:schemeClr val="accent1"/>
+        </a:fillRef>
+        <a:effectRef idx="1">
+          <a:schemeClr val="accent1"/>
+        </a:effectRef>
+        <a:fontRef idx="minor">
+          <a:schemeClr val="tx1"/>
+        </a:fontRef>
+      </a:style>
+    </a:lnDef>
+  </a:objectDefaults>
+  <a:extraClrSchemeLst/>
+  <a:extLst>
+    <a:ext uri="{05A4C25C-085E-4340-85A3-A5531E510DB2}">
+      <thm15:themeFamily xmlns:thm15="http://schemas.microsoft.com/office/thememl/2012/main" name="Office Theme" id="{2E142A2C-CD16-42D6-873A-C26D2A0506FA}" vid="{1BDDFF52-6CD6-40A5-AB3C-68EB2F1E4D0A}"/>
+    </a:ext>
+  </a:extLst>
+</a:theme>
 </file>
--- a/presentation/presentation.pptx
+++ b/presentation/presentation.pptx
@@ -148,7 +148,7 @@
     </p:spTree>
     <p:extLst>
       <p:ext uri="{BB962C8B-B14F-4D97-AF65-F5344CB8AC3E}">
-        <p14:creationId xmlns:p14="http://schemas.microsoft.com/office/powerpoint/2010/main" val="1175941594"/>
+        <p14:creationId xmlns:p14="http://schemas.microsoft.com/office/powerpoint/2010/main" val="2900081196"/>
       </p:ext>
     </p:extLst>
   </p:cSld>
@@ -292,7 +292,7 @@
           <a:bodyPr/>
           <a:lstStyle/>
           <a:p>
-            <a:endParaRPr dirty="0"/>
+            <a:endParaRPr/>
           </a:p>
         </p:txBody>
       </p:sp>
@@ -376,7 +376,7 @@
           <a:bodyPr/>
           <a:lstStyle/>
           <a:p>
-            <a:endParaRPr dirty="0"/>
+            <a:endParaRPr/>
           </a:p>
         </p:txBody>
       </p:sp>
@@ -460,7 +460,7 @@
           <a:bodyPr/>
           <a:lstStyle/>
           <a:p>
-            <a:endParaRPr dirty="0"/>
+            <a:endParaRPr/>
           </a:p>
         </p:txBody>
       </p:sp>
@@ -544,7 +544,7 @@
           <a:bodyPr/>
           <a:lstStyle/>
           <a:p>
-            <a:endParaRPr dirty="0"/>
+            <a:endParaRPr/>
           </a:p>
         </p:txBody>
       </p:sp>
@@ -628,7 +628,7 @@
           <a:bodyPr/>
           <a:lstStyle/>
           <a:p>
-            <a:endParaRPr dirty="0"/>
+            <a:endParaRPr/>
           </a:p>
         </p:txBody>
       </p:sp>
@@ -712,7 +712,7 @@
           <a:bodyPr/>
           <a:lstStyle/>
           <a:p>
-            <a:endParaRPr dirty="0"/>
+            <a:endParaRPr/>
           </a:p>
         </p:txBody>
       </p:sp>
@@ -796,7 +796,7 @@
           <a:bodyPr/>
           <a:lstStyle/>
           <a:p>
-            <a:endParaRPr dirty="0"/>
+            <a:endParaRPr/>
           </a:p>
         </p:txBody>
       </p:sp>
@@ -880,7 +880,7 @@
           <a:bodyPr/>
           <a:lstStyle/>
           <a:p>
-            <a:endParaRPr dirty="0"/>
+            <a:endParaRPr/>
           </a:p>
         </p:txBody>
       </p:sp>
@@ -964,7 +964,7 @@
           <a:bodyPr/>
           <a:lstStyle/>
           <a:p>
-            <a:endParaRPr dirty="0"/>
+            <a:endParaRPr/>
           </a:p>
         </p:txBody>
       </p:sp>
@@ -1048,7 +1048,7 @@
           <a:bodyPr/>
           <a:lstStyle/>
           <a:p>
-            <a:endParaRPr dirty="0"/>
+            <a:endParaRPr/>
           </a:p>
         </p:txBody>
       </p:sp>
@@ -1132,7 +1132,7 @@
           <a:bodyPr/>
           <a:lstStyle/>
           <a:p>
-            <a:endParaRPr dirty="0"/>
+            <a:endParaRPr/>
           </a:p>
         </p:txBody>
       </p:sp>
@@ -1216,7 +1216,7 @@
           <a:bodyPr/>
           <a:lstStyle/>
           <a:p>
-            <a:endParaRPr dirty="0"/>
+            <a:endParaRPr/>
           </a:p>
         </p:txBody>
       </p:sp>
@@ -4845,52 +4845,13 @@
       </p:sp>
       <p:sp>
         <p:nvSpPr>
-          <p:cNvPr id="9" name="Text 7"/>
-          <p:cNvSpPr/>
-          <p:nvPr/>
-        </p:nvSpPr>
-        <p:spPr>
-          <a:xfrm>
-            <a:off x="822960" y="3520440"/>
-            <a:ext cx="10515600" cy="548640"/>
-          </a:xfrm>
-          <a:prstGeom prst="rect">
-            <a:avLst/>
-          </a:prstGeom>
-          <a:noFill/>
-          <a:ln/>
-        </p:spPr>
-        <p:txBody>
-          <a:bodyPr wrap="square" lIns="0" tIns="0" rIns="0" bIns="0" rtlCol="0" anchor="ctr"/>
-          <a:lstStyle/>
-          <a:p>
-            <a:pPr marL="0" indent="0">
-              <a:buNone/>
-            </a:pPr>
-            <a:r>
-              <a:rPr lang="en-US" sz="1800" i="1" dirty="0">
-                <a:solidFill>
-                  <a:srgbClr val="E4E2D3"/>
-                </a:solidFill>
-                <a:latin typeface="Calibri" pitchFamily="34" charset="0"/>
-                <a:ea typeface="Calibri" pitchFamily="34" charset="-122"/>
-                <a:cs typeface="Calibri" pitchFamily="34" charset="-120"/>
-              </a:rPr>
-              <a:t>Готова ответить на вопросы</a:t>
-            </a:r>
-            <a:endParaRPr lang="en-US" sz="1800" dirty="0"/>
-          </a:p>
-        </p:txBody>
-      </p:sp>
-      <p:sp>
-        <p:nvSpPr>
           <p:cNvPr id="10" name="Shape 8"/>
           <p:cNvSpPr/>
           <p:nvPr/>
         </p:nvSpPr>
         <p:spPr>
           <a:xfrm>
-            <a:off x="822960" y="4160520"/>
+            <a:off x="813816" y="3566160"/>
             <a:ext cx="2011680" cy="0"/>
           </a:xfrm>
           <a:prstGeom prst="line">
@@ -4904,45 +4865,6 @@
             <a:prstDash val="solid"/>
           </a:ln>
         </p:spPr>
-      </p:sp>
-      <p:sp>
-        <p:nvSpPr>
-          <p:cNvPr id="11" name="Text 9"/>
-          <p:cNvSpPr/>
-          <p:nvPr/>
-        </p:nvSpPr>
-        <p:spPr>
-          <a:xfrm>
-            <a:off x="822960" y="5943600"/>
-            <a:ext cx="10058400" cy="457200"/>
-          </a:xfrm>
-          <a:prstGeom prst="rect">
-            <a:avLst/>
-          </a:prstGeom>
-          <a:noFill/>
-          <a:ln/>
-        </p:spPr>
-        <p:txBody>
-          <a:bodyPr wrap="square" lIns="0" tIns="0" rIns="0" bIns="0" rtlCol="0" anchor="ctr"/>
-          <a:lstStyle/>
-          <a:p>
-            <a:pPr marL="0" indent="0">
-              <a:buNone/>
-            </a:pPr>
-            <a:r>
-              <a:rPr lang="en-US" sz="1200" dirty="0">
-                <a:solidFill>
-                  <a:srgbClr val="C5C9A6"/>
-                </a:solidFill>
-                <a:latin typeface="Calibri" pitchFamily="34" charset="0"/>
-                <a:ea typeface="Calibri" pitchFamily="34" charset="-122"/>
-                <a:cs typeface="Calibri" pitchFamily="34" charset="-120"/>
-              </a:rPr>
-              <a:t>Код, выводы по блокам и графики — в приватном репозитории проекта на GitHub</a:t>
-            </a:r>
-            <a:endParaRPr lang="en-US" sz="1200" dirty="0"/>
-          </a:p>
-        </p:txBody>
       </p:sp>
     </p:spTree>
   </p:cSld>
@@ -5076,6 +4998,13 @@
           </a:solidFill>
           <a:ln/>
         </p:spPr>
+        <p:txBody>
+          <a:bodyPr/>
+          <a:lstStyle/>
+          <a:p>
+            <a:endParaRPr/>
+          </a:p>
+        </p:txBody>
       </p:sp>
       <p:sp>
         <p:nvSpPr>
@@ -5096,6 +5025,13 @@
           </a:solidFill>
           <a:ln/>
         </p:spPr>
+        <p:txBody>
+          <a:bodyPr/>
+          <a:lstStyle/>
+          <a:p>
+            <a:endParaRPr/>
+          </a:p>
+        </p:txBody>
       </p:sp>
       <p:sp>
         <p:nvSpPr>
@@ -5169,7 +5105,7 @@
                 <a:ea typeface="Cambria" pitchFamily="34" charset="-122"/>
                 <a:cs typeface="Cambria" pitchFamily="34" charset="-120"/>
               </a:rPr>
-              <a:t>Недовоз</a:t>
+              <a:t>Нехватка</a:t>
             </a:r>
             <a:endParaRPr lang="en-US" sz="2200" dirty="0"/>
           </a:p>
@@ -5277,6 +5213,13 @@
           </a:solidFill>
           <a:ln/>
         </p:spPr>
+        <p:txBody>
+          <a:bodyPr/>
+          <a:lstStyle/>
+          <a:p>
+            <a:endParaRPr/>
+          </a:p>
+        </p:txBody>
       </p:sp>
       <p:sp>
         <p:nvSpPr>
@@ -5297,6 +5240,13 @@
           </a:solidFill>
           <a:ln/>
         </p:spPr>
+        <p:txBody>
+          <a:bodyPr/>
+          <a:lstStyle/>
+          <a:p>
+            <a:endParaRPr/>
+          </a:p>
+        </p:txBody>
       </p:sp>
       <p:sp>
         <p:nvSpPr>
@@ -5331,7 +5281,7 @@
                 <a:ea typeface="Cambria" pitchFamily="34" charset="-122"/>
                 <a:cs typeface="Cambria" pitchFamily="34" charset="-120"/>
               </a:rPr>
-              <a:t>П</a:t>
+              <a:t>И</a:t>
             </a:r>
             <a:endParaRPr lang="en-US" sz="2000" dirty="0"/>
           </a:p>
@@ -5370,7 +5320,7 @@
                 <a:ea typeface="Cambria" pitchFamily="34" charset="-122"/>
                 <a:cs typeface="Cambria" pitchFamily="34" charset="-120"/>
               </a:rPr>
-              <a:t>Перевоз</a:t>
+              <a:t>Излишки</a:t>
             </a:r>
             <a:endParaRPr lang="en-US" sz="2200" dirty="0"/>
           </a:p>

--- a/presentation/presentation.pptx
+++ b/presentation/presentation.pptx
@@ -148,7 +148,7 @@
     </p:spTree>
     <p:extLst>
       <p:ext uri="{BB962C8B-B14F-4D97-AF65-F5344CB8AC3E}">
-        <p14:creationId xmlns:p14="http://schemas.microsoft.com/office/powerpoint/2010/main" val="2900081196"/>
+        <p14:creationId xmlns:p14="http://schemas.microsoft.com/office/powerpoint/2010/main" val="394246397"/>
       </p:ext>
     </p:extLst>
   </p:cSld>
@@ -1746,7 +1746,7 @@
                 <a:ea typeface="Calibri" pitchFamily="34" charset="-122"/>
                 <a:cs typeface="Calibri" pitchFamily="34" charset="-120"/>
               </a:rPr>
-              <a:t>ИТОГОВЫЙ ПРОЕКТ  ·  КУРС «АНАЛИТИК ДАННЫХ»  ·  НИУ ВШЭ</a:t>
+              <a:t>ИТОГОВЫЙ ПРОЕКТ</a:t>
             </a:r>
             <a:endParaRPr lang="en-US" sz="1300" dirty="0"/>
           </a:p>
@@ -3859,6 +3859,13 @@
           </a:solidFill>
           <a:ln/>
         </p:spPr>
+        <p:txBody>
+          <a:bodyPr/>
+          <a:lstStyle/>
+          <a:p>
+            <a:endParaRPr/>
+          </a:p>
+        </p:txBody>
       </p:sp>
       <p:sp>
         <p:nvSpPr>
@@ -3918,6 +3925,13 @@
           </a:solidFill>
           <a:ln/>
         </p:spPr>
+        <p:txBody>
+          <a:bodyPr/>
+          <a:lstStyle/>
+          <a:p>
+            <a:endParaRPr/>
+          </a:p>
+        </p:txBody>
       </p:sp>
       <p:sp>
         <p:nvSpPr>
@@ -4019,6 +4033,13 @@
           </a:solidFill>
           <a:ln/>
         </p:spPr>
+        <p:txBody>
+          <a:bodyPr/>
+          <a:lstStyle/>
+          <a:p>
+            <a:endParaRPr/>
+          </a:p>
+        </p:txBody>
       </p:sp>
       <p:sp>
         <p:nvSpPr>
@@ -4095,7 +4116,7 @@
                 <a:ea typeface="Calibri" pitchFamily="34" charset="-122"/>
                 <a:cs typeface="Calibri" pitchFamily="34" charset="-120"/>
               </a:rPr>
-              <a:t>Пересмотреть логистику Дальнего Востока: упущенная выручка ≈307 тыс. руб. за сезон</a:t>
+              <a:t>Магазины, открывшиеся в прошлом сезоне: прогноз модели вместо LFL (49.9% против 64.4%)</a:t>
             </a:r>
             <a:endParaRPr lang="en-US" sz="1300" dirty="0"/>
           </a:p>
@@ -4120,6 +4141,13 @@
           </a:solidFill>
           <a:ln/>
         </p:spPr>
+        <p:txBody>
+          <a:bodyPr/>
+          <a:lstStyle/>
+          <a:p>
+            <a:endParaRPr/>
+          </a:p>
+        </p:txBody>
       </p:sp>
       <p:sp>
         <p:nvSpPr>
@@ -4221,6 +4249,13 @@
           </a:solidFill>
           <a:ln/>
         </p:spPr>
+        <p:txBody>
+          <a:bodyPr/>
+          <a:lstStyle/>
+          <a:p>
+            <a:endParaRPr/>
+          </a:p>
+        </p:txBody>
       </p:sp>
       <p:sp>
         <p:nvSpPr>
@@ -4324,6 +4359,13 @@
           </a:solidFill>
           <a:ln/>
         </p:spPr>
+        <p:txBody>
+          <a:bodyPr/>
+          <a:lstStyle/>
+          <a:p>
+            <a:endParaRPr/>
+          </a:p>
+        </p:txBody>
       </p:sp>
       <p:sp>
         <p:nvSpPr>
@@ -4383,6 +4425,13 @@
           </a:solidFill>
           <a:ln/>
         </p:spPr>
+        <p:txBody>
+          <a:bodyPr/>
+          <a:lstStyle/>
+          <a:p>
+            <a:endParaRPr/>
+          </a:p>
+        </p:txBody>
       </p:sp>
       <p:sp>
         <p:nvSpPr>
@@ -4445,6 +4494,13 @@
           </a:solidFill>
           <a:ln/>
         </p:spPr>
+        <p:txBody>
+          <a:bodyPr/>
+          <a:lstStyle/>
+          <a:p>
+            <a:endParaRPr/>
+          </a:p>
+        </p:txBody>
       </p:sp>
       <p:sp>
         <p:nvSpPr>
@@ -4507,6 +4563,13 @@
           </a:solidFill>
           <a:ln/>
         </p:spPr>
+        <p:txBody>
+          <a:bodyPr/>
+          <a:lstStyle/>
+          <a:p>
+            <a:endParaRPr/>
+          </a:p>
+        </p:txBody>
       </p:sp>
       <p:sp>
         <p:nvSpPr>
@@ -4569,6 +4632,13 @@
           </a:solidFill>
           <a:ln/>
         </p:spPr>
+        <p:txBody>
+          <a:bodyPr/>
+          <a:lstStyle/>
+          <a:p>
+            <a:endParaRPr/>
+          </a:p>
+        </p:txBody>
       </p:sp>
       <p:sp>
         <p:nvSpPr>
@@ -6560,6 +6630,13 @@
             <a:prstDash val="solid"/>
           </a:ln>
         </p:spPr>
+        <p:txBody>
+          <a:bodyPr/>
+          <a:lstStyle/>
+          <a:p>
+            <a:endParaRPr/>
+          </a:p>
+        </p:txBody>
       </p:sp>
       <p:sp>
         <p:nvSpPr>
@@ -6580,6 +6657,13 @@
           </a:solidFill>
           <a:ln/>
         </p:spPr>
+        <p:txBody>
+          <a:bodyPr/>
+          <a:lstStyle/>
+          <a:p>
+            <a:endParaRPr/>
+          </a:p>
+        </p:txBody>
       </p:sp>
       <p:sp>
         <p:nvSpPr>
@@ -6720,6 +6804,13 @@
           </a:solidFill>
           <a:ln/>
         </p:spPr>
+        <p:txBody>
+          <a:bodyPr/>
+          <a:lstStyle/>
+          <a:p>
+            <a:endParaRPr/>
+          </a:p>
+        </p:txBody>
       </p:sp>
       <p:sp>
         <p:nvSpPr>
@@ -6835,7 +6926,7 @@
                 <a:ea typeface="Calibri" pitchFamily="34" charset="-122"/>
                 <a:cs typeface="Calibri" pitchFamily="34" charset="-120"/>
               </a:rPr>
-              <a:t>ever_active — товар в ассортименте магазина; is_stockout — нулевой остаток на конец недели</a:t>
+              <a:t>ever_active — товар в ассортименте магазина; is_stockout — нулевой остаток в уже работающем магазине</a:t>
             </a:r>
             <a:endParaRPr lang="en-US" sz="1300" dirty="0"/>
           </a:p>
@@ -6860,6 +6951,13 @@
           </a:solidFill>
           <a:ln/>
         </p:spPr>
+        <p:txBody>
+          <a:bodyPr/>
+          <a:lstStyle/>
+          <a:p>
+            <a:endParaRPr/>
+          </a:p>
+        </p:txBody>
       </p:sp>
       <p:sp>
         <p:nvSpPr>
@@ -7389,6 +7487,13 @@
           </a:solidFill>
           <a:ln/>
         </p:spPr>
+        <p:txBody>
+          <a:bodyPr/>
+          <a:lstStyle/>
+          <a:p>
+            <a:endParaRPr/>
+          </a:p>
+        </p:txBody>
       </p:sp>
       <p:sp>
         <p:nvSpPr>
@@ -7531,6 +7636,13 @@
           </a:solidFill>
           <a:ln/>
         </p:spPr>
+        <p:txBody>
+          <a:bodyPr/>
+          <a:lstStyle/>
+          <a:p>
+            <a:endParaRPr/>
+          </a:p>
+        </p:txBody>
       </p:sp>
       <p:sp>
         <p:nvSpPr>
@@ -7565,7 +7677,7 @@
                 <a:ea typeface="Cambria" pitchFamily="34" charset="-122"/>
                 <a:cs typeface="Cambria" pitchFamily="34" charset="-120"/>
               </a:rPr>
-              <a:t>× 5.2</a:t>
+              <a:t>6.3 п.п.</a:t>
             </a:r>
             <a:endParaRPr lang="en-US" sz="3000" dirty="0"/>
           </a:p>
@@ -7604,7 +7716,7 @@
                 <a:ea typeface="Calibri" pitchFamily="34" charset="-122"/>
                 <a:cs typeface="Calibri" pitchFamily="34" charset="-120"/>
               </a:rPr>
-              <a:t>Манна-Уитни, p &lt; 0.00001</a:t>
+              <a:t>χ², p &lt; 0.00001</a:t>
             </a:r>
             <a:endParaRPr lang="en-US" sz="1100" dirty="0"/>
           </a:p>
@@ -7646,7 +7758,7 @@
                 <a:ea typeface="Calibri" pitchFamily="34" charset="-122"/>
                 <a:cs typeface="Calibri" pitchFamily="34" charset="-120"/>
               </a:rPr>
-              <a:t>Дефицит на Дальнем Востоке 25.7% против 4.9% по остальной сети</a:t>
+              <a:t>Категория магазина влияет на дефицит статистически, но слабо: по кластерам дефицит ровный, 2.6–8.1%</a:t>
             </a:r>
             <a:endParaRPr lang="en-US" sz="1250" dirty="0"/>
           </a:p>
@@ -9387,6 +9499,13 @@
           </a:solidFill>
           <a:ln/>
         </p:spPr>
+        <p:txBody>
+          <a:bodyPr/>
+          <a:lstStyle/>
+          <a:p>
+            <a:endParaRPr/>
+          </a:p>
+        </p:txBody>
       </p:sp>
       <p:sp>
         <p:nvSpPr>
@@ -9421,7 +9540,7 @@
                 <a:ea typeface="Cambria" pitchFamily="34" charset="-122"/>
                 <a:cs typeface="Cambria" pitchFamily="34" charset="-120"/>
               </a:rPr>
-              <a:t>29.6%</a:t>
+              <a:t>30.3%</a:t>
             </a:r>
             <a:endParaRPr lang="en-US" sz="3400" dirty="0"/>
           </a:p>
@@ -9463,7 +9582,7 @@
                 <a:ea typeface="Calibri" pitchFamily="34" charset="-122"/>
                 <a:cs typeface="Calibri" pitchFamily="34" charset="-120"/>
               </a:rPr>
-              <a:t>Random Forest против 51.7% у бейзлайна, смещение всего 0.7%</a:t>
+              <a:t>Random Forest против 51.7% у бейзлайна, смещение всего 0.3%</a:t>
             </a:r>
             <a:endParaRPr lang="en-US" sz="1250" dirty="0"/>
           </a:p>
@@ -9488,6 +9607,13 @@
           </a:solidFill>
           <a:ln/>
         </p:spPr>
+        <p:txBody>
+          <a:bodyPr/>
+          <a:lstStyle/>
+          <a:p>
+            <a:endParaRPr/>
+          </a:p>
+        </p:txBody>
       </p:sp>
       <p:sp>
         <p:nvSpPr>
@@ -9525,7 +9651,7 @@
                 <a:ea typeface="Calibri" pitchFamily="34" charset="-122"/>
                 <a:cs typeface="Calibri" pitchFamily="34" charset="-120"/>
               </a:rPr>
-              <a:t>Лес лучший в 7 из 9 кластеров; главный признак — продажи прошлого сезона (82%)</a:t>
+              <a:t>Лес лучший в 6 из 9 кластеров; главный признак — продажи прошлого сезона (82%)</a:t>
             </a:r>
             <a:endParaRPr lang="en-US" sz="1300" dirty="0"/>
           </a:p>
@@ -9550,6 +9676,13 @@
           </a:solidFill>
           <a:ln/>
         </p:spPr>
+        <p:txBody>
+          <a:bodyPr/>
+          <a:lstStyle/>
+          <a:p>
+            <a:endParaRPr/>
+          </a:p>
+        </p:txBody>
       </p:sp>
       <p:sp>
         <p:nvSpPr>
@@ -9587,7 +9720,7 @@
                 <a:ea typeface="Calibri" pitchFamily="34" charset="-122"/>
                 <a:cs typeface="Calibri" pitchFamily="34" charset="-120"/>
               </a:rPr>
-              <a:t>Lasso оставил 15 признаков из 96 и потерял всего 2 п.п. точности</a:t>
+              <a:t>Lasso оставил 16 признаков из 96 и потерял около 1 п.п. точности</a:t>
             </a:r>
             <a:endParaRPr lang="en-US" sz="1300" dirty="0"/>
           </a:p>
@@ -9612,6 +9745,13 @@
           </a:solidFill>
           <a:ln/>
         </p:spPr>
+        <p:txBody>
+          <a:bodyPr/>
+          <a:lstStyle/>
+          <a:p>
+            <a:endParaRPr/>
+          </a:p>
+        </p:txBody>
       </p:sp>
       <p:sp>
         <p:nvSpPr>
